--- a/Figuras/Diagrams TFM.pptx
+++ b/Figuras/Diagrams TFM.pptx
@@ -4,8 +4,12 @@
   <p:sldMasterIdLst>
     <p:sldMasterId id="2147483648" r:id="rId1"/>
   </p:sldMasterIdLst>
+  <p:notesMasterIdLst>
+    <p:notesMasterId r:id="rId4"/>
+  </p:notesMasterIdLst>
   <p:sldIdLst>
     <p:sldId id="256" r:id="rId2"/>
+    <p:sldId id="258" r:id="rId3"/>
   </p:sldIdLst>
   <p:sldSz cx="12192000" cy="6858000"/>
   <p:notesSz cx="6858000" cy="9144000"/>
@@ -104,7 +108,638 @@
       </a:defRPr>
     </a:lvl9pPr>
   </p:defaultTextStyle>
+  <p:extLst>
+    <p:ext uri="{EFAFB233-063F-42B5-8137-9DF3F51BA10A}">
+      <p15:sldGuideLst xmlns:p15="http://schemas.microsoft.com/office/powerpoint/2012/main"/>
+    </p:ext>
+  </p:extLst>
 </p:presentation>
+</file>
+
+<file path=ppt/notesMasters/notesMaster1.xml><?xml version="1.0" encoding="utf-8"?>
+<p:notesMaster xmlns:a="http://schemas.openxmlformats.org/drawingml/2006/main" xmlns:r="http://schemas.openxmlformats.org/officeDocument/2006/relationships" xmlns:p="http://schemas.openxmlformats.org/presentationml/2006/main">
+  <p:cSld>
+    <p:bg>
+      <p:bgRef idx="1001">
+        <a:schemeClr val="bg1"/>
+      </p:bgRef>
+    </p:bg>
+    <p:spTree>
+      <p:nvGrpSpPr>
+        <p:cNvPr id="1" name=""/>
+        <p:cNvGrpSpPr/>
+        <p:nvPr/>
+      </p:nvGrpSpPr>
+      <p:grpSpPr>
+        <a:xfrm>
+          <a:off x="0" y="0"/>
+          <a:ext cx="0" cy="0"/>
+          <a:chOff x="0" y="0"/>
+          <a:chExt cx="0" cy="0"/>
+        </a:xfrm>
+      </p:grpSpPr>
+      <p:sp>
+        <p:nvSpPr>
+          <p:cNvPr id="2" name="Header Placeholder 1"/>
+          <p:cNvSpPr>
+            <a:spLocks noGrp="1"/>
+          </p:cNvSpPr>
+          <p:nvPr>
+            <p:ph type="hdr" sz="quarter"/>
+          </p:nvPr>
+        </p:nvSpPr>
+        <p:spPr>
+          <a:xfrm>
+            <a:off x="0" y="0"/>
+            <a:ext cx="2971800" cy="458788"/>
+          </a:xfrm>
+          <a:prstGeom prst="rect">
+            <a:avLst/>
+          </a:prstGeom>
+        </p:spPr>
+        <p:txBody>
+          <a:bodyPr vert="horz" lIns="91440" tIns="45720" rIns="91440" bIns="45720" rtlCol="0"/>
+          <a:lstStyle>
+            <a:lvl1pPr algn="l">
+              <a:defRPr sz="1200"/>
+            </a:lvl1pPr>
+          </a:lstStyle>
+          <a:p>
+            <a:endParaRPr lang="en-GB"/>
+          </a:p>
+        </p:txBody>
+      </p:sp>
+      <p:sp>
+        <p:nvSpPr>
+          <p:cNvPr id="3" name="Date Placeholder 2"/>
+          <p:cNvSpPr>
+            <a:spLocks noGrp="1"/>
+          </p:cNvSpPr>
+          <p:nvPr>
+            <p:ph type="dt" idx="1"/>
+          </p:nvPr>
+        </p:nvSpPr>
+        <p:spPr>
+          <a:xfrm>
+            <a:off x="3884613" y="0"/>
+            <a:ext cx="2971800" cy="458788"/>
+          </a:xfrm>
+          <a:prstGeom prst="rect">
+            <a:avLst/>
+          </a:prstGeom>
+        </p:spPr>
+        <p:txBody>
+          <a:bodyPr vert="horz" lIns="91440" tIns="45720" rIns="91440" bIns="45720" rtlCol="0"/>
+          <a:lstStyle>
+            <a:lvl1pPr algn="r">
+              <a:defRPr sz="1200"/>
+            </a:lvl1pPr>
+          </a:lstStyle>
+          <a:p>
+            <a:fld id="{D15AD191-481F-47CD-BB31-6284BAB9F5F2}" type="datetimeFigureOut">
+              <a:rPr lang="en-GB" smtClean="0"/>
+              <a:t>15/04/2026</a:t>
+            </a:fld>
+            <a:endParaRPr lang="en-GB"/>
+          </a:p>
+        </p:txBody>
+      </p:sp>
+      <p:sp>
+        <p:nvSpPr>
+          <p:cNvPr id="4" name="Slide Image Placeholder 3"/>
+          <p:cNvSpPr>
+            <a:spLocks noGrp="1" noRot="1" noChangeAspect="1"/>
+          </p:cNvSpPr>
+          <p:nvPr>
+            <p:ph type="sldImg" idx="2"/>
+          </p:nvPr>
+        </p:nvSpPr>
+        <p:spPr>
+          <a:xfrm>
+            <a:off x="685800" y="1143000"/>
+            <a:ext cx="5486400" cy="3086100"/>
+          </a:xfrm>
+          <a:prstGeom prst="rect">
+            <a:avLst/>
+          </a:prstGeom>
+          <a:noFill/>
+          <a:ln w="12700">
+            <a:solidFill>
+              <a:prstClr val="black"/>
+            </a:solidFill>
+          </a:ln>
+        </p:spPr>
+        <p:txBody>
+          <a:bodyPr vert="horz" lIns="91440" tIns="45720" rIns="91440" bIns="45720" rtlCol="0" anchor="ctr"/>
+          <a:lstStyle/>
+          <a:p>
+            <a:endParaRPr lang="en-GB"/>
+          </a:p>
+        </p:txBody>
+      </p:sp>
+      <p:sp>
+        <p:nvSpPr>
+          <p:cNvPr id="5" name="Notes Placeholder 4"/>
+          <p:cNvSpPr>
+            <a:spLocks noGrp="1"/>
+          </p:cNvSpPr>
+          <p:nvPr>
+            <p:ph type="body" sz="quarter" idx="3"/>
+          </p:nvPr>
+        </p:nvSpPr>
+        <p:spPr>
+          <a:xfrm>
+            <a:off x="685800" y="4400550"/>
+            <a:ext cx="5486400" cy="3600450"/>
+          </a:xfrm>
+          <a:prstGeom prst="rect">
+            <a:avLst/>
+          </a:prstGeom>
+        </p:spPr>
+        <p:txBody>
+          <a:bodyPr vert="horz" lIns="91440" tIns="45720" rIns="91440" bIns="45720" rtlCol="0"/>
+          <a:lstStyle/>
+          <a:p>
+            <a:pPr lvl="0"/>
+            <a:r>
+              <a:rPr lang="en-GB"/>
+              <a:t>Click to edit Master text styles</a:t>
+            </a:r>
+          </a:p>
+          <a:p>
+            <a:pPr lvl="1"/>
+            <a:r>
+              <a:rPr lang="en-GB"/>
+              <a:t>Second level</a:t>
+            </a:r>
+          </a:p>
+          <a:p>
+            <a:pPr lvl="2"/>
+            <a:r>
+              <a:rPr lang="en-GB"/>
+              <a:t>Third level</a:t>
+            </a:r>
+          </a:p>
+          <a:p>
+            <a:pPr lvl="3"/>
+            <a:r>
+              <a:rPr lang="en-GB"/>
+              <a:t>Fourth level</a:t>
+            </a:r>
+          </a:p>
+          <a:p>
+            <a:pPr lvl="4"/>
+            <a:r>
+              <a:rPr lang="en-GB"/>
+              <a:t>Fifth level</a:t>
+            </a:r>
+          </a:p>
+        </p:txBody>
+      </p:sp>
+      <p:sp>
+        <p:nvSpPr>
+          <p:cNvPr id="6" name="Footer Placeholder 5"/>
+          <p:cNvSpPr>
+            <a:spLocks noGrp="1"/>
+          </p:cNvSpPr>
+          <p:nvPr>
+            <p:ph type="ftr" sz="quarter" idx="4"/>
+          </p:nvPr>
+        </p:nvSpPr>
+        <p:spPr>
+          <a:xfrm>
+            <a:off x="0" y="8685213"/>
+            <a:ext cx="2971800" cy="458787"/>
+          </a:xfrm>
+          <a:prstGeom prst="rect">
+            <a:avLst/>
+          </a:prstGeom>
+        </p:spPr>
+        <p:txBody>
+          <a:bodyPr vert="horz" lIns="91440" tIns="45720" rIns="91440" bIns="45720" rtlCol="0" anchor="b"/>
+          <a:lstStyle>
+            <a:lvl1pPr algn="l">
+              <a:defRPr sz="1200"/>
+            </a:lvl1pPr>
+          </a:lstStyle>
+          <a:p>
+            <a:endParaRPr lang="en-GB"/>
+          </a:p>
+        </p:txBody>
+      </p:sp>
+      <p:sp>
+        <p:nvSpPr>
+          <p:cNvPr id="7" name="Slide Number Placeholder 6"/>
+          <p:cNvSpPr>
+            <a:spLocks noGrp="1"/>
+          </p:cNvSpPr>
+          <p:nvPr>
+            <p:ph type="sldNum" sz="quarter" idx="5"/>
+          </p:nvPr>
+        </p:nvSpPr>
+        <p:spPr>
+          <a:xfrm>
+            <a:off x="3884613" y="8685213"/>
+            <a:ext cx="2971800" cy="458787"/>
+          </a:xfrm>
+          <a:prstGeom prst="rect">
+            <a:avLst/>
+          </a:prstGeom>
+        </p:spPr>
+        <p:txBody>
+          <a:bodyPr vert="horz" lIns="91440" tIns="45720" rIns="91440" bIns="45720" rtlCol="0" anchor="b"/>
+          <a:lstStyle>
+            <a:lvl1pPr algn="r">
+              <a:defRPr sz="1200"/>
+            </a:lvl1pPr>
+          </a:lstStyle>
+          <a:p>
+            <a:fld id="{25275E58-B779-47B9-B424-789E2006D55A}" type="slidenum">
+              <a:rPr lang="en-GB" smtClean="0"/>
+              <a:t>‹#›</a:t>
+            </a:fld>
+            <a:endParaRPr lang="en-GB"/>
+          </a:p>
+        </p:txBody>
+      </p:sp>
+    </p:spTree>
+    <p:extLst>
+      <p:ext uri="{BB962C8B-B14F-4D97-AF65-F5344CB8AC3E}">
+        <p14:creationId xmlns:p14="http://schemas.microsoft.com/office/powerpoint/2010/main" val="2805036316"/>
+      </p:ext>
+    </p:extLst>
+  </p:cSld>
+  <p:clrMap bg1="lt1" tx1="dk1" bg2="lt2" tx2="dk2" accent1="accent1" accent2="accent2" accent3="accent3" accent4="accent4" accent5="accent5" accent6="accent6" hlink="hlink" folHlink="folHlink"/>
+  <p:notesStyle>
+    <a:lvl1pPr marL="0" algn="l" defTabSz="914400" rtl="0" eaLnBrk="1" latinLnBrk="0" hangingPunct="1">
+      <a:defRPr sz="1200" kern="1200">
+        <a:solidFill>
+          <a:schemeClr val="tx1"/>
+        </a:solidFill>
+        <a:latin typeface="+mn-lt"/>
+        <a:ea typeface="+mn-ea"/>
+        <a:cs typeface="+mn-cs"/>
+      </a:defRPr>
+    </a:lvl1pPr>
+    <a:lvl2pPr marL="457200" algn="l" defTabSz="914400" rtl="0" eaLnBrk="1" latinLnBrk="0" hangingPunct="1">
+      <a:defRPr sz="1200" kern="1200">
+        <a:solidFill>
+          <a:schemeClr val="tx1"/>
+        </a:solidFill>
+        <a:latin typeface="+mn-lt"/>
+        <a:ea typeface="+mn-ea"/>
+        <a:cs typeface="+mn-cs"/>
+      </a:defRPr>
+    </a:lvl2pPr>
+    <a:lvl3pPr marL="914400" algn="l" defTabSz="914400" rtl="0" eaLnBrk="1" latinLnBrk="0" hangingPunct="1">
+      <a:defRPr sz="1200" kern="1200">
+        <a:solidFill>
+          <a:schemeClr val="tx1"/>
+        </a:solidFill>
+        <a:latin typeface="+mn-lt"/>
+        <a:ea typeface="+mn-ea"/>
+        <a:cs typeface="+mn-cs"/>
+      </a:defRPr>
+    </a:lvl3pPr>
+    <a:lvl4pPr marL="1371600" algn="l" defTabSz="914400" rtl="0" eaLnBrk="1" latinLnBrk="0" hangingPunct="1">
+      <a:defRPr sz="1200" kern="1200">
+        <a:solidFill>
+          <a:schemeClr val="tx1"/>
+        </a:solidFill>
+        <a:latin typeface="+mn-lt"/>
+        <a:ea typeface="+mn-ea"/>
+        <a:cs typeface="+mn-cs"/>
+      </a:defRPr>
+    </a:lvl4pPr>
+    <a:lvl5pPr marL="1828800" algn="l" defTabSz="914400" rtl="0" eaLnBrk="1" latinLnBrk="0" hangingPunct="1">
+      <a:defRPr sz="1200" kern="1200">
+        <a:solidFill>
+          <a:schemeClr val="tx1"/>
+        </a:solidFill>
+        <a:latin typeface="+mn-lt"/>
+        <a:ea typeface="+mn-ea"/>
+        <a:cs typeface="+mn-cs"/>
+      </a:defRPr>
+    </a:lvl5pPr>
+    <a:lvl6pPr marL="2286000" algn="l" defTabSz="914400" rtl="0" eaLnBrk="1" latinLnBrk="0" hangingPunct="1">
+      <a:defRPr sz="1200" kern="1200">
+        <a:solidFill>
+          <a:schemeClr val="tx1"/>
+        </a:solidFill>
+        <a:latin typeface="+mn-lt"/>
+        <a:ea typeface="+mn-ea"/>
+        <a:cs typeface="+mn-cs"/>
+      </a:defRPr>
+    </a:lvl6pPr>
+    <a:lvl7pPr marL="2743200" algn="l" defTabSz="914400" rtl="0" eaLnBrk="1" latinLnBrk="0" hangingPunct="1">
+      <a:defRPr sz="1200" kern="1200">
+        <a:solidFill>
+          <a:schemeClr val="tx1"/>
+        </a:solidFill>
+        <a:latin typeface="+mn-lt"/>
+        <a:ea typeface="+mn-ea"/>
+        <a:cs typeface="+mn-cs"/>
+      </a:defRPr>
+    </a:lvl7pPr>
+    <a:lvl8pPr marL="3200400" algn="l" defTabSz="914400" rtl="0" eaLnBrk="1" latinLnBrk="0" hangingPunct="1">
+      <a:defRPr sz="1200" kern="1200">
+        <a:solidFill>
+          <a:schemeClr val="tx1"/>
+        </a:solidFill>
+        <a:latin typeface="+mn-lt"/>
+        <a:ea typeface="+mn-ea"/>
+        <a:cs typeface="+mn-cs"/>
+      </a:defRPr>
+    </a:lvl8pPr>
+    <a:lvl9pPr marL="3657600" algn="l" defTabSz="914400" rtl="0" eaLnBrk="1" latinLnBrk="0" hangingPunct="1">
+      <a:defRPr sz="1200" kern="1200">
+        <a:solidFill>
+          <a:schemeClr val="tx1"/>
+        </a:solidFill>
+        <a:latin typeface="+mn-lt"/>
+        <a:ea typeface="+mn-ea"/>
+        <a:cs typeface="+mn-cs"/>
+      </a:defRPr>
+    </a:lvl9pPr>
+  </p:notesStyle>
+</p:notesMaster>
+</file>
+
+<file path=ppt/notesSlides/notesSlide1.xml><?xml version="1.0" encoding="utf-8"?>
+<p:notes xmlns:a="http://schemas.openxmlformats.org/drawingml/2006/main" xmlns:r="http://schemas.openxmlformats.org/officeDocument/2006/relationships" xmlns:p="http://schemas.openxmlformats.org/presentationml/2006/main">
+  <p:cSld>
+    <p:spTree>
+      <p:nvGrpSpPr>
+        <p:cNvPr id="1" name=""/>
+        <p:cNvGrpSpPr/>
+        <p:nvPr/>
+      </p:nvGrpSpPr>
+      <p:grpSpPr>
+        <a:xfrm>
+          <a:off x="0" y="0"/>
+          <a:ext cx="0" cy="0"/>
+          <a:chOff x="0" y="0"/>
+          <a:chExt cx="0" cy="0"/>
+        </a:xfrm>
+      </p:grpSpPr>
+      <p:sp>
+        <p:nvSpPr>
+          <p:cNvPr id="2" name="Marcador de imagen de diapositiva 1"/>
+          <p:cNvSpPr>
+            <a:spLocks noGrp="1" noRot="1" noChangeAspect="1"/>
+          </p:cNvSpPr>
+          <p:nvPr>
+            <p:ph type="sldImg"/>
+          </p:nvPr>
+        </p:nvSpPr>
+        <p:spPr/>
+      </p:sp>
+      <p:sp>
+        <p:nvSpPr>
+          <p:cNvPr id="3" name="Marcador de notas 2"/>
+          <p:cNvSpPr>
+            <a:spLocks noGrp="1"/>
+          </p:cNvSpPr>
+          <p:nvPr>
+            <p:ph type="body" idx="1"/>
+          </p:nvPr>
+        </p:nvSpPr>
+        <p:spPr/>
+        <p:txBody>
+          <a:bodyPr/>
+          <a:lstStyle/>
+          <a:p>
+            <a:r>
+              <a:rPr lang="es-ES" dirty="0"/>
+              <a:t>Z = final </a:t>
+            </a:r>
+            <a:r>
+              <a:rPr lang="es-ES" dirty="0" err="1"/>
+              <a:t>embedding</a:t>
+            </a:r>
+            <a:endParaRPr lang="es-ES" dirty="0"/>
+          </a:p>
+          <a:p>
+            <a:r>
+              <a:rPr lang="es-ES" dirty="0"/>
+              <a:t>E(t1) </a:t>
+            </a:r>
+            <a:r>
+              <a:rPr lang="es-ES" dirty="0" err="1"/>
+              <a:t>is</a:t>
+            </a:r>
+            <a:r>
+              <a:rPr lang="es-ES" dirty="0"/>
+              <a:t> </a:t>
+            </a:r>
+            <a:r>
+              <a:rPr lang="es-ES" dirty="0" err="1"/>
+              <a:t>the</a:t>
+            </a:r>
+            <a:r>
+              <a:rPr lang="es-ES" dirty="0"/>
+              <a:t> </a:t>
+            </a:r>
+            <a:r>
+              <a:rPr lang="es-ES" dirty="0" err="1"/>
+              <a:t>tokenization</a:t>
+            </a:r>
+            <a:r>
+              <a:rPr lang="es-ES" dirty="0"/>
+              <a:t> step, </a:t>
+            </a:r>
+            <a:r>
+              <a:rPr lang="es-ES" dirty="0" err="1"/>
+              <a:t>with</a:t>
+            </a:r>
+            <a:r>
+              <a:rPr lang="es-ES" dirty="0"/>
+              <a:t> </a:t>
+            </a:r>
+            <a:r>
+              <a:rPr lang="es-ES" dirty="0" err="1"/>
+              <a:t>the</a:t>
+            </a:r>
+            <a:r>
+              <a:rPr lang="es-ES" dirty="0"/>
+              <a:t> </a:t>
+            </a:r>
+            <a:r>
+              <a:rPr lang="es-ES" dirty="0" err="1"/>
+              <a:t>learned</a:t>
+            </a:r>
+            <a:r>
+              <a:rPr lang="es-ES" dirty="0"/>
+              <a:t> </a:t>
+            </a:r>
+            <a:r>
+              <a:rPr lang="es-ES" dirty="0" err="1"/>
+              <a:t>tokenizer</a:t>
+            </a:r>
+            <a:endParaRPr lang="es-ES" dirty="0"/>
+          </a:p>
+          <a:p>
+            <a:r>
+              <a:rPr lang="es-ES" dirty="0" err="1"/>
+              <a:t>fO</a:t>
+            </a:r>
+            <a:r>
+              <a:rPr lang="es-ES" dirty="0"/>
+              <a:t> </a:t>
+            </a:r>
+            <a:r>
+              <a:rPr lang="es-ES" dirty="0" err="1"/>
+              <a:t>is</a:t>
+            </a:r>
+            <a:r>
+              <a:rPr lang="es-ES" dirty="0"/>
+              <a:t> </a:t>
+            </a:r>
+            <a:r>
+              <a:rPr lang="es-ES" dirty="0" err="1"/>
+              <a:t>the</a:t>
+            </a:r>
+            <a:r>
+              <a:rPr lang="es-ES" dirty="0"/>
+              <a:t> </a:t>
+            </a:r>
+            <a:r>
+              <a:rPr lang="es-ES" dirty="0" err="1"/>
+              <a:t>embedder</a:t>
+            </a:r>
+            <a:endParaRPr lang="es-ES" dirty="0"/>
+          </a:p>
+          <a:p>
+            <a:r>
+              <a:rPr lang="es-ES" dirty="0"/>
+              <a:t>X </a:t>
+            </a:r>
+            <a:r>
+              <a:rPr lang="es-ES" dirty="0" err="1"/>
+              <a:t>is</a:t>
+            </a:r>
+            <a:r>
+              <a:rPr lang="es-ES" dirty="0"/>
+              <a:t> </a:t>
+            </a:r>
+            <a:r>
+              <a:rPr lang="es-ES" dirty="0" err="1"/>
+              <a:t>the</a:t>
+            </a:r>
+            <a:r>
+              <a:rPr lang="es-ES" dirty="0"/>
+              <a:t> </a:t>
+            </a:r>
+            <a:r>
+              <a:rPr lang="es-ES" dirty="0" err="1"/>
+              <a:t>matrix</a:t>
+            </a:r>
+            <a:r>
+              <a:rPr lang="es-ES" dirty="0"/>
+              <a:t> </a:t>
+            </a:r>
+            <a:r>
+              <a:rPr lang="es-ES" dirty="0" err="1"/>
+              <a:t>resulting</a:t>
+            </a:r>
+            <a:r>
+              <a:rPr lang="es-ES" dirty="0"/>
+              <a:t> </a:t>
+            </a:r>
+            <a:r>
+              <a:rPr lang="es-ES" dirty="0" err="1"/>
+              <a:t>form</a:t>
+            </a:r>
+            <a:r>
+              <a:rPr lang="es-ES" dirty="0"/>
+              <a:t> </a:t>
+            </a:r>
+            <a:r>
+              <a:rPr lang="es-ES" dirty="0" err="1"/>
+              <a:t>the</a:t>
+            </a:r>
+            <a:r>
+              <a:rPr lang="es-ES" dirty="0"/>
+              <a:t> </a:t>
+            </a:r>
+            <a:r>
+              <a:rPr lang="es-ES" dirty="0" err="1"/>
+              <a:t>tokenizer</a:t>
+            </a:r>
+            <a:r>
+              <a:rPr lang="es-ES" dirty="0"/>
+              <a:t> step </a:t>
+            </a:r>
+            <a:r>
+              <a:rPr lang="es-ES" dirty="0" err="1"/>
+              <a:t>of</a:t>
+            </a:r>
+            <a:r>
+              <a:rPr lang="es-ES" dirty="0"/>
+              <a:t> </a:t>
+            </a:r>
+            <a:r>
+              <a:rPr lang="es-ES" dirty="0" err="1"/>
+              <a:t>introducing</a:t>
+            </a:r>
+            <a:r>
+              <a:rPr lang="es-ES" dirty="0"/>
+              <a:t> </a:t>
+            </a:r>
+            <a:r>
+              <a:rPr lang="es-ES" dirty="0" err="1"/>
+              <a:t>the</a:t>
+            </a:r>
+            <a:r>
+              <a:rPr lang="es-ES" dirty="0"/>
+              <a:t> </a:t>
+            </a:r>
+            <a:r>
+              <a:rPr lang="es-ES" dirty="0" err="1"/>
+              <a:t>ibuprofen</a:t>
+            </a:r>
+            <a:r>
+              <a:rPr lang="es-ES" dirty="0"/>
+              <a:t> SMILES</a:t>
+            </a:r>
+            <a:endParaRPr lang="en-GB" dirty="0"/>
+          </a:p>
+        </p:txBody>
+      </p:sp>
+      <p:sp>
+        <p:nvSpPr>
+          <p:cNvPr id="4" name="Marcador de número de diapositiva 3"/>
+          <p:cNvSpPr>
+            <a:spLocks noGrp="1"/>
+          </p:cNvSpPr>
+          <p:nvPr>
+            <p:ph type="sldNum" sz="quarter" idx="5"/>
+          </p:nvPr>
+        </p:nvSpPr>
+        <p:spPr/>
+        <p:txBody>
+          <a:bodyPr/>
+          <a:lstStyle/>
+          <a:p>
+            <a:fld id="{721BA27C-3EF0-485A-B33F-5876D132EE7E}" type="slidenum">
+              <a:rPr lang="en-GB" smtClean="0"/>
+              <a:t>2</a:t>
+            </a:fld>
+            <a:endParaRPr lang="en-GB"/>
+          </a:p>
+        </p:txBody>
+      </p:sp>
+    </p:spTree>
+    <p:extLst>
+      <p:ext uri="{BB962C8B-B14F-4D97-AF65-F5344CB8AC3E}">
+        <p14:creationId xmlns:p14="http://schemas.microsoft.com/office/powerpoint/2010/main" val="652076717"/>
+      </p:ext>
+    </p:extLst>
+  </p:cSld>
+  <p:clrMapOvr>
+    <a:masterClrMapping/>
+  </p:clrMapOvr>
+</p:notes>
 </file>
 
 <file path=ppt/slideLayouts/slideLayout1.xml><?xml version="1.0" encoding="utf-8"?>
@@ -254,7 +889,7 @@
           <a:p>
             <a:fld id="{76EE70CD-0C52-4877-95B4-2234339B47C2}" type="datetimeFigureOut">
               <a:rPr lang="en-GB" smtClean="0"/>
-              <a:t>28/09/2025</a:t>
+              <a:t>15/04/2026</a:t>
             </a:fld>
             <a:endParaRPr lang="en-GB"/>
           </a:p>
@@ -452,7 +1087,7 @@
           <a:p>
             <a:fld id="{76EE70CD-0C52-4877-95B4-2234339B47C2}" type="datetimeFigureOut">
               <a:rPr lang="en-GB" smtClean="0"/>
-              <a:t>28/09/2025</a:t>
+              <a:t>15/04/2026</a:t>
             </a:fld>
             <a:endParaRPr lang="en-GB"/>
           </a:p>
@@ -660,7 +1295,7 @@
           <a:p>
             <a:fld id="{76EE70CD-0C52-4877-95B4-2234339B47C2}" type="datetimeFigureOut">
               <a:rPr lang="en-GB" smtClean="0"/>
-              <a:t>28/09/2025</a:t>
+              <a:t>15/04/2026</a:t>
             </a:fld>
             <a:endParaRPr lang="en-GB"/>
           </a:p>
@@ -858,7 +1493,7 @@
           <a:p>
             <a:fld id="{76EE70CD-0C52-4877-95B4-2234339B47C2}" type="datetimeFigureOut">
               <a:rPr lang="en-GB" smtClean="0"/>
-              <a:t>28/09/2025</a:t>
+              <a:t>15/04/2026</a:t>
             </a:fld>
             <a:endParaRPr lang="en-GB"/>
           </a:p>
@@ -1133,7 +1768,7 @@
           <a:p>
             <a:fld id="{76EE70CD-0C52-4877-95B4-2234339B47C2}" type="datetimeFigureOut">
               <a:rPr lang="en-GB" smtClean="0"/>
-              <a:t>28/09/2025</a:t>
+              <a:t>15/04/2026</a:t>
             </a:fld>
             <a:endParaRPr lang="en-GB"/>
           </a:p>
@@ -1398,7 +2033,7 @@
           <a:p>
             <a:fld id="{76EE70CD-0C52-4877-95B4-2234339B47C2}" type="datetimeFigureOut">
               <a:rPr lang="en-GB" smtClean="0"/>
-              <a:t>28/09/2025</a:t>
+              <a:t>15/04/2026</a:t>
             </a:fld>
             <a:endParaRPr lang="en-GB"/>
           </a:p>
@@ -1810,7 +2445,7 @@
           <a:p>
             <a:fld id="{76EE70CD-0C52-4877-95B4-2234339B47C2}" type="datetimeFigureOut">
               <a:rPr lang="en-GB" smtClean="0"/>
-              <a:t>28/09/2025</a:t>
+              <a:t>15/04/2026</a:t>
             </a:fld>
             <a:endParaRPr lang="en-GB"/>
           </a:p>
@@ -1951,7 +2586,7 @@
           <a:p>
             <a:fld id="{76EE70CD-0C52-4877-95B4-2234339B47C2}" type="datetimeFigureOut">
               <a:rPr lang="en-GB" smtClean="0"/>
-              <a:t>28/09/2025</a:t>
+              <a:t>15/04/2026</a:t>
             </a:fld>
             <a:endParaRPr lang="en-GB"/>
           </a:p>
@@ -2064,7 +2699,7 @@
           <a:p>
             <a:fld id="{76EE70CD-0C52-4877-95B4-2234339B47C2}" type="datetimeFigureOut">
               <a:rPr lang="en-GB" smtClean="0"/>
-              <a:t>28/09/2025</a:t>
+              <a:t>15/04/2026</a:t>
             </a:fld>
             <a:endParaRPr lang="en-GB"/>
           </a:p>
@@ -2375,7 +3010,7 @@
           <a:p>
             <a:fld id="{76EE70CD-0C52-4877-95B4-2234339B47C2}" type="datetimeFigureOut">
               <a:rPr lang="en-GB" smtClean="0"/>
-              <a:t>28/09/2025</a:t>
+              <a:t>15/04/2026</a:t>
             </a:fld>
             <a:endParaRPr lang="en-GB"/>
           </a:p>
@@ -2663,7 +3298,7 @@
           <a:p>
             <a:fld id="{76EE70CD-0C52-4877-95B4-2234339B47C2}" type="datetimeFigureOut">
               <a:rPr lang="en-GB" smtClean="0"/>
-              <a:t>28/09/2025</a:t>
+              <a:t>15/04/2026</a:t>
             </a:fld>
             <a:endParaRPr lang="en-GB"/>
           </a:p>
@@ -2904,7 +3539,7 @@
           <a:p>
             <a:fld id="{76EE70CD-0C52-4877-95B4-2234339B47C2}" type="datetimeFigureOut">
               <a:rPr lang="en-GB" smtClean="0"/>
-              <a:t>28/09/2025</a:t>
+              <a:t>15/04/2026</a:t>
             </a:fld>
             <a:endParaRPr lang="en-GB"/>
           </a:p>
@@ -4752,6 +5387,4744 @@
 </p:sld>
 </file>
 
+<file path=ppt/slides/slide2.xml><?xml version="1.0" encoding="utf-8"?>
+<p:sld xmlns:a="http://schemas.openxmlformats.org/drawingml/2006/main" xmlns:r="http://schemas.openxmlformats.org/officeDocument/2006/relationships" xmlns:p="http://schemas.openxmlformats.org/presentationml/2006/main">
+  <p:cSld>
+    <p:spTree>
+      <p:nvGrpSpPr>
+        <p:cNvPr id="1" name=""/>
+        <p:cNvGrpSpPr/>
+        <p:nvPr/>
+      </p:nvGrpSpPr>
+      <p:grpSpPr>
+        <a:xfrm>
+          <a:off x="0" y="0"/>
+          <a:ext cx="0" cy="0"/>
+          <a:chOff x="0" y="0"/>
+          <a:chExt cx="0" cy="0"/>
+        </a:xfrm>
+      </p:grpSpPr>
+      <p:grpSp>
+        <p:nvGrpSpPr>
+          <p:cNvPr id="1062" name="Grupo 1061">
+            <a:extLst>
+              <a:ext uri="{FF2B5EF4-FFF2-40B4-BE49-F238E27FC236}">
+                <a16:creationId xmlns:a16="http://schemas.microsoft.com/office/drawing/2014/main" id="{DC3009EC-AA9C-83AA-33E4-6D8E204F63A8}"/>
+              </a:ext>
+            </a:extLst>
+          </p:cNvPr>
+          <p:cNvGrpSpPr/>
+          <p:nvPr/>
+        </p:nvGrpSpPr>
+        <p:grpSpPr>
+          <a:xfrm>
+            <a:off x="2257425" y="235356"/>
+            <a:ext cx="7499734" cy="1900727"/>
+            <a:chOff x="2257425" y="235356"/>
+            <a:chExt cx="7499734" cy="1900727"/>
+          </a:xfrm>
+        </p:grpSpPr>
+        <p:pic>
+          <p:nvPicPr>
+            <p:cNvPr id="1061" name="Imagen 1060">
+              <a:extLst>
+                <a:ext uri="{FF2B5EF4-FFF2-40B4-BE49-F238E27FC236}">
+                  <a16:creationId xmlns:a16="http://schemas.microsoft.com/office/drawing/2014/main" id="{2DB22FF4-A3DB-78B6-5D09-169E8E930F5D}"/>
+                </a:ext>
+              </a:extLst>
+            </p:cNvPr>
+            <p:cNvPicPr>
+              <a:picLocks noChangeAspect="1"/>
+            </p:cNvPicPr>
+            <p:nvPr/>
+          </p:nvPicPr>
+          <p:blipFill>
+            <a:blip r:embed="rId3"/>
+            <a:stretch>
+              <a:fillRect/>
+            </a:stretch>
+          </p:blipFill>
+          <p:spPr>
+            <a:xfrm>
+              <a:off x="2257425" y="235356"/>
+              <a:ext cx="3696886" cy="1848443"/>
+            </a:xfrm>
+            <a:prstGeom prst="rect">
+              <a:avLst/>
+            </a:prstGeom>
+          </p:spPr>
+        </p:pic>
+        <p:grpSp>
+          <p:nvGrpSpPr>
+            <p:cNvPr id="41" name="Grupo 40">
+              <a:extLst>
+                <a:ext uri="{FF2B5EF4-FFF2-40B4-BE49-F238E27FC236}">
+                  <a16:creationId xmlns:a16="http://schemas.microsoft.com/office/drawing/2014/main" id="{A7B94D04-17B5-8EBC-1DCC-B5BDDD4F60AE}"/>
+                </a:ext>
+              </a:extLst>
+            </p:cNvPr>
+            <p:cNvGrpSpPr/>
+            <p:nvPr/>
+          </p:nvGrpSpPr>
+          <p:grpSpPr>
+            <a:xfrm>
+              <a:off x="3495051" y="1082675"/>
+              <a:ext cx="6262108" cy="1053408"/>
+              <a:chOff x="3495051" y="1082675"/>
+              <a:chExt cx="6262108" cy="1053408"/>
+            </a:xfrm>
+          </p:grpSpPr>
+          <p:grpSp>
+            <p:nvGrpSpPr>
+              <p:cNvPr id="20" name="Grupo 19">
+                <a:extLst>
+                  <a:ext uri="{FF2B5EF4-FFF2-40B4-BE49-F238E27FC236}">
+                    <a16:creationId xmlns:a16="http://schemas.microsoft.com/office/drawing/2014/main" id="{E167B4B8-BDB5-926A-E81C-8A21FD1461E5}"/>
+                  </a:ext>
+                </a:extLst>
+              </p:cNvPr>
+              <p:cNvGrpSpPr/>
+              <p:nvPr/>
+            </p:nvGrpSpPr>
+            <p:grpSpPr>
+              <a:xfrm>
+                <a:off x="5511736" y="1082675"/>
+                <a:ext cx="4245423" cy="394031"/>
+                <a:chOff x="5511736" y="1061317"/>
+                <a:chExt cx="4245423" cy="394031"/>
+              </a:xfrm>
+            </p:grpSpPr>
+            <p:grpSp>
+              <p:nvGrpSpPr>
+                <p:cNvPr id="19" name="Grupo 18">
+                  <a:extLst>
+                    <a:ext uri="{FF2B5EF4-FFF2-40B4-BE49-F238E27FC236}">
+                      <a16:creationId xmlns:a16="http://schemas.microsoft.com/office/drawing/2014/main" id="{1385188E-EE7F-378A-FCDF-74D42C8FBD89}"/>
+                    </a:ext>
+                  </a:extLst>
+                </p:cNvPr>
+                <p:cNvGrpSpPr/>
+                <p:nvPr/>
+              </p:nvGrpSpPr>
+              <p:grpSpPr>
+                <a:xfrm>
+                  <a:off x="5511736" y="1061317"/>
+                  <a:ext cx="1168528" cy="261610"/>
+                  <a:chOff x="5551019" y="1024313"/>
+                  <a:chExt cx="1168528" cy="261610"/>
+                </a:xfrm>
+              </p:grpSpPr>
+              <p:cxnSp>
+                <p:nvCxnSpPr>
+                  <p:cNvPr id="9" name="Conector recto de flecha 8">
+                    <a:extLst>
+                      <a:ext uri="{FF2B5EF4-FFF2-40B4-BE49-F238E27FC236}">
+                        <a16:creationId xmlns:a16="http://schemas.microsoft.com/office/drawing/2014/main" id="{D22FA9FB-7FA3-6DBF-73A6-600F81E6C932}"/>
+                      </a:ext>
+                    </a:extLst>
+                  </p:cNvPr>
+                  <p:cNvCxnSpPr>
+                    <a:cxnSpLocks/>
+                  </p:cNvCxnSpPr>
+                  <p:nvPr/>
+                </p:nvCxnSpPr>
+                <p:spPr>
+                  <a:xfrm>
+                    <a:off x="5587596" y="1249067"/>
+                    <a:ext cx="1131951" cy="0"/>
+                  </a:xfrm>
+                  <a:prstGeom prst="straightConnector1">
+                    <a:avLst/>
+                  </a:prstGeom>
+                  <a:ln>
+                    <a:tailEnd type="triangle"/>
+                  </a:ln>
+                </p:spPr>
+                <p:style>
+                  <a:lnRef idx="2">
+                    <a:schemeClr val="dk1"/>
+                  </a:lnRef>
+                  <a:fillRef idx="0">
+                    <a:schemeClr val="dk1"/>
+                  </a:fillRef>
+                  <a:effectRef idx="1">
+                    <a:schemeClr val="dk1"/>
+                  </a:effectRef>
+                  <a:fontRef idx="minor">
+                    <a:schemeClr val="tx1"/>
+                  </a:fontRef>
+                </p:style>
+              </p:cxnSp>
+              <p:sp>
+                <p:nvSpPr>
+                  <p:cNvPr id="10" name="CuadroTexto 9">
+                    <a:extLst>
+                      <a:ext uri="{FF2B5EF4-FFF2-40B4-BE49-F238E27FC236}">
+                        <a16:creationId xmlns:a16="http://schemas.microsoft.com/office/drawing/2014/main" id="{F575386E-C0BD-8E0A-822E-8DC083E3FDC6}"/>
+                      </a:ext>
+                    </a:extLst>
+                  </p:cNvPr>
+                  <p:cNvSpPr txBox="1"/>
+                  <p:nvPr/>
+                </p:nvSpPr>
+                <p:spPr>
+                  <a:xfrm>
+                    <a:off x="5551019" y="1024313"/>
+                    <a:ext cx="1131951" cy="261610"/>
+                  </a:xfrm>
+                  <a:prstGeom prst="rect">
+                    <a:avLst/>
+                  </a:prstGeom>
+                  <a:noFill/>
+                </p:spPr>
+                <p:txBody>
+                  <a:bodyPr wrap="square" rtlCol="0">
+                    <a:spAutoFit/>
+                  </a:bodyPr>
+                  <a:lstStyle/>
+                  <a:p>
+                    <a:pPr algn="ctr"/>
+                    <a:r>
+                      <a:rPr lang="en-US" sz="1100" b="1" noProof="1">
+                        <a:latin typeface="Calibri" panose="020F0502020204030204" pitchFamily="34" charset="0"/>
+                        <a:ea typeface="Calibri" panose="020F0502020204030204" pitchFamily="34" charset="0"/>
+                        <a:cs typeface="Calibri" panose="020F0502020204030204" pitchFamily="34" charset="0"/>
+                      </a:rPr>
+                      <a:t>String encoding </a:t>
+                    </a:r>
+                  </a:p>
+                </p:txBody>
+              </p:sp>
+            </p:grpSp>
+            <p:sp>
+              <p:nvSpPr>
+                <p:cNvPr id="13" name="CuadroTexto 12">
+                  <a:extLst>
+                    <a:ext uri="{FF2B5EF4-FFF2-40B4-BE49-F238E27FC236}">
+                      <a16:creationId xmlns:a16="http://schemas.microsoft.com/office/drawing/2014/main" id="{994FC89D-8F3A-E6DF-886B-9715B1D8E649}"/>
+                    </a:ext>
+                  </a:extLst>
+                </p:cNvPr>
+                <p:cNvSpPr txBox="1"/>
+                <p:nvPr/>
+              </p:nvSpPr>
+              <p:spPr>
+                <a:xfrm>
+                  <a:off x="6756126" y="1116794"/>
+                  <a:ext cx="3001033" cy="338554"/>
+                </a:xfrm>
+                <a:prstGeom prst="rect">
+                  <a:avLst/>
+                </a:prstGeom>
+                <a:noFill/>
+              </p:spPr>
+              <p:txBody>
+                <a:bodyPr wrap="square" rtlCol="0">
+                  <a:spAutoFit/>
+                </a:bodyPr>
+                <a:lstStyle/>
+                <a:p>
+                  <a:pPr algn="ctr"/>
+                  <a:r>
+                    <a:rPr lang="en-US" sz="1600" b="1" noProof="1">
+                      <a:solidFill>
+                        <a:srgbClr val="FF9A25"/>
+                      </a:solidFill>
+                      <a:latin typeface="Calibri" panose="020F0502020204030204" pitchFamily="34" charset="0"/>
+                      <a:ea typeface="Calibri" panose="020F0502020204030204" pitchFamily="34" charset="0"/>
+                      <a:cs typeface="Calibri" panose="020F0502020204030204" pitchFamily="34" charset="0"/>
+                    </a:rPr>
+                    <a:t>CC(C)C</a:t>
+                  </a:r>
+                  <a:r>
+                    <a:rPr lang="en-US" sz="1600" b="1" noProof="1">
+                      <a:solidFill>
+                        <a:srgbClr val="FF0000"/>
+                      </a:solidFill>
+                      <a:latin typeface="Calibri" panose="020F0502020204030204" pitchFamily="34" charset="0"/>
+                      <a:ea typeface="Calibri" panose="020F0502020204030204" pitchFamily="34" charset="0"/>
+                      <a:cs typeface="Calibri" panose="020F0502020204030204" pitchFamily="34" charset="0"/>
+                    </a:rPr>
+                    <a:t>C1=CC=C(C=C1)</a:t>
+                  </a:r>
+                  <a:r>
+                    <a:rPr lang="en-US" sz="1600" b="1" noProof="1">
+                      <a:solidFill>
+                        <a:srgbClr val="FF69B4"/>
+                      </a:solidFill>
+                      <a:latin typeface="Calibri" panose="020F0502020204030204" pitchFamily="34" charset="0"/>
+                      <a:ea typeface="Calibri" panose="020F0502020204030204" pitchFamily="34" charset="0"/>
+                      <a:cs typeface="Calibri" panose="020F0502020204030204" pitchFamily="34" charset="0"/>
+                    </a:rPr>
+                    <a:t>C(C)</a:t>
+                  </a:r>
+                  <a:r>
+                    <a:rPr lang="en-US" sz="1600" b="1" noProof="1">
+                      <a:solidFill>
+                        <a:srgbClr val="8CC253"/>
+                      </a:solidFill>
+                      <a:latin typeface="Calibri" panose="020F0502020204030204" pitchFamily="34" charset="0"/>
+                      <a:ea typeface="Calibri" panose="020F0502020204030204" pitchFamily="34" charset="0"/>
+                      <a:cs typeface="Calibri" panose="020F0502020204030204" pitchFamily="34" charset="0"/>
+                    </a:rPr>
+                    <a:t>C(=O)O</a:t>
+                  </a:r>
+                </a:p>
+              </p:txBody>
+            </p:sp>
+          </p:grpSp>
+          <p:sp>
+            <p:nvSpPr>
+              <p:cNvPr id="32" name="CuadroTexto 31">
+                <a:extLst>
+                  <a:ext uri="{FF2B5EF4-FFF2-40B4-BE49-F238E27FC236}">
+                    <a16:creationId xmlns:a16="http://schemas.microsoft.com/office/drawing/2014/main" id="{FECC6823-9B0A-6311-5D64-53C52EF4B68A}"/>
+                  </a:ext>
+                </a:extLst>
+              </p:cNvPr>
+              <p:cNvSpPr txBox="1"/>
+              <p:nvPr/>
+            </p:nvSpPr>
+            <p:spPr>
+              <a:xfrm>
+                <a:off x="3495051" y="1828306"/>
+                <a:ext cx="1329941" cy="307777"/>
+              </a:xfrm>
+              <a:prstGeom prst="rect">
+                <a:avLst/>
+              </a:prstGeom>
+              <a:solidFill>
+                <a:srgbClr val="FCFCFC"/>
+              </a:solidFill>
+            </p:spPr>
+            <p:txBody>
+              <a:bodyPr wrap="square" rtlCol="0">
+                <a:spAutoFit/>
+              </a:bodyPr>
+              <a:lstStyle/>
+              <a:p>
+                <a:pPr algn="ctr"/>
+                <a:r>
+                  <a:rPr lang="en-US" sz="1400" b="1" noProof="1">
+                    <a:latin typeface="Calibri" panose="020F0502020204030204" pitchFamily="34" charset="0"/>
+                    <a:ea typeface="Calibri" panose="020F0502020204030204" pitchFamily="34" charset="0"/>
+                    <a:cs typeface="Calibri" panose="020F0502020204030204" pitchFamily="34" charset="0"/>
+                  </a:rPr>
+                  <a:t>Ibuprofen</a:t>
+                </a:r>
+              </a:p>
+            </p:txBody>
+          </p:sp>
+        </p:grpSp>
+      </p:grpSp>
+      <p:cxnSp>
+        <p:nvCxnSpPr>
+          <p:cNvPr id="22" name="Conector recto 21">
+            <a:extLst>
+              <a:ext uri="{FF2B5EF4-FFF2-40B4-BE49-F238E27FC236}">
+                <a16:creationId xmlns:a16="http://schemas.microsoft.com/office/drawing/2014/main" id="{41DA9A9A-25EE-2FC8-822A-3632977FE3D0}"/>
+              </a:ext>
+            </a:extLst>
+          </p:cNvPr>
+          <p:cNvCxnSpPr>
+            <a:cxnSpLocks/>
+          </p:cNvCxnSpPr>
+          <p:nvPr/>
+        </p:nvCxnSpPr>
+        <p:spPr>
+          <a:xfrm>
+            <a:off x="-18289" y="2251531"/>
+            <a:ext cx="12192000" cy="0"/>
+          </a:xfrm>
+          <a:prstGeom prst="line">
+            <a:avLst/>
+          </a:prstGeom>
+          <a:ln w="38100"/>
+        </p:spPr>
+        <p:style>
+          <a:lnRef idx="2">
+            <a:schemeClr val="dk1"/>
+          </a:lnRef>
+          <a:fillRef idx="0">
+            <a:schemeClr val="dk1"/>
+          </a:fillRef>
+          <a:effectRef idx="1">
+            <a:schemeClr val="dk1"/>
+          </a:effectRef>
+          <a:fontRef idx="minor">
+            <a:schemeClr val="tx1"/>
+          </a:fontRef>
+        </p:style>
+      </p:cxnSp>
+      <p:sp>
+        <p:nvSpPr>
+          <p:cNvPr id="23" name="CuadroTexto 22">
+            <a:extLst>
+              <a:ext uri="{FF2B5EF4-FFF2-40B4-BE49-F238E27FC236}">
+                <a16:creationId xmlns:a16="http://schemas.microsoft.com/office/drawing/2014/main" id="{56BB3199-A4B3-71B1-628C-C121F5CE7F8E}"/>
+              </a:ext>
+            </a:extLst>
+          </p:cNvPr>
+          <p:cNvSpPr txBox="1"/>
+          <p:nvPr/>
+        </p:nvSpPr>
+        <p:spPr>
+          <a:xfrm>
+            <a:off x="4134659" y="43387"/>
+            <a:ext cx="3925454" cy="369332"/>
+          </a:xfrm>
+          <a:prstGeom prst="rect">
+            <a:avLst/>
+          </a:prstGeom>
+          <a:noFill/>
+        </p:spPr>
+        <p:txBody>
+          <a:bodyPr wrap="square" rtlCol="0">
+            <a:spAutoFit/>
+          </a:bodyPr>
+          <a:lstStyle/>
+          <a:p>
+            <a:pPr algn="ctr"/>
+            <a:r>
+              <a:rPr lang="en-US" b="1" u="sng" noProof="1"/>
+              <a:t>Chemical representation → SMILES</a:t>
+            </a:r>
+          </a:p>
+        </p:txBody>
+      </p:sp>
+      <p:cxnSp>
+        <p:nvCxnSpPr>
+          <p:cNvPr id="27" name="Conector recto 26">
+            <a:extLst>
+              <a:ext uri="{FF2B5EF4-FFF2-40B4-BE49-F238E27FC236}">
+                <a16:creationId xmlns:a16="http://schemas.microsoft.com/office/drawing/2014/main" id="{8575DC62-F9B7-30CF-228B-67E2616B34B2}"/>
+              </a:ext>
+            </a:extLst>
+          </p:cNvPr>
+          <p:cNvCxnSpPr>
+            <a:cxnSpLocks/>
+          </p:cNvCxnSpPr>
+          <p:nvPr/>
+        </p:nvCxnSpPr>
+        <p:spPr>
+          <a:xfrm>
+            <a:off x="-12273" y="4534935"/>
+            <a:ext cx="12192000" cy="0"/>
+          </a:xfrm>
+          <a:prstGeom prst="line">
+            <a:avLst/>
+          </a:prstGeom>
+          <a:ln w="38100"/>
+        </p:spPr>
+        <p:style>
+          <a:lnRef idx="2">
+            <a:schemeClr val="dk1"/>
+          </a:lnRef>
+          <a:fillRef idx="0">
+            <a:schemeClr val="dk1"/>
+          </a:fillRef>
+          <a:effectRef idx="1">
+            <a:schemeClr val="dk1"/>
+          </a:effectRef>
+          <a:fontRef idx="minor">
+            <a:schemeClr val="tx1"/>
+          </a:fontRef>
+        </p:style>
+      </p:cxnSp>
+      <p:sp>
+        <p:nvSpPr>
+          <p:cNvPr id="28" name="CuadroTexto 27">
+            <a:extLst>
+              <a:ext uri="{FF2B5EF4-FFF2-40B4-BE49-F238E27FC236}">
+                <a16:creationId xmlns:a16="http://schemas.microsoft.com/office/drawing/2014/main" id="{A453C512-6DD5-B6F5-66B9-E75E6014876F}"/>
+              </a:ext>
+            </a:extLst>
+          </p:cNvPr>
+          <p:cNvSpPr txBox="1"/>
+          <p:nvPr/>
+        </p:nvSpPr>
+        <p:spPr>
+          <a:xfrm>
+            <a:off x="4173099" y="2308490"/>
+            <a:ext cx="3925454" cy="369332"/>
+          </a:xfrm>
+          <a:prstGeom prst="rect">
+            <a:avLst/>
+          </a:prstGeom>
+          <a:noFill/>
+        </p:spPr>
+        <p:txBody>
+          <a:bodyPr wrap="square" rtlCol="0">
+            <a:spAutoFit/>
+          </a:bodyPr>
+          <a:lstStyle/>
+          <a:p>
+            <a:pPr algn="ctr"/>
+            <a:r>
+              <a:rPr lang="en-US" b="1" u="sng" noProof="1"/>
+              <a:t>SMILES → Morgan Fingerprints</a:t>
+            </a:r>
+          </a:p>
+        </p:txBody>
+      </p:sp>
+      <p:sp>
+        <p:nvSpPr>
+          <p:cNvPr id="31" name="CuadroTexto 30">
+            <a:extLst>
+              <a:ext uri="{FF2B5EF4-FFF2-40B4-BE49-F238E27FC236}">
+                <a16:creationId xmlns:a16="http://schemas.microsoft.com/office/drawing/2014/main" id="{5F57696A-FD26-5FFD-D1B6-9AC79ADAE2CC}"/>
+              </a:ext>
+            </a:extLst>
+          </p:cNvPr>
+          <p:cNvSpPr txBox="1"/>
+          <p:nvPr/>
+        </p:nvSpPr>
+        <p:spPr>
+          <a:xfrm>
+            <a:off x="6642484" y="1444819"/>
+            <a:ext cx="3114675" cy="523220"/>
+          </a:xfrm>
+          <a:prstGeom prst="rect">
+            <a:avLst/>
+          </a:prstGeom>
+          <a:noFill/>
+        </p:spPr>
+        <p:txBody>
+          <a:bodyPr wrap="square" rtlCol="0">
+            <a:spAutoFit/>
+          </a:bodyPr>
+          <a:lstStyle/>
+          <a:p>
+            <a:pPr algn="ctr"/>
+            <a:r>
+              <a:rPr lang="en-US" sz="1400" b="1" noProof="1">
+                <a:latin typeface="Calibri" panose="020F0502020204030204" pitchFamily="34" charset="0"/>
+                <a:ea typeface="Calibri" panose="020F0502020204030204" pitchFamily="34" charset="0"/>
+                <a:cs typeface="Calibri" panose="020F0502020204030204" pitchFamily="34" charset="0"/>
+              </a:rPr>
+              <a:t>SMILES </a:t>
+            </a:r>
+          </a:p>
+          <a:p>
+            <a:pPr algn="ctr"/>
+            <a:r>
+              <a:rPr lang="en-US" sz="1400" b="1" noProof="1">
+                <a:latin typeface="Calibri" panose="020F0502020204030204" pitchFamily="34" charset="0"/>
+                <a:ea typeface="Calibri" panose="020F0502020204030204" pitchFamily="34" charset="0"/>
+                <a:cs typeface="Calibri" panose="020F0502020204030204" pitchFamily="34" charset="0"/>
+              </a:rPr>
+              <a:t>(linear textual representation)</a:t>
+            </a:r>
+          </a:p>
+        </p:txBody>
+      </p:sp>
+      <p:pic>
+        <p:nvPicPr>
+          <p:cNvPr id="34" name="Imagen 33">
+            <a:extLst>
+              <a:ext uri="{FF2B5EF4-FFF2-40B4-BE49-F238E27FC236}">
+                <a16:creationId xmlns:a16="http://schemas.microsoft.com/office/drawing/2014/main" id="{6D4E31DC-68BC-C61C-612B-EBBAD7BA977F}"/>
+              </a:ext>
+            </a:extLst>
+          </p:cNvPr>
+          <p:cNvPicPr>
+            <a:picLocks noChangeAspect="1"/>
+          </p:cNvPicPr>
+          <p:nvPr/>
+        </p:nvPicPr>
+        <p:blipFill>
+          <a:blip r:embed="rId4"/>
+          <a:stretch>
+            <a:fillRect/>
+          </a:stretch>
+        </p:blipFill>
+        <p:spPr>
+          <a:xfrm>
+            <a:off x="273947" y="2889124"/>
+            <a:ext cx="2785700" cy="1260721"/>
+          </a:xfrm>
+          <a:prstGeom prst="rect">
+            <a:avLst/>
+          </a:prstGeom>
+        </p:spPr>
+      </p:pic>
+      <p:sp>
+        <p:nvSpPr>
+          <p:cNvPr id="36" name="Elipse 35">
+            <a:extLst>
+              <a:ext uri="{FF2B5EF4-FFF2-40B4-BE49-F238E27FC236}">
+                <a16:creationId xmlns:a16="http://schemas.microsoft.com/office/drawing/2014/main" id="{EF4DF477-0A16-CC26-E35B-C7330C3D7F63}"/>
+              </a:ext>
+            </a:extLst>
+          </p:cNvPr>
+          <p:cNvSpPr/>
+          <p:nvPr/>
+        </p:nvSpPr>
+        <p:spPr>
+          <a:xfrm>
+            <a:off x="1836746" y="2752145"/>
+            <a:ext cx="1154104" cy="1260723"/>
+          </a:xfrm>
+          <a:prstGeom prst="ellipse">
+            <a:avLst/>
+          </a:prstGeom>
+          <a:noFill/>
+          <a:ln>
+            <a:solidFill>
+              <a:schemeClr val="accent5">
+                <a:lumMod val="75000"/>
+              </a:schemeClr>
+            </a:solidFill>
+          </a:ln>
+        </p:spPr>
+        <p:style>
+          <a:lnRef idx="2">
+            <a:schemeClr val="accent1">
+              <a:shade val="15000"/>
+            </a:schemeClr>
+          </a:lnRef>
+          <a:fillRef idx="1">
+            <a:schemeClr val="accent1"/>
+          </a:fillRef>
+          <a:effectRef idx="0">
+            <a:schemeClr val="accent1"/>
+          </a:effectRef>
+          <a:fontRef idx="minor">
+            <a:schemeClr val="lt1"/>
+          </a:fontRef>
+        </p:style>
+        <p:txBody>
+          <a:bodyPr rtlCol="0" anchor="ctr"/>
+          <a:lstStyle/>
+          <a:p>
+            <a:pPr algn="ctr"/>
+            <a:endParaRPr lang="en-US" noProof="1"/>
+          </a:p>
+        </p:txBody>
+      </p:sp>
+      <p:sp>
+        <p:nvSpPr>
+          <p:cNvPr id="37" name="CuadroTexto 36">
+            <a:extLst>
+              <a:ext uri="{FF2B5EF4-FFF2-40B4-BE49-F238E27FC236}">
+                <a16:creationId xmlns:a16="http://schemas.microsoft.com/office/drawing/2014/main" id="{F9C1D32E-085C-F5FB-357B-F2FC78D633CC}"/>
+              </a:ext>
+            </a:extLst>
+          </p:cNvPr>
+          <p:cNvSpPr txBox="1"/>
+          <p:nvPr/>
+        </p:nvSpPr>
+        <p:spPr>
+          <a:xfrm>
+            <a:off x="401216" y="2600903"/>
+            <a:ext cx="1382189" cy="261610"/>
+          </a:xfrm>
+          <a:prstGeom prst="rect">
+            <a:avLst/>
+          </a:prstGeom>
+          <a:noFill/>
+        </p:spPr>
+        <p:txBody>
+          <a:bodyPr wrap="square" rtlCol="0">
+            <a:spAutoFit/>
+          </a:bodyPr>
+          <a:lstStyle/>
+          <a:p>
+            <a:pPr algn="ctr"/>
+            <a:r>
+              <a:rPr lang="en-US" sz="1100" b="1" noProof="1">
+                <a:latin typeface="Calibri" panose="020F0502020204030204" pitchFamily="34" charset="0"/>
+                <a:ea typeface="Calibri" panose="020F0502020204030204" pitchFamily="34" charset="0"/>
+                <a:cs typeface="Calibri" panose="020F0502020204030204" pitchFamily="34" charset="0"/>
+              </a:rPr>
+              <a:t>1. Select </a:t>
+            </a:r>
+            <a:r>
+              <a:rPr lang="en-US" sz="1100" b="1" noProof="1">
+                <a:solidFill>
+                  <a:srgbClr val="FF00FF"/>
+                </a:solidFill>
+                <a:latin typeface="Calibri" panose="020F0502020204030204" pitchFamily="34" charset="0"/>
+                <a:ea typeface="Calibri" panose="020F0502020204030204" pitchFamily="34" charset="0"/>
+                <a:cs typeface="Calibri" panose="020F0502020204030204" pitchFamily="34" charset="0"/>
+              </a:rPr>
+              <a:t>atom</a:t>
+            </a:r>
+          </a:p>
+        </p:txBody>
+      </p:sp>
+      <p:sp>
+        <p:nvSpPr>
+          <p:cNvPr id="38" name="CuadroTexto 37">
+            <a:extLst>
+              <a:ext uri="{FF2B5EF4-FFF2-40B4-BE49-F238E27FC236}">
+                <a16:creationId xmlns:a16="http://schemas.microsoft.com/office/drawing/2014/main" id="{82FC17F2-5F79-56AD-D857-0B1BCA0061DA}"/>
+              </a:ext>
+            </a:extLst>
+          </p:cNvPr>
+          <p:cNvSpPr txBox="1"/>
+          <p:nvPr/>
+        </p:nvSpPr>
+        <p:spPr>
+          <a:xfrm>
+            <a:off x="2862488" y="2726275"/>
+            <a:ext cx="1131951" cy="600164"/>
+          </a:xfrm>
+          <a:prstGeom prst="rect">
+            <a:avLst/>
+          </a:prstGeom>
+          <a:noFill/>
+        </p:spPr>
+        <p:txBody>
+          <a:bodyPr wrap="square" rtlCol="0">
+            <a:spAutoFit/>
+          </a:bodyPr>
+          <a:lstStyle/>
+          <a:p>
+            <a:pPr algn="ctr"/>
+            <a:r>
+              <a:rPr lang="en-US" sz="1100" b="1" noProof="1">
+                <a:latin typeface="Calibri" panose="020F0502020204030204" pitchFamily="34" charset="0"/>
+                <a:ea typeface="Calibri" panose="020F0502020204030204" pitchFamily="34" charset="0"/>
+                <a:cs typeface="Calibri" panose="020F0502020204030204" pitchFamily="34" charset="0"/>
+              </a:rPr>
+              <a:t>2. Check substructures in </a:t>
+            </a:r>
+            <a:r>
+              <a:rPr lang="en-US" sz="1100" b="1" noProof="1">
+                <a:solidFill>
+                  <a:schemeClr val="accent5">
+                    <a:lumMod val="75000"/>
+                  </a:schemeClr>
+                </a:solidFill>
+                <a:latin typeface="Calibri" panose="020F0502020204030204" pitchFamily="34" charset="0"/>
+                <a:ea typeface="Calibri" panose="020F0502020204030204" pitchFamily="34" charset="0"/>
+                <a:cs typeface="Calibri" panose="020F0502020204030204" pitchFamily="34" charset="0"/>
+              </a:rPr>
+              <a:t>Radius = 3</a:t>
+            </a:r>
+          </a:p>
+        </p:txBody>
+      </p:sp>
+      <p:sp>
+        <p:nvSpPr>
+          <p:cNvPr id="42" name="CuadroTexto 41">
+            <a:extLst>
+              <a:ext uri="{FF2B5EF4-FFF2-40B4-BE49-F238E27FC236}">
+                <a16:creationId xmlns:a16="http://schemas.microsoft.com/office/drawing/2014/main" id="{3A9B3E78-660F-6A75-44F7-4FCC95B12EFF}"/>
+              </a:ext>
+            </a:extLst>
+          </p:cNvPr>
+          <p:cNvSpPr txBox="1"/>
+          <p:nvPr/>
+        </p:nvSpPr>
+        <p:spPr>
+          <a:xfrm>
+            <a:off x="3767172" y="3290060"/>
+            <a:ext cx="1420035" cy="261610"/>
+          </a:xfrm>
+          <a:prstGeom prst="rect">
+            <a:avLst/>
+          </a:prstGeom>
+          <a:noFill/>
+        </p:spPr>
+        <p:txBody>
+          <a:bodyPr wrap="square" rtlCol="0">
+            <a:spAutoFit/>
+          </a:bodyPr>
+          <a:lstStyle/>
+          <a:p>
+            <a:pPr algn="ctr"/>
+            <a:r>
+              <a:rPr lang="en-US" sz="1100" b="1" noProof="1">
+                <a:latin typeface="Calibri" panose="020F0502020204030204" pitchFamily="34" charset="0"/>
+                <a:ea typeface="Calibri" panose="020F0502020204030204" pitchFamily="34" charset="0"/>
+                <a:cs typeface="Calibri" panose="020F0502020204030204" pitchFamily="34" charset="0"/>
+              </a:rPr>
+              <a:t>4. Hashing algorithm</a:t>
+            </a:r>
+          </a:p>
+        </p:txBody>
+      </p:sp>
+      <p:cxnSp>
+        <p:nvCxnSpPr>
+          <p:cNvPr id="43" name="Conector recto de flecha 42">
+            <a:extLst>
+              <a:ext uri="{FF2B5EF4-FFF2-40B4-BE49-F238E27FC236}">
+                <a16:creationId xmlns:a16="http://schemas.microsoft.com/office/drawing/2014/main" id="{637A5816-08BD-1C14-DF30-52C557AAF55E}"/>
+              </a:ext>
+            </a:extLst>
+          </p:cNvPr>
+          <p:cNvCxnSpPr>
+            <a:cxnSpLocks/>
+          </p:cNvCxnSpPr>
+          <p:nvPr/>
+        </p:nvCxnSpPr>
+        <p:spPr>
+          <a:xfrm>
+            <a:off x="3890031" y="3536279"/>
+            <a:ext cx="1261654" cy="0"/>
+          </a:xfrm>
+          <a:prstGeom prst="straightConnector1">
+            <a:avLst/>
+          </a:prstGeom>
+          <a:ln>
+            <a:tailEnd type="triangle"/>
+          </a:ln>
+        </p:spPr>
+        <p:style>
+          <a:lnRef idx="2">
+            <a:schemeClr val="dk1"/>
+          </a:lnRef>
+          <a:fillRef idx="0">
+            <a:schemeClr val="dk1"/>
+          </a:fillRef>
+          <a:effectRef idx="1">
+            <a:schemeClr val="dk1"/>
+          </a:effectRef>
+          <a:fontRef idx="minor">
+            <a:schemeClr val="tx1"/>
+          </a:fontRef>
+        </p:style>
+      </p:cxnSp>
+      <p:sp>
+        <p:nvSpPr>
+          <p:cNvPr id="1039" name="CuadroTexto 1038">
+            <a:extLst>
+              <a:ext uri="{FF2B5EF4-FFF2-40B4-BE49-F238E27FC236}">
+                <a16:creationId xmlns:a16="http://schemas.microsoft.com/office/drawing/2014/main" id="{C909B4C3-DB09-2160-3E68-DFA47E48305B}"/>
+              </a:ext>
+            </a:extLst>
+          </p:cNvPr>
+          <p:cNvSpPr txBox="1"/>
+          <p:nvPr/>
+        </p:nvSpPr>
+        <p:spPr>
+          <a:xfrm>
+            <a:off x="1851334" y="4007179"/>
+            <a:ext cx="1379066" cy="430887"/>
+          </a:xfrm>
+          <a:prstGeom prst="rect">
+            <a:avLst/>
+          </a:prstGeom>
+          <a:noFill/>
+        </p:spPr>
+        <p:txBody>
+          <a:bodyPr wrap="square" rtlCol="0">
+            <a:spAutoFit/>
+          </a:bodyPr>
+          <a:lstStyle/>
+          <a:p>
+            <a:pPr algn="ctr"/>
+            <a:r>
+              <a:rPr lang="en-US" sz="1100" b="1" noProof="1">
+                <a:latin typeface="Calibri" panose="020F0502020204030204" pitchFamily="34" charset="0"/>
+                <a:ea typeface="Calibri" panose="020F0502020204030204" pitchFamily="34" charset="0"/>
+                <a:cs typeface="Calibri" panose="020F0502020204030204" pitchFamily="34" charset="0"/>
+              </a:rPr>
+              <a:t>3. Iterative process for each atom</a:t>
+            </a:r>
+          </a:p>
+        </p:txBody>
+      </p:sp>
+      <p:sp>
+        <p:nvSpPr>
+          <p:cNvPr id="1051" name="CuadroTexto 1050">
+            <a:extLst>
+              <a:ext uri="{FF2B5EF4-FFF2-40B4-BE49-F238E27FC236}">
+                <a16:creationId xmlns:a16="http://schemas.microsoft.com/office/drawing/2014/main" id="{422AB256-2016-3AD6-E9F5-7784C184CDEB}"/>
+              </a:ext>
+            </a:extLst>
+          </p:cNvPr>
+          <p:cNvSpPr txBox="1"/>
+          <p:nvPr/>
+        </p:nvSpPr>
+        <p:spPr>
+          <a:xfrm>
+            <a:off x="6542871" y="4111178"/>
+            <a:ext cx="3319564" cy="261610"/>
+          </a:xfrm>
+          <a:prstGeom prst="rect">
+            <a:avLst/>
+          </a:prstGeom>
+          <a:solidFill>
+            <a:srgbClr val="9A9A9A"/>
+          </a:solidFill>
+          <a:ln>
+            <a:solidFill>
+              <a:schemeClr val="tx1"/>
+            </a:solidFill>
+          </a:ln>
+        </p:spPr>
+        <p:txBody>
+          <a:bodyPr wrap="square" rtlCol="0">
+            <a:spAutoFit/>
+          </a:bodyPr>
+          <a:lstStyle/>
+          <a:p>
+            <a:pPr algn="ctr"/>
+            <a:r>
+              <a:rPr lang="en-US" sz="1100" b="1" noProof="1">
+                <a:latin typeface="Calibri" panose="020F0502020204030204" pitchFamily="34" charset="0"/>
+                <a:ea typeface="Calibri" panose="020F0502020204030204" pitchFamily="34" charset="0"/>
+                <a:cs typeface="Calibri" panose="020F0502020204030204" pitchFamily="34" charset="0"/>
+              </a:rPr>
+              <a:t>ECFP6 = […, 0, </a:t>
+            </a:r>
+            <a:r>
+              <a:rPr lang="en-US" sz="1100" b="1" noProof="1">
+                <a:solidFill>
+                  <a:srgbClr val="FF66B3"/>
+                </a:solidFill>
+                <a:latin typeface="Calibri" panose="020F0502020204030204" pitchFamily="34" charset="0"/>
+                <a:ea typeface="Calibri" panose="020F0502020204030204" pitchFamily="34" charset="0"/>
+                <a:cs typeface="Calibri" panose="020F0502020204030204" pitchFamily="34" charset="0"/>
+              </a:rPr>
+              <a:t>0</a:t>
+            </a:r>
+            <a:r>
+              <a:rPr lang="en-US" sz="1100" b="1" noProof="1">
+                <a:latin typeface="Calibri" panose="020F0502020204030204" pitchFamily="34" charset="0"/>
+                <a:ea typeface="Calibri" panose="020F0502020204030204" pitchFamily="34" charset="0"/>
+                <a:cs typeface="Calibri" panose="020F0502020204030204" pitchFamily="34" charset="0"/>
+              </a:rPr>
+              <a:t>, 0, 0, </a:t>
+            </a:r>
+            <a:r>
+              <a:rPr lang="en-US" sz="1100" b="1" noProof="1">
+                <a:solidFill>
+                  <a:srgbClr val="FF9A25"/>
+                </a:solidFill>
+                <a:latin typeface="Calibri" panose="020F0502020204030204" pitchFamily="34" charset="0"/>
+                <a:ea typeface="Calibri" panose="020F0502020204030204" pitchFamily="34" charset="0"/>
+                <a:cs typeface="Calibri" panose="020F0502020204030204" pitchFamily="34" charset="0"/>
+              </a:rPr>
+              <a:t>4</a:t>
+            </a:r>
+            <a:r>
+              <a:rPr lang="en-US" sz="1100" b="1" noProof="1">
+                <a:latin typeface="Calibri" panose="020F0502020204030204" pitchFamily="34" charset="0"/>
+                <a:ea typeface="Calibri" panose="020F0502020204030204" pitchFamily="34" charset="0"/>
+                <a:cs typeface="Calibri" panose="020F0502020204030204" pitchFamily="34" charset="0"/>
+              </a:rPr>
+              <a:t>, 0, 0, </a:t>
+            </a:r>
+            <a:r>
+              <a:rPr lang="en-US" sz="1100" b="1" noProof="1">
+                <a:solidFill>
+                  <a:srgbClr val="FFFF00"/>
+                </a:solidFill>
+                <a:latin typeface="Calibri" panose="020F0502020204030204" pitchFamily="34" charset="0"/>
+                <a:ea typeface="Calibri" panose="020F0502020204030204" pitchFamily="34" charset="0"/>
+                <a:cs typeface="Calibri" panose="020F0502020204030204" pitchFamily="34" charset="0"/>
+              </a:rPr>
+              <a:t>1</a:t>
+            </a:r>
+            <a:r>
+              <a:rPr lang="en-US" sz="1100" b="1" noProof="1">
+                <a:latin typeface="Calibri" panose="020F0502020204030204" pitchFamily="34" charset="0"/>
+                <a:ea typeface="Calibri" panose="020F0502020204030204" pitchFamily="34" charset="0"/>
+                <a:cs typeface="Calibri" panose="020F0502020204030204" pitchFamily="34" charset="0"/>
+              </a:rPr>
+              <a:t>, 0, 0, </a:t>
+            </a:r>
+            <a:r>
+              <a:rPr lang="en-US" sz="1100" b="1" noProof="1">
+                <a:solidFill>
+                  <a:srgbClr val="8CC253"/>
+                </a:solidFill>
+                <a:latin typeface="Calibri" panose="020F0502020204030204" pitchFamily="34" charset="0"/>
+                <a:ea typeface="Calibri" panose="020F0502020204030204" pitchFamily="34" charset="0"/>
+                <a:cs typeface="Calibri" panose="020F0502020204030204" pitchFamily="34" charset="0"/>
+              </a:rPr>
+              <a:t>1</a:t>
+            </a:r>
+            <a:r>
+              <a:rPr lang="en-US" sz="1100" b="1" noProof="1">
+                <a:latin typeface="Calibri" panose="020F0502020204030204" pitchFamily="34" charset="0"/>
+                <a:ea typeface="Calibri" panose="020F0502020204030204" pitchFamily="34" charset="0"/>
+                <a:cs typeface="Calibri" panose="020F0502020204030204" pitchFamily="34" charset="0"/>
+              </a:rPr>
+              <a:t>, 0, 0, </a:t>
+            </a:r>
+            <a:r>
+              <a:rPr lang="en-US" sz="1100" b="1" noProof="1">
+                <a:solidFill>
+                  <a:srgbClr val="00BBD3"/>
+                </a:solidFill>
+                <a:latin typeface="Calibri" panose="020F0502020204030204" pitchFamily="34" charset="0"/>
+                <a:ea typeface="Calibri" panose="020F0502020204030204" pitchFamily="34" charset="0"/>
+                <a:cs typeface="Calibri" panose="020F0502020204030204" pitchFamily="34" charset="0"/>
+              </a:rPr>
+              <a:t>0</a:t>
+            </a:r>
+            <a:r>
+              <a:rPr lang="en-US" sz="1100" b="1" noProof="1">
+                <a:latin typeface="Calibri" panose="020F0502020204030204" pitchFamily="34" charset="0"/>
+                <a:ea typeface="Calibri" panose="020F0502020204030204" pitchFamily="34" charset="0"/>
+                <a:cs typeface="Calibri" panose="020F0502020204030204" pitchFamily="34" charset="0"/>
+              </a:rPr>
+              <a:t>, 0, 0, ...]</a:t>
+            </a:r>
+          </a:p>
+        </p:txBody>
+      </p:sp>
+      <p:sp>
+        <p:nvSpPr>
+          <p:cNvPr id="1052" name="CuadroTexto 1051">
+            <a:extLst>
+              <a:ext uri="{FF2B5EF4-FFF2-40B4-BE49-F238E27FC236}">
+                <a16:creationId xmlns:a16="http://schemas.microsoft.com/office/drawing/2014/main" id="{08BAA5DD-8691-780C-4BEB-2858763872D6}"/>
+              </a:ext>
+            </a:extLst>
+          </p:cNvPr>
+          <p:cNvSpPr txBox="1"/>
+          <p:nvPr/>
+        </p:nvSpPr>
+        <p:spPr>
+          <a:xfrm>
+            <a:off x="10517978" y="2838853"/>
+            <a:ext cx="1936418" cy="769441"/>
+          </a:xfrm>
+          <a:prstGeom prst="rect">
+            <a:avLst/>
+          </a:prstGeom>
+          <a:noFill/>
+        </p:spPr>
+        <p:txBody>
+          <a:bodyPr wrap="square" rtlCol="0">
+            <a:spAutoFit/>
+          </a:bodyPr>
+          <a:lstStyle/>
+          <a:p>
+            <a:r>
+              <a:rPr lang="en-US" sz="1100" b="1" noProof="1">
+                <a:latin typeface="Calibri" panose="020F0502020204030204" pitchFamily="34" charset="0"/>
+                <a:ea typeface="Calibri" panose="020F0502020204030204" pitchFamily="34" charset="0"/>
+                <a:cs typeface="Calibri" panose="020F0502020204030204" pitchFamily="34" charset="0"/>
+              </a:rPr>
+              <a:t>• Fixed length (2048)</a:t>
+            </a:r>
+          </a:p>
+          <a:p>
+            <a:r>
+              <a:rPr lang="en-US" sz="1100" b="1" noProof="1">
+                <a:latin typeface="Calibri" panose="020F0502020204030204" pitchFamily="34" charset="0"/>
+                <a:ea typeface="Calibri" panose="020F0502020204030204" pitchFamily="34" charset="0"/>
+                <a:cs typeface="Calibri" panose="020F0502020204030204" pitchFamily="34" charset="0"/>
+              </a:rPr>
+              <a:t>• Interpretable </a:t>
+            </a:r>
+          </a:p>
+          <a:p>
+            <a:r>
+              <a:rPr lang="en-US" sz="1100" b="1" noProof="1">
+                <a:latin typeface="Calibri" panose="020F0502020204030204" pitchFamily="34" charset="0"/>
+                <a:ea typeface="Calibri" panose="020F0502020204030204" pitchFamily="34" charset="0"/>
+                <a:cs typeface="Calibri" panose="020F0502020204030204" pitchFamily="34" charset="0"/>
+              </a:rPr>
+              <a:t>• Sparse (Mostly 0s)</a:t>
+            </a:r>
+          </a:p>
+          <a:p>
+            <a:r>
+              <a:rPr lang="en-US" sz="1100" b="1" noProof="1">
+                <a:latin typeface="Calibri" panose="020F0502020204030204" pitchFamily="34" charset="0"/>
+                <a:ea typeface="Calibri" panose="020F0502020204030204" pitchFamily="34" charset="0"/>
+                <a:cs typeface="Calibri" panose="020F0502020204030204" pitchFamily="34" charset="0"/>
+              </a:rPr>
+              <a:t>• Discrete (Integers only)</a:t>
+            </a:r>
+          </a:p>
+        </p:txBody>
+      </p:sp>
+      <p:sp>
+        <p:nvSpPr>
+          <p:cNvPr id="1054" name="CuadroTexto 1053">
+            <a:extLst>
+              <a:ext uri="{FF2B5EF4-FFF2-40B4-BE49-F238E27FC236}">
+                <a16:creationId xmlns:a16="http://schemas.microsoft.com/office/drawing/2014/main" id="{0C7B6728-3D0B-3871-3716-D024D038983F}"/>
+              </a:ext>
+            </a:extLst>
+          </p:cNvPr>
+          <p:cNvSpPr txBox="1"/>
+          <p:nvPr/>
+        </p:nvSpPr>
+        <p:spPr>
+          <a:xfrm>
+            <a:off x="5086351" y="3804850"/>
+            <a:ext cx="318342" cy="369332"/>
+          </a:xfrm>
+          <a:prstGeom prst="rect">
+            <a:avLst/>
+          </a:prstGeom>
+          <a:noFill/>
+        </p:spPr>
+        <p:txBody>
+          <a:bodyPr wrap="square" rtlCol="0">
+            <a:spAutoFit/>
+          </a:bodyPr>
+          <a:lstStyle/>
+          <a:p>
+            <a:r>
+              <a:rPr lang="en-US" noProof="1"/>
+              <a:t>…</a:t>
+            </a:r>
+          </a:p>
+        </p:txBody>
+      </p:sp>
+      <p:sp>
+        <p:nvSpPr>
+          <p:cNvPr id="1055" name="CuadroTexto 1054">
+            <a:extLst>
+              <a:ext uri="{FF2B5EF4-FFF2-40B4-BE49-F238E27FC236}">
+                <a16:creationId xmlns:a16="http://schemas.microsoft.com/office/drawing/2014/main" id="{F020B35C-4ED7-4D4A-2245-9DE7728CCCD7}"/>
+              </a:ext>
+            </a:extLst>
+          </p:cNvPr>
+          <p:cNvSpPr txBox="1"/>
+          <p:nvPr/>
+        </p:nvSpPr>
+        <p:spPr>
+          <a:xfrm>
+            <a:off x="10722401" y="3804850"/>
+            <a:ext cx="318342" cy="369332"/>
+          </a:xfrm>
+          <a:prstGeom prst="rect">
+            <a:avLst/>
+          </a:prstGeom>
+          <a:noFill/>
+        </p:spPr>
+        <p:txBody>
+          <a:bodyPr wrap="square" rtlCol="0">
+            <a:spAutoFit/>
+          </a:bodyPr>
+          <a:lstStyle/>
+          <a:p>
+            <a:r>
+              <a:rPr lang="en-US" noProof="1"/>
+              <a:t>…</a:t>
+            </a:r>
+          </a:p>
+        </p:txBody>
+      </p:sp>
+      <p:sp>
+        <p:nvSpPr>
+          <p:cNvPr id="1057" name="CuadroTexto 1056">
+            <a:extLst>
+              <a:ext uri="{FF2B5EF4-FFF2-40B4-BE49-F238E27FC236}">
+                <a16:creationId xmlns:a16="http://schemas.microsoft.com/office/drawing/2014/main" id="{74DC6ABE-02ED-E9C0-7DEA-7056450D0938}"/>
+              </a:ext>
+            </a:extLst>
+          </p:cNvPr>
+          <p:cNvSpPr txBox="1"/>
+          <p:nvPr/>
+        </p:nvSpPr>
+        <p:spPr>
+          <a:xfrm>
+            <a:off x="4151561" y="4601513"/>
+            <a:ext cx="3925454" cy="369332"/>
+          </a:xfrm>
+          <a:prstGeom prst="rect">
+            <a:avLst/>
+          </a:prstGeom>
+          <a:noFill/>
+        </p:spPr>
+        <p:txBody>
+          <a:bodyPr wrap="square" rtlCol="0">
+            <a:spAutoFit/>
+          </a:bodyPr>
+          <a:lstStyle/>
+          <a:p>
+            <a:pPr algn="ctr"/>
+            <a:r>
+              <a:rPr lang="en-US" b="1" u="sng" noProof="1"/>
+              <a:t>SMILES → Neural Embedding</a:t>
+            </a:r>
+          </a:p>
+        </p:txBody>
+      </p:sp>
+      <p:grpSp>
+        <p:nvGrpSpPr>
+          <p:cNvPr id="11" name="Grupo 10">
+            <a:extLst>
+              <a:ext uri="{FF2B5EF4-FFF2-40B4-BE49-F238E27FC236}">
+                <a16:creationId xmlns:a16="http://schemas.microsoft.com/office/drawing/2014/main" id="{6F03835C-1AE9-A30F-2565-A76FABE9F554}"/>
+              </a:ext>
+            </a:extLst>
+          </p:cNvPr>
+          <p:cNvGrpSpPr/>
+          <p:nvPr/>
+        </p:nvGrpSpPr>
+        <p:grpSpPr>
+          <a:xfrm>
+            <a:off x="519794" y="5130923"/>
+            <a:ext cx="1665429" cy="1225578"/>
+            <a:chOff x="392333" y="5187995"/>
+            <a:chExt cx="1665429" cy="1225578"/>
+          </a:xfrm>
+        </p:grpSpPr>
+        <p:pic>
+          <p:nvPicPr>
+            <p:cNvPr id="8" name="Imagen 7">
+              <a:extLst>
+                <a:ext uri="{FF2B5EF4-FFF2-40B4-BE49-F238E27FC236}">
+                  <a16:creationId xmlns:a16="http://schemas.microsoft.com/office/drawing/2014/main" id="{7133E526-6554-A0B4-9013-1420CE0C4DCB}"/>
+                </a:ext>
+              </a:extLst>
+            </p:cNvPr>
+            <p:cNvPicPr>
+              <a:picLocks noChangeAspect="1"/>
+            </p:cNvPicPr>
+            <p:nvPr/>
+          </p:nvPicPr>
+          <p:blipFill>
+            <a:blip r:embed="rId5"/>
+            <a:stretch>
+              <a:fillRect/>
+            </a:stretch>
+          </p:blipFill>
+          <p:spPr>
+            <a:xfrm>
+              <a:off x="442353" y="5238273"/>
+              <a:ext cx="1565388" cy="1125022"/>
+            </a:xfrm>
+            <a:prstGeom prst="rect">
+              <a:avLst/>
+            </a:prstGeom>
+          </p:spPr>
+        </p:pic>
+        <p:sp>
+          <p:nvSpPr>
+            <p:cNvPr id="4" name="Rectángulo: esquinas redondeadas 3">
+              <a:extLst>
+                <a:ext uri="{FF2B5EF4-FFF2-40B4-BE49-F238E27FC236}">
+                  <a16:creationId xmlns:a16="http://schemas.microsoft.com/office/drawing/2014/main" id="{666C8195-F7A6-7FB8-0417-ED469BE7C332}"/>
+                </a:ext>
+              </a:extLst>
+            </p:cNvPr>
+            <p:cNvSpPr/>
+            <p:nvPr/>
+          </p:nvSpPr>
+          <p:spPr>
+            <a:xfrm>
+              <a:off x="392333" y="5187995"/>
+              <a:ext cx="1665429" cy="1225578"/>
+            </a:xfrm>
+            <a:prstGeom prst="roundRect">
+              <a:avLst/>
+            </a:prstGeom>
+            <a:noFill/>
+            <a:ln>
+              <a:solidFill>
+                <a:schemeClr val="tx1"/>
+              </a:solidFill>
+            </a:ln>
+          </p:spPr>
+          <p:style>
+            <a:lnRef idx="2">
+              <a:schemeClr val="accent1">
+                <a:shade val="15000"/>
+              </a:schemeClr>
+            </a:lnRef>
+            <a:fillRef idx="1">
+              <a:schemeClr val="accent1"/>
+            </a:fillRef>
+            <a:effectRef idx="0">
+              <a:schemeClr val="accent1"/>
+            </a:effectRef>
+            <a:fontRef idx="minor">
+              <a:schemeClr val="lt1"/>
+            </a:fontRef>
+          </p:style>
+          <p:txBody>
+            <a:bodyPr rtlCol="0" anchor="ctr"/>
+            <a:lstStyle/>
+            <a:p>
+              <a:pPr algn="ctr"/>
+              <a:endParaRPr lang="en-US" noProof="1"/>
+            </a:p>
+          </p:txBody>
+        </p:sp>
+      </p:grpSp>
+      <p:sp>
+        <p:nvSpPr>
+          <p:cNvPr id="6" name="CuadroTexto 5">
+            <a:extLst>
+              <a:ext uri="{FF2B5EF4-FFF2-40B4-BE49-F238E27FC236}">
+                <a16:creationId xmlns:a16="http://schemas.microsoft.com/office/drawing/2014/main" id="{A3593480-D2E9-9E32-3655-C4B92FBC82D1}"/>
+              </a:ext>
+            </a:extLst>
+          </p:cNvPr>
+          <p:cNvSpPr txBox="1"/>
+          <p:nvPr/>
+        </p:nvSpPr>
+        <p:spPr>
+          <a:xfrm>
+            <a:off x="721681" y="6319000"/>
+            <a:ext cx="1261654" cy="261610"/>
+          </a:xfrm>
+          <a:prstGeom prst="rect">
+            <a:avLst/>
+          </a:prstGeom>
+          <a:noFill/>
+        </p:spPr>
+        <p:txBody>
+          <a:bodyPr wrap="square" rtlCol="0">
+            <a:spAutoFit/>
+          </a:bodyPr>
+          <a:lstStyle/>
+          <a:p>
+            <a:pPr algn="ctr"/>
+            <a:r>
+              <a:rPr lang="en-US" sz="1100" b="1" noProof="1">
+                <a:latin typeface="Calibri" panose="020F0502020204030204" pitchFamily="34" charset="0"/>
+                <a:ea typeface="Calibri" panose="020F0502020204030204" pitchFamily="34" charset="0"/>
+                <a:cs typeface="Calibri" panose="020F0502020204030204" pitchFamily="34" charset="0"/>
+              </a:rPr>
+              <a:t>Large chemical db</a:t>
+            </a:r>
+          </a:p>
+        </p:txBody>
+      </p:sp>
+      <p:sp>
+        <p:nvSpPr>
+          <p:cNvPr id="12" name="CuadroTexto 11">
+            <a:extLst>
+              <a:ext uri="{FF2B5EF4-FFF2-40B4-BE49-F238E27FC236}">
+                <a16:creationId xmlns:a16="http://schemas.microsoft.com/office/drawing/2014/main" id="{786F06E1-519C-2534-70F3-A9A0C4D8C9E7}"/>
+              </a:ext>
+            </a:extLst>
+          </p:cNvPr>
+          <p:cNvSpPr txBox="1"/>
+          <p:nvPr/>
+        </p:nvSpPr>
+        <p:spPr>
+          <a:xfrm>
+            <a:off x="2221535" y="5402013"/>
+            <a:ext cx="1261654" cy="573940"/>
+          </a:xfrm>
+          <a:prstGeom prst="rect">
+            <a:avLst/>
+          </a:prstGeom>
+          <a:noFill/>
+        </p:spPr>
+        <p:txBody>
+          <a:bodyPr wrap="square" rtlCol="0">
+            <a:spAutoFit/>
+          </a:bodyPr>
+          <a:lstStyle/>
+          <a:p>
+            <a:pPr algn="ctr">
+              <a:lnSpc>
+                <a:spcPct val="150000"/>
+              </a:lnSpc>
+            </a:pPr>
+            <a:r>
+              <a:rPr lang="en-US" sz="1100" b="1" noProof="1">
+                <a:latin typeface="Calibri" panose="020F0502020204030204" pitchFamily="34" charset="0"/>
+                <a:ea typeface="Calibri" panose="020F0502020204030204" pitchFamily="34" charset="0"/>
+                <a:cs typeface="Calibri" panose="020F0502020204030204" pitchFamily="34" charset="0"/>
+              </a:rPr>
+              <a:t>Representation learning</a:t>
+            </a:r>
+          </a:p>
+        </p:txBody>
+      </p:sp>
+      <p:cxnSp>
+        <p:nvCxnSpPr>
+          <p:cNvPr id="14" name="Conector recto de flecha 13">
+            <a:extLst>
+              <a:ext uri="{FF2B5EF4-FFF2-40B4-BE49-F238E27FC236}">
+                <a16:creationId xmlns:a16="http://schemas.microsoft.com/office/drawing/2014/main" id="{D996592F-04BF-1057-63AD-12576F18153D}"/>
+              </a:ext>
+            </a:extLst>
+          </p:cNvPr>
+          <p:cNvCxnSpPr>
+            <a:cxnSpLocks/>
+          </p:cNvCxnSpPr>
+          <p:nvPr/>
+        </p:nvCxnSpPr>
+        <p:spPr>
+          <a:xfrm>
+            <a:off x="2260001" y="5730981"/>
+            <a:ext cx="1261654" cy="0"/>
+          </a:xfrm>
+          <a:prstGeom prst="straightConnector1">
+            <a:avLst/>
+          </a:prstGeom>
+          <a:ln>
+            <a:tailEnd type="triangle"/>
+          </a:ln>
+        </p:spPr>
+        <p:style>
+          <a:lnRef idx="2">
+            <a:schemeClr val="dk1"/>
+          </a:lnRef>
+          <a:fillRef idx="0">
+            <a:schemeClr val="dk1"/>
+          </a:fillRef>
+          <a:effectRef idx="1">
+            <a:schemeClr val="dk1"/>
+          </a:effectRef>
+          <a:fontRef idx="minor">
+            <a:schemeClr val="tx1"/>
+          </a:fontRef>
+        </p:style>
+      </p:cxnSp>
+      <p:grpSp>
+        <p:nvGrpSpPr>
+          <p:cNvPr id="1069" name="Grupo 1068">
+            <a:extLst>
+              <a:ext uri="{FF2B5EF4-FFF2-40B4-BE49-F238E27FC236}">
+                <a16:creationId xmlns:a16="http://schemas.microsoft.com/office/drawing/2014/main" id="{2D803080-2D22-61C3-6B40-4FB518EBAE14}"/>
+              </a:ext>
+            </a:extLst>
+          </p:cNvPr>
+          <p:cNvGrpSpPr/>
+          <p:nvPr/>
+        </p:nvGrpSpPr>
+        <p:grpSpPr>
+          <a:xfrm flipH="1">
+            <a:off x="4725731" y="5737387"/>
+            <a:ext cx="1944183" cy="1391162"/>
+            <a:chOff x="6105440" y="5672578"/>
+            <a:chExt cx="1944183" cy="1391162"/>
+          </a:xfrm>
+        </p:grpSpPr>
+        <p:cxnSp>
+          <p:nvCxnSpPr>
+            <p:cNvPr id="1033" name="Conector recto de flecha 1032">
+              <a:extLst>
+                <a:ext uri="{FF2B5EF4-FFF2-40B4-BE49-F238E27FC236}">
+                  <a16:creationId xmlns:a16="http://schemas.microsoft.com/office/drawing/2014/main" id="{280527BD-4A85-6C64-DA4E-49C5BB26549F}"/>
+                </a:ext>
+              </a:extLst>
+            </p:cNvPr>
+            <p:cNvCxnSpPr>
+              <a:cxnSpLocks/>
+            </p:cNvCxnSpPr>
+            <p:nvPr/>
+          </p:nvCxnSpPr>
+          <p:spPr>
+            <a:xfrm flipH="1">
+              <a:off x="6105440" y="5672578"/>
+              <a:ext cx="1944183" cy="0"/>
+            </a:xfrm>
+            <a:prstGeom prst="straightConnector1">
+              <a:avLst/>
+            </a:prstGeom>
+            <a:ln>
+              <a:tailEnd type="triangle"/>
+            </a:ln>
+          </p:spPr>
+          <p:style>
+            <a:lnRef idx="2">
+              <a:schemeClr val="dk1"/>
+            </a:lnRef>
+            <a:fillRef idx="0">
+              <a:schemeClr val="dk1"/>
+            </a:fillRef>
+            <a:effectRef idx="1">
+              <a:schemeClr val="dk1"/>
+            </a:effectRef>
+            <a:fontRef idx="minor">
+              <a:schemeClr val="tx1"/>
+            </a:fontRef>
+          </p:style>
+        </p:cxnSp>
+        <p:sp>
+          <p:nvSpPr>
+            <p:cNvPr id="1038" name="Arco 1037">
+              <a:extLst>
+                <a:ext uri="{FF2B5EF4-FFF2-40B4-BE49-F238E27FC236}">
+                  <a16:creationId xmlns:a16="http://schemas.microsoft.com/office/drawing/2014/main" id="{CD130AED-A103-0004-10B3-14072A2C77E3}"/>
+                </a:ext>
+              </a:extLst>
+            </p:cNvPr>
+            <p:cNvSpPr/>
+            <p:nvPr/>
+          </p:nvSpPr>
+          <p:spPr>
+            <a:xfrm>
+              <a:off x="6162672" y="5672578"/>
+              <a:ext cx="1504774" cy="1391162"/>
+            </a:xfrm>
+            <a:prstGeom prst="arc">
+              <a:avLst/>
+            </a:prstGeom>
+          </p:spPr>
+          <p:style>
+            <a:lnRef idx="2">
+              <a:schemeClr val="dk1"/>
+            </a:lnRef>
+            <a:fillRef idx="0">
+              <a:schemeClr val="dk1"/>
+            </a:fillRef>
+            <a:effectRef idx="1">
+              <a:schemeClr val="dk1"/>
+            </a:effectRef>
+            <a:fontRef idx="minor">
+              <a:schemeClr val="tx1"/>
+            </a:fontRef>
+          </p:style>
+          <p:txBody>
+            <a:bodyPr rtlCol="0" anchor="ctr"/>
+            <a:lstStyle/>
+            <a:p>
+              <a:pPr algn="ctr"/>
+              <a:endParaRPr lang="en-GB"/>
+            </a:p>
+          </p:txBody>
+        </p:sp>
+      </p:grpSp>
+      <p:sp>
+        <p:nvSpPr>
+          <p:cNvPr id="1041" name="CuadroTexto 1040">
+            <a:extLst>
+              <a:ext uri="{FF2B5EF4-FFF2-40B4-BE49-F238E27FC236}">
+                <a16:creationId xmlns:a16="http://schemas.microsoft.com/office/drawing/2014/main" id="{62B676EA-0B9E-FD55-BD2B-EF0FE755F8A9}"/>
+              </a:ext>
+            </a:extLst>
+          </p:cNvPr>
+          <p:cNvSpPr txBox="1"/>
+          <p:nvPr/>
+        </p:nvSpPr>
+        <p:spPr>
+          <a:xfrm>
+            <a:off x="4470784" y="6366356"/>
+            <a:ext cx="1329941" cy="523220"/>
+          </a:xfrm>
+          <a:prstGeom prst="rect">
+            <a:avLst/>
+          </a:prstGeom>
+          <a:noFill/>
+        </p:spPr>
+        <p:txBody>
+          <a:bodyPr wrap="square" rtlCol="0">
+            <a:spAutoFit/>
+          </a:bodyPr>
+          <a:lstStyle/>
+          <a:p>
+            <a:pPr algn="ctr"/>
+            <a:r>
+              <a:rPr lang="en-US" sz="1400" b="1" noProof="1">
+                <a:solidFill>
+                  <a:srgbClr val="78206E"/>
+                </a:solidFill>
+                <a:latin typeface="Calibri" panose="020F0502020204030204" pitchFamily="34" charset="0"/>
+                <a:ea typeface="Calibri" panose="020F0502020204030204" pitchFamily="34" charset="0"/>
+                <a:cs typeface="Calibri" panose="020F0502020204030204" pitchFamily="34" charset="0"/>
+              </a:rPr>
+              <a:t>Ibuprofen</a:t>
+            </a:r>
+            <a:r>
+              <a:rPr lang="en-US" sz="1400" b="1" noProof="1">
+                <a:latin typeface="Calibri" panose="020F0502020204030204" pitchFamily="34" charset="0"/>
+                <a:ea typeface="Calibri" panose="020F0502020204030204" pitchFamily="34" charset="0"/>
+                <a:cs typeface="Calibri" panose="020F0502020204030204" pitchFamily="34" charset="0"/>
+              </a:rPr>
+              <a:t> SMILES</a:t>
+            </a:r>
+          </a:p>
+        </p:txBody>
+      </p:sp>
+      <mc:AlternateContent xmlns:mc="http://schemas.openxmlformats.org/markup-compatibility/2006" xmlns:a14="http://schemas.microsoft.com/office/drawing/2010/main">
+        <mc:Choice Requires="a14">
+          <p:sp>
+            <p:nvSpPr>
+              <p:cNvPr id="1059" name="CuadroTexto 1058">
+                <a:extLst>
+                  <a:ext uri="{FF2B5EF4-FFF2-40B4-BE49-F238E27FC236}">
+                    <a16:creationId xmlns:a16="http://schemas.microsoft.com/office/drawing/2014/main" id="{058A701C-8BB5-4B70-1972-43EBBFB96102}"/>
+                  </a:ext>
+                </a:extLst>
+              </p:cNvPr>
+              <p:cNvSpPr txBox="1"/>
+              <p:nvPr/>
+            </p:nvSpPr>
+            <p:spPr>
+              <a:xfrm>
+                <a:off x="4961465" y="5374719"/>
+                <a:ext cx="1617552" cy="369332"/>
+              </a:xfrm>
+              <a:prstGeom prst="rect">
+                <a:avLst/>
+              </a:prstGeom>
+              <a:noFill/>
+            </p:spPr>
+            <p:txBody>
+              <a:bodyPr wrap="square">
+                <a:spAutoFit/>
+              </a:bodyPr>
+              <a:lstStyle/>
+              <a:p>
+                <a:pPr/>
+                <a14:m>
+                  <m:oMathPara xmlns:m="http://schemas.openxmlformats.org/officeDocument/2006/math">
+                    <m:oMathParaPr>
+                      <m:jc m:val="centerGroup"/>
+                    </m:oMathParaPr>
+                    <m:oMath xmlns:m="http://schemas.openxmlformats.org/officeDocument/2006/math">
+                      <m:r>
+                        <a:rPr lang="en-GB" i="1" smtClean="0">
+                          <a:latin typeface="Cambria Math" panose="02040503050406030204" pitchFamily="18" charset="0"/>
+                        </a:rPr>
+                        <m:t>𝑧</m:t>
+                      </m:r>
+                      <m:r>
+                        <a:rPr lang="en-GB" i="0">
+                          <a:latin typeface="Cambria Math" panose="02040503050406030204" pitchFamily="18" charset="0"/>
+                        </a:rPr>
+                        <m:t>= </m:t>
+                      </m:r>
+                      <m:sSub>
+                        <m:sSubPr>
+                          <m:ctrlPr>
+                            <a:rPr lang="en-GB" i="1">
+                              <a:latin typeface="Cambria Math" panose="02040503050406030204" pitchFamily="18" charset="0"/>
+                            </a:rPr>
+                          </m:ctrlPr>
+                        </m:sSubPr>
+                        <m:e>
+                          <m:r>
+                            <a:rPr lang="en-GB" i="1">
+                              <a:latin typeface="Cambria Math" panose="02040503050406030204" pitchFamily="18" charset="0"/>
+                            </a:rPr>
+                            <m:t>𝑓</m:t>
+                          </m:r>
+                        </m:e>
+                        <m:sub>
+                          <m:r>
+                            <a:rPr lang="en-GB" i="1">
+                              <a:latin typeface="Cambria Math" panose="02040503050406030204" pitchFamily="18" charset="0"/>
+                            </a:rPr>
+                            <m:t>𝜃</m:t>
+                          </m:r>
+                        </m:sub>
+                      </m:sSub>
+                      <m:d>
+                        <m:dPr>
+                          <m:ctrlPr>
+                            <a:rPr lang="en-GB" i="1">
+                              <a:latin typeface="Cambria Math" panose="02040503050406030204" pitchFamily="18" charset="0"/>
+                            </a:rPr>
+                          </m:ctrlPr>
+                        </m:dPr>
+                        <m:e>
+                          <m:r>
+                            <a:rPr lang="es-ES" b="1" i="1" smtClean="0">
+                              <a:latin typeface="Cambria Math" panose="02040503050406030204" pitchFamily="18" charset="0"/>
+                            </a:rPr>
+                            <m:t>𝒙</m:t>
+                          </m:r>
+                        </m:e>
+                      </m:d>
+                    </m:oMath>
+                  </m:oMathPara>
+                </a14:m>
+                <a:endParaRPr lang="en-GB" dirty="0"/>
+              </a:p>
+            </p:txBody>
+          </p:sp>
+        </mc:Choice>
+        <mc:Fallback xmlns="">
+          <p:sp>
+            <p:nvSpPr>
+              <p:cNvPr id="1059" name="CuadroTexto 1058">
+                <a:extLst>
+                  <a:ext uri="{FF2B5EF4-FFF2-40B4-BE49-F238E27FC236}">
+                    <a16:creationId xmlns:a16="http://schemas.microsoft.com/office/drawing/2014/main" id="{058A701C-8BB5-4B70-1972-43EBBFB96102}"/>
+                  </a:ext>
+                </a:extLst>
+              </p:cNvPr>
+              <p:cNvSpPr txBox="1">
+                <a:spLocks noRot="1" noChangeAspect="1" noMove="1" noResize="1" noEditPoints="1" noAdjustHandles="1" noChangeArrowheads="1" noChangeShapeType="1" noTextEdit="1"/>
+              </p:cNvSpPr>
+              <p:nvPr/>
+            </p:nvSpPr>
+            <p:spPr>
+              <a:xfrm>
+                <a:off x="4961465" y="5374719"/>
+                <a:ext cx="1617552" cy="369332"/>
+              </a:xfrm>
+              <a:prstGeom prst="rect">
+                <a:avLst/>
+              </a:prstGeom>
+              <a:blipFill>
+                <a:blip r:embed="rId10"/>
+                <a:stretch>
+                  <a:fillRect b="-13333"/>
+                </a:stretch>
+              </a:blipFill>
+            </p:spPr>
+            <p:txBody>
+              <a:bodyPr/>
+              <a:lstStyle/>
+              <a:p>
+                <a:r>
+                  <a:rPr lang="en-GB">
+                    <a:noFill/>
+                  </a:rPr>
+                  <a:t> </a:t>
+                </a:r>
+              </a:p>
+            </p:txBody>
+          </p:sp>
+        </mc:Fallback>
+      </mc:AlternateContent>
+      <p:grpSp>
+        <p:nvGrpSpPr>
+          <p:cNvPr id="1070" name="Grupo 1069">
+            <a:extLst>
+              <a:ext uri="{FF2B5EF4-FFF2-40B4-BE49-F238E27FC236}">
+                <a16:creationId xmlns:a16="http://schemas.microsoft.com/office/drawing/2014/main" id="{3460D1AC-6972-B8AC-7AE7-A01AC6555CAF}"/>
+              </a:ext>
+            </a:extLst>
+          </p:cNvPr>
+          <p:cNvGrpSpPr/>
+          <p:nvPr/>
+        </p:nvGrpSpPr>
+        <p:grpSpPr>
+          <a:xfrm>
+            <a:off x="4698415" y="5884213"/>
+            <a:ext cx="2524936" cy="429640"/>
+            <a:chOff x="6429333" y="5916389"/>
+            <a:chExt cx="2524936" cy="429640"/>
+          </a:xfrm>
+        </p:grpSpPr>
+        <p:sp>
+          <p:nvSpPr>
+            <p:cNvPr id="1044" name="CuadroTexto 1043">
+              <a:extLst>
+                <a:ext uri="{FF2B5EF4-FFF2-40B4-BE49-F238E27FC236}">
+                  <a16:creationId xmlns:a16="http://schemas.microsoft.com/office/drawing/2014/main" id="{17FEF3F5-9E50-6314-9181-F38C0A73F42B}"/>
+                </a:ext>
+              </a:extLst>
+            </p:cNvPr>
+            <p:cNvSpPr txBox="1"/>
+            <p:nvPr/>
+          </p:nvSpPr>
+          <p:spPr>
+            <a:xfrm>
+              <a:off x="7103049" y="5916389"/>
+              <a:ext cx="1261655" cy="261610"/>
+            </a:xfrm>
+            <a:prstGeom prst="rect">
+              <a:avLst/>
+            </a:prstGeom>
+            <a:noFill/>
+          </p:spPr>
+          <p:txBody>
+            <a:bodyPr wrap="square" rtlCol="0">
+              <a:spAutoFit/>
+            </a:bodyPr>
+            <a:lstStyle>
+              <a:defPPr>
+                <a:defRPr lang="en-US"/>
+              </a:defPPr>
+              <a:lvl1pPr algn="ctr">
+                <a:defRPr sz="1100" b="1">
+                  <a:latin typeface="Calibri" panose="020F0502020204030204" pitchFamily="34" charset="0"/>
+                  <a:ea typeface="Calibri" panose="020F0502020204030204" pitchFamily="34" charset="0"/>
+                  <a:cs typeface="Calibri" panose="020F0502020204030204" pitchFamily="34" charset="0"/>
+                </a:defRPr>
+              </a:lvl1pPr>
+            </a:lstStyle>
+            <a:p>
+              <a:r>
+                <a:rPr lang="en-GB" dirty="0"/>
+                <a:t>Feature extraction</a:t>
+              </a:r>
+            </a:p>
+          </p:txBody>
+        </p:sp>
+        <mc:AlternateContent xmlns:mc="http://schemas.openxmlformats.org/markup-compatibility/2006" xmlns:a14="http://schemas.microsoft.com/office/drawing/2010/main">
+          <mc:Choice Requires="a14">
+            <p:sp>
+              <p:nvSpPr>
+                <p:cNvPr id="1064" name="CuadroTexto 1063">
+                  <a:extLst>
+                    <a:ext uri="{FF2B5EF4-FFF2-40B4-BE49-F238E27FC236}">
+                      <a16:creationId xmlns:a16="http://schemas.microsoft.com/office/drawing/2014/main" id="{F319FD34-1111-1226-576B-2296FD938214}"/>
+                    </a:ext>
+                  </a:extLst>
+                </p:cNvPr>
+                <p:cNvSpPr txBox="1"/>
+                <p:nvPr/>
+              </p:nvSpPr>
+              <p:spPr>
+                <a:xfrm>
+                  <a:off x="6429333" y="6084419"/>
+                  <a:ext cx="2524936" cy="261610"/>
+                </a:xfrm>
+                <a:prstGeom prst="rect">
+                  <a:avLst/>
+                </a:prstGeom>
+                <a:noFill/>
+              </p:spPr>
+              <p:txBody>
+                <a:bodyPr wrap="square">
+                  <a:spAutoFit/>
+                </a:bodyPr>
+                <a:lstStyle/>
+                <a:p>
+                  <a:pPr/>
+                  <a14:m>
+                    <m:oMathPara xmlns:m="http://schemas.openxmlformats.org/officeDocument/2006/math">
+                      <m:oMathParaPr>
+                        <m:jc m:val="centerGroup"/>
+                      </m:oMathParaPr>
+                      <m:oMath xmlns:m="http://schemas.openxmlformats.org/officeDocument/2006/math">
+                        <m:r>
+                          <a:rPr lang="es-ES" sz="1050" b="1" i="1" smtClean="0">
+                            <a:latin typeface="Cambria Math" panose="02040503050406030204" pitchFamily="18" charset="0"/>
+                          </a:rPr>
+                          <m:t>𝒙</m:t>
+                        </m:r>
+                        <m:r>
+                          <a:rPr lang="es-ES" sz="1050" b="0" i="1" smtClean="0">
+                            <a:latin typeface="Cambria Math" panose="02040503050406030204" pitchFamily="18" charset="0"/>
+                          </a:rPr>
+                          <m:t>=</m:t>
+                        </m:r>
+                        <m:r>
+                          <a:rPr lang="en-GB" sz="1050" i="1" smtClean="0">
+                            <a:latin typeface="Cambria Math" panose="02040503050406030204" pitchFamily="18" charset="0"/>
+                          </a:rPr>
+                          <m:t>𝑒</m:t>
+                        </m:r>
+                        <m:d>
+                          <m:dPr>
+                            <m:ctrlPr>
+                              <a:rPr lang="en-GB" sz="1050" i="1">
+                                <a:latin typeface="Cambria Math" panose="02040503050406030204" pitchFamily="18" charset="0"/>
+                              </a:rPr>
+                            </m:ctrlPr>
+                          </m:dPr>
+                          <m:e>
+                            <m:sSub>
+                              <m:sSubPr>
+                                <m:ctrlPr>
+                                  <a:rPr lang="en-GB" sz="1050" i="1">
+                                    <a:latin typeface="Cambria Math" panose="02040503050406030204" pitchFamily="18" charset="0"/>
+                                  </a:rPr>
+                                </m:ctrlPr>
+                              </m:sSubPr>
+                              <m:e>
+                                <m:r>
+                                  <a:rPr lang="en-GB" sz="1050" i="1">
+                                    <a:latin typeface="Cambria Math" panose="02040503050406030204" pitchFamily="18" charset="0"/>
+                                  </a:rPr>
+                                  <m:t>𝑡</m:t>
+                                </m:r>
+                              </m:e>
+                              <m:sub>
+                                <m:r>
+                                  <a:rPr lang="en-GB" sz="1050" i="0">
+                                    <a:latin typeface="Cambria Math" panose="02040503050406030204" pitchFamily="18" charset="0"/>
+                                  </a:rPr>
+                                  <m:t>1</m:t>
+                                </m:r>
+                              </m:sub>
+                            </m:sSub>
+                          </m:e>
+                        </m:d>
+                        <m:r>
+                          <a:rPr lang="en-GB" sz="1050" i="0">
+                            <a:latin typeface="Cambria Math" panose="02040503050406030204" pitchFamily="18" charset="0"/>
+                          </a:rPr>
+                          <m:t>, </m:t>
+                        </m:r>
+                        <m:r>
+                          <a:rPr lang="en-GB" sz="1050" i="1">
+                            <a:latin typeface="Cambria Math" panose="02040503050406030204" pitchFamily="18" charset="0"/>
+                          </a:rPr>
+                          <m:t>𝑒</m:t>
+                        </m:r>
+                        <m:d>
+                          <m:dPr>
+                            <m:ctrlPr>
+                              <a:rPr lang="en-GB" sz="1050" i="1">
+                                <a:latin typeface="Cambria Math" panose="02040503050406030204" pitchFamily="18" charset="0"/>
+                              </a:rPr>
+                            </m:ctrlPr>
+                          </m:dPr>
+                          <m:e>
+                            <m:sSub>
+                              <m:sSubPr>
+                                <m:ctrlPr>
+                                  <a:rPr lang="en-GB" sz="1050" i="1">
+                                    <a:latin typeface="Cambria Math" panose="02040503050406030204" pitchFamily="18" charset="0"/>
+                                  </a:rPr>
+                                </m:ctrlPr>
+                              </m:sSubPr>
+                              <m:e>
+                                <m:r>
+                                  <a:rPr lang="en-GB" sz="1050" i="1">
+                                    <a:latin typeface="Cambria Math" panose="02040503050406030204" pitchFamily="18" charset="0"/>
+                                  </a:rPr>
+                                  <m:t>𝑡</m:t>
+                                </m:r>
+                              </m:e>
+                              <m:sub>
+                                <m:r>
+                                  <a:rPr lang="en-GB" sz="1050" i="0">
+                                    <a:latin typeface="Cambria Math" panose="02040503050406030204" pitchFamily="18" charset="0"/>
+                                  </a:rPr>
+                                  <m:t>2</m:t>
+                                </m:r>
+                              </m:sub>
+                            </m:sSub>
+                          </m:e>
+                        </m:d>
+                        <m:r>
+                          <a:rPr lang="en-GB" sz="1050" i="0">
+                            <a:latin typeface="Cambria Math" panose="02040503050406030204" pitchFamily="18" charset="0"/>
+                          </a:rPr>
+                          <m:t>, … , </m:t>
+                        </m:r>
+                        <m:r>
+                          <a:rPr lang="en-GB" sz="1050" i="1">
+                            <a:latin typeface="Cambria Math" panose="02040503050406030204" pitchFamily="18" charset="0"/>
+                          </a:rPr>
+                          <m:t>𝑒</m:t>
+                        </m:r>
+                        <m:d>
+                          <m:dPr>
+                            <m:ctrlPr>
+                              <a:rPr lang="en-GB" sz="1050" i="1">
+                                <a:latin typeface="Cambria Math" panose="02040503050406030204" pitchFamily="18" charset="0"/>
+                              </a:rPr>
+                            </m:ctrlPr>
+                          </m:dPr>
+                          <m:e>
+                            <m:sSub>
+                              <m:sSubPr>
+                                <m:ctrlPr>
+                                  <a:rPr lang="en-GB" sz="1050" i="1">
+                                    <a:latin typeface="Cambria Math" panose="02040503050406030204" pitchFamily="18" charset="0"/>
+                                  </a:rPr>
+                                </m:ctrlPr>
+                              </m:sSubPr>
+                              <m:e>
+                                <m:r>
+                                  <a:rPr lang="en-GB" sz="1050" i="1">
+                                    <a:latin typeface="Cambria Math" panose="02040503050406030204" pitchFamily="18" charset="0"/>
+                                  </a:rPr>
+                                  <m:t>𝑡</m:t>
+                                </m:r>
+                              </m:e>
+                              <m:sub>
+                                <m:r>
+                                  <a:rPr lang="en-GB" sz="1050" i="1">
+                                    <a:latin typeface="Cambria Math" panose="02040503050406030204" pitchFamily="18" charset="0"/>
+                                  </a:rPr>
+                                  <m:t>𝑛</m:t>
+                                </m:r>
+                              </m:sub>
+                            </m:sSub>
+                          </m:e>
+                        </m:d>
+                      </m:oMath>
+                    </m:oMathPara>
+                  </a14:m>
+                  <a:endParaRPr lang="en-GB" sz="1050" dirty="0"/>
+                </a:p>
+              </p:txBody>
+            </p:sp>
+          </mc:Choice>
+          <mc:Fallback xmlns="">
+            <p:sp>
+              <p:nvSpPr>
+                <p:cNvPr id="1064" name="CuadroTexto 1063">
+                  <a:extLst>
+                    <a:ext uri="{FF2B5EF4-FFF2-40B4-BE49-F238E27FC236}">
+                      <a16:creationId xmlns:a16="http://schemas.microsoft.com/office/drawing/2014/main" id="{F319FD34-1111-1226-576B-2296FD938214}"/>
+                    </a:ext>
+                  </a:extLst>
+                </p:cNvPr>
+                <p:cNvSpPr txBox="1">
+                  <a:spLocks noRot="1" noChangeAspect="1" noMove="1" noResize="1" noEditPoints="1" noAdjustHandles="1" noChangeArrowheads="1" noChangeShapeType="1" noTextEdit="1"/>
+                </p:cNvSpPr>
+                <p:nvPr/>
+              </p:nvSpPr>
+              <p:spPr>
+                <a:xfrm>
+                  <a:off x="6429333" y="6084419"/>
+                  <a:ext cx="2524936" cy="261610"/>
+                </a:xfrm>
+                <a:prstGeom prst="rect">
+                  <a:avLst/>
+                </a:prstGeom>
+                <a:blipFill>
+                  <a:blip r:embed="rId11"/>
+                  <a:stretch>
+                    <a:fillRect/>
+                  </a:stretch>
+                </a:blipFill>
+              </p:spPr>
+              <p:txBody>
+                <a:bodyPr/>
+                <a:lstStyle/>
+                <a:p>
+                  <a:r>
+                    <a:rPr lang="en-GB">
+                      <a:noFill/>
+                    </a:rPr>
+                    <a:t> </a:t>
+                  </a:r>
+                </a:p>
+              </p:txBody>
+            </p:sp>
+          </mc:Fallback>
+        </mc:AlternateContent>
+      </p:grpSp>
+      <mc:AlternateContent xmlns:mc="http://schemas.openxmlformats.org/markup-compatibility/2006" xmlns:a14="http://schemas.microsoft.com/office/drawing/2010/main">
+        <mc:Choice Requires="a14">
+          <p:sp>
+            <p:nvSpPr>
+              <p:cNvPr id="1065" name="CuadroTexto 1064">
+                <a:extLst>
+                  <a:ext uri="{FF2B5EF4-FFF2-40B4-BE49-F238E27FC236}">
+                    <a16:creationId xmlns:a16="http://schemas.microsoft.com/office/drawing/2014/main" id="{EA134F5B-32EC-4276-E7FC-5E4929ECC5F7}"/>
+                  </a:ext>
+                </a:extLst>
+              </p:cNvPr>
+              <p:cNvSpPr txBox="1"/>
+              <p:nvPr/>
+            </p:nvSpPr>
+            <p:spPr>
+              <a:xfrm>
+                <a:off x="6331242" y="5568848"/>
+                <a:ext cx="3057525" cy="307777"/>
+              </a:xfrm>
+              <a:prstGeom prst="rect">
+                <a:avLst/>
+              </a:prstGeom>
+              <a:noFill/>
+            </p:spPr>
+            <p:txBody>
+              <a:bodyPr wrap="square" rtlCol="0">
+                <a:spAutoFit/>
+              </a:bodyPr>
+              <a:lstStyle/>
+              <a:p>
+                <a:pPr/>
+                <a14:m>
+                  <m:oMathPara xmlns:m="http://schemas.openxmlformats.org/officeDocument/2006/math">
+                    <m:oMathParaPr>
+                      <m:jc m:val="centerGroup"/>
+                    </m:oMathParaPr>
+                    <m:oMath xmlns:m="http://schemas.openxmlformats.org/officeDocument/2006/math">
+                      <m:r>
+                        <a:rPr lang="en-GB" sz="1400" i="1" smtClean="0">
+                          <a:latin typeface="Cambria Math" panose="02040503050406030204" pitchFamily="18" charset="0"/>
+                        </a:rPr>
+                        <m:t>𝑧</m:t>
+                      </m:r>
+                      <m:r>
+                        <a:rPr lang="es-ES" sz="1400" b="0" i="1" smtClean="0">
+                          <a:latin typeface="Cambria Math" panose="02040503050406030204" pitchFamily="18" charset="0"/>
+                        </a:rPr>
+                        <m:t>=[1.12, 0.33, −1.34, …,</m:t>
+                      </m:r>
+                      <m:r>
+                        <a:rPr lang="es-ES" sz="1400" b="0" i="1" smtClean="0">
+                          <a:latin typeface="Cambria Math" panose="02040503050406030204" pitchFamily="18" charset="0"/>
+                        </a:rPr>
+                        <m:t>𝑛</m:t>
+                      </m:r>
+                      <m:r>
+                        <a:rPr lang="es-ES" sz="1400" b="0" i="1" smtClean="0">
+                          <a:latin typeface="Cambria Math" panose="02040503050406030204" pitchFamily="18" charset="0"/>
+                        </a:rPr>
+                        <m:t>]</m:t>
+                      </m:r>
+                    </m:oMath>
+                  </m:oMathPara>
+                </a14:m>
+                <a:endParaRPr lang="en-GB" sz="1400" dirty="0"/>
+              </a:p>
+            </p:txBody>
+          </p:sp>
+        </mc:Choice>
+        <mc:Fallback xmlns="">
+          <p:sp>
+            <p:nvSpPr>
+              <p:cNvPr id="1065" name="CuadroTexto 1064">
+                <a:extLst>
+                  <a:ext uri="{FF2B5EF4-FFF2-40B4-BE49-F238E27FC236}">
+                    <a16:creationId xmlns:a16="http://schemas.microsoft.com/office/drawing/2014/main" id="{EA134F5B-32EC-4276-E7FC-5E4929ECC5F7}"/>
+                  </a:ext>
+                </a:extLst>
+              </p:cNvPr>
+              <p:cNvSpPr txBox="1">
+                <a:spLocks noRot="1" noChangeAspect="1" noMove="1" noResize="1" noEditPoints="1" noAdjustHandles="1" noChangeArrowheads="1" noChangeShapeType="1" noTextEdit="1"/>
+              </p:cNvSpPr>
+              <p:nvPr/>
+            </p:nvSpPr>
+            <p:spPr>
+              <a:xfrm>
+                <a:off x="6331242" y="5568848"/>
+                <a:ext cx="3057525" cy="307777"/>
+              </a:xfrm>
+              <a:prstGeom prst="rect">
+                <a:avLst/>
+              </a:prstGeom>
+              <a:blipFill>
+                <a:blip r:embed="rId12"/>
+                <a:stretch>
+                  <a:fillRect b="-8000"/>
+                </a:stretch>
+              </a:blipFill>
+            </p:spPr>
+            <p:txBody>
+              <a:bodyPr/>
+              <a:lstStyle/>
+              <a:p>
+                <a:r>
+                  <a:rPr lang="en-GB">
+                    <a:noFill/>
+                  </a:rPr>
+                  <a:t> </a:t>
+                </a:r>
+              </a:p>
+            </p:txBody>
+          </p:sp>
+        </mc:Fallback>
+      </mc:AlternateContent>
+      <mc:AlternateContent xmlns:mc="http://schemas.openxmlformats.org/markup-compatibility/2006" xmlns:a14="http://schemas.microsoft.com/office/drawing/2010/main">
+        <mc:Choice Requires="a14">
+          <p:sp>
+            <p:nvSpPr>
+              <p:cNvPr id="16" name="CuadroTexto 15">
+                <a:extLst>
+                  <a:ext uri="{FF2B5EF4-FFF2-40B4-BE49-F238E27FC236}">
+                    <a16:creationId xmlns:a16="http://schemas.microsoft.com/office/drawing/2014/main" id="{A6E8BE35-1D53-D7D6-FC94-87A873EFB8CB}"/>
+                  </a:ext>
+                </a:extLst>
+              </p:cNvPr>
+              <p:cNvSpPr txBox="1"/>
+              <p:nvPr/>
+            </p:nvSpPr>
+            <p:spPr>
+              <a:xfrm>
+                <a:off x="9647944" y="6386836"/>
+                <a:ext cx="2141439" cy="430887"/>
+              </a:xfrm>
+              <a:prstGeom prst="rect">
+                <a:avLst/>
+              </a:prstGeom>
+              <a:noFill/>
+            </p:spPr>
+            <p:txBody>
+              <a:bodyPr wrap="square" rtlCol="0">
+                <a:spAutoFit/>
+              </a:bodyPr>
+              <a:lstStyle>
+                <a:defPPr>
+                  <a:defRPr lang="en-US"/>
+                </a:defPPr>
+                <a:lvl1pPr algn="ctr">
+                  <a:defRPr sz="1100" b="1">
+                    <a:latin typeface="Calibri" panose="020F0502020204030204" pitchFamily="34" charset="0"/>
+                    <a:ea typeface="Calibri" panose="020F0502020204030204" pitchFamily="34" charset="0"/>
+                    <a:cs typeface="Calibri" panose="020F0502020204030204" pitchFamily="34" charset="0"/>
+                  </a:defRPr>
+                </a:lvl1pPr>
+              </a:lstStyle>
+              <a:p>
+                <a:r>
+                  <a:rPr lang="en-US" noProof="1"/>
+                  <a:t>Learned molecular embedding space (</a:t>
+                </a:r>
+                <a14:m>
+                  <m:oMath xmlns:m="http://schemas.openxmlformats.org/officeDocument/2006/math">
+                    <m:r>
+                      <a:rPr lang="es-ES" b="1" i="1" noProof="1" smtClean="0">
+                        <a:latin typeface="Cambria Math" panose="02040503050406030204" pitchFamily="18" charset="0"/>
+                      </a:rPr>
+                      <m:t>𝒌</m:t>
+                    </m:r>
+                  </m:oMath>
+                </a14:m>
+                <a:r>
+                  <a:rPr lang="en-US" noProof="1"/>
+                  <a:t>-dimensional)</a:t>
+                </a:r>
+              </a:p>
+            </p:txBody>
+          </p:sp>
+        </mc:Choice>
+        <mc:Fallback xmlns="">
+          <p:sp>
+            <p:nvSpPr>
+              <p:cNvPr id="16" name="CuadroTexto 15">
+                <a:extLst>
+                  <a:ext uri="{FF2B5EF4-FFF2-40B4-BE49-F238E27FC236}">
+                    <a16:creationId xmlns:a16="http://schemas.microsoft.com/office/drawing/2014/main" id="{A6E8BE35-1D53-D7D6-FC94-87A873EFB8CB}"/>
+                  </a:ext>
+                </a:extLst>
+              </p:cNvPr>
+              <p:cNvSpPr txBox="1">
+                <a:spLocks noRot="1" noChangeAspect="1" noMove="1" noResize="1" noEditPoints="1" noAdjustHandles="1" noChangeArrowheads="1" noChangeShapeType="1" noTextEdit="1"/>
+              </p:cNvSpPr>
+              <p:nvPr/>
+            </p:nvSpPr>
+            <p:spPr>
+              <a:xfrm>
+                <a:off x="9647944" y="6386836"/>
+                <a:ext cx="2141439" cy="430887"/>
+              </a:xfrm>
+              <a:prstGeom prst="rect">
+                <a:avLst/>
+              </a:prstGeom>
+              <a:blipFill>
+                <a:blip r:embed="rId13"/>
+                <a:stretch>
+                  <a:fillRect t="-1429" b="-10000"/>
+                </a:stretch>
+              </a:blipFill>
+            </p:spPr>
+            <p:txBody>
+              <a:bodyPr/>
+              <a:lstStyle/>
+              <a:p>
+                <a:r>
+                  <a:rPr lang="en-GB">
+                    <a:noFill/>
+                  </a:rPr>
+                  <a:t> </a:t>
+                </a:r>
+              </a:p>
+            </p:txBody>
+          </p:sp>
+        </mc:Fallback>
+      </mc:AlternateContent>
+      <p:grpSp>
+        <p:nvGrpSpPr>
+          <p:cNvPr id="1078" name="Grupo 1077">
+            <a:extLst>
+              <a:ext uri="{FF2B5EF4-FFF2-40B4-BE49-F238E27FC236}">
+                <a16:creationId xmlns:a16="http://schemas.microsoft.com/office/drawing/2014/main" id="{F864B66A-D158-9D1C-4A01-A66CB32440EF}"/>
+              </a:ext>
+            </a:extLst>
+          </p:cNvPr>
+          <p:cNvGrpSpPr/>
+          <p:nvPr/>
+        </p:nvGrpSpPr>
+        <p:grpSpPr>
+          <a:xfrm>
+            <a:off x="9885890" y="5110978"/>
+            <a:ext cx="1523852" cy="1247749"/>
+            <a:chOff x="9896949" y="5021422"/>
+            <a:chExt cx="1523852" cy="1247749"/>
+          </a:xfrm>
+        </p:grpSpPr>
+        <p:sp>
+          <p:nvSpPr>
+            <p:cNvPr id="60" name="Rectángulo: esquinas redondeadas 59">
+              <a:extLst>
+                <a:ext uri="{FF2B5EF4-FFF2-40B4-BE49-F238E27FC236}">
+                  <a16:creationId xmlns:a16="http://schemas.microsoft.com/office/drawing/2014/main" id="{534EB05A-F451-63E2-1D4C-F0A1BEC37A4E}"/>
+                </a:ext>
+              </a:extLst>
+            </p:cNvPr>
+            <p:cNvSpPr/>
+            <p:nvPr/>
+          </p:nvSpPr>
+          <p:spPr>
+            <a:xfrm>
+              <a:off x="10098896" y="5061989"/>
+              <a:ext cx="1261654" cy="1201693"/>
+            </a:xfrm>
+            <a:prstGeom prst="roundRect">
+              <a:avLst/>
+            </a:prstGeom>
+            <a:solidFill>
+              <a:schemeClr val="bg2">
+                <a:lumMod val="90000"/>
+              </a:schemeClr>
+            </a:solidFill>
+            <a:ln>
+              <a:solidFill>
+                <a:schemeClr val="tx1"/>
+              </a:solidFill>
+            </a:ln>
+          </p:spPr>
+          <p:style>
+            <a:lnRef idx="2">
+              <a:schemeClr val="accent1">
+                <a:shade val="15000"/>
+              </a:schemeClr>
+            </a:lnRef>
+            <a:fillRef idx="1">
+              <a:schemeClr val="accent1"/>
+            </a:fillRef>
+            <a:effectRef idx="0">
+              <a:schemeClr val="accent1"/>
+            </a:effectRef>
+            <a:fontRef idx="minor">
+              <a:schemeClr val="lt1"/>
+            </a:fontRef>
+          </p:style>
+          <p:txBody>
+            <a:bodyPr rtlCol="0" anchor="ctr"/>
+            <a:lstStyle/>
+            <a:p>
+              <a:pPr algn="ctr"/>
+              <a:endParaRPr lang="en-US" noProof="1"/>
+            </a:p>
+          </p:txBody>
+        </p:sp>
+        <p:cxnSp>
+          <p:nvCxnSpPr>
+            <p:cNvPr id="18" name="Conector recto 17">
+              <a:extLst>
+                <a:ext uri="{FF2B5EF4-FFF2-40B4-BE49-F238E27FC236}">
+                  <a16:creationId xmlns:a16="http://schemas.microsoft.com/office/drawing/2014/main" id="{E3C5FCA5-3EB2-DE35-4A48-C2A335EFEE1A}"/>
+                </a:ext>
+              </a:extLst>
+            </p:cNvPr>
+            <p:cNvCxnSpPr/>
+            <p:nvPr/>
+          </p:nvCxnSpPr>
+          <p:spPr>
+            <a:xfrm>
+              <a:off x="10659984" y="5199960"/>
+              <a:ext cx="0" cy="600075"/>
+            </a:xfrm>
+            <a:prstGeom prst="line">
+              <a:avLst/>
+            </a:prstGeom>
+          </p:spPr>
+          <p:style>
+            <a:lnRef idx="2">
+              <a:schemeClr val="dk1"/>
+            </a:lnRef>
+            <a:fillRef idx="0">
+              <a:schemeClr val="dk1"/>
+            </a:fillRef>
+            <a:effectRef idx="1">
+              <a:schemeClr val="dk1"/>
+            </a:effectRef>
+            <a:fontRef idx="minor">
+              <a:schemeClr val="tx1"/>
+            </a:fontRef>
+          </p:style>
+        </p:cxnSp>
+        <p:cxnSp>
+          <p:nvCxnSpPr>
+            <p:cNvPr id="21" name="Conector recto 20">
+              <a:extLst>
+                <a:ext uri="{FF2B5EF4-FFF2-40B4-BE49-F238E27FC236}">
+                  <a16:creationId xmlns:a16="http://schemas.microsoft.com/office/drawing/2014/main" id="{245A6979-7A6E-E67C-EE16-F698EEE81869}"/>
+                </a:ext>
+              </a:extLst>
+            </p:cNvPr>
+            <p:cNvCxnSpPr>
+              <a:cxnSpLocks/>
+            </p:cNvCxnSpPr>
+            <p:nvPr/>
+          </p:nvCxnSpPr>
+          <p:spPr>
+            <a:xfrm flipH="1">
+              <a:off x="10387608" y="5800807"/>
+              <a:ext cx="276074" cy="294503"/>
+            </a:xfrm>
+            <a:prstGeom prst="line">
+              <a:avLst/>
+            </a:prstGeom>
+          </p:spPr>
+          <p:style>
+            <a:lnRef idx="2">
+              <a:schemeClr val="dk1"/>
+            </a:lnRef>
+            <a:fillRef idx="0">
+              <a:schemeClr val="dk1"/>
+            </a:fillRef>
+            <a:effectRef idx="1">
+              <a:schemeClr val="dk1"/>
+            </a:effectRef>
+            <a:fontRef idx="minor">
+              <a:schemeClr val="tx1"/>
+            </a:fontRef>
+          </p:style>
+        </p:cxnSp>
+        <p:cxnSp>
+          <p:nvCxnSpPr>
+            <p:cNvPr id="24" name="Conector recto 23">
+              <a:extLst>
+                <a:ext uri="{FF2B5EF4-FFF2-40B4-BE49-F238E27FC236}">
+                  <a16:creationId xmlns:a16="http://schemas.microsoft.com/office/drawing/2014/main" id="{B31CB71B-A635-3F28-6E75-E5F79A6925C8}"/>
+                </a:ext>
+              </a:extLst>
+            </p:cNvPr>
+            <p:cNvCxnSpPr>
+              <a:cxnSpLocks/>
+            </p:cNvCxnSpPr>
+            <p:nvPr/>
+          </p:nvCxnSpPr>
+          <p:spPr>
+            <a:xfrm>
+              <a:off x="10663682" y="5800035"/>
+              <a:ext cx="545534" cy="0"/>
+            </a:xfrm>
+            <a:prstGeom prst="line">
+              <a:avLst/>
+            </a:prstGeom>
+          </p:spPr>
+          <p:style>
+            <a:lnRef idx="2">
+              <a:schemeClr val="dk1"/>
+            </a:lnRef>
+            <a:fillRef idx="0">
+              <a:schemeClr val="dk1"/>
+            </a:fillRef>
+            <a:effectRef idx="1">
+              <a:schemeClr val="dk1"/>
+            </a:effectRef>
+            <a:fontRef idx="minor">
+              <a:schemeClr val="tx1"/>
+            </a:fontRef>
+          </p:style>
+        </p:cxnSp>
+        <p:cxnSp>
+          <p:nvCxnSpPr>
+            <p:cNvPr id="44" name="Conector recto 43">
+              <a:extLst>
+                <a:ext uri="{FF2B5EF4-FFF2-40B4-BE49-F238E27FC236}">
+                  <a16:creationId xmlns:a16="http://schemas.microsoft.com/office/drawing/2014/main" id="{D49C5B09-32F9-6E03-D448-4352EEC0460C}"/>
+                </a:ext>
+              </a:extLst>
+            </p:cNvPr>
+            <p:cNvCxnSpPr>
+              <a:cxnSpLocks/>
+            </p:cNvCxnSpPr>
+            <p:nvPr/>
+          </p:nvCxnSpPr>
+          <p:spPr>
+            <a:xfrm>
+              <a:off x="10252878" y="5800035"/>
+              <a:ext cx="545534" cy="0"/>
+            </a:xfrm>
+            <a:prstGeom prst="line">
+              <a:avLst/>
+            </a:prstGeom>
+            <a:ln>
+              <a:prstDash val="sysDot"/>
+            </a:ln>
+          </p:spPr>
+          <p:style>
+            <a:lnRef idx="2">
+              <a:schemeClr val="dk1"/>
+            </a:lnRef>
+            <a:fillRef idx="0">
+              <a:schemeClr val="dk1"/>
+            </a:fillRef>
+            <a:effectRef idx="1">
+              <a:schemeClr val="dk1"/>
+            </a:effectRef>
+            <a:fontRef idx="minor">
+              <a:schemeClr val="tx1"/>
+            </a:fontRef>
+          </p:style>
+        </p:cxnSp>
+        <p:cxnSp>
+          <p:nvCxnSpPr>
+            <p:cNvPr id="48" name="Conector recto 47">
+              <a:extLst>
+                <a:ext uri="{FF2B5EF4-FFF2-40B4-BE49-F238E27FC236}">
+                  <a16:creationId xmlns:a16="http://schemas.microsoft.com/office/drawing/2014/main" id="{6D59460C-3393-4D6C-2F6C-3C66C7DF0468}"/>
+                </a:ext>
+              </a:extLst>
+            </p:cNvPr>
+            <p:cNvCxnSpPr>
+              <a:cxnSpLocks/>
+            </p:cNvCxnSpPr>
+            <p:nvPr/>
+          </p:nvCxnSpPr>
+          <p:spPr>
+            <a:xfrm>
+              <a:off x="10659984" y="5671053"/>
+              <a:ext cx="1317" cy="398063"/>
+            </a:xfrm>
+            <a:prstGeom prst="line">
+              <a:avLst/>
+            </a:prstGeom>
+            <a:ln>
+              <a:prstDash val="sysDot"/>
+            </a:ln>
+          </p:spPr>
+          <p:style>
+            <a:lnRef idx="2">
+              <a:schemeClr val="dk1"/>
+            </a:lnRef>
+            <a:fillRef idx="0">
+              <a:schemeClr val="dk1"/>
+            </a:fillRef>
+            <a:effectRef idx="1">
+              <a:schemeClr val="dk1"/>
+            </a:effectRef>
+            <a:fontRef idx="minor">
+              <a:schemeClr val="tx1"/>
+            </a:fontRef>
+          </p:style>
+        </p:cxnSp>
+        <p:cxnSp>
+          <p:nvCxnSpPr>
+            <p:cNvPr id="51" name="Conector recto 50">
+              <a:extLst>
+                <a:ext uri="{FF2B5EF4-FFF2-40B4-BE49-F238E27FC236}">
+                  <a16:creationId xmlns:a16="http://schemas.microsoft.com/office/drawing/2014/main" id="{CF2DD38A-A57C-D645-0680-5C90A42506CD}"/>
+                </a:ext>
+              </a:extLst>
+            </p:cNvPr>
+            <p:cNvCxnSpPr>
+              <a:cxnSpLocks/>
+            </p:cNvCxnSpPr>
+            <p:nvPr/>
+          </p:nvCxnSpPr>
+          <p:spPr>
+            <a:xfrm flipH="1">
+              <a:off x="10593010" y="5580182"/>
+              <a:ext cx="276074" cy="294503"/>
+            </a:xfrm>
+            <a:prstGeom prst="line">
+              <a:avLst/>
+            </a:prstGeom>
+            <a:ln>
+              <a:prstDash val="sysDot"/>
+            </a:ln>
+          </p:spPr>
+          <p:style>
+            <a:lnRef idx="2">
+              <a:schemeClr val="dk1"/>
+            </a:lnRef>
+            <a:fillRef idx="0">
+              <a:schemeClr val="dk1"/>
+            </a:fillRef>
+            <a:effectRef idx="1">
+              <a:schemeClr val="dk1"/>
+            </a:effectRef>
+            <a:fontRef idx="minor">
+              <a:schemeClr val="tx1"/>
+            </a:fontRef>
+          </p:style>
+        </p:cxnSp>
+        <p:sp>
+          <p:nvSpPr>
+            <p:cNvPr id="52" name="Elipse 51">
+              <a:extLst>
+                <a:ext uri="{FF2B5EF4-FFF2-40B4-BE49-F238E27FC236}">
+                  <a16:creationId xmlns:a16="http://schemas.microsoft.com/office/drawing/2014/main" id="{277DC9C2-00C1-45B0-452C-F1B342A8F0E9}"/>
+                </a:ext>
+              </a:extLst>
+            </p:cNvPr>
+            <p:cNvSpPr/>
+            <p:nvPr/>
+          </p:nvSpPr>
+          <p:spPr>
+            <a:xfrm>
+              <a:off x="10400821" y="5822116"/>
+              <a:ext cx="76013" cy="77817"/>
+            </a:xfrm>
+            <a:prstGeom prst="ellipse">
+              <a:avLst/>
+            </a:prstGeom>
+            <a:solidFill>
+              <a:srgbClr val="FF9A25"/>
+            </a:solidFill>
+            <a:ln w="6350">
+              <a:solidFill>
+                <a:schemeClr val="accent2"/>
+              </a:solidFill>
+            </a:ln>
+          </p:spPr>
+          <p:style>
+            <a:lnRef idx="2">
+              <a:schemeClr val="accent1">
+                <a:shade val="15000"/>
+              </a:schemeClr>
+            </a:lnRef>
+            <a:fillRef idx="1">
+              <a:schemeClr val="accent1"/>
+            </a:fillRef>
+            <a:effectRef idx="0">
+              <a:schemeClr val="accent1"/>
+            </a:effectRef>
+            <a:fontRef idx="minor">
+              <a:schemeClr val="lt1"/>
+            </a:fontRef>
+          </p:style>
+          <p:txBody>
+            <a:bodyPr rtlCol="0" anchor="ctr"/>
+            <a:lstStyle/>
+            <a:p>
+              <a:pPr algn="ctr"/>
+              <a:endParaRPr lang="en-US" noProof="1"/>
+            </a:p>
+          </p:txBody>
+        </p:sp>
+        <p:sp>
+          <p:nvSpPr>
+            <p:cNvPr id="53" name="Elipse 52">
+              <a:extLst>
+                <a:ext uri="{FF2B5EF4-FFF2-40B4-BE49-F238E27FC236}">
+                  <a16:creationId xmlns:a16="http://schemas.microsoft.com/office/drawing/2014/main" id="{BC38FBB1-45A1-DDB6-FEC0-50C2EC82D519}"/>
+                </a:ext>
+              </a:extLst>
+            </p:cNvPr>
+            <p:cNvSpPr/>
+            <p:nvPr/>
+          </p:nvSpPr>
+          <p:spPr>
+            <a:xfrm>
+              <a:off x="10595217" y="5329354"/>
+              <a:ext cx="76014" cy="73003"/>
+            </a:xfrm>
+            <a:prstGeom prst="ellipse">
+              <a:avLst/>
+            </a:prstGeom>
+            <a:solidFill>
+              <a:srgbClr val="FFEA4E"/>
+            </a:solidFill>
+            <a:ln w="6350">
+              <a:solidFill>
+                <a:srgbClr val="CCCC00"/>
+              </a:solidFill>
+            </a:ln>
+          </p:spPr>
+          <p:style>
+            <a:lnRef idx="2">
+              <a:schemeClr val="accent1">
+                <a:shade val="15000"/>
+              </a:schemeClr>
+            </a:lnRef>
+            <a:fillRef idx="1">
+              <a:schemeClr val="accent1"/>
+            </a:fillRef>
+            <a:effectRef idx="0">
+              <a:schemeClr val="accent1"/>
+            </a:effectRef>
+            <a:fontRef idx="minor">
+              <a:schemeClr val="lt1"/>
+            </a:fontRef>
+          </p:style>
+          <p:txBody>
+            <a:bodyPr rtlCol="0" anchor="ctr"/>
+            <a:lstStyle/>
+            <a:p>
+              <a:pPr algn="ctr"/>
+              <a:endParaRPr lang="en-US" noProof="1"/>
+            </a:p>
+          </p:txBody>
+        </p:sp>
+        <p:sp>
+          <p:nvSpPr>
+            <p:cNvPr id="54" name="Elipse 53">
+              <a:extLst>
+                <a:ext uri="{FF2B5EF4-FFF2-40B4-BE49-F238E27FC236}">
+                  <a16:creationId xmlns:a16="http://schemas.microsoft.com/office/drawing/2014/main" id="{A26FFCD0-314B-C18A-3EAD-B117FEE82D3F}"/>
+                </a:ext>
+              </a:extLst>
+            </p:cNvPr>
+            <p:cNvSpPr/>
+            <p:nvPr/>
+          </p:nvSpPr>
+          <p:spPr>
+            <a:xfrm>
+              <a:off x="10540915" y="5930665"/>
+              <a:ext cx="73376" cy="73002"/>
+            </a:xfrm>
+            <a:prstGeom prst="ellipse">
+              <a:avLst/>
+            </a:prstGeom>
+            <a:solidFill>
+              <a:srgbClr val="8CC253"/>
+            </a:solidFill>
+            <a:ln w="6350">
+              <a:solidFill>
+                <a:srgbClr val="3B7D23"/>
+              </a:solidFill>
+            </a:ln>
+          </p:spPr>
+          <p:style>
+            <a:lnRef idx="2">
+              <a:schemeClr val="accent1">
+                <a:shade val="15000"/>
+              </a:schemeClr>
+            </a:lnRef>
+            <a:fillRef idx="1">
+              <a:schemeClr val="accent1"/>
+            </a:fillRef>
+            <a:effectRef idx="0">
+              <a:schemeClr val="accent1"/>
+            </a:effectRef>
+            <a:fontRef idx="minor">
+              <a:schemeClr val="lt1"/>
+            </a:fontRef>
+          </p:style>
+          <p:txBody>
+            <a:bodyPr rtlCol="0" anchor="ctr"/>
+            <a:lstStyle/>
+            <a:p>
+              <a:pPr algn="ctr"/>
+              <a:endParaRPr lang="en-US" noProof="1"/>
+            </a:p>
+          </p:txBody>
+        </p:sp>
+        <p:sp>
+          <p:nvSpPr>
+            <p:cNvPr id="55" name="Elipse 54">
+              <a:extLst>
+                <a:ext uri="{FF2B5EF4-FFF2-40B4-BE49-F238E27FC236}">
+                  <a16:creationId xmlns:a16="http://schemas.microsoft.com/office/drawing/2014/main" id="{BAA8330C-AE21-C3E6-CC40-D763D79721F8}"/>
+                </a:ext>
+              </a:extLst>
+            </p:cNvPr>
+            <p:cNvSpPr/>
+            <p:nvPr/>
+          </p:nvSpPr>
+          <p:spPr>
+            <a:xfrm>
+              <a:off x="10985725" y="5622403"/>
+              <a:ext cx="76015" cy="73004"/>
+            </a:xfrm>
+            <a:prstGeom prst="ellipse">
+              <a:avLst/>
+            </a:prstGeom>
+            <a:solidFill>
+              <a:srgbClr val="00BBD3"/>
+            </a:solidFill>
+            <a:ln w="6350">
+              <a:solidFill>
+                <a:srgbClr val="0B76A0"/>
+              </a:solidFill>
+            </a:ln>
+          </p:spPr>
+          <p:style>
+            <a:lnRef idx="2">
+              <a:schemeClr val="accent1">
+                <a:shade val="15000"/>
+              </a:schemeClr>
+            </a:lnRef>
+            <a:fillRef idx="1">
+              <a:schemeClr val="accent1"/>
+            </a:fillRef>
+            <a:effectRef idx="0">
+              <a:schemeClr val="accent1"/>
+            </a:effectRef>
+            <a:fontRef idx="minor">
+              <a:schemeClr val="lt1"/>
+            </a:fontRef>
+          </p:style>
+          <p:txBody>
+            <a:bodyPr rtlCol="0" anchor="ctr"/>
+            <a:lstStyle/>
+            <a:p>
+              <a:pPr algn="ctr"/>
+              <a:endParaRPr lang="en-US" noProof="1"/>
+            </a:p>
+          </p:txBody>
+        </p:sp>
+        <p:sp>
+          <p:nvSpPr>
+            <p:cNvPr id="61" name="CuadroTexto 60">
+              <a:extLst>
+                <a:ext uri="{FF2B5EF4-FFF2-40B4-BE49-F238E27FC236}">
+                  <a16:creationId xmlns:a16="http://schemas.microsoft.com/office/drawing/2014/main" id="{DE36A8B2-A17C-671A-1D6E-A57C188052E2}"/>
+                </a:ext>
+              </a:extLst>
+            </p:cNvPr>
+            <p:cNvSpPr txBox="1"/>
+            <p:nvPr/>
+          </p:nvSpPr>
+          <p:spPr>
+            <a:xfrm>
+              <a:off x="11003814" y="5770056"/>
+              <a:ext cx="416987" cy="200055"/>
+            </a:xfrm>
+            <a:prstGeom prst="rect">
+              <a:avLst/>
+            </a:prstGeom>
+            <a:noFill/>
+          </p:spPr>
+          <p:txBody>
+            <a:bodyPr wrap="square" rtlCol="0">
+              <a:spAutoFit/>
+            </a:bodyPr>
+            <a:lstStyle>
+              <a:defPPr>
+                <a:defRPr lang="en-US"/>
+              </a:defPPr>
+              <a:lvl1pPr>
+                <a:defRPr sz="700"/>
+              </a:lvl1pPr>
+            </a:lstStyle>
+            <a:p>
+              <a:r>
+                <a:rPr lang="en-US" noProof="1"/>
+                <a:t>Dim 1</a:t>
+              </a:r>
+            </a:p>
+          </p:txBody>
+        </p:sp>
+        <p:sp>
+          <p:nvSpPr>
+            <p:cNvPr id="62" name="CuadroTexto 61">
+              <a:extLst>
+                <a:ext uri="{FF2B5EF4-FFF2-40B4-BE49-F238E27FC236}">
+                  <a16:creationId xmlns:a16="http://schemas.microsoft.com/office/drawing/2014/main" id="{6C713316-87F6-812A-BB8C-447D028AA1F6}"/>
+                </a:ext>
+              </a:extLst>
+            </p:cNvPr>
+            <p:cNvSpPr txBox="1"/>
+            <p:nvPr/>
+          </p:nvSpPr>
+          <p:spPr>
+            <a:xfrm>
+              <a:off x="10479783" y="5021422"/>
+              <a:ext cx="456666" cy="200055"/>
+            </a:xfrm>
+            <a:prstGeom prst="rect">
+              <a:avLst/>
+            </a:prstGeom>
+            <a:noFill/>
+          </p:spPr>
+          <p:txBody>
+            <a:bodyPr wrap="square" rtlCol="0">
+              <a:spAutoFit/>
+            </a:bodyPr>
+            <a:lstStyle/>
+            <a:p>
+              <a:r>
+                <a:rPr lang="en-US" sz="700" noProof="1"/>
+                <a:t>Dim 2</a:t>
+              </a:r>
+            </a:p>
+          </p:txBody>
+        </p:sp>
+        <p:sp>
+          <p:nvSpPr>
+            <p:cNvPr id="63" name="CuadroTexto 62">
+              <a:extLst>
+                <a:ext uri="{FF2B5EF4-FFF2-40B4-BE49-F238E27FC236}">
+                  <a16:creationId xmlns:a16="http://schemas.microsoft.com/office/drawing/2014/main" id="{761E8BFA-933E-FDF5-4D3F-DE3C722CD609}"/>
+                </a:ext>
+              </a:extLst>
+            </p:cNvPr>
+            <p:cNvSpPr txBox="1"/>
+            <p:nvPr/>
+          </p:nvSpPr>
+          <p:spPr>
+            <a:xfrm>
+              <a:off x="10191782" y="6069116"/>
+              <a:ext cx="413367" cy="200055"/>
+            </a:xfrm>
+            <a:prstGeom prst="rect">
+              <a:avLst/>
+            </a:prstGeom>
+            <a:noFill/>
+          </p:spPr>
+          <p:txBody>
+            <a:bodyPr wrap="square" rtlCol="0">
+              <a:spAutoFit/>
+            </a:bodyPr>
+            <a:lstStyle>
+              <a:defPPr>
+                <a:defRPr lang="en-US"/>
+              </a:defPPr>
+              <a:lvl1pPr>
+                <a:defRPr sz="700"/>
+              </a:lvl1pPr>
+            </a:lstStyle>
+            <a:p>
+              <a:r>
+                <a:rPr lang="en-US" noProof="1"/>
+                <a:t>Dim 3</a:t>
+              </a:r>
+            </a:p>
+          </p:txBody>
+        </p:sp>
+        <mc:AlternateContent xmlns:mc="http://schemas.openxmlformats.org/markup-compatibility/2006" xmlns:a14="http://schemas.microsoft.com/office/drawing/2010/main">
+          <mc:Choice Requires="a14">
+            <p:sp>
+              <p:nvSpPr>
+                <p:cNvPr id="1068" name="CuadroTexto 1067">
+                  <a:extLst>
+                    <a:ext uri="{FF2B5EF4-FFF2-40B4-BE49-F238E27FC236}">
+                      <a16:creationId xmlns:a16="http://schemas.microsoft.com/office/drawing/2014/main" id="{B9C10625-41F6-2217-7AF5-F1301949B2BE}"/>
+                    </a:ext>
+                  </a:extLst>
+                </p:cNvPr>
+                <p:cNvSpPr txBox="1"/>
+                <p:nvPr/>
+              </p:nvSpPr>
+              <p:spPr>
+                <a:xfrm>
+                  <a:off x="9896949" y="5061989"/>
+                  <a:ext cx="883222" cy="374270"/>
+                </a:xfrm>
+                <a:prstGeom prst="rect">
+                  <a:avLst/>
+                </a:prstGeom>
+                <a:noFill/>
+              </p:spPr>
+              <p:txBody>
+                <a:bodyPr wrap="square">
+                  <a:spAutoFit/>
+                </a:bodyPr>
+                <a:lstStyle/>
+                <a:p>
+                  <a:pPr/>
+                  <a14:m>
+                    <m:oMathPara xmlns:m="http://schemas.openxmlformats.org/officeDocument/2006/math">
+                      <m:oMathParaPr>
+                        <m:jc m:val="centerGroup"/>
+                      </m:oMathParaPr>
+                      <m:oMath xmlns:m="http://schemas.openxmlformats.org/officeDocument/2006/math">
+                        <m:sSup>
+                          <m:sSupPr>
+                            <m:ctrlPr>
+                              <a:rPr lang="en-GB" i="1" smtClean="0">
+                                <a:latin typeface="Cambria Math" panose="02040503050406030204" pitchFamily="18" charset="0"/>
+                              </a:rPr>
+                            </m:ctrlPr>
+                          </m:sSupPr>
+                          <m:e>
+                            <m:r>
+                              <a:rPr lang="en-GB">
+                                <a:latin typeface="Cambria Math" panose="02040503050406030204" pitchFamily="18" charset="0"/>
+                              </a:rPr>
+                              <m:t>ℝ</m:t>
+                            </m:r>
+                          </m:e>
+                          <m:sup>
+                            <m:r>
+                              <a:rPr lang="es-ES" b="0" i="1" smtClean="0">
+                                <a:latin typeface="Cambria Math" panose="02040503050406030204" pitchFamily="18" charset="0"/>
+                              </a:rPr>
+                              <m:t>𝑘</m:t>
+                            </m:r>
+                          </m:sup>
+                        </m:sSup>
+                      </m:oMath>
+                    </m:oMathPara>
+                  </a14:m>
+                  <a:endParaRPr lang="en-GB" dirty="0"/>
+                </a:p>
+              </p:txBody>
+            </p:sp>
+          </mc:Choice>
+          <mc:Fallback xmlns="">
+            <p:sp>
+              <p:nvSpPr>
+                <p:cNvPr id="1068" name="CuadroTexto 1067">
+                  <a:extLst>
+                    <a:ext uri="{FF2B5EF4-FFF2-40B4-BE49-F238E27FC236}">
+                      <a16:creationId xmlns:a16="http://schemas.microsoft.com/office/drawing/2014/main" id="{B9C10625-41F6-2217-7AF5-F1301949B2BE}"/>
+                    </a:ext>
+                  </a:extLst>
+                </p:cNvPr>
+                <p:cNvSpPr txBox="1">
+                  <a:spLocks noRot="1" noChangeAspect="1" noMove="1" noResize="1" noEditPoints="1" noAdjustHandles="1" noChangeArrowheads="1" noChangeShapeType="1" noTextEdit="1"/>
+                </p:cNvSpPr>
+                <p:nvPr/>
+              </p:nvSpPr>
+              <p:spPr>
+                <a:xfrm>
+                  <a:off x="9896949" y="5061989"/>
+                  <a:ext cx="883222" cy="374270"/>
+                </a:xfrm>
+                <a:prstGeom prst="rect">
+                  <a:avLst/>
+                </a:prstGeom>
+                <a:blipFill>
+                  <a:blip r:embed="rId14"/>
+                  <a:stretch>
+                    <a:fillRect/>
+                  </a:stretch>
+                </a:blipFill>
+              </p:spPr>
+              <p:txBody>
+                <a:bodyPr/>
+                <a:lstStyle/>
+                <a:p>
+                  <a:r>
+                    <a:rPr lang="en-GB">
+                      <a:noFill/>
+                    </a:rPr>
+                    <a:t> </a:t>
+                  </a:r>
+                </a:p>
+              </p:txBody>
+            </p:sp>
+          </mc:Fallback>
+        </mc:AlternateContent>
+      </p:grpSp>
+      <mc:AlternateContent xmlns:mc="http://schemas.openxmlformats.org/markup-compatibility/2006" xmlns:a14="http://schemas.microsoft.com/office/drawing/2010/main">
+        <mc:Choice Requires="a14">
+          <p:sp>
+            <p:nvSpPr>
+              <p:cNvPr id="1071" name="CuadroTexto 1070">
+                <a:extLst>
+                  <a:ext uri="{FF2B5EF4-FFF2-40B4-BE49-F238E27FC236}">
+                    <a16:creationId xmlns:a16="http://schemas.microsoft.com/office/drawing/2014/main" id="{7AA5FE89-C135-743C-F5FD-DDE00641107F}"/>
+                  </a:ext>
+                </a:extLst>
+              </p:cNvPr>
+              <p:cNvSpPr txBox="1"/>
+              <p:nvPr/>
+            </p:nvSpPr>
+            <p:spPr>
+              <a:xfrm>
+                <a:off x="3452849" y="5427373"/>
+                <a:ext cx="1261654" cy="523220"/>
+              </a:xfrm>
+              <a:prstGeom prst="rect">
+                <a:avLst/>
+              </a:prstGeom>
+              <a:noFill/>
+            </p:spPr>
+            <p:txBody>
+              <a:bodyPr wrap="square" rtlCol="0">
+                <a:spAutoFit/>
+              </a:bodyPr>
+              <a:lstStyle/>
+              <a:p>
+                <a:pPr algn="ctr"/>
+                <a:r>
+                  <a:rPr lang="en-US" sz="1400" b="1" noProof="1">
+                    <a:latin typeface="Calibri" panose="020F0502020204030204" pitchFamily="34" charset="0"/>
+                    <a:ea typeface="Calibri" panose="020F0502020204030204" pitchFamily="34" charset="0"/>
+                    <a:cs typeface="Calibri" panose="020F0502020204030204" pitchFamily="34" charset="0"/>
+                  </a:rPr>
+                  <a:t>Embedder</a:t>
+                </a:r>
+              </a:p>
+              <a:p>
+                <a:pPr algn="ctr"/>
+                <a14:m>
+                  <m:oMathPara xmlns:m="http://schemas.openxmlformats.org/officeDocument/2006/math">
+                    <m:oMathParaPr>
+                      <m:jc m:val="centerGroup"/>
+                    </m:oMathParaPr>
+                    <m:oMath xmlns:m="http://schemas.openxmlformats.org/officeDocument/2006/math">
+                      <m:sSub>
+                        <m:sSubPr>
+                          <m:ctrlPr>
+                            <a:rPr lang="en-GB" sz="1400" i="1">
+                              <a:latin typeface="Cambria Math" panose="02040503050406030204" pitchFamily="18" charset="0"/>
+                            </a:rPr>
+                          </m:ctrlPr>
+                        </m:sSubPr>
+                        <m:e>
+                          <m:r>
+                            <a:rPr lang="en-GB" sz="1400" i="1">
+                              <a:latin typeface="Cambria Math" panose="02040503050406030204" pitchFamily="18" charset="0"/>
+                            </a:rPr>
+                            <m:t>𝑓</m:t>
+                          </m:r>
+                        </m:e>
+                        <m:sub>
+                          <m:r>
+                            <a:rPr lang="en-GB" sz="1400" i="1">
+                              <a:latin typeface="Cambria Math" panose="02040503050406030204" pitchFamily="18" charset="0"/>
+                            </a:rPr>
+                            <m:t>𝜃</m:t>
+                          </m:r>
+                        </m:sub>
+                      </m:sSub>
+                    </m:oMath>
+                  </m:oMathPara>
+                </a14:m>
+                <a:endParaRPr lang="en-US" sz="1400" b="1" noProof="1">
+                  <a:latin typeface="Calibri" panose="020F0502020204030204" pitchFamily="34" charset="0"/>
+                  <a:ea typeface="Calibri" panose="020F0502020204030204" pitchFamily="34" charset="0"/>
+                  <a:cs typeface="Calibri" panose="020F0502020204030204" pitchFamily="34" charset="0"/>
+                </a:endParaRPr>
+              </a:p>
+            </p:txBody>
+          </p:sp>
+        </mc:Choice>
+        <mc:Fallback xmlns="">
+          <p:sp>
+            <p:nvSpPr>
+              <p:cNvPr id="1071" name="CuadroTexto 1070">
+                <a:extLst>
+                  <a:ext uri="{FF2B5EF4-FFF2-40B4-BE49-F238E27FC236}">
+                    <a16:creationId xmlns:a16="http://schemas.microsoft.com/office/drawing/2014/main" id="{7AA5FE89-C135-743C-F5FD-DDE00641107F}"/>
+                  </a:ext>
+                </a:extLst>
+              </p:cNvPr>
+              <p:cNvSpPr txBox="1">
+                <a:spLocks noRot="1" noChangeAspect="1" noMove="1" noResize="1" noEditPoints="1" noAdjustHandles="1" noChangeArrowheads="1" noChangeShapeType="1" noTextEdit="1"/>
+              </p:cNvSpPr>
+              <p:nvPr/>
+            </p:nvSpPr>
+            <p:spPr>
+              <a:xfrm>
+                <a:off x="3452849" y="5427373"/>
+                <a:ext cx="1261654" cy="523220"/>
+              </a:xfrm>
+              <a:prstGeom prst="rect">
+                <a:avLst/>
+              </a:prstGeom>
+              <a:blipFill>
+                <a:blip r:embed="rId15"/>
+                <a:stretch>
+                  <a:fillRect t="-1163" b="-3488"/>
+                </a:stretch>
+              </a:blipFill>
+            </p:spPr>
+            <p:txBody>
+              <a:bodyPr/>
+              <a:lstStyle/>
+              <a:p>
+                <a:r>
+                  <a:rPr lang="en-GB">
+                    <a:noFill/>
+                  </a:rPr>
+                  <a:t> </a:t>
+                </a:r>
+              </a:p>
+            </p:txBody>
+          </p:sp>
+        </mc:Fallback>
+      </mc:AlternateContent>
+      <mc:AlternateContent xmlns:mc="http://schemas.openxmlformats.org/markup-compatibility/2006" xmlns:a14="http://schemas.microsoft.com/office/drawing/2010/main">
+        <mc:Choice Requires="a14">
+          <p:sp>
+            <p:nvSpPr>
+              <p:cNvPr id="1073" name="CuadroTexto 1072">
+                <a:extLst>
+                  <a:ext uri="{FF2B5EF4-FFF2-40B4-BE49-F238E27FC236}">
+                    <a16:creationId xmlns:a16="http://schemas.microsoft.com/office/drawing/2014/main" id="{897A4D00-6302-83EF-B51F-2FC39C43F804}"/>
+                  </a:ext>
+                </a:extLst>
+              </p:cNvPr>
+              <p:cNvSpPr txBox="1"/>
+              <p:nvPr/>
+            </p:nvSpPr>
+            <p:spPr>
+              <a:xfrm>
+                <a:off x="7391927" y="5927450"/>
+                <a:ext cx="1339913" cy="769441"/>
+              </a:xfrm>
+              <a:prstGeom prst="rect">
+                <a:avLst/>
+              </a:prstGeom>
+              <a:noFill/>
+            </p:spPr>
+            <p:txBody>
+              <a:bodyPr wrap="square" rtlCol="0">
+                <a:spAutoFit/>
+              </a:bodyPr>
+              <a:lstStyle/>
+              <a:p>
+                <a:r>
+                  <a:rPr lang="en-US" sz="1100" b="1" noProof="1">
+                    <a:latin typeface="Calibri" panose="020F0502020204030204" pitchFamily="34" charset="0"/>
+                    <a:ea typeface="Calibri" panose="020F0502020204030204" pitchFamily="34" charset="0"/>
+                    <a:cs typeface="Calibri" panose="020F0502020204030204" pitchFamily="34" charset="0"/>
+                  </a:rPr>
+                  <a:t>• Fixed length (</a:t>
+                </a:r>
+                <a14:m>
+                  <m:oMath xmlns:m="http://schemas.openxmlformats.org/officeDocument/2006/math">
+                    <m:r>
+                      <a:rPr lang="es-ES" sz="1100" b="1" i="1">
+                        <a:latin typeface="Cambria Math" panose="02040503050406030204" pitchFamily="18" charset="0"/>
+                      </a:rPr>
+                      <m:t>𝒏</m:t>
+                    </m:r>
+                  </m:oMath>
+                </a14:m>
+                <a:r>
+                  <a:rPr lang="en-US" sz="1100" b="1" noProof="1">
+                    <a:latin typeface="Calibri" panose="020F0502020204030204" pitchFamily="34" charset="0"/>
+                    <a:ea typeface="Calibri" panose="020F0502020204030204" pitchFamily="34" charset="0"/>
+                    <a:cs typeface="Calibri" panose="020F0502020204030204" pitchFamily="34" charset="0"/>
+                  </a:rPr>
+                  <a:t>)</a:t>
+                </a:r>
+              </a:p>
+              <a:p>
+                <a:r>
+                  <a:rPr lang="en-GB" sz="1100" b="1" noProof="1">
+                    <a:latin typeface="Calibri" panose="020F0502020204030204" pitchFamily="34" charset="0"/>
+                    <a:ea typeface="Calibri" panose="020F0502020204030204" pitchFamily="34" charset="0"/>
+                    <a:cs typeface="Calibri" panose="020F0502020204030204" pitchFamily="34" charset="0"/>
+                  </a:rPr>
+                  <a:t>• Obscure</a:t>
+                </a:r>
+              </a:p>
+              <a:p>
+                <a:r>
+                  <a:rPr lang="en-GB" sz="1100" b="1" noProof="1">
+                    <a:latin typeface="Calibri" panose="020F0502020204030204" pitchFamily="34" charset="0"/>
+                    <a:ea typeface="Calibri" panose="020F0502020204030204" pitchFamily="34" charset="0"/>
+                    <a:cs typeface="Calibri" panose="020F0502020204030204" pitchFamily="34" charset="0"/>
+                  </a:rPr>
+                  <a:t>• Dense</a:t>
+                </a:r>
+              </a:p>
+              <a:p>
+                <a:r>
+                  <a:rPr lang="en-GB" sz="1100" b="1" noProof="1">
+                    <a:latin typeface="Calibri" panose="020F0502020204030204" pitchFamily="34" charset="0"/>
+                    <a:ea typeface="Calibri" panose="020F0502020204030204" pitchFamily="34" charset="0"/>
+                    <a:cs typeface="Calibri" panose="020F0502020204030204" pitchFamily="34" charset="0"/>
+                  </a:rPr>
+                  <a:t>• Continuous</a:t>
+                </a:r>
+              </a:p>
+            </p:txBody>
+          </p:sp>
+        </mc:Choice>
+        <mc:Fallback xmlns="">
+          <p:sp>
+            <p:nvSpPr>
+              <p:cNvPr id="1073" name="CuadroTexto 1072">
+                <a:extLst>
+                  <a:ext uri="{FF2B5EF4-FFF2-40B4-BE49-F238E27FC236}">
+                    <a16:creationId xmlns:a16="http://schemas.microsoft.com/office/drawing/2014/main" id="{897A4D00-6302-83EF-B51F-2FC39C43F804}"/>
+                  </a:ext>
+                </a:extLst>
+              </p:cNvPr>
+              <p:cNvSpPr txBox="1">
+                <a:spLocks noRot="1" noChangeAspect="1" noMove="1" noResize="1" noEditPoints="1" noAdjustHandles="1" noChangeArrowheads="1" noChangeShapeType="1" noTextEdit="1"/>
+              </p:cNvSpPr>
+              <p:nvPr/>
+            </p:nvSpPr>
+            <p:spPr>
+              <a:xfrm>
+                <a:off x="7391927" y="5927450"/>
+                <a:ext cx="1339913" cy="769441"/>
+              </a:xfrm>
+              <a:prstGeom prst="rect">
+                <a:avLst/>
+              </a:prstGeom>
+              <a:blipFill>
+                <a:blip r:embed="rId16"/>
+                <a:stretch>
+                  <a:fillRect b="-3937"/>
+                </a:stretch>
+              </a:blipFill>
+            </p:spPr>
+            <p:txBody>
+              <a:bodyPr/>
+              <a:lstStyle/>
+              <a:p>
+                <a:r>
+                  <a:rPr lang="en-GB">
+                    <a:noFill/>
+                  </a:rPr>
+                  <a:t> </a:t>
+                </a:r>
+              </a:p>
+            </p:txBody>
+          </p:sp>
+        </mc:Fallback>
+      </mc:AlternateContent>
+      <mc:AlternateContent xmlns:mc="http://schemas.openxmlformats.org/markup-compatibility/2006" xmlns:a14="http://schemas.microsoft.com/office/drawing/2010/main">
+        <mc:Choice Requires="a14">
+          <p:sp>
+            <p:nvSpPr>
+              <p:cNvPr id="1075" name="CuadroTexto 1074">
+                <a:extLst>
+                  <a:ext uri="{FF2B5EF4-FFF2-40B4-BE49-F238E27FC236}">
+                    <a16:creationId xmlns:a16="http://schemas.microsoft.com/office/drawing/2014/main" id="{5882E7B7-6110-BB3E-2988-4EA9DE2A0E5F}"/>
+                  </a:ext>
+                </a:extLst>
+              </p:cNvPr>
+              <p:cNvSpPr txBox="1"/>
+              <p:nvPr/>
+            </p:nvSpPr>
+            <p:spPr>
+              <a:xfrm>
+                <a:off x="9071626" y="5395786"/>
+                <a:ext cx="635962" cy="374270"/>
+              </a:xfrm>
+              <a:prstGeom prst="rect">
+                <a:avLst/>
+              </a:prstGeom>
+              <a:noFill/>
+            </p:spPr>
+            <p:txBody>
+              <a:bodyPr wrap="square" rtlCol="0">
+                <a:spAutoFit/>
+              </a:bodyPr>
+              <a:lstStyle/>
+              <a:p>
+                <a:pPr/>
+                <a14:m>
+                  <m:oMathPara xmlns:m="http://schemas.openxmlformats.org/officeDocument/2006/math">
+                    <m:oMathParaPr>
+                      <m:jc m:val="centerGroup"/>
+                    </m:oMathParaPr>
+                    <m:oMath xmlns:m="http://schemas.openxmlformats.org/officeDocument/2006/math">
+                      <m:sSup>
+                        <m:sSupPr>
+                          <m:ctrlPr>
+                            <a:rPr lang="en-GB" i="1" smtClean="0">
+                              <a:latin typeface="Cambria Math" panose="02040503050406030204" pitchFamily="18" charset="0"/>
+                            </a:rPr>
+                          </m:ctrlPr>
+                        </m:sSupPr>
+                        <m:e>
+                          <m:r>
+                            <m:rPr>
+                              <m:sty m:val="p"/>
+                            </m:rPr>
+                            <a:rPr lang="es-ES" b="0" i="0" smtClean="0">
+                              <a:latin typeface="Cambria Math" panose="02040503050406030204" pitchFamily="18" charset="0"/>
+                            </a:rPr>
+                            <m:t>z</m:t>
+                          </m:r>
+                          <m:r>
+                            <a:rPr lang="es-ES" b="0" i="0" smtClean="0">
+                              <a:latin typeface="Cambria Math" panose="02040503050406030204" pitchFamily="18" charset="0"/>
+                            </a:rPr>
+                            <m:t> </m:t>
+                          </m:r>
+                          <m:r>
+                            <m:rPr>
+                              <m:sty m:val="p"/>
+                            </m:rPr>
+                            <a:rPr lang="el-GR" b="0" i="1" smtClean="0">
+                              <a:latin typeface="Cambria Math" panose="02040503050406030204" pitchFamily="18" charset="0"/>
+                              <a:ea typeface="Cambria Math" panose="02040503050406030204" pitchFamily="18" charset="0"/>
+                            </a:rPr>
+                            <m:t>ϵ</m:t>
+                          </m:r>
+                          <m:r>
+                            <a:rPr lang="es-ES" b="0" i="1" smtClean="0">
+                              <a:latin typeface="Cambria Math" panose="02040503050406030204" pitchFamily="18" charset="0"/>
+                              <a:ea typeface="Cambria Math" panose="02040503050406030204" pitchFamily="18" charset="0"/>
+                            </a:rPr>
+                            <m:t> </m:t>
+                          </m:r>
+                          <m:r>
+                            <a:rPr lang="en-GB">
+                              <a:latin typeface="Cambria Math" panose="02040503050406030204" pitchFamily="18" charset="0"/>
+                            </a:rPr>
+                            <m:t>ℝ</m:t>
+                          </m:r>
+                        </m:e>
+                        <m:sup>
+                          <m:r>
+                            <a:rPr lang="es-ES" b="0" i="1" smtClean="0">
+                              <a:latin typeface="Cambria Math" panose="02040503050406030204" pitchFamily="18" charset="0"/>
+                            </a:rPr>
+                            <m:t>𝑘</m:t>
+                          </m:r>
+                        </m:sup>
+                      </m:sSup>
+                    </m:oMath>
+                  </m:oMathPara>
+                </a14:m>
+                <a:endParaRPr lang="en-GB" dirty="0"/>
+              </a:p>
+            </p:txBody>
+          </p:sp>
+        </mc:Choice>
+        <mc:Fallback xmlns="">
+          <p:sp>
+            <p:nvSpPr>
+              <p:cNvPr id="1075" name="CuadroTexto 1074">
+                <a:extLst>
+                  <a:ext uri="{FF2B5EF4-FFF2-40B4-BE49-F238E27FC236}">
+                    <a16:creationId xmlns:a16="http://schemas.microsoft.com/office/drawing/2014/main" id="{5882E7B7-6110-BB3E-2988-4EA9DE2A0E5F}"/>
+                  </a:ext>
+                </a:extLst>
+              </p:cNvPr>
+              <p:cNvSpPr txBox="1">
+                <a:spLocks noRot="1" noChangeAspect="1" noMove="1" noResize="1" noEditPoints="1" noAdjustHandles="1" noChangeArrowheads="1" noChangeShapeType="1" noTextEdit="1"/>
+              </p:cNvSpPr>
+              <p:nvPr/>
+            </p:nvSpPr>
+            <p:spPr>
+              <a:xfrm>
+                <a:off x="9071626" y="5395786"/>
+                <a:ext cx="635962" cy="374270"/>
+              </a:xfrm>
+              <a:prstGeom prst="rect">
+                <a:avLst/>
+              </a:prstGeom>
+              <a:blipFill>
+                <a:blip r:embed="rId17"/>
+                <a:stretch>
+                  <a:fillRect r="-15385"/>
+                </a:stretch>
+              </a:blipFill>
+            </p:spPr>
+            <p:txBody>
+              <a:bodyPr/>
+              <a:lstStyle/>
+              <a:p>
+                <a:r>
+                  <a:rPr lang="en-GB">
+                    <a:noFill/>
+                  </a:rPr>
+                  <a:t> </a:t>
+                </a:r>
+              </a:p>
+            </p:txBody>
+          </p:sp>
+        </mc:Fallback>
+      </mc:AlternateContent>
+      <p:cxnSp>
+        <p:nvCxnSpPr>
+          <p:cNvPr id="1076" name="Conector recto de flecha 1075">
+            <a:extLst>
+              <a:ext uri="{FF2B5EF4-FFF2-40B4-BE49-F238E27FC236}">
+                <a16:creationId xmlns:a16="http://schemas.microsoft.com/office/drawing/2014/main" id="{B1301A2F-53FB-B1D4-4902-44CE14A54D87}"/>
+              </a:ext>
+            </a:extLst>
+          </p:cNvPr>
+          <p:cNvCxnSpPr>
+            <a:cxnSpLocks/>
+          </p:cNvCxnSpPr>
+          <p:nvPr/>
+        </p:nvCxnSpPr>
+        <p:spPr>
+          <a:xfrm>
+            <a:off x="9009519" y="5737387"/>
+            <a:ext cx="908988" cy="6664"/>
+          </a:xfrm>
+          <a:prstGeom prst="straightConnector1">
+            <a:avLst/>
+          </a:prstGeom>
+          <a:ln>
+            <a:tailEnd type="triangle"/>
+          </a:ln>
+        </p:spPr>
+        <p:style>
+          <a:lnRef idx="2">
+            <a:schemeClr val="dk1"/>
+          </a:lnRef>
+          <a:fillRef idx="0">
+            <a:schemeClr val="dk1"/>
+          </a:fillRef>
+          <a:effectRef idx="1">
+            <a:schemeClr val="dk1"/>
+          </a:effectRef>
+          <a:fontRef idx="minor">
+            <a:schemeClr val="tx1"/>
+          </a:fontRef>
+        </p:style>
+      </p:cxnSp>
+      <p:sp>
+        <p:nvSpPr>
+          <p:cNvPr id="1079" name="Elipse 1078">
+            <a:extLst>
+              <a:ext uri="{FF2B5EF4-FFF2-40B4-BE49-F238E27FC236}">
+                <a16:creationId xmlns:a16="http://schemas.microsoft.com/office/drawing/2014/main" id="{9CDD35AF-0284-96B3-3A9E-9F985A4DECB5}"/>
+              </a:ext>
+            </a:extLst>
+          </p:cNvPr>
+          <p:cNvSpPr/>
+          <p:nvPr/>
+        </p:nvSpPr>
+        <p:spPr>
+          <a:xfrm>
+            <a:off x="10784681" y="5983718"/>
+            <a:ext cx="76015" cy="73004"/>
+          </a:xfrm>
+          <a:prstGeom prst="ellipse">
+            <a:avLst/>
+          </a:prstGeom>
+          <a:solidFill>
+            <a:srgbClr val="78206E"/>
+          </a:solidFill>
+          <a:ln w="6350">
+            <a:solidFill>
+              <a:schemeClr val="tx1"/>
+            </a:solidFill>
+          </a:ln>
+        </p:spPr>
+        <p:style>
+          <a:lnRef idx="2">
+            <a:schemeClr val="accent1">
+              <a:shade val="15000"/>
+            </a:schemeClr>
+          </a:lnRef>
+          <a:fillRef idx="1">
+            <a:schemeClr val="accent1"/>
+          </a:fillRef>
+          <a:effectRef idx="0">
+            <a:schemeClr val="accent1"/>
+          </a:effectRef>
+          <a:fontRef idx="minor">
+            <a:schemeClr val="lt1"/>
+          </a:fontRef>
+        </p:style>
+        <p:txBody>
+          <a:bodyPr rtlCol="0" anchor="ctr"/>
+          <a:lstStyle/>
+          <a:p>
+            <a:pPr algn="ctr"/>
+            <a:endParaRPr lang="en-US" noProof="1">
+              <a:solidFill>
+                <a:srgbClr val="78206E"/>
+              </a:solidFill>
+            </a:endParaRPr>
+          </a:p>
+        </p:txBody>
+      </p:sp>
+      <p:sp>
+        <p:nvSpPr>
+          <p:cNvPr id="1082" name="CuadroTexto 1081">
+            <a:extLst>
+              <a:ext uri="{FF2B5EF4-FFF2-40B4-BE49-F238E27FC236}">
+                <a16:creationId xmlns:a16="http://schemas.microsoft.com/office/drawing/2014/main" id="{8D918043-6CE0-2B47-30E8-9FDE4F38BE59}"/>
+              </a:ext>
+            </a:extLst>
+          </p:cNvPr>
+          <p:cNvSpPr txBox="1"/>
+          <p:nvPr/>
+        </p:nvSpPr>
+        <p:spPr>
+          <a:xfrm>
+            <a:off x="10747397" y="6004777"/>
+            <a:ext cx="656929" cy="215444"/>
+          </a:xfrm>
+          <a:prstGeom prst="rect">
+            <a:avLst/>
+          </a:prstGeom>
+          <a:noFill/>
+        </p:spPr>
+        <p:txBody>
+          <a:bodyPr wrap="square">
+            <a:spAutoFit/>
+          </a:bodyPr>
+          <a:lstStyle/>
+          <a:p>
+            <a:r>
+              <a:rPr lang="en-US" sz="800" b="1" noProof="1">
+                <a:solidFill>
+                  <a:srgbClr val="78206E"/>
+                </a:solidFill>
+                <a:latin typeface="Calibri" panose="020F0502020204030204" pitchFamily="34" charset="0"/>
+                <a:ea typeface="Calibri" panose="020F0502020204030204" pitchFamily="34" charset="0"/>
+                <a:cs typeface="Calibri" panose="020F0502020204030204" pitchFamily="34" charset="0"/>
+              </a:rPr>
+              <a:t>Ibuprofen</a:t>
+            </a:r>
+            <a:endParaRPr lang="en-GB" sz="800" dirty="0"/>
+          </a:p>
+        </p:txBody>
+      </p:sp>
+      <p:grpSp>
+        <p:nvGrpSpPr>
+          <p:cNvPr id="5" name="Grupo 4">
+            <a:extLst>
+              <a:ext uri="{FF2B5EF4-FFF2-40B4-BE49-F238E27FC236}">
+                <a16:creationId xmlns:a16="http://schemas.microsoft.com/office/drawing/2014/main" id="{1370DFA1-252A-F32B-FB64-E2D0B34626F5}"/>
+              </a:ext>
+            </a:extLst>
+          </p:cNvPr>
+          <p:cNvGrpSpPr/>
+          <p:nvPr/>
+        </p:nvGrpSpPr>
+        <p:grpSpPr>
+          <a:xfrm>
+            <a:off x="5392664" y="2836104"/>
+            <a:ext cx="5408529" cy="1227381"/>
+            <a:chOff x="5392664" y="2836104"/>
+            <a:chExt cx="5408529" cy="1227381"/>
+          </a:xfrm>
+        </p:grpSpPr>
+        <p:pic>
+          <p:nvPicPr>
+            <p:cNvPr id="3" name="Imagen 2">
+              <a:extLst>
+                <a:ext uri="{FF2B5EF4-FFF2-40B4-BE49-F238E27FC236}">
+                  <a16:creationId xmlns:a16="http://schemas.microsoft.com/office/drawing/2014/main" id="{6D7ADA22-65AA-0476-31B9-05EC1314604C}"/>
+                </a:ext>
+              </a:extLst>
+            </p:cNvPr>
+            <p:cNvPicPr>
+              <a:picLocks noChangeAspect="1"/>
+            </p:cNvPicPr>
+            <p:nvPr/>
+          </p:nvPicPr>
+          <p:blipFill>
+            <a:blip r:embed="rId18"/>
+            <a:stretch>
+              <a:fillRect/>
+            </a:stretch>
+          </p:blipFill>
+          <p:spPr>
+            <a:xfrm>
+              <a:off x="5392664" y="2836104"/>
+              <a:ext cx="1003307" cy="907911"/>
+            </a:xfrm>
+            <a:prstGeom prst="rect">
+              <a:avLst/>
+            </a:prstGeom>
+          </p:spPr>
+        </p:pic>
+        <p:pic>
+          <p:nvPicPr>
+            <p:cNvPr id="1049" name="Imagen 1048">
+              <a:extLst>
+                <a:ext uri="{FF2B5EF4-FFF2-40B4-BE49-F238E27FC236}">
+                  <a16:creationId xmlns:a16="http://schemas.microsoft.com/office/drawing/2014/main" id="{30171FFD-6E96-EC4B-C747-A41BBF61F4BE}"/>
+                </a:ext>
+              </a:extLst>
+            </p:cNvPr>
+            <p:cNvPicPr>
+              <a:picLocks noChangeAspect="1"/>
+            </p:cNvPicPr>
+            <p:nvPr/>
+          </p:nvPicPr>
+          <p:blipFill>
+            <a:blip r:embed="rId19"/>
+            <a:stretch>
+              <a:fillRect/>
+            </a:stretch>
+          </p:blipFill>
+          <p:spPr>
+            <a:xfrm>
+              <a:off x="9408222" y="2877502"/>
+              <a:ext cx="1049161" cy="888087"/>
+            </a:xfrm>
+            <a:prstGeom prst="rect">
+              <a:avLst/>
+            </a:prstGeom>
+          </p:spPr>
+        </p:pic>
+        <p:pic>
+          <p:nvPicPr>
+            <p:cNvPr id="1047" name="Imagen 1046">
+              <a:extLst>
+                <a:ext uri="{FF2B5EF4-FFF2-40B4-BE49-F238E27FC236}">
+                  <a16:creationId xmlns:a16="http://schemas.microsoft.com/office/drawing/2014/main" id="{8CEF6736-A743-0551-D7BF-84D678EEDC1A}"/>
+                </a:ext>
+              </a:extLst>
+            </p:cNvPr>
+            <p:cNvPicPr>
+              <a:picLocks noChangeAspect="1"/>
+            </p:cNvPicPr>
+            <p:nvPr/>
+          </p:nvPicPr>
+          <p:blipFill>
+            <a:blip r:embed="rId20"/>
+            <a:stretch>
+              <a:fillRect/>
+            </a:stretch>
+          </p:blipFill>
+          <p:spPr>
+            <a:xfrm>
+              <a:off x="8534663" y="2952481"/>
+              <a:ext cx="956235" cy="824037"/>
+            </a:xfrm>
+            <a:prstGeom prst="rect">
+              <a:avLst/>
+            </a:prstGeom>
+          </p:spPr>
+        </p:pic>
+        <p:pic>
+          <p:nvPicPr>
+            <p:cNvPr id="1045" name="Imagen 1044">
+              <a:extLst>
+                <a:ext uri="{FF2B5EF4-FFF2-40B4-BE49-F238E27FC236}">
+                  <a16:creationId xmlns:a16="http://schemas.microsoft.com/office/drawing/2014/main" id="{EB889269-FF30-2244-8F87-31E5200D8F67}"/>
+                </a:ext>
+              </a:extLst>
+            </p:cNvPr>
+            <p:cNvPicPr>
+              <a:picLocks noChangeAspect="1"/>
+            </p:cNvPicPr>
+            <p:nvPr/>
+          </p:nvPicPr>
+          <p:blipFill>
+            <a:blip r:embed="rId21"/>
+            <a:stretch>
+              <a:fillRect/>
+            </a:stretch>
+          </p:blipFill>
+          <p:spPr>
+            <a:xfrm>
+              <a:off x="7385846" y="2844906"/>
+              <a:ext cx="1087584" cy="918090"/>
+            </a:xfrm>
+            <a:prstGeom prst="rect">
+              <a:avLst/>
+            </a:prstGeom>
+          </p:spPr>
+        </p:pic>
+        <p:pic>
+          <p:nvPicPr>
+            <p:cNvPr id="1037" name="Imagen 1036">
+              <a:extLst>
+                <a:ext uri="{FF2B5EF4-FFF2-40B4-BE49-F238E27FC236}">
+                  <a16:creationId xmlns:a16="http://schemas.microsoft.com/office/drawing/2014/main" id="{D7213B68-699B-F83E-49D5-3499F6AF3128}"/>
+                </a:ext>
+              </a:extLst>
+            </p:cNvPr>
+            <p:cNvPicPr>
+              <a:picLocks noChangeAspect="1"/>
+            </p:cNvPicPr>
+            <p:nvPr/>
+          </p:nvPicPr>
+          <p:blipFill>
+            <a:blip r:embed="rId22"/>
+            <a:stretch>
+              <a:fillRect/>
+            </a:stretch>
+          </p:blipFill>
+          <p:spPr>
+            <a:xfrm>
+              <a:off x="6514800" y="2934392"/>
+              <a:ext cx="868533" cy="752729"/>
+            </a:xfrm>
+            <a:prstGeom prst="rect">
+              <a:avLst/>
+            </a:prstGeom>
+          </p:spPr>
+        </p:pic>
+        <p:sp>
+          <p:nvSpPr>
+            <p:cNvPr id="57" name="Rectángulo 56">
+              <a:extLst>
+                <a:ext uri="{FF2B5EF4-FFF2-40B4-BE49-F238E27FC236}">
+                  <a16:creationId xmlns:a16="http://schemas.microsoft.com/office/drawing/2014/main" id="{E3530447-450B-73E4-A0B3-9E6792B0B693}"/>
+                </a:ext>
+              </a:extLst>
+            </p:cNvPr>
+            <p:cNvSpPr/>
+            <p:nvPr/>
+          </p:nvSpPr>
+          <p:spPr>
+            <a:xfrm>
+              <a:off x="7085063" y="3757035"/>
+              <a:ext cx="337830" cy="306450"/>
+            </a:xfrm>
+            <a:prstGeom prst="rect">
+              <a:avLst/>
+            </a:prstGeom>
+            <a:ln/>
+          </p:spPr>
+          <p:style>
+            <a:lnRef idx="1">
+              <a:schemeClr val="dk1"/>
+            </a:lnRef>
+            <a:fillRef idx="2">
+              <a:schemeClr val="dk1"/>
+            </a:fillRef>
+            <a:effectRef idx="1">
+              <a:schemeClr val="dk1"/>
+            </a:effectRef>
+            <a:fontRef idx="minor">
+              <a:schemeClr val="dk1"/>
+            </a:fontRef>
+          </p:style>
+          <p:txBody>
+            <a:bodyPr rtlCol="0" anchor="ctr"/>
+            <a:lstStyle/>
+            <a:p>
+              <a:pPr algn="ctr"/>
+              <a:r>
+                <a:rPr lang="en-US" sz="1100" noProof="1"/>
+                <a:t>0</a:t>
+              </a:r>
+            </a:p>
+          </p:txBody>
+        </p:sp>
+        <p:sp>
+          <p:nvSpPr>
+            <p:cNvPr id="58" name="Rectángulo 57">
+              <a:extLst>
+                <a:ext uri="{FF2B5EF4-FFF2-40B4-BE49-F238E27FC236}">
+                  <a16:creationId xmlns:a16="http://schemas.microsoft.com/office/drawing/2014/main" id="{D6A46203-80E3-A713-536F-7F7649F924EE}"/>
+                </a:ext>
+              </a:extLst>
+            </p:cNvPr>
+            <p:cNvSpPr/>
+            <p:nvPr/>
+          </p:nvSpPr>
+          <p:spPr>
+            <a:xfrm>
+              <a:off x="7422893" y="3757035"/>
+              <a:ext cx="337830" cy="306450"/>
+            </a:xfrm>
+            <a:prstGeom prst="rect">
+              <a:avLst/>
+            </a:prstGeom>
+            <a:ln/>
+          </p:spPr>
+          <p:style>
+            <a:lnRef idx="1">
+              <a:schemeClr val="dk1"/>
+            </a:lnRef>
+            <a:fillRef idx="2">
+              <a:schemeClr val="dk1"/>
+            </a:fillRef>
+            <a:effectRef idx="1">
+              <a:schemeClr val="dk1"/>
+            </a:effectRef>
+            <a:fontRef idx="minor">
+              <a:schemeClr val="dk1"/>
+            </a:fontRef>
+          </p:style>
+          <p:txBody>
+            <a:bodyPr rtlCol="0" anchor="ctr"/>
+            <a:lstStyle/>
+            <a:p>
+              <a:pPr algn="ctr"/>
+              <a:r>
+                <a:rPr lang="en-US" sz="1100" noProof="1"/>
+                <a:t>0</a:t>
+              </a:r>
+            </a:p>
+          </p:txBody>
+        </p:sp>
+        <p:sp>
+          <p:nvSpPr>
+            <p:cNvPr id="1029" name="Rectángulo 1028">
+              <a:extLst>
+                <a:ext uri="{FF2B5EF4-FFF2-40B4-BE49-F238E27FC236}">
+                  <a16:creationId xmlns:a16="http://schemas.microsoft.com/office/drawing/2014/main" id="{EFE7F150-310D-5F3D-26A6-43FAEBCBFD96}"/>
+                </a:ext>
+              </a:extLst>
+            </p:cNvPr>
+            <p:cNvSpPr/>
+            <p:nvPr/>
+          </p:nvSpPr>
+          <p:spPr>
+            <a:xfrm>
+              <a:off x="8098553" y="3757035"/>
+              <a:ext cx="337830" cy="306450"/>
+            </a:xfrm>
+            <a:prstGeom prst="rect">
+              <a:avLst/>
+            </a:prstGeom>
+            <a:ln/>
+          </p:spPr>
+          <p:style>
+            <a:lnRef idx="1">
+              <a:schemeClr val="dk1"/>
+            </a:lnRef>
+            <a:fillRef idx="2">
+              <a:schemeClr val="dk1"/>
+            </a:fillRef>
+            <a:effectRef idx="1">
+              <a:schemeClr val="dk1"/>
+            </a:effectRef>
+            <a:fontRef idx="minor">
+              <a:schemeClr val="dk1"/>
+            </a:fontRef>
+          </p:style>
+          <p:txBody>
+            <a:bodyPr rtlCol="0" anchor="ctr"/>
+            <a:lstStyle/>
+            <a:p>
+              <a:pPr algn="ctr"/>
+              <a:r>
+                <a:rPr lang="en-US" sz="1100" noProof="1"/>
+                <a:t>0</a:t>
+              </a:r>
+            </a:p>
+          </p:txBody>
+        </p:sp>
+        <p:sp>
+          <p:nvSpPr>
+            <p:cNvPr id="1030" name="Rectángulo 1029">
+              <a:extLst>
+                <a:ext uri="{FF2B5EF4-FFF2-40B4-BE49-F238E27FC236}">
+                  <a16:creationId xmlns:a16="http://schemas.microsoft.com/office/drawing/2014/main" id="{C2B690CC-90DF-899E-A66B-CAE6ACFDE4AA}"/>
+                </a:ext>
+              </a:extLst>
+            </p:cNvPr>
+            <p:cNvSpPr/>
+            <p:nvPr/>
+          </p:nvSpPr>
+          <p:spPr>
+            <a:xfrm>
+              <a:off x="8436383" y="3757035"/>
+              <a:ext cx="337830" cy="306450"/>
+            </a:xfrm>
+            <a:prstGeom prst="rect">
+              <a:avLst/>
+            </a:prstGeom>
+            <a:ln/>
+          </p:spPr>
+          <p:style>
+            <a:lnRef idx="1">
+              <a:schemeClr val="dk1"/>
+            </a:lnRef>
+            <a:fillRef idx="2">
+              <a:schemeClr val="dk1"/>
+            </a:fillRef>
+            <a:effectRef idx="1">
+              <a:schemeClr val="dk1"/>
+            </a:effectRef>
+            <a:fontRef idx="minor">
+              <a:schemeClr val="dk1"/>
+            </a:fontRef>
+          </p:style>
+          <p:txBody>
+            <a:bodyPr rtlCol="0" anchor="ctr"/>
+            <a:lstStyle/>
+            <a:p>
+              <a:pPr algn="ctr"/>
+              <a:r>
+                <a:rPr lang="en-US" sz="1100" noProof="1"/>
+                <a:t>0</a:t>
+              </a:r>
+            </a:p>
+          </p:txBody>
+        </p:sp>
+        <p:sp>
+          <p:nvSpPr>
+            <p:cNvPr id="1032" name="Rectángulo 1031">
+              <a:extLst>
+                <a:ext uri="{FF2B5EF4-FFF2-40B4-BE49-F238E27FC236}">
+                  <a16:creationId xmlns:a16="http://schemas.microsoft.com/office/drawing/2014/main" id="{1A6470AC-E948-7F3E-0300-2F511AF6A0C2}"/>
+                </a:ext>
+              </a:extLst>
+            </p:cNvPr>
+            <p:cNvSpPr/>
+            <p:nvPr/>
+          </p:nvSpPr>
+          <p:spPr>
+            <a:xfrm>
+              <a:off x="9112043" y="3757035"/>
+              <a:ext cx="337830" cy="306450"/>
+            </a:xfrm>
+            <a:prstGeom prst="rect">
+              <a:avLst/>
+            </a:prstGeom>
+            <a:ln/>
+          </p:spPr>
+          <p:style>
+            <a:lnRef idx="1">
+              <a:schemeClr val="dk1"/>
+            </a:lnRef>
+            <a:fillRef idx="2">
+              <a:schemeClr val="dk1"/>
+            </a:fillRef>
+            <a:effectRef idx="1">
+              <a:schemeClr val="dk1"/>
+            </a:effectRef>
+            <a:fontRef idx="minor">
+              <a:schemeClr val="dk1"/>
+            </a:fontRef>
+          </p:style>
+          <p:txBody>
+            <a:bodyPr rtlCol="0" anchor="ctr"/>
+            <a:lstStyle/>
+            <a:p>
+              <a:pPr algn="ctr"/>
+              <a:r>
+                <a:rPr lang="en-US" sz="1100" noProof="1"/>
+                <a:t>0</a:t>
+              </a:r>
+            </a:p>
+          </p:txBody>
+        </p:sp>
+        <p:sp>
+          <p:nvSpPr>
+            <p:cNvPr id="1024" name="Rectángulo 1023">
+              <a:extLst>
+                <a:ext uri="{FF2B5EF4-FFF2-40B4-BE49-F238E27FC236}">
+                  <a16:creationId xmlns:a16="http://schemas.microsoft.com/office/drawing/2014/main" id="{59E1345C-7BDA-E379-3647-F1A6B91E89C9}"/>
+                </a:ext>
+              </a:extLst>
+            </p:cNvPr>
+            <p:cNvSpPr/>
+            <p:nvPr/>
+          </p:nvSpPr>
+          <p:spPr>
+            <a:xfrm>
+              <a:off x="9449873" y="3757035"/>
+              <a:ext cx="337830" cy="306450"/>
+            </a:xfrm>
+            <a:prstGeom prst="rect">
+              <a:avLst/>
+            </a:prstGeom>
+            <a:ln/>
+          </p:spPr>
+          <p:style>
+            <a:lnRef idx="1">
+              <a:schemeClr val="dk1"/>
+            </a:lnRef>
+            <a:fillRef idx="2">
+              <a:schemeClr val="dk1"/>
+            </a:fillRef>
+            <a:effectRef idx="1">
+              <a:schemeClr val="dk1"/>
+            </a:effectRef>
+            <a:fontRef idx="minor">
+              <a:schemeClr val="dk1"/>
+            </a:fontRef>
+          </p:style>
+          <p:txBody>
+            <a:bodyPr rtlCol="0" anchor="ctr"/>
+            <a:lstStyle/>
+            <a:p>
+              <a:pPr algn="ctr"/>
+              <a:r>
+                <a:rPr lang="en-US" sz="1100" noProof="1"/>
+                <a:t>0</a:t>
+              </a:r>
+            </a:p>
+          </p:txBody>
+        </p:sp>
+        <p:sp>
+          <p:nvSpPr>
+            <p:cNvPr id="1027" name="Rectángulo 1026">
+              <a:extLst>
+                <a:ext uri="{FF2B5EF4-FFF2-40B4-BE49-F238E27FC236}">
+                  <a16:creationId xmlns:a16="http://schemas.microsoft.com/office/drawing/2014/main" id="{6FD4FD63-4104-EC83-694B-A8688C02603D}"/>
+                </a:ext>
+              </a:extLst>
+            </p:cNvPr>
+            <p:cNvSpPr/>
+            <p:nvPr/>
+          </p:nvSpPr>
+          <p:spPr>
+            <a:xfrm>
+              <a:off x="10125533" y="3757035"/>
+              <a:ext cx="337830" cy="306450"/>
+            </a:xfrm>
+            <a:prstGeom prst="rect">
+              <a:avLst/>
+            </a:prstGeom>
+            <a:ln/>
+          </p:spPr>
+          <p:style>
+            <a:lnRef idx="1">
+              <a:schemeClr val="dk1"/>
+            </a:lnRef>
+            <a:fillRef idx="2">
+              <a:schemeClr val="dk1"/>
+            </a:fillRef>
+            <a:effectRef idx="1">
+              <a:schemeClr val="dk1"/>
+            </a:effectRef>
+            <a:fontRef idx="minor">
+              <a:schemeClr val="dk1"/>
+            </a:fontRef>
+          </p:style>
+          <p:txBody>
+            <a:bodyPr rtlCol="0" anchor="ctr"/>
+            <a:lstStyle/>
+            <a:p>
+              <a:pPr algn="ctr"/>
+              <a:r>
+                <a:rPr lang="en-US" sz="1100" noProof="1"/>
+                <a:t>0</a:t>
+              </a:r>
+            </a:p>
+          </p:txBody>
+        </p:sp>
+        <p:sp>
+          <p:nvSpPr>
+            <p:cNvPr id="1028" name="Rectángulo 1027">
+              <a:extLst>
+                <a:ext uri="{FF2B5EF4-FFF2-40B4-BE49-F238E27FC236}">
+                  <a16:creationId xmlns:a16="http://schemas.microsoft.com/office/drawing/2014/main" id="{882496BE-3D6B-9FCE-FC35-5D90FED32610}"/>
+                </a:ext>
+              </a:extLst>
+            </p:cNvPr>
+            <p:cNvSpPr/>
+            <p:nvPr/>
+          </p:nvSpPr>
+          <p:spPr>
+            <a:xfrm>
+              <a:off x="10463363" y="3757035"/>
+              <a:ext cx="337830" cy="306450"/>
+            </a:xfrm>
+            <a:prstGeom prst="rect">
+              <a:avLst/>
+            </a:prstGeom>
+            <a:ln/>
+          </p:spPr>
+          <p:style>
+            <a:lnRef idx="1">
+              <a:schemeClr val="dk1"/>
+            </a:lnRef>
+            <a:fillRef idx="2">
+              <a:schemeClr val="dk1"/>
+            </a:fillRef>
+            <a:effectRef idx="1">
+              <a:schemeClr val="dk1"/>
+            </a:effectRef>
+            <a:fontRef idx="minor">
+              <a:schemeClr val="dk1"/>
+            </a:fontRef>
+          </p:style>
+          <p:txBody>
+            <a:bodyPr rtlCol="0" anchor="ctr"/>
+            <a:lstStyle/>
+            <a:p>
+              <a:pPr algn="ctr"/>
+              <a:r>
+                <a:rPr lang="en-US" sz="1100" noProof="1"/>
+                <a:t>0</a:t>
+              </a:r>
+            </a:p>
+          </p:txBody>
+        </p:sp>
+        <p:sp>
+          <p:nvSpPr>
+            <p:cNvPr id="45" name="Rectángulo 44">
+              <a:extLst>
+                <a:ext uri="{FF2B5EF4-FFF2-40B4-BE49-F238E27FC236}">
+                  <a16:creationId xmlns:a16="http://schemas.microsoft.com/office/drawing/2014/main" id="{69ACFBF6-58C3-D303-855A-6EA257996C77}"/>
+                </a:ext>
+              </a:extLst>
+            </p:cNvPr>
+            <p:cNvSpPr/>
+            <p:nvPr/>
+          </p:nvSpPr>
+          <p:spPr>
+            <a:xfrm>
+              <a:off x="5395913" y="3757035"/>
+              <a:ext cx="337830" cy="306450"/>
+            </a:xfrm>
+            <a:prstGeom prst="rect">
+              <a:avLst/>
+            </a:prstGeom>
+            <a:ln/>
+          </p:spPr>
+          <p:style>
+            <a:lnRef idx="1">
+              <a:schemeClr val="dk1"/>
+            </a:lnRef>
+            <a:fillRef idx="2">
+              <a:schemeClr val="dk1"/>
+            </a:fillRef>
+            <a:effectRef idx="1">
+              <a:schemeClr val="dk1"/>
+            </a:effectRef>
+            <a:fontRef idx="minor">
+              <a:schemeClr val="dk1"/>
+            </a:fontRef>
+          </p:style>
+          <p:txBody>
+            <a:bodyPr rtlCol="0" anchor="ctr"/>
+            <a:lstStyle/>
+            <a:p>
+              <a:pPr algn="ctr"/>
+              <a:r>
+                <a:rPr lang="en-US" sz="1100" noProof="1"/>
+                <a:t>0</a:t>
+              </a:r>
+            </a:p>
+          </p:txBody>
+        </p:sp>
+        <p:sp>
+          <p:nvSpPr>
+            <p:cNvPr id="47" name="Rectángulo 46">
+              <a:extLst>
+                <a:ext uri="{FF2B5EF4-FFF2-40B4-BE49-F238E27FC236}">
+                  <a16:creationId xmlns:a16="http://schemas.microsoft.com/office/drawing/2014/main" id="{E8DCCE86-445E-1077-ED0A-DA6F3155CC68}"/>
+                </a:ext>
+              </a:extLst>
+            </p:cNvPr>
+            <p:cNvSpPr/>
+            <p:nvPr/>
+          </p:nvSpPr>
+          <p:spPr>
+            <a:xfrm>
+              <a:off x="6071573" y="3757035"/>
+              <a:ext cx="337830" cy="306450"/>
+            </a:xfrm>
+            <a:prstGeom prst="rect">
+              <a:avLst/>
+            </a:prstGeom>
+            <a:ln/>
+          </p:spPr>
+          <p:style>
+            <a:lnRef idx="1">
+              <a:schemeClr val="dk1"/>
+            </a:lnRef>
+            <a:fillRef idx="2">
+              <a:schemeClr val="dk1"/>
+            </a:fillRef>
+            <a:effectRef idx="1">
+              <a:schemeClr val="dk1"/>
+            </a:effectRef>
+            <a:fontRef idx="minor">
+              <a:schemeClr val="dk1"/>
+            </a:fontRef>
+          </p:style>
+          <p:txBody>
+            <a:bodyPr rtlCol="0" anchor="ctr"/>
+            <a:lstStyle/>
+            <a:p>
+              <a:pPr algn="ctr"/>
+              <a:r>
+                <a:rPr lang="en-US" sz="1100" noProof="1"/>
+                <a:t>0</a:t>
+              </a:r>
+            </a:p>
+          </p:txBody>
+        </p:sp>
+        <p:sp>
+          <p:nvSpPr>
+            <p:cNvPr id="59" name="Rectángulo 58">
+              <a:extLst>
+                <a:ext uri="{FF2B5EF4-FFF2-40B4-BE49-F238E27FC236}">
+                  <a16:creationId xmlns:a16="http://schemas.microsoft.com/office/drawing/2014/main" id="{DEC51D03-9A87-7A1C-3349-74CBF0F31317}"/>
+                </a:ext>
+              </a:extLst>
+            </p:cNvPr>
+            <p:cNvSpPr/>
+            <p:nvPr/>
+          </p:nvSpPr>
+          <p:spPr>
+            <a:xfrm>
+              <a:off x="7760723" y="3757035"/>
+              <a:ext cx="337830" cy="306450"/>
+            </a:xfrm>
+            <a:prstGeom prst="rect">
+              <a:avLst/>
+            </a:prstGeom>
+            <a:solidFill>
+              <a:srgbClr val="FFEA4E"/>
+            </a:solidFill>
+            <a:ln>
+              <a:solidFill>
+                <a:srgbClr val="CCCC00"/>
+              </a:solidFill>
+            </a:ln>
+          </p:spPr>
+          <p:style>
+            <a:lnRef idx="1">
+              <a:schemeClr val="dk1"/>
+            </a:lnRef>
+            <a:fillRef idx="2">
+              <a:schemeClr val="dk1"/>
+            </a:fillRef>
+            <a:effectRef idx="1">
+              <a:schemeClr val="dk1"/>
+            </a:effectRef>
+            <a:fontRef idx="minor">
+              <a:schemeClr val="dk1"/>
+            </a:fontRef>
+          </p:style>
+          <p:txBody>
+            <a:bodyPr rtlCol="0" anchor="ctr"/>
+            <a:lstStyle/>
+            <a:p>
+              <a:pPr algn="ctr"/>
+              <a:r>
+                <a:rPr lang="en-US" noProof="1"/>
+                <a:t>1</a:t>
+              </a:r>
+            </a:p>
+          </p:txBody>
+        </p:sp>
+        <p:sp>
+          <p:nvSpPr>
+            <p:cNvPr id="1025" name="Rectángulo 1024">
+              <a:extLst>
+                <a:ext uri="{FF2B5EF4-FFF2-40B4-BE49-F238E27FC236}">
+                  <a16:creationId xmlns:a16="http://schemas.microsoft.com/office/drawing/2014/main" id="{C55BF753-165B-1D7D-B6D6-0108AC4D937B}"/>
+                </a:ext>
+              </a:extLst>
+            </p:cNvPr>
+            <p:cNvSpPr/>
+            <p:nvPr/>
+          </p:nvSpPr>
+          <p:spPr>
+            <a:xfrm>
+              <a:off x="9787703" y="3757035"/>
+              <a:ext cx="337830" cy="306450"/>
+            </a:xfrm>
+            <a:prstGeom prst="rect">
+              <a:avLst/>
+            </a:prstGeom>
+            <a:solidFill>
+              <a:srgbClr val="00BBD3"/>
+            </a:solidFill>
+            <a:ln>
+              <a:solidFill>
+                <a:schemeClr val="accent4">
+                  <a:lumMod val="75000"/>
+                </a:schemeClr>
+              </a:solidFill>
+            </a:ln>
+          </p:spPr>
+          <p:style>
+            <a:lnRef idx="1">
+              <a:schemeClr val="dk1"/>
+            </a:lnRef>
+            <a:fillRef idx="2">
+              <a:schemeClr val="dk1"/>
+            </a:fillRef>
+            <a:effectRef idx="1">
+              <a:schemeClr val="dk1"/>
+            </a:effectRef>
+            <a:fontRef idx="minor">
+              <a:schemeClr val="dk1"/>
+            </a:fontRef>
+          </p:style>
+          <p:txBody>
+            <a:bodyPr rtlCol="0" anchor="ctr"/>
+            <a:lstStyle/>
+            <a:p>
+              <a:pPr algn="ctr"/>
+              <a:r>
+                <a:rPr lang="en-US" noProof="1"/>
+                <a:t>0</a:t>
+              </a:r>
+            </a:p>
+          </p:txBody>
+        </p:sp>
+        <p:sp>
+          <p:nvSpPr>
+            <p:cNvPr id="1053" name="Rectángulo 1052">
+              <a:extLst>
+                <a:ext uri="{FF2B5EF4-FFF2-40B4-BE49-F238E27FC236}">
+                  <a16:creationId xmlns:a16="http://schemas.microsoft.com/office/drawing/2014/main" id="{E3A926DF-9DA7-BF9B-8BFC-31C903000E8B}"/>
+                </a:ext>
+              </a:extLst>
+            </p:cNvPr>
+            <p:cNvSpPr/>
+            <p:nvPr/>
+          </p:nvSpPr>
+          <p:spPr>
+            <a:xfrm>
+              <a:off x="6411153" y="3757035"/>
+              <a:ext cx="337830" cy="306450"/>
+            </a:xfrm>
+            <a:prstGeom prst="rect">
+              <a:avLst/>
+            </a:prstGeom>
+            <a:ln/>
+          </p:spPr>
+          <p:style>
+            <a:lnRef idx="1">
+              <a:schemeClr val="dk1"/>
+            </a:lnRef>
+            <a:fillRef idx="2">
+              <a:schemeClr val="dk1"/>
+            </a:fillRef>
+            <a:effectRef idx="1">
+              <a:schemeClr val="dk1"/>
+            </a:effectRef>
+            <a:fontRef idx="minor">
+              <a:schemeClr val="dk1"/>
+            </a:fontRef>
+          </p:style>
+          <p:txBody>
+            <a:bodyPr rtlCol="0" anchor="ctr"/>
+            <a:lstStyle/>
+            <a:p>
+              <a:pPr algn="ctr"/>
+              <a:r>
+                <a:rPr lang="en-US" sz="1100" noProof="1"/>
+                <a:t>0</a:t>
+              </a:r>
+            </a:p>
+          </p:txBody>
+        </p:sp>
+        <p:sp>
+          <p:nvSpPr>
+            <p:cNvPr id="56" name="Rectángulo 55">
+              <a:extLst>
+                <a:ext uri="{FF2B5EF4-FFF2-40B4-BE49-F238E27FC236}">
+                  <a16:creationId xmlns:a16="http://schemas.microsoft.com/office/drawing/2014/main" id="{C666F80B-684C-F638-A8A5-528CB77EC7C7}"/>
+                </a:ext>
+              </a:extLst>
+            </p:cNvPr>
+            <p:cNvSpPr/>
+            <p:nvPr/>
+          </p:nvSpPr>
+          <p:spPr>
+            <a:xfrm>
+              <a:off x="6747233" y="3757035"/>
+              <a:ext cx="337830" cy="306450"/>
+            </a:xfrm>
+            <a:prstGeom prst="rect">
+              <a:avLst/>
+            </a:prstGeom>
+            <a:solidFill>
+              <a:srgbClr val="FF9A25"/>
+            </a:solidFill>
+            <a:ln>
+              <a:solidFill>
+                <a:schemeClr val="accent2"/>
+              </a:solidFill>
+            </a:ln>
+          </p:spPr>
+          <p:style>
+            <a:lnRef idx="1">
+              <a:schemeClr val="dk1"/>
+            </a:lnRef>
+            <a:fillRef idx="2">
+              <a:schemeClr val="dk1"/>
+            </a:fillRef>
+            <a:effectRef idx="1">
+              <a:schemeClr val="dk1"/>
+            </a:effectRef>
+            <a:fontRef idx="minor">
+              <a:schemeClr val="dk1"/>
+            </a:fontRef>
+          </p:style>
+          <p:txBody>
+            <a:bodyPr rtlCol="0" anchor="ctr"/>
+            <a:lstStyle/>
+            <a:p>
+              <a:pPr algn="ctr"/>
+              <a:r>
+                <a:rPr lang="en-US" noProof="1"/>
+                <a:t>4</a:t>
+              </a:r>
+            </a:p>
+          </p:txBody>
+        </p:sp>
+        <p:sp>
+          <p:nvSpPr>
+            <p:cNvPr id="46" name="Rectángulo 45">
+              <a:extLst>
+                <a:ext uri="{FF2B5EF4-FFF2-40B4-BE49-F238E27FC236}">
+                  <a16:creationId xmlns:a16="http://schemas.microsoft.com/office/drawing/2014/main" id="{08C14244-D2BC-2158-5A7F-C938E83054C7}"/>
+                </a:ext>
+              </a:extLst>
+            </p:cNvPr>
+            <p:cNvSpPr/>
+            <p:nvPr/>
+          </p:nvSpPr>
+          <p:spPr>
+            <a:xfrm>
+              <a:off x="5733743" y="3757035"/>
+              <a:ext cx="337830" cy="306450"/>
+            </a:xfrm>
+            <a:prstGeom prst="rect">
+              <a:avLst/>
+            </a:prstGeom>
+            <a:solidFill>
+              <a:srgbClr val="FF66B3"/>
+            </a:solidFill>
+            <a:ln>
+              <a:solidFill>
+                <a:schemeClr val="accent5"/>
+              </a:solidFill>
+            </a:ln>
+          </p:spPr>
+          <p:style>
+            <a:lnRef idx="1">
+              <a:schemeClr val="dk1"/>
+            </a:lnRef>
+            <a:fillRef idx="2">
+              <a:schemeClr val="dk1"/>
+            </a:fillRef>
+            <a:effectRef idx="1">
+              <a:schemeClr val="dk1"/>
+            </a:effectRef>
+            <a:fontRef idx="minor">
+              <a:schemeClr val="dk1"/>
+            </a:fontRef>
+          </p:style>
+          <p:txBody>
+            <a:bodyPr rtlCol="0" anchor="ctr"/>
+            <a:lstStyle/>
+            <a:p>
+              <a:pPr algn="ctr"/>
+              <a:r>
+                <a:rPr lang="en-US" noProof="1"/>
+                <a:t>0</a:t>
+              </a:r>
+            </a:p>
+          </p:txBody>
+        </p:sp>
+        <p:sp>
+          <p:nvSpPr>
+            <p:cNvPr id="1031" name="Rectángulo 1030">
+              <a:extLst>
+                <a:ext uri="{FF2B5EF4-FFF2-40B4-BE49-F238E27FC236}">
+                  <a16:creationId xmlns:a16="http://schemas.microsoft.com/office/drawing/2014/main" id="{04677E3B-A939-6146-5F66-E718CBA9026C}"/>
+                </a:ext>
+              </a:extLst>
+            </p:cNvPr>
+            <p:cNvSpPr/>
+            <p:nvPr/>
+          </p:nvSpPr>
+          <p:spPr>
+            <a:xfrm>
+              <a:off x="8774213" y="3757035"/>
+              <a:ext cx="337830" cy="306450"/>
+            </a:xfrm>
+            <a:prstGeom prst="rect">
+              <a:avLst/>
+            </a:prstGeom>
+            <a:solidFill>
+              <a:srgbClr val="8CC253"/>
+            </a:solidFill>
+            <a:ln>
+              <a:solidFill>
+                <a:schemeClr val="accent6">
+                  <a:lumMod val="75000"/>
+                </a:schemeClr>
+              </a:solidFill>
+            </a:ln>
+          </p:spPr>
+          <p:style>
+            <a:lnRef idx="1">
+              <a:schemeClr val="dk1"/>
+            </a:lnRef>
+            <a:fillRef idx="2">
+              <a:schemeClr val="dk1"/>
+            </a:fillRef>
+            <a:effectRef idx="1">
+              <a:schemeClr val="dk1"/>
+            </a:effectRef>
+            <a:fontRef idx="minor">
+              <a:schemeClr val="dk1"/>
+            </a:fontRef>
+          </p:style>
+          <p:txBody>
+            <a:bodyPr rtlCol="0" anchor="ctr"/>
+            <a:lstStyle/>
+            <a:p>
+              <a:pPr algn="ctr"/>
+              <a:r>
+                <a:rPr lang="en-US" noProof="1"/>
+                <a:t>1</a:t>
+              </a:r>
+            </a:p>
+          </p:txBody>
+        </p:sp>
+      </p:grpSp>
+      <p:sp>
+        <p:nvSpPr>
+          <p:cNvPr id="2" name="Text Box 1">
+            <a:extLst>
+              <a:ext uri="{FF2B5EF4-FFF2-40B4-BE49-F238E27FC236}">
+                <a16:creationId xmlns:a16="http://schemas.microsoft.com/office/drawing/2014/main" id="{AB779B5B-CEF6-1AA0-9261-EDCDCCE371B9}"/>
+              </a:ext>
+            </a:extLst>
+          </p:cNvPr>
+          <p:cNvSpPr txBox="1"/>
+          <p:nvPr/>
+        </p:nvSpPr>
+        <p:spPr>
+          <a:xfrm>
+            <a:off x="-50671" y="133585"/>
+            <a:ext cx="630110" cy="461179"/>
+          </a:xfrm>
+          <a:prstGeom prst="rect">
+            <a:avLst/>
+          </a:prstGeom>
+          <a:noFill/>
+          <a:ln>
+            <a:noFill/>
+          </a:ln>
+        </p:spPr>
+        <p:txBody>
+          <a:bodyPr rot="0" spcFirstLastPara="0" vert="horz" wrap="none" lIns="91440" tIns="45720" rIns="91440" bIns="45720" numCol="1" spcCol="0" rtlCol="0" fromWordArt="0" anchor="t" anchorCtr="0" forceAA="0" compatLnSpc="1">
+            <a:prstTxWarp prst="textNoShape">
+              <a:avLst/>
+            </a:prstTxWarp>
+            <a:noAutofit/>
+          </a:bodyPr>
+          <a:lstStyle/>
+          <a:p>
+            <a:pPr algn="ctr">
+              <a:lnSpc>
+                <a:spcPct val="107000"/>
+              </a:lnSpc>
+              <a:spcAft>
+                <a:spcPts val="800"/>
+              </a:spcAft>
+              <a:buNone/>
+            </a:pPr>
+            <a:r>
+              <a:rPr lang="es-ES" sz="2000" b="1" dirty="0">
+                <a:ln>
+                  <a:noFill/>
+                </a:ln>
+                <a:solidFill>
+                  <a:srgbClr val="000000"/>
+                </a:solidFill>
+                <a:effectLst>
+                  <a:outerShdw blurRad="38100" dist="19050" dir="2700000" algn="tl">
+                    <a:schemeClr val="dk1">
+                      <a:alpha val="40000"/>
+                    </a:schemeClr>
+                  </a:outerShdw>
+                </a:effectLst>
+                <a:latin typeface="Calibri" panose="020F0502020204030204" pitchFamily="34" charset="0"/>
+                <a:ea typeface="Times New Roman" panose="02020603050405020304" pitchFamily="18" charset="0"/>
+                <a:cs typeface="Times New Roman" panose="02020603050405020304" pitchFamily="18" charset="0"/>
+              </a:rPr>
+              <a:t>A</a:t>
+            </a:r>
+            <a:endParaRPr lang="en-GB" sz="1100" b="1" dirty="0">
+              <a:effectLst/>
+              <a:latin typeface="Calibri" panose="020F0502020204030204" pitchFamily="34" charset="0"/>
+              <a:ea typeface="Times New Roman" panose="02020603050405020304" pitchFamily="18" charset="0"/>
+              <a:cs typeface="Times New Roman" panose="02020603050405020304" pitchFamily="18" charset="0"/>
+            </a:endParaRPr>
+          </a:p>
+        </p:txBody>
+      </p:sp>
+      <p:sp>
+        <p:nvSpPr>
+          <p:cNvPr id="7" name="Text Box 1">
+            <a:extLst>
+              <a:ext uri="{FF2B5EF4-FFF2-40B4-BE49-F238E27FC236}">
+                <a16:creationId xmlns:a16="http://schemas.microsoft.com/office/drawing/2014/main" id="{C0376401-464F-A6FC-FAC1-ED020B54C875}"/>
+              </a:ext>
+            </a:extLst>
+          </p:cNvPr>
+          <p:cNvSpPr txBox="1"/>
+          <p:nvPr/>
+        </p:nvSpPr>
+        <p:spPr>
+          <a:xfrm>
+            <a:off x="-41108" y="2274599"/>
+            <a:ext cx="630110" cy="461179"/>
+          </a:xfrm>
+          <a:prstGeom prst="rect">
+            <a:avLst/>
+          </a:prstGeom>
+          <a:noFill/>
+          <a:ln>
+            <a:noFill/>
+          </a:ln>
+        </p:spPr>
+        <p:txBody>
+          <a:bodyPr rot="0" spcFirstLastPara="0" vert="horz" wrap="none" lIns="91440" tIns="45720" rIns="91440" bIns="45720" numCol="1" spcCol="0" rtlCol="0" fromWordArt="0" anchor="t" anchorCtr="0" forceAA="0" compatLnSpc="1">
+            <a:prstTxWarp prst="textNoShape">
+              <a:avLst/>
+            </a:prstTxWarp>
+            <a:noAutofit/>
+          </a:bodyPr>
+          <a:lstStyle/>
+          <a:p>
+            <a:pPr algn="ctr">
+              <a:lnSpc>
+                <a:spcPct val="107000"/>
+              </a:lnSpc>
+              <a:spcAft>
+                <a:spcPts val="800"/>
+              </a:spcAft>
+              <a:buNone/>
+            </a:pPr>
+            <a:r>
+              <a:rPr lang="es-ES" sz="2000" b="1" dirty="0">
+                <a:solidFill>
+                  <a:srgbClr val="000000"/>
+                </a:solidFill>
+                <a:effectLst>
+                  <a:outerShdw blurRad="38100" dist="19050" dir="2700000" algn="tl">
+                    <a:schemeClr val="dk1">
+                      <a:alpha val="40000"/>
+                    </a:schemeClr>
+                  </a:outerShdw>
+                </a:effectLst>
+                <a:latin typeface="Calibri" panose="020F0502020204030204" pitchFamily="34" charset="0"/>
+                <a:ea typeface="Times New Roman" panose="02020603050405020304" pitchFamily="18" charset="0"/>
+                <a:cs typeface="Times New Roman" panose="02020603050405020304" pitchFamily="18" charset="0"/>
+              </a:rPr>
+              <a:t>B</a:t>
+            </a:r>
+            <a:endParaRPr lang="en-GB" sz="1100" b="1" dirty="0">
+              <a:effectLst/>
+              <a:latin typeface="Calibri" panose="020F0502020204030204" pitchFamily="34" charset="0"/>
+              <a:ea typeface="Times New Roman" panose="02020603050405020304" pitchFamily="18" charset="0"/>
+              <a:cs typeface="Times New Roman" panose="02020603050405020304" pitchFamily="18" charset="0"/>
+            </a:endParaRPr>
+          </a:p>
+        </p:txBody>
+      </p:sp>
+      <p:sp>
+        <p:nvSpPr>
+          <p:cNvPr id="15" name="Text Box 1">
+            <a:extLst>
+              <a:ext uri="{FF2B5EF4-FFF2-40B4-BE49-F238E27FC236}">
+                <a16:creationId xmlns:a16="http://schemas.microsoft.com/office/drawing/2014/main" id="{4D1353D1-625C-2244-F83D-787641C8F19B}"/>
+              </a:ext>
+            </a:extLst>
+          </p:cNvPr>
+          <p:cNvSpPr txBox="1"/>
+          <p:nvPr/>
+        </p:nvSpPr>
+        <p:spPr>
+          <a:xfrm>
+            <a:off x="-45573" y="4554832"/>
+            <a:ext cx="630110" cy="461179"/>
+          </a:xfrm>
+          <a:prstGeom prst="rect">
+            <a:avLst/>
+          </a:prstGeom>
+          <a:noFill/>
+          <a:ln>
+            <a:noFill/>
+          </a:ln>
+        </p:spPr>
+        <p:txBody>
+          <a:bodyPr rot="0" spcFirstLastPara="0" vert="horz" wrap="none" lIns="91440" tIns="45720" rIns="91440" bIns="45720" numCol="1" spcCol="0" rtlCol="0" fromWordArt="0" anchor="t" anchorCtr="0" forceAA="0" compatLnSpc="1">
+            <a:prstTxWarp prst="textNoShape">
+              <a:avLst/>
+            </a:prstTxWarp>
+            <a:noAutofit/>
+          </a:bodyPr>
+          <a:lstStyle/>
+          <a:p>
+            <a:pPr algn="ctr">
+              <a:lnSpc>
+                <a:spcPct val="107000"/>
+              </a:lnSpc>
+              <a:spcAft>
+                <a:spcPts val="800"/>
+              </a:spcAft>
+              <a:buNone/>
+            </a:pPr>
+            <a:r>
+              <a:rPr lang="es-ES" sz="2000" b="1" dirty="0">
+                <a:ln>
+                  <a:noFill/>
+                </a:ln>
+                <a:solidFill>
+                  <a:srgbClr val="000000"/>
+                </a:solidFill>
+                <a:effectLst>
+                  <a:outerShdw blurRad="38100" dist="19050" dir="2700000" algn="tl">
+                    <a:schemeClr val="dk1">
+                      <a:alpha val="40000"/>
+                    </a:schemeClr>
+                  </a:outerShdw>
+                </a:effectLst>
+                <a:latin typeface="Calibri" panose="020F0502020204030204" pitchFamily="34" charset="0"/>
+                <a:ea typeface="Times New Roman" panose="02020603050405020304" pitchFamily="18" charset="0"/>
+                <a:cs typeface="Times New Roman" panose="02020603050405020304" pitchFamily="18" charset="0"/>
+              </a:rPr>
+              <a:t>C</a:t>
+            </a:r>
+            <a:endParaRPr lang="en-GB" sz="1100" b="1" dirty="0">
+              <a:effectLst/>
+              <a:latin typeface="Calibri" panose="020F0502020204030204" pitchFamily="34" charset="0"/>
+              <a:ea typeface="Times New Roman" panose="02020603050405020304" pitchFamily="18" charset="0"/>
+              <a:cs typeface="Times New Roman" panose="02020603050405020304" pitchFamily="18" charset="0"/>
+            </a:endParaRPr>
+          </a:p>
+        </p:txBody>
+      </p:sp>
+    </p:spTree>
+    <p:extLst>
+      <p:ext uri="{BB962C8B-B14F-4D97-AF65-F5344CB8AC3E}">
+        <p14:creationId xmlns:p14="http://schemas.microsoft.com/office/powerpoint/2010/main" val="3562240675"/>
+      </p:ext>
+    </p:extLst>
+  </p:cSld>
+  <p:clrMapOvr>
+    <a:masterClrMapping/>
+  </p:clrMapOvr>
+</p:sld>
+</file>
+
 <file path=ppt/theme/theme1.xml><?xml version="1.0" encoding="utf-8"?>
 <a:theme xmlns:a="http://schemas.openxmlformats.org/drawingml/2006/main" name="Office Theme">
   <a:themeElements>
@@ -5065,4 +10438,319 @@
     </a:ext>
   </a:extLst>
 </a:theme>
+</file>
+
+<file path=ppt/theme/theme2.xml><?xml version="1.0" encoding="utf-8"?>
+<a:theme xmlns:a="http://schemas.openxmlformats.org/drawingml/2006/main" name="Office Theme">
+  <a:themeElements>
+    <a:clrScheme name="Office">
+      <a:dk1>
+        <a:sysClr val="windowText" lastClr="000000"/>
+      </a:dk1>
+      <a:lt1>
+        <a:sysClr val="window" lastClr="FFFFFF"/>
+      </a:lt1>
+      <a:dk2>
+        <a:srgbClr val="0E2841"/>
+      </a:dk2>
+      <a:lt2>
+        <a:srgbClr val="E8E8E8"/>
+      </a:lt2>
+      <a:accent1>
+        <a:srgbClr val="156082"/>
+      </a:accent1>
+      <a:accent2>
+        <a:srgbClr val="E97132"/>
+      </a:accent2>
+      <a:accent3>
+        <a:srgbClr val="196B24"/>
+      </a:accent3>
+      <a:accent4>
+        <a:srgbClr val="0F9ED5"/>
+      </a:accent4>
+      <a:accent5>
+        <a:srgbClr val="A02B93"/>
+      </a:accent5>
+      <a:accent6>
+        <a:srgbClr val="4EA72E"/>
+      </a:accent6>
+      <a:hlink>
+        <a:srgbClr val="467886"/>
+      </a:hlink>
+      <a:folHlink>
+        <a:srgbClr val="96607D"/>
+      </a:folHlink>
+    </a:clrScheme>
+    <a:fontScheme name="Office">
+      <a:majorFont>
+        <a:latin typeface="Aptos Display" panose="02110004020202020204"/>
+        <a:ea typeface=""/>
+        <a:cs typeface=""/>
+        <a:font script="Jpan" typeface="游ゴシック Light"/>
+        <a:font script="Hang" typeface="맑은 고딕"/>
+        <a:font script="Hans" typeface="等线 Light"/>
+        <a:font script="Hant" typeface="新細明體"/>
+        <a:font script="Arab" typeface="Times New Roman"/>
+        <a:font script="Hebr" typeface="Times New Roman"/>
+        <a:font script="Thai" typeface="Angsana New"/>
+        <a:font script="Ethi" typeface="Nyala"/>
+        <a:font script="Beng" typeface="Vrinda"/>
+        <a:font script="Gujr" typeface="Shruti"/>
+        <a:font script="Khmr" typeface="MoolBoran"/>
+        <a:font script="Knda" typeface="Tunga"/>
+        <a:font script="Guru" typeface="Raavi"/>
+        <a:font script="Cans" typeface="Euphemia"/>
+        <a:font script="Cher" typeface="Plantagenet Cherokee"/>
+        <a:font script="Yiii" typeface="Microsoft Yi Baiti"/>
+        <a:font script="Tibt" typeface="Microsoft Himalaya"/>
+        <a:font script="Thaa" typeface="MV Boli"/>
+        <a:font script="Deva" typeface="Mangal"/>
+        <a:font script="Telu" typeface="Gautami"/>
+        <a:font script="Taml" typeface="Latha"/>
+        <a:font script="Syrc" typeface="Estrangelo Edessa"/>
+        <a:font script="Orya" typeface="Kalinga"/>
+        <a:font script="Mlym" typeface="Kartika"/>
+        <a:font script="Laoo" typeface="DokChampa"/>
+        <a:font script="Sinh" typeface="Iskoola Pota"/>
+        <a:font script="Mong" typeface="Mongolian Baiti"/>
+        <a:font script="Viet" typeface="Times New Roman"/>
+        <a:font script="Uigh" typeface="Microsoft Uighur"/>
+        <a:font script="Geor" typeface="Sylfaen"/>
+        <a:font script="Armn" typeface="Arial"/>
+        <a:font script="Bugi" typeface="Leelawadee UI"/>
+        <a:font script="Bopo" typeface="Microsoft JhengHei"/>
+        <a:font script="Java" typeface="Javanese Text"/>
+        <a:font script="Lisu" typeface="Segoe UI"/>
+        <a:font script="Mymr" typeface="Myanmar Text"/>
+        <a:font script="Nkoo" typeface="Ebrima"/>
+        <a:font script="Olck" typeface="Nirmala UI"/>
+        <a:font script="Osma" typeface="Ebrima"/>
+        <a:font script="Phag" typeface="Phagspa"/>
+        <a:font script="Syrn" typeface="Estrangelo Edessa"/>
+        <a:font script="Syrj" typeface="Estrangelo Edessa"/>
+        <a:font script="Syre" typeface="Estrangelo Edessa"/>
+        <a:font script="Sora" typeface="Nirmala UI"/>
+        <a:font script="Tale" typeface="Microsoft Tai Le"/>
+        <a:font script="Talu" typeface="Microsoft New Tai Lue"/>
+        <a:font script="Tfng" typeface="Ebrima"/>
+      </a:majorFont>
+      <a:minorFont>
+        <a:latin typeface="Aptos" panose="02110004020202020204"/>
+        <a:ea typeface=""/>
+        <a:cs typeface=""/>
+        <a:font script="Jpan" typeface="游ゴシック"/>
+        <a:font script="Hang" typeface="맑은 고딕"/>
+        <a:font script="Hans" typeface="等线"/>
+        <a:font script="Hant" typeface="新細明體"/>
+        <a:font script="Arab" typeface="Arial"/>
+        <a:font script="Hebr" typeface="Arial"/>
+        <a:font script="Thai" typeface="Cordia New"/>
+        <a:font script="Ethi" typeface="Nyala"/>
+        <a:font script="Beng" typeface="Vrinda"/>
+        <a:font script="Gujr" typeface="Shruti"/>
+        <a:font script="Khmr" typeface="DaunPenh"/>
+        <a:font script="Knda" typeface="Tunga"/>
+        <a:font script="Guru" typeface="Raavi"/>
+        <a:font script="Cans" typeface="Euphemia"/>
+        <a:font script="Cher" typeface="Plantagenet Cherokee"/>
+        <a:font script="Yiii" typeface="Microsoft Yi Baiti"/>
+        <a:font script="Tibt" typeface="Microsoft Himalaya"/>
+        <a:font script="Thaa" typeface="MV Boli"/>
+        <a:font script="Deva" typeface="Mangal"/>
+        <a:font script="Telu" typeface="Gautami"/>
+        <a:font script="Taml" typeface="Latha"/>
+        <a:font script="Syrc" typeface="Estrangelo Edessa"/>
+        <a:font script="Orya" typeface="Kalinga"/>
+        <a:font script="Mlym" typeface="Kartika"/>
+        <a:font script="Laoo" typeface="DokChampa"/>
+        <a:font script="Sinh" typeface="Iskoola Pota"/>
+        <a:font script="Mong" typeface="Mongolian Baiti"/>
+        <a:font script="Viet" typeface="Arial"/>
+        <a:font script="Uigh" typeface="Microsoft Uighur"/>
+        <a:font script="Geor" typeface="Sylfaen"/>
+        <a:font script="Armn" typeface="Arial"/>
+        <a:font script="Bugi" typeface="Leelawadee UI"/>
+        <a:font script="Bopo" typeface="Microsoft JhengHei"/>
+        <a:font script="Java" typeface="Javanese Text"/>
+        <a:font script="Lisu" typeface="Segoe UI"/>
+        <a:font script="Mymr" typeface="Myanmar Text"/>
+        <a:font script="Nkoo" typeface="Ebrima"/>
+        <a:font script="Olck" typeface="Nirmala UI"/>
+        <a:font script="Osma" typeface="Ebrima"/>
+        <a:font script="Phag" typeface="Phagspa"/>
+        <a:font script="Syrn" typeface="Estrangelo Edessa"/>
+        <a:font script="Syrj" typeface="Estrangelo Edessa"/>
+        <a:font script="Syre" typeface="Estrangelo Edessa"/>
+        <a:font script="Sora" typeface="Nirmala UI"/>
+        <a:font script="Tale" typeface="Microsoft Tai Le"/>
+        <a:font script="Talu" typeface="Microsoft New Tai Lue"/>
+        <a:font script="Tfng" typeface="Ebrima"/>
+      </a:minorFont>
+    </a:fontScheme>
+    <a:fmtScheme name="Office">
+      <a:fillStyleLst>
+        <a:solidFill>
+          <a:schemeClr val="phClr"/>
+        </a:solidFill>
+        <a:gradFill rotWithShape="1">
+          <a:gsLst>
+            <a:gs pos="0">
+              <a:schemeClr val="phClr">
+                <a:lumMod val="110000"/>
+                <a:satMod val="105000"/>
+                <a:tint val="67000"/>
+              </a:schemeClr>
+            </a:gs>
+            <a:gs pos="50000">
+              <a:schemeClr val="phClr">
+                <a:lumMod val="105000"/>
+                <a:satMod val="103000"/>
+                <a:tint val="73000"/>
+              </a:schemeClr>
+            </a:gs>
+            <a:gs pos="100000">
+              <a:schemeClr val="phClr">
+                <a:lumMod val="105000"/>
+                <a:satMod val="109000"/>
+                <a:tint val="81000"/>
+              </a:schemeClr>
+            </a:gs>
+          </a:gsLst>
+          <a:lin ang="5400000" scaled="0"/>
+        </a:gradFill>
+        <a:gradFill rotWithShape="1">
+          <a:gsLst>
+            <a:gs pos="0">
+              <a:schemeClr val="phClr">
+                <a:satMod val="103000"/>
+                <a:lumMod val="102000"/>
+                <a:tint val="94000"/>
+              </a:schemeClr>
+            </a:gs>
+            <a:gs pos="50000">
+              <a:schemeClr val="phClr">
+                <a:satMod val="110000"/>
+                <a:lumMod val="100000"/>
+                <a:shade val="100000"/>
+              </a:schemeClr>
+            </a:gs>
+            <a:gs pos="100000">
+              <a:schemeClr val="phClr">
+                <a:lumMod val="99000"/>
+                <a:satMod val="120000"/>
+                <a:shade val="78000"/>
+              </a:schemeClr>
+            </a:gs>
+          </a:gsLst>
+          <a:lin ang="5400000" scaled="0"/>
+        </a:gradFill>
+      </a:fillStyleLst>
+      <a:lnStyleLst>
+        <a:ln w="12700" cap="flat" cmpd="sng" algn="ctr">
+          <a:solidFill>
+            <a:schemeClr val="phClr"/>
+          </a:solidFill>
+          <a:prstDash val="solid"/>
+          <a:miter lim="800000"/>
+        </a:ln>
+        <a:ln w="19050" cap="flat" cmpd="sng" algn="ctr">
+          <a:solidFill>
+            <a:schemeClr val="phClr"/>
+          </a:solidFill>
+          <a:prstDash val="solid"/>
+          <a:miter lim="800000"/>
+        </a:ln>
+        <a:ln w="25400" cap="flat" cmpd="sng" algn="ctr">
+          <a:solidFill>
+            <a:schemeClr val="phClr"/>
+          </a:solidFill>
+          <a:prstDash val="solid"/>
+          <a:miter lim="800000"/>
+        </a:ln>
+      </a:lnStyleLst>
+      <a:effectStyleLst>
+        <a:effectStyle>
+          <a:effectLst/>
+        </a:effectStyle>
+        <a:effectStyle>
+          <a:effectLst/>
+        </a:effectStyle>
+        <a:effectStyle>
+          <a:effectLst>
+            <a:outerShdw blurRad="57150" dist="19050" dir="5400000" algn="ctr" rotWithShape="0">
+              <a:srgbClr val="000000">
+                <a:alpha val="63000"/>
+              </a:srgbClr>
+            </a:outerShdw>
+          </a:effectLst>
+        </a:effectStyle>
+      </a:effectStyleLst>
+      <a:bgFillStyleLst>
+        <a:solidFill>
+          <a:schemeClr val="phClr"/>
+        </a:solidFill>
+        <a:solidFill>
+          <a:schemeClr val="phClr">
+            <a:tint val="95000"/>
+            <a:satMod val="170000"/>
+          </a:schemeClr>
+        </a:solidFill>
+        <a:gradFill rotWithShape="1">
+          <a:gsLst>
+            <a:gs pos="0">
+              <a:schemeClr val="phClr">
+                <a:tint val="93000"/>
+                <a:satMod val="150000"/>
+                <a:shade val="98000"/>
+                <a:lumMod val="102000"/>
+              </a:schemeClr>
+            </a:gs>
+            <a:gs pos="50000">
+              <a:schemeClr val="phClr">
+                <a:tint val="98000"/>
+                <a:satMod val="130000"/>
+                <a:shade val="90000"/>
+                <a:lumMod val="103000"/>
+              </a:schemeClr>
+            </a:gs>
+            <a:gs pos="100000">
+              <a:schemeClr val="phClr">
+                <a:shade val="63000"/>
+                <a:satMod val="120000"/>
+              </a:schemeClr>
+            </a:gs>
+          </a:gsLst>
+          <a:lin ang="5400000" scaled="0"/>
+        </a:gradFill>
+      </a:bgFillStyleLst>
+    </a:fmtScheme>
+  </a:themeElements>
+  <a:objectDefaults>
+    <a:lnDef>
+      <a:spPr/>
+      <a:bodyPr/>
+      <a:lstStyle/>
+      <a:style>
+        <a:lnRef idx="2">
+          <a:schemeClr val="accent1"/>
+        </a:lnRef>
+        <a:fillRef idx="0">
+          <a:schemeClr val="accent1"/>
+        </a:fillRef>
+        <a:effectRef idx="1">
+          <a:schemeClr val="accent1"/>
+        </a:effectRef>
+        <a:fontRef idx="minor">
+          <a:schemeClr val="tx1"/>
+        </a:fontRef>
+      </a:style>
+    </a:lnDef>
+  </a:objectDefaults>
+  <a:extraClrSchemeLst/>
+  <a:extLst>
+    <a:ext uri="{05A4C25C-085E-4340-85A3-A5531E510DB2}">
+      <thm15:themeFamily xmlns:thm15="http://schemas.microsoft.com/office/thememl/2012/main" name="Office Theme" id="{2E142A2C-CD16-42D6-873A-C26D2A0506FA}" vid="{1BDDFF52-6CD6-40A5-AB3C-68EB2F1E4D0A}"/>
+    </a:ext>
+  </a:extLst>
+</a:theme>
 </file>
--- a/Figuras/Diagrams TFM.pptx
+++ b/Figuras/Diagrams TFM.pptx
@@ -198,7 +198,7 @@
           <a:p>
             <a:fld id="{D15AD191-481F-47CD-BB31-6284BAB9F5F2}" type="datetimeFigureOut">
               <a:rPr lang="en-GB" smtClean="0"/>
-              <a:t>15/04/2026</a:t>
+              <a:t>05/05/2026</a:t>
             </a:fld>
             <a:endParaRPr lang="en-GB"/>
           </a:p>
@@ -889,7 +889,7 @@
           <a:p>
             <a:fld id="{76EE70CD-0C52-4877-95B4-2234339B47C2}" type="datetimeFigureOut">
               <a:rPr lang="en-GB" smtClean="0"/>
-              <a:t>15/04/2026</a:t>
+              <a:t>05/05/2026</a:t>
             </a:fld>
             <a:endParaRPr lang="en-GB"/>
           </a:p>
@@ -1087,7 +1087,7 @@
           <a:p>
             <a:fld id="{76EE70CD-0C52-4877-95B4-2234339B47C2}" type="datetimeFigureOut">
               <a:rPr lang="en-GB" smtClean="0"/>
-              <a:t>15/04/2026</a:t>
+              <a:t>05/05/2026</a:t>
             </a:fld>
             <a:endParaRPr lang="en-GB"/>
           </a:p>
@@ -1295,7 +1295,7 @@
           <a:p>
             <a:fld id="{76EE70CD-0C52-4877-95B4-2234339B47C2}" type="datetimeFigureOut">
               <a:rPr lang="en-GB" smtClean="0"/>
-              <a:t>15/04/2026</a:t>
+              <a:t>05/05/2026</a:t>
             </a:fld>
             <a:endParaRPr lang="en-GB"/>
           </a:p>
@@ -1493,7 +1493,7 @@
           <a:p>
             <a:fld id="{76EE70CD-0C52-4877-95B4-2234339B47C2}" type="datetimeFigureOut">
               <a:rPr lang="en-GB" smtClean="0"/>
-              <a:t>15/04/2026</a:t>
+              <a:t>05/05/2026</a:t>
             </a:fld>
             <a:endParaRPr lang="en-GB"/>
           </a:p>
@@ -1768,7 +1768,7 @@
           <a:p>
             <a:fld id="{76EE70CD-0C52-4877-95B4-2234339B47C2}" type="datetimeFigureOut">
               <a:rPr lang="en-GB" smtClean="0"/>
-              <a:t>15/04/2026</a:t>
+              <a:t>05/05/2026</a:t>
             </a:fld>
             <a:endParaRPr lang="en-GB"/>
           </a:p>
@@ -2033,7 +2033,7 @@
           <a:p>
             <a:fld id="{76EE70CD-0C52-4877-95B4-2234339B47C2}" type="datetimeFigureOut">
               <a:rPr lang="en-GB" smtClean="0"/>
-              <a:t>15/04/2026</a:t>
+              <a:t>05/05/2026</a:t>
             </a:fld>
             <a:endParaRPr lang="en-GB"/>
           </a:p>
@@ -2445,7 +2445,7 @@
           <a:p>
             <a:fld id="{76EE70CD-0C52-4877-95B4-2234339B47C2}" type="datetimeFigureOut">
               <a:rPr lang="en-GB" smtClean="0"/>
-              <a:t>15/04/2026</a:t>
+              <a:t>05/05/2026</a:t>
             </a:fld>
             <a:endParaRPr lang="en-GB"/>
           </a:p>
@@ -2586,7 +2586,7 @@
           <a:p>
             <a:fld id="{76EE70CD-0C52-4877-95B4-2234339B47C2}" type="datetimeFigureOut">
               <a:rPr lang="en-GB" smtClean="0"/>
-              <a:t>15/04/2026</a:t>
+              <a:t>05/05/2026</a:t>
             </a:fld>
             <a:endParaRPr lang="en-GB"/>
           </a:p>
@@ -2699,7 +2699,7 @@
           <a:p>
             <a:fld id="{76EE70CD-0C52-4877-95B4-2234339B47C2}" type="datetimeFigureOut">
               <a:rPr lang="en-GB" smtClean="0"/>
-              <a:t>15/04/2026</a:t>
+              <a:t>05/05/2026</a:t>
             </a:fld>
             <a:endParaRPr lang="en-GB"/>
           </a:p>
@@ -3010,7 +3010,7 @@
           <a:p>
             <a:fld id="{76EE70CD-0C52-4877-95B4-2234339B47C2}" type="datetimeFigureOut">
               <a:rPr lang="en-GB" smtClean="0"/>
-              <a:t>15/04/2026</a:t>
+              <a:t>05/05/2026</a:t>
             </a:fld>
             <a:endParaRPr lang="en-GB"/>
           </a:p>
@@ -3298,7 +3298,7 @@
           <a:p>
             <a:fld id="{76EE70CD-0C52-4877-95B4-2234339B47C2}" type="datetimeFigureOut">
               <a:rPr lang="en-GB" smtClean="0"/>
-              <a:t>15/04/2026</a:t>
+              <a:t>05/05/2026</a:t>
             </a:fld>
             <a:endParaRPr lang="en-GB"/>
           </a:p>
@@ -3539,7 +3539,7 @@
           <a:p>
             <a:fld id="{76EE70CD-0C52-4877-95B4-2234339B47C2}" type="datetimeFigureOut">
               <a:rPr lang="en-GB" smtClean="0"/>
-              <a:t>15/04/2026</a:t>
+              <a:t>05/05/2026</a:t>
             </a:fld>
             <a:endParaRPr lang="en-GB"/>
           </a:p>
@@ -8932,10 +8932,10 @@
         </p:nvGrpSpPr>
         <p:grpSpPr>
           <a:xfrm>
-            <a:off x="5392664" y="2836104"/>
-            <a:ext cx="5408529" cy="1227381"/>
-            <a:chOff x="5392664" y="2836104"/>
-            <a:chExt cx="5408529" cy="1227381"/>
+            <a:off x="5395913" y="2787802"/>
+            <a:ext cx="5405280" cy="1275683"/>
+            <a:chOff x="5395913" y="2787802"/>
+            <a:chExt cx="5405280" cy="1275683"/>
           </a:xfrm>
         </p:grpSpPr>
         <p:pic>
@@ -8954,14 +8954,15 @@
           </p:nvPicPr>
           <p:blipFill>
             <a:blip r:embed="rId18"/>
+            <a:srcRect l="20653" t="17246" r="20193" b="21185"/>
             <a:stretch>
               <a:fillRect/>
             </a:stretch>
           </p:blipFill>
           <p:spPr>
             <a:xfrm>
-              <a:off x="5392664" y="2836104"/>
-              <a:ext cx="1003307" cy="907911"/>
+              <a:off x="5417737" y="2787802"/>
+              <a:ext cx="1071242" cy="1008986"/>
             </a:xfrm>
             <a:prstGeom prst="rect">
               <a:avLst/>
@@ -8984,14 +8985,15 @@
           </p:nvPicPr>
           <p:blipFill>
             <a:blip r:embed="rId19"/>
+            <a:srcRect l="12543" t="8311" r="6445" b="10092"/>
             <a:stretch>
               <a:fillRect/>
             </a:stretch>
           </p:blipFill>
           <p:spPr>
             <a:xfrm>
-              <a:off x="9408222" y="2877502"/>
-              <a:ext cx="1049161" cy="888087"/>
+              <a:off x="9426773" y="2886795"/>
+              <a:ext cx="1000995" cy="853441"/>
             </a:xfrm>
             <a:prstGeom prst="rect">
               <a:avLst/>
@@ -9014,14 +9016,15 @@
           </p:nvPicPr>
           <p:blipFill>
             <a:blip r:embed="rId20"/>
+            <a:srcRect r="23290" b="18453"/>
             <a:stretch>
               <a:fillRect/>
             </a:stretch>
           </p:blipFill>
           <p:spPr>
             <a:xfrm>
-              <a:off x="8534663" y="2952481"/>
-              <a:ext cx="956235" cy="824037"/>
+              <a:off x="8398031" y="2877753"/>
+              <a:ext cx="979566" cy="897372"/>
             </a:xfrm>
             <a:prstGeom prst="rect">
               <a:avLst/>
@@ -9044,14 +9047,15 @@
           </p:nvPicPr>
           <p:blipFill>
             <a:blip r:embed="rId21"/>
+            <a:srcRect l="16765" t="16908" r="15413" b="13125"/>
             <a:stretch>
               <a:fillRect/>
             </a:stretch>
           </p:blipFill>
           <p:spPr>
             <a:xfrm>
-              <a:off x="7385846" y="2844906"/>
-              <a:ext cx="1087584" cy="918090"/>
+              <a:off x="7529826" y="2919882"/>
+              <a:ext cx="868205" cy="756079"/>
             </a:xfrm>
             <a:prstGeom prst="rect">
               <a:avLst/>
@@ -9080,8 +9084,8 @@
           </p:blipFill>
           <p:spPr>
             <a:xfrm>
-              <a:off x="6514800" y="2934392"/>
-              <a:ext cx="868533" cy="752729"/>
+              <a:off x="6514800" y="2852188"/>
+              <a:ext cx="963383" cy="834933"/>
             </a:xfrm>
             <a:prstGeom prst="rect">
               <a:avLst/>

--- a/Figuras/Diagrams TFM.pptx
+++ b/Figuras/Diagrams TFM.pptx
@@ -5,11 +5,12 @@
     <p:sldMasterId id="2147483648" r:id="rId1"/>
   </p:sldMasterIdLst>
   <p:notesMasterIdLst>
-    <p:notesMasterId r:id="rId4"/>
+    <p:notesMasterId r:id="rId5"/>
   </p:notesMasterIdLst>
   <p:sldIdLst>
     <p:sldId id="256" r:id="rId2"/>
     <p:sldId id="258" r:id="rId3"/>
+    <p:sldId id="259" r:id="rId4"/>
   </p:sldIdLst>
   <p:sldSz cx="12192000" cy="6858000"/>
   <p:notesSz cx="6858000" cy="9144000"/>
@@ -198,7 +199,7 @@
           <a:p>
             <a:fld id="{D15AD191-481F-47CD-BB31-6284BAB9F5F2}" type="datetimeFigureOut">
               <a:rPr lang="en-GB" smtClean="0"/>
-              <a:t>05/05/2026</a:t>
+              <a:t>23/06/2026</a:t>
             </a:fld>
             <a:endParaRPr lang="en-GB"/>
           </a:p>
@@ -889,7 +890,7 @@
           <a:p>
             <a:fld id="{76EE70CD-0C52-4877-95B4-2234339B47C2}" type="datetimeFigureOut">
               <a:rPr lang="en-GB" smtClean="0"/>
-              <a:t>05/05/2026</a:t>
+              <a:t>23/06/2026</a:t>
             </a:fld>
             <a:endParaRPr lang="en-GB"/>
           </a:p>
@@ -1087,7 +1088,7 @@
           <a:p>
             <a:fld id="{76EE70CD-0C52-4877-95B4-2234339B47C2}" type="datetimeFigureOut">
               <a:rPr lang="en-GB" smtClean="0"/>
-              <a:t>05/05/2026</a:t>
+              <a:t>23/06/2026</a:t>
             </a:fld>
             <a:endParaRPr lang="en-GB"/>
           </a:p>
@@ -1295,7 +1296,7 @@
           <a:p>
             <a:fld id="{76EE70CD-0C52-4877-95B4-2234339B47C2}" type="datetimeFigureOut">
               <a:rPr lang="en-GB" smtClean="0"/>
-              <a:t>05/05/2026</a:t>
+              <a:t>23/06/2026</a:t>
             </a:fld>
             <a:endParaRPr lang="en-GB"/>
           </a:p>
@@ -1493,7 +1494,7 @@
           <a:p>
             <a:fld id="{76EE70CD-0C52-4877-95B4-2234339B47C2}" type="datetimeFigureOut">
               <a:rPr lang="en-GB" smtClean="0"/>
-              <a:t>05/05/2026</a:t>
+              <a:t>23/06/2026</a:t>
             </a:fld>
             <a:endParaRPr lang="en-GB"/>
           </a:p>
@@ -1768,7 +1769,7 @@
           <a:p>
             <a:fld id="{76EE70CD-0C52-4877-95B4-2234339B47C2}" type="datetimeFigureOut">
               <a:rPr lang="en-GB" smtClean="0"/>
-              <a:t>05/05/2026</a:t>
+              <a:t>23/06/2026</a:t>
             </a:fld>
             <a:endParaRPr lang="en-GB"/>
           </a:p>
@@ -2033,7 +2034,7 @@
           <a:p>
             <a:fld id="{76EE70CD-0C52-4877-95B4-2234339B47C2}" type="datetimeFigureOut">
               <a:rPr lang="en-GB" smtClean="0"/>
-              <a:t>05/05/2026</a:t>
+              <a:t>23/06/2026</a:t>
             </a:fld>
             <a:endParaRPr lang="en-GB"/>
           </a:p>
@@ -2445,7 +2446,7 @@
           <a:p>
             <a:fld id="{76EE70CD-0C52-4877-95B4-2234339B47C2}" type="datetimeFigureOut">
               <a:rPr lang="en-GB" smtClean="0"/>
-              <a:t>05/05/2026</a:t>
+              <a:t>23/06/2026</a:t>
             </a:fld>
             <a:endParaRPr lang="en-GB"/>
           </a:p>
@@ -2586,7 +2587,7 @@
           <a:p>
             <a:fld id="{76EE70CD-0C52-4877-95B4-2234339B47C2}" type="datetimeFigureOut">
               <a:rPr lang="en-GB" smtClean="0"/>
-              <a:t>05/05/2026</a:t>
+              <a:t>23/06/2026</a:t>
             </a:fld>
             <a:endParaRPr lang="en-GB"/>
           </a:p>
@@ -2699,7 +2700,7 @@
           <a:p>
             <a:fld id="{76EE70CD-0C52-4877-95B4-2234339B47C2}" type="datetimeFigureOut">
               <a:rPr lang="en-GB" smtClean="0"/>
-              <a:t>05/05/2026</a:t>
+              <a:t>23/06/2026</a:t>
             </a:fld>
             <a:endParaRPr lang="en-GB"/>
           </a:p>
@@ -3010,7 +3011,7 @@
           <a:p>
             <a:fld id="{76EE70CD-0C52-4877-95B4-2234339B47C2}" type="datetimeFigureOut">
               <a:rPr lang="en-GB" smtClean="0"/>
-              <a:t>05/05/2026</a:t>
+              <a:t>23/06/2026</a:t>
             </a:fld>
             <a:endParaRPr lang="en-GB"/>
           </a:p>
@@ -3298,7 +3299,7 @@
           <a:p>
             <a:fld id="{76EE70CD-0C52-4877-95B4-2234339B47C2}" type="datetimeFigureOut">
               <a:rPr lang="en-GB" smtClean="0"/>
-              <a:t>05/05/2026</a:t>
+              <a:t>23/06/2026</a:t>
             </a:fld>
             <a:endParaRPr lang="en-GB"/>
           </a:p>
@@ -3539,7 +3540,7 @@
           <a:p>
             <a:fld id="{76EE70CD-0C52-4877-95B4-2234339B47C2}" type="datetimeFigureOut">
               <a:rPr lang="en-GB" smtClean="0"/>
-              <a:t>05/05/2026</a:t>
+              <a:t>23/06/2026</a:t>
             </a:fld>
             <a:endParaRPr lang="en-GB"/>
           </a:p>
@@ -10129,6 +10130,8877 @@
 </p:sld>
 </file>
 
+<file path=ppt/slides/slide3.xml><?xml version="1.0" encoding="utf-8"?>
+<p:sld xmlns:a="http://schemas.openxmlformats.org/drawingml/2006/main" xmlns:r="http://schemas.openxmlformats.org/officeDocument/2006/relationships" xmlns:p="http://schemas.openxmlformats.org/presentationml/2006/main">
+  <p:cSld>
+    <p:spTree>
+      <p:nvGrpSpPr>
+        <p:cNvPr id="1" name=""/>
+        <p:cNvGrpSpPr/>
+        <p:nvPr/>
+      </p:nvGrpSpPr>
+      <p:grpSpPr>
+        <a:xfrm>
+          <a:off x="0" y="0"/>
+          <a:ext cx="0" cy="0"/>
+          <a:chOff x="0" y="0"/>
+          <a:chExt cx="0" cy="0"/>
+        </a:xfrm>
+      </p:grpSpPr>
+      <p:sp>
+        <p:nvSpPr>
+          <p:cNvPr id="79" name="Rectángulo 78">
+            <a:extLst>
+              <a:ext uri="{FF2B5EF4-FFF2-40B4-BE49-F238E27FC236}">
+                <a16:creationId xmlns:a16="http://schemas.microsoft.com/office/drawing/2014/main" id="{19EB77B5-4112-0BB5-DB16-CDD05627B468}"/>
+              </a:ext>
+            </a:extLst>
+          </p:cNvPr>
+          <p:cNvSpPr/>
+          <p:nvPr/>
+        </p:nvSpPr>
+        <p:spPr>
+          <a:xfrm>
+            <a:off x="4008357" y="2114524"/>
+            <a:ext cx="7393851" cy="2550645"/>
+          </a:xfrm>
+          <a:prstGeom prst="rect">
+            <a:avLst/>
+          </a:prstGeom>
+          <a:solidFill>
+            <a:schemeClr val="bg2">
+              <a:lumMod val="90000"/>
+            </a:schemeClr>
+          </a:solidFill>
+          <a:ln>
+            <a:solidFill>
+              <a:schemeClr val="bg2">
+                <a:lumMod val="50000"/>
+              </a:schemeClr>
+            </a:solidFill>
+          </a:ln>
+        </p:spPr>
+        <p:style>
+          <a:lnRef idx="2">
+            <a:schemeClr val="accent1">
+              <a:shade val="15000"/>
+            </a:schemeClr>
+          </a:lnRef>
+          <a:fillRef idx="1">
+            <a:schemeClr val="accent1"/>
+          </a:fillRef>
+          <a:effectRef idx="0">
+            <a:schemeClr val="accent1"/>
+          </a:effectRef>
+          <a:fontRef idx="minor">
+            <a:schemeClr val="lt1"/>
+          </a:fontRef>
+        </p:style>
+        <p:txBody>
+          <a:bodyPr rtlCol="0" anchor="ctr"/>
+          <a:lstStyle/>
+          <a:p>
+            <a:pPr algn="ctr"/>
+            <a:endParaRPr lang="en-GB" sz="1633" u="sng" dirty="0"/>
+          </a:p>
+        </p:txBody>
+      </p:sp>
+      <p:sp>
+        <p:nvSpPr>
+          <p:cNvPr id="23" name="CuadroTexto 22">
+            <a:extLst>
+              <a:ext uri="{FF2B5EF4-FFF2-40B4-BE49-F238E27FC236}">
+                <a16:creationId xmlns:a16="http://schemas.microsoft.com/office/drawing/2014/main" id="{8EEFB8A7-1321-2145-76F9-3A201DB6C12C}"/>
+              </a:ext>
+            </a:extLst>
+          </p:cNvPr>
+          <p:cNvSpPr txBox="1"/>
+          <p:nvPr/>
+        </p:nvSpPr>
+        <p:spPr>
+          <a:xfrm>
+            <a:off x="1096112" y="44873"/>
+            <a:ext cx="2801493" cy="539250"/>
+          </a:xfrm>
+          <a:prstGeom prst="rect">
+            <a:avLst/>
+          </a:prstGeom>
+          <a:noFill/>
+          <a:ln>
+            <a:solidFill>
+              <a:schemeClr val="tx1"/>
+            </a:solidFill>
+          </a:ln>
+        </p:spPr>
+        <p:txBody>
+          <a:bodyPr wrap="square" rtlCol="0">
+            <a:spAutoFit/>
+          </a:bodyPr>
+          <a:lstStyle/>
+          <a:p>
+            <a:pPr algn="ctr"/>
+            <a:r>
+              <a:rPr lang="es-ES" sz="1452" b="1" dirty="0"/>
+              <a:t>Training set </a:t>
+            </a:r>
+          </a:p>
+          <a:p>
+            <a:pPr algn="ctr"/>
+            <a:r>
+              <a:rPr lang="es-ES" sz="1452" dirty="0"/>
+              <a:t>(</a:t>
+            </a:r>
+            <a:r>
+              <a:rPr lang="es-ES" sz="1452" i="1" dirty="0"/>
+              <a:t>n</a:t>
+            </a:r>
+            <a:r>
+              <a:rPr lang="es-ES" sz="1452" dirty="0"/>
+              <a:t> </a:t>
+            </a:r>
+            <a:r>
+              <a:rPr lang="es-ES" sz="1452" dirty="0" err="1"/>
+              <a:t>molecules</a:t>
+            </a:r>
+            <a:r>
+              <a:rPr lang="es-ES" sz="1452" dirty="0"/>
+              <a:t>, </a:t>
+            </a:r>
+            <a:r>
+              <a:rPr lang="es-ES" sz="1452" i="1" dirty="0"/>
+              <a:t>p</a:t>
+            </a:r>
+            <a:r>
+              <a:rPr lang="es-ES" sz="1452" dirty="0"/>
+              <a:t> </a:t>
+            </a:r>
+            <a:r>
+              <a:rPr lang="es-ES" sz="1452" dirty="0" err="1"/>
+              <a:t>features</a:t>
+            </a:r>
+            <a:r>
+              <a:rPr lang="es-ES" sz="1452" dirty="0"/>
+              <a:t>)</a:t>
+            </a:r>
+          </a:p>
+        </p:txBody>
+      </p:sp>
+      <p:cxnSp>
+        <p:nvCxnSpPr>
+          <p:cNvPr id="110" name="Conector recto 109">
+            <a:extLst>
+              <a:ext uri="{FF2B5EF4-FFF2-40B4-BE49-F238E27FC236}">
+                <a16:creationId xmlns:a16="http://schemas.microsoft.com/office/drawing/2014/main" id="{0616D13B-D95D-1AAB-1E8D-F9694DAFF520}"/>
+              </a:ext>
+            </a:extLst>
+          </p:cNvPr>
+          <p:cNvCxnSpPr>
+            <a:cxnSpLocks/>
+          </p:cNvCxnSpPr>
+          <p:nvPr/>
+        </p:nvCxnSpPr>
+        <p:spPr>
+          <a:xfrm flipH="1">
+            <a:off x="9332214" y="3055166"/>
+            <a:ext cx="401110" cy="476872"/>
+          </a:xfrm>
+          <a:prstGeom prst="line">
+            <a:avLst/>
+          </a:prstGeom>
+        </p:spPr>
+        <p:style>
+          <a:lnRef idx="2">
+            <a:schemeClr val="dk1"/>
+          </a:lnRef>
+          <a:fillRef idx="0">
+            <a:schemeClr val="dk1"/>
+          </a:fillRef>
+          <a:effectRef idx="1">
+            <a:schemeClr val="dk1"/>
+          </a:effectRef>
+          <a:fontRef idx="minor">
+            <a:schemeClr val="tx1"/>
+          </a:fontRef>
+        </p:style>
+      </p:cxnSp>
+      <p:cxnSp>
+        <p:nvCxnSpPr>
+          <p:cNvPr id="111" name="Conector recto 110">
+            <a:extLst>
+              <a:ext uri="{FF2B5EF4-FFF2-40B4-BE49-F238E27FC236}">
+                <a16:creationId xmlns:a16="http://schemas.microsoft.com/office/drawing/2014/main" id="{5A962447-A58C-7365-BED9-256F61BC51A7}"/>
+              </a:ext>
+            </a:extLst>
+          </p:cNvPr>
+          <p:cNvCxnSpPr>
+            <a:cxnSpLocks/>
+          </p:cNvCxnSpPr>
+          <p:nvPr/>
+        </p:nvCxnSpPr>
+        <p:spPr>
+          <a:xfrm>
+            <a:off x="9963562" y="3055166"/>
+            <a:ext cx="401110" cy="476872"/>
+          </a:xfrm>
+          <a:prstGeom prst="line">
+            <a:avLst/>
+          </a:prstGeom>
+        </p:spPr>
+        <p:style>
+          <a:lnRef idx="2">
+            <a:schemeClr val="dk1"/>
+          </a:lnRef>
+          <a:fillRef idx="0">
+            <a:schemeClr val="dk1"/>
+          </a:fillRef>
+          <a:effectRef idx="1">
+            <a:schemeClr val="dk1"/>
+          </a:effectRef>
+          <a:fontRef idx="minor">
+            <a:schemeClr val="tx1"/>
+          </a:fontRef>
+        </p:style>
+      </p:cxnSp>
+      <p:sp>
+        <p:nvSpPr>
+          <p:cNvPr id="112" name="Elipse 111">
+            <a:extLst>
+              <a:ext uri="{FF2B5EF4-FFF2-40B4-BE49-F238E27FC236}">
+                <a16:creationId xmlns:a16="http://schemas.microsoft.com/office/drawing/2014/main" id="{47EFBEA4-8A28-3086-3C6A-2995CEE7ED98}"/>
+              </a:ext>
+            </a:extLst>
+          </p:cNvPr>
+          <p:cNvSpPr/>
+          <p:nvPr/>
+        </p:nvSpPr>
+        <p:spPr>
+          <a:xfrm>
+            <a:off x="9667892" y="2762812"/>
+            <a:ext cx="361105" cy="340624"/>
+          </a:xfrm>
+          <a:prstGeom prst="ellipse">
+            <a:avLst/>
+          </a:prstGeom>
+          <a:solidFill>
+            <a:schemeClr val="accent5">
+              <a:lumMod val="20000"/>
+              <a:lumOff val="80000"/>
+            </a:schemeClr>
+          </a:solidFill>
+          <a:ln>
+            <a:solidFill>
+              <a:schemeClr val="accent5">
+                <a:lumMod val="60000"/>
+                <a:lumOff val="40000"/>
+              </a:schemeClr>
+            </a:solidFill>
+          </a:ln>
+        </p:spPr>
+        <p:style>
+          <a:lnRef idx="2">
+            <a:schemeClr val="accent1">
+              <a:shade val="15000"/>
+            </a:schemeClr>
+          </a:lnRef>
+          <a:fillRef idx="1">
+            <a:schemeClr val="accent1"/>
+          </a:fillRef>
+          <a:effectRef idx="0">
+            <a:schemeClr val="accent1"/>
+          </a:effectRef>
+          <a:fontRef idx="minor">
+            <a:schemeClr val="lt1"/>
+          </a:fontRef>
+        </p:style>
+        <p:txBody>
+          <a:bodyPr rtlCol="0" anchor="ctr"/>
+          <a:lstStyle/>
+          <a:p>
+            <a:pPr algn="ctr"/>
+            <a:endParaRPr lang="en-GB" sz="998" dirty="0">
+              <a:solidFill>
+                <a:schemeClr val="tx1"/>
+              </a:solidFill>
+            </a:endParaRPr>
+          </a:p>
+        </p:txBody>
+      </p:sp>
+      <p:cxnSp>
+        <p:nvCxnSpPr>
+          <p:cNvPr id="113" name="Conector recto 112">
+            <a:extLst>
+              <a:ext uri="{FF2B5EF4-FFF2-40B4-BE49-F238E27FC236}">
+                <a16:creationId xmlns:a16="http://schemas.microsoft.com/office/drawing/2014/main" id="{F68DA517-64FD-DC04-5787-37A221238A63}"/>
+              </a:ext>
+            </a:extLst>
+          </p:cNvPr>
+          <p:cNvCxnSpPr>
+            <a:cxnSpLocks/>
+          </p:cNvCxnSpPr>
+          <p:nvPr/>
+        </p:nvCxnSpPr>
+        <p:spPr>
+          <a:xfrm flipH="1">
+            <a:off x="10046674" y="3842289"/>
+            <a:ext cx="223830" cy="489628"/>
+          </a:xfrm>
+          <a:prstGeom prst="line">
+            <a:avLst/>
+          </a:prstGeom>
+        </p:spPr>
+        <p:style>
+          <a:lnRef idx="2">
+            <a:schemeClr val="dk1"/>
+          </a:lnRef>
+          <a:fillRef idx="0">
+            <a:schemeClr val="dk1"/>
+          </a:fillRef>
+          <a:effectRef idx="1">
+            <a:schemeClr val="dk1"/>
+          </a:effectRef>
+          <a:fontRef idx="minor">
+            <a:schemeClr val="tx1"/>
+          </a:fontRef>
+        </p:style>
+      </p:cxnSp>
+      <p:cxnSp>
+        <p:nvCxnSpPr>
+          <p:cNvPr id="114" name="Conector recto 113">
+            <a:extLst>
+              <a:ext uri="{FF2B5EF4-FFF2-40B4-BE49-F238E27FC236}">
+                <a16:creationId xmlns:a16="http://schemas.microsoft.com/office/drawing/2014/main" id="{C080B047-EFC5-1564-86DE-5FD6F68C4FCC}"/>
+              </a:ext>
+            </a:extLst>
+          </p:cNvPr>
+          <p:cNvCxnSpPr>
+            <a:cxnSpLocks/>
+          </p:cNvCxnSpPr>
+          <p:nvPr/>
+        </p:nvCxnSpPr>
+        <p:spPr>
+          <a:xfrm>
+            <a:off x="10507922" y="3835473"/>
+            <a:ext cx="260725" cy="496445"/>
+          </a:xfrm>
+          <a:prstGeom prst="line">
+            <a:avLst/>
+          </a:prstGeom>
+        </p:spPr>
+        <p:style>
+          <a:lnRef idx="2">
+            <a:schemeClr val="dk1"/>
+          </a:lnRef>
+          <a:fillRef idx="0">
+            <a:schemeClr val="dk1"/>
+          </a:fillRef>
+          <a:effectRef idx="1">
+            <a:schemeClr val="dk1"/>
+          </a:effectRef>
+          <a:fontRef idx="minor">
+            <a:schemeClr val="tx1"/>
+          </a:fontRef>
+        </p:style>
+      </p:cxnSp>
+      <p:cxnSp>
+        <p:nvCxnSpPr>
+          <p:cNvPr id="115" name="Conector recto 114">
+            <a:extLst>
+              <a:ext uri="{FF2B5EF4-FFF2-40B4-BE49-F238E27FC236}">
+                <a16:creationId xmlns:a16="http://schemas.microsoft.com/office/drawing/2014/main" id="{D8DC97CA-4AB2-11C3-7767-6B4625DF78E9}"/>
+              </a:ext>
+            </a:extLst>
+          </p:cNvPr>
+          <p:cNvCxnSpPr>
+            <a:cxnSpLocks/>
+          </p:cNvCxnSpPr>
+          <p:nvPr/>
+        </p:nvCxnSpPr>
+        <p:spPr>
+          <a:xfrm>
+            <a:off x="10402173" y="3863475"/>
+            <a:ext cx="0" cy="482053"/>
+          </a:xfrm>
+          <a:prstGeom prst="line">
+            <a:avLst/>
+          </a:prstGeom>
+        </p:spPr>
+        <p:style>
+          <a:lnRef idx="2">
+            <a:schemeClr val="dk1"/>
+          </a:lnRef>
+          <a:fillRef idx="0">
+            <a:schemeClr val="dk1"/>
+          </a:fillRef>
+          <a:effectRef idx="1">
+            <a:schemeClr val="dk1"/>
+          </a:effectRef>
+          <a:fontRef idx="minor">
+            <a:schemeClr val="tx1"/>
+          </a:fontRef>
+        </p:style>
+      </p:cxnSp>
+      <p:cxnSp>
+        <p:nvCxnSpPr>
+          <p:cNvPr id="116" name="Conector recto 115">
+            <a:extLst>
+              <a:ext uri="{FF2B5EF4-FFF2-40B4-BE49-F238E27FC236}">
+                <a16:creationId xmlns:a16="http://schemas.microsoft.com/office/drawing/2014/main" id="{6E3B856A-B736-4380-5DA4-327F793DFEFF}"/>
+              </a:ext>
+            </a:extLst>
+          </p:cNvPr>
+          <p:cNvCxnSpPr>
+            <a:cxnSpLocks/>
+            <a:endCxn id="122" idx="0"/>
+          </p:cNvCxnSpPr>
+          <p:nvPr/>
+        </p:nvCxnSpPr>
+        <p:spPr>
+          <a:xfrm flipH="1">
+            <a:off x="8972448" y="3833649"/>
+            <a:ext cx="248459" cy="503238"/>
+          </a:xfrm>
+          <a:prstGeom prst="line">
+            <a:avLst/>
+          </a:prstGeom>
+        </p:spPr>
+        <p:style>
+          <a:lnRef idx="2">
+            <a:schemeClr val="dk1"/>
+          </a:lnRef>
+          <a:fillRef idx="0">
+            <a:schemeClr val="dk1"/>
+          </a:fillRef>
+          <a:effectRef idx="1">
+            <a:schemeClr val="dk1"/>
+          </a:effectRef>
+          <a:fontRef idx="minor">
+            <a:schemeClr val="tx1"/>
+          </a:fontRef>
+        </p:style>
+      </p:cxnSp>
+      <p:cxnSp>
+        <p:nvCxnSpPr>
+          <p:cNvPr id="117" name="Conector recto 116">
+            <a:extLst>
+              <a:ext uri="{FF2B5EF4-FFF2-40B4-BE49-F238E27FC236}">
+                <a16:creationId xmlns:a16="http://schemas.microsoft.com/office/drawing/2014/main" id="{4734D326-E84F-5D7A-FE66-4639A57DE940}"/>
+              </a:ext>
+            </a:extLst>
+          </p:cNvPr>
+          <p:cNvCxnSpPr>
+            <a:cxnSpLocks/>
+            <a:endCxn id="124" idx="0"/>
+          </p:cNvCxnSpPr>
+          <p:nvPr/>
+        </p:nvCxnSpPr>
+        <p:spPr>
+          <a:xfrm>
+            <a:off x="9458325" y="3826831"/>
+            <a:ext cx="227897" cy="506548"/>
+          </a:xfrm>
+          <a:prstGeom prst="line">
+            <a:avLst/>
+          </a:prstGeom>
+        </p:spPr>
+        <p:style>
+          <a:lnRef idx="2">
+            <a:schemeClr val="dk1"/>
+          </a:lnRef>
+          <a:fillRef idx="0">
+            <a:schemeClr val="dk1"/>
+          </a:fillRef>
+          <a:effectRef idx="1">
+            <a:schemeClr val="dk1"/>
+          </a:effectRef>
+          <a:fontRef idx="minor">
+            <a:schemeClr val="tx1"/>
+          </a:fontRef>
+        </p:style>
+      </p:cxnSp>
+      <p:cxnSp>
+        <p:nvCxnSpPr>
+          <p:cNvPr id="118" name="Conector recto 117">
+            <a:extLst>
+              <a:ext uri="{FF2B5EF4-FFF2-40B4-BE49-F238E27FC236}">
+                <a16:creationId xmlns:a16="http://schemas.microsoft.com/office/drawing/2014/main" id="{057C69D5-59C9-6764-0BE9-996167637E13}"/>
+              </a:ext>
+            </a:extLst>
+          </p:cNvPr>
+          <p:cNvCxnSpPr>
+            <a:cxnSpLocks/>
+          </p:cNvCxnSpPr>
+          <p:nvPr/>
+        </p:nvCxnSpPr>
+        <p:spPr>
+          <a:xfrm>
+            <a:off x="9330972" y="3854833"/>
+            <a:ext cx="0" cy="482053"/>
+          </a:xfrm>
+          <a:prstGeom prst="line">
+            <a:avLst/>
+          </a:prstGeom>
+        </p:spPr>
+        <p:style>
+          <a:lnRef idx="2">
+            <a:schemeClr val="dk1"/>
+          </a:lnRef>
+          <a:fillRef idx="0">
+            <a:schemeClr val="dk1"/>
+          </a:fillRef>
+          <a:effectRef idx="1">
+            <a:schemeClr val="dk1"/>
+          </a:effectRef>
+          <a:fontRef idx="minor">
+            <a:schemeClr val="tx1"/>
+          </a:fontRef>
+        </p:style>
+      </p:cxnSp>
+      <p:sp>
+        <p:nvSpPr>
+          <p:cNvPr id="119" name="Elipse 118">
+            <a:extLst>
+              <a:ext uri="{FF2B5EF4-FFF2-40B4-BE49-F238E27FC236}">
+                <a16:creationId xmlns:a16="http://schemas.microsoft.com/office/drawing/2014/main" id="{EFC5C90F-58FB-D2F9-0BDB-F1790EC8AFFC}"/>
+              </a:ext>
+            </a:extLst>
+          </p:cNvPr>
+          <p:cNvSpPr/>
+          <p:nvPr/>
+        </p:nvSpPr>
+        <p:spPr>
+          <a:xfrm>
+            <a:off x="10283545" y="4331918"/>
+            <a:ext cx="260725" cy="258911"/>
+          </a:xfrm>
+          <a:prstGeom prst="ellipse">
+            <a:avLst/>
+          </a:prstGeom>
+          <a:solidFill>
+            <a:schemeClr val="accent6">
+              <a:lumMod val="40000"/>
+              <a:lumOff val="60000"/>
+            </a:schemeClr>
+          </a:solidFill>
+          <a:ln>
+            <a:solidFill>
+              <a:schemeClr val="accent3">
+                <a:lumMod val="60000"/>
+                <a:lumOff val="40000"/>
+              </a:schemeClr>
+            </a:solidFill>
+          </a:ln>
+        </p:spPr>
+        <p:style>
+          <a:lnRef idx="2">
+            <a:schemeClr val="accent1">
+              <a:shade val="15000"/>
+            </a:schemeClr>
+          </a:lnRef>
+          <a:fillRef idx="1">
+            <a:schemeClr val="accent1"/>
+          </a:fillRef>
+          <a:effectRef idx="0">
+            <a:schemeClr val="accent1"/>
+          </a:effectRef>
+          <a:fontRef idx="minor">
+            <a:schemeClr val="lt1"/>
+          </a:fontRef>
+        </p:style>
+        <p:txBody>
+          <a:bodyPr rtlCol="0" anchor="ctr"/>
+          <a:lstStyle/>
+          <a:p>
+            <a:pPr algn="ctr"/>
+            <a:r>
+              <a:rPr lang="es-ES" sz="998" dirty="0">
+                <a:solidFill>
+                  <a:schemeClr val="bg2">
+                    <a:lumMod val="50000"/>
+                  </a:schemeClr>
+                </a:solidFill>
+              </a:rPr>
+              <a:t>4</a:t>
+            </a:r>
+            <a:endParaRPr lang="en-GB" sz="998" dirty="0">
+              <a:solidFill>
+                <a:schemeClr val="bg2">
+                  <a:lumMod val="50000"/>
+                </a:schemeClr>
+              </a:solidFill>
+            </a:endParaRPr>
+          </a:p>
+        </p:txBody>
+      </p:sp>
+      <p:sp>
+        <p:nvSpPr>
+          <p:cNvPr id="120" name="Elipse 119">
+            <a:extLst>
+              <a:ext uri="{FF2B5EF4-FFF2-40B4-BE49-F238E27FC236}">
+                <a16:creationId xmlns:a16="http://schemas.microsoft.com/office/drawing/2014/main" id="{1473B87A-C76C-8A75-6237-F653DDBA4E4B}"/>
+              </a:ext>
+            </a:extLst>
+          </p:cNvPr>
+          <p:cNvSpPr/>
+          <p:nvPr/>
+        </p:nvSpPr>
+        <p:spPr>
+          <a:xfrm>
+            <a:off x="9923779" y="4324088"/>
+            <a:ext cx="260725" cy="258911"/>
+          </a:xfrm>
+          <a:prstGeom prst="ellipse">
+            <a:avLst/>
+          </a:prstGeom>
+          <a:solidFill>
+            <a:schemeClr val="accent6">
+              <a:lumMod val="40000"/>
+              <a:lumOff val="60000"/>
+            </a:schemeClr>
+          </a:solidFill>
+          <a:ln>
+            <a:solidFill>
+              <a:schemeClr val="accent3">
+                <a:lumMod val="60000"/>
+                <a:lumOff val="40000"/>
+              </a:schemeClr>
+            </a:solidFill>
+          </a:ln>
+        </p:spPr>
+        <p:style>
+          <a:lnRef idx="2">
+            <a:schemeClr val="accent1">
+              <a:shade val="15000"/>
+            </a:schemeClr>
+          </a:lnRef>
+          <a:fillRef idx="1">
+            <a:schemeClr val="accent1"/>
+          </a:fillRef>
+          <a:effectRef idx="0">
+            <a:schemeClr val="accent1"/>
+          </a:effectRef>
+          <a:fontRef idx="minor">
+            <a:schemeClr val="lt1"/>
+          </a:fontRef>
+        </p:style>
+        <p:txBody>
+          <a:bodyPr rtlCol="0" anchor="ctr"/>
+          <a:lstStyle/>
+          <a:p>
+            <a:pPr algn="ctr"/>
+            <a:r>
+              <a:rPr lang="es-ES" sz="998" dirty="0">
+                <a:solidFill>
+                  <a:schemeClr val="bg2">
+                    <a:lumMod val="50000"/>
+                  </a:schemeClr>
+                </a:solidFill>
+              </a:rPr>
+              <a:t>2</a:t>
+            </a:r>
+            <a:endParaRPr lang="en-GB" sz="998" dirty="0">
+              <a:solidFill>
+                <a:schemeClr val="bg2">
+                  <a:lumMod val="50000"/>
+                </a:schemeClr>
+              </a:solidFill>
+            </a:endParaRPr>
+          </a:p>
+        </p:txBody>
+      </p:sp>
+      <p:sp>
+        <p:nvSpPr>
+          <p:cNvPr id="121" name="Elipse 120">
+            <a:extLst>
+              <a:ext uri="{FF2B5EF4-FFF2-40B4-BE49-F238E27FC236}">
+                <a16:creationId xmlns:a16="http://schemas.microsoft.com/office/drawing/2014/main" id="{0655D880-6E1A-19E6-EBA1-A0ABBEC3AEE3}"/>
+              </a:ext>
+            </a:extLst>
+          </p:cNvPr>
+          <p:cNvSpPr/>
+          <p:nvPr/>
+        </p:nvSpPr>
+        <p:spPr>
+          <a:xfrm>
+            <a:off x="10662899" y="4331918"/>
+            <a:ext cx="260725" cy="258911"/>
+          </a:xfrm>
+          <a:prstGeom prst="ellipse">
+            <a:avLst/>
+          </a:prstGeom>
+          <a:solidFill>
+            <a:schemeClr val="accent6">
+              <a:lumMod val="40000"/>
+              <a:lumOff val="60000"/>
+            </a:schemeClr>
+          </a:solidFill>
+          <a:ln>
+            <a:solidFill>
+              <a:schemeClr val="accent3">
+                <a:lumMod val="60000"/>
+                <a:lumOff val="40000"/>
+              </a:schemeClr>
+            </a:solidFill>
+          </a:ln>
+        </p:spPr>
+        <p:style>
+          <a:lnRef idx="2">
+            <a:schemeClr val="accent1">
+              <a:shade val="15000"/>
+            </a:schemeClr>
+          </a:lnRef>
+          <a:fillRef idx="1">
+            <a:schemeClr val="accent1"/>
+          </a:fillRef>
+          <a:effectRef idx="0">
+            <a:schemeClr val="accent1"/>
+          </a:effectRef>
+          <a:fontRef idx="minor">
+            <a:schemeClr val="lt1"/>
+          </a:fontRef>
+        </p:style>
+        <p:txBody>
+          <a:bodyPr rtlCol="0" anchor="ctr"/>
+          <a:lstStyle/>
+          <a:p>
+            <a:pPr algn="ctr"/>
+            <a:r>
+              <a:rPr lang="es-ES" sz="998" dirty="0">
+                <a:solidFill>
+                  <a:schemeClr val="bg2">
+                    <a:lumMod val="50000"/>
+                  </a:schemeClr>
+                </a:solidFill>
+              </a:rPr>
+              <a:t>9</a:t>
+            </a:r>
+            <a:endParaRPr lang="en-GB" sz="998" dirty="0">
+              <a:solidFill>
+                <a:schemeClr val="bg2">
+                  <a:lumMod val="50000"/>
+                </a:schemeClr>
+              </a:solidFill>
+            </a:endParaRPr>
+          </a:p>
+        </p:txBody>
+      </p:sp>
+      <p:sp>
+        <p:nvSpPr>
+          <p:cNvPr id="122" name="Elipse 121">
+            <a:extLst>
+              <a:ext uri="{FF2B5EF4-FFF2-40B4-BE49-F238E27FC236}">
+                <a16:creationId xmlns:a16="http://schemas.microsoft.com/office/drawing/2014/main" id="{3AAADD62-3F97-5321-A10C-CCF6703C95E0}"/>
+              </a:ext>
+            </a:extLst>
+          </p:cNvPr>
+          <p:cNvSpPr/>
+          <p:nvPr/>
+        </p:nvSpPr>
+        <p:spPr>
+          <a:xfrm>
+            <a:off x="8842086" y="4336887"/>
+            <a:ext cx="260725" cy="258911"/>
+          </a:xfrm>
+          <a:prstGeom prst="ellipse">
+            <a:avLst/>
+          </a:prstGeom>
+          <a:solidFill>
+            <a:schemeClr val="accent2">
+              <a:lumMod val="40000"/>
+              <a:lumOff val="60000"/>
+            </a:schemeClr>
+          </a:solidFill>
+          <a:ln>
+            <a:solidFill>
+              <a:schemeClr val="accent2">
+                <a:lumMod val="75000"/>
+              </a:schemeClr>
+            </a:solidFill>
+          </a:ln>
+        </p:spPr>
+        <p:style>
+          <a:lnRef idx="2">
+            <a:schemeClr val="accent1">
+              <a:shade val="15000"/>
+            </a:schemeClr>
+          </a:lnRef>
+          <a:fillRef idx="1">
+            <a:schemeClr val="accent1"/>
+          </a:fillRef>
+          <a:effectRef idx="0">
+            <a:schemeClr val="accent1"/>
+          </a:effectRef>
+          <a:fontRef idx="minor">
+            <a:schemeClr val="lt1"/>
+          </a:fontRef>
+        </p:style>
+        <p:txBody>
+          <a:bodyPr rtlCol="0" anchor="ctr"/>
+          <a:lstStyle/>
+          <a:p>
+            <a:pPr algn="ctr"/>
+            <a:r>
+              <a:rPr lang="es-ES" sz="998" dirty="0">
+                <a:solidFill>
+                  <a:schemeClr val="bg2">
+                    <a:lumMod val="50000"/>
+                  </a:schemeClr>
+                </a:solidFill>
+              </a:rPr>
+              <a:t>3</a:t>
+            </a:r>
+            <a:endParaRPr lang="en-GB" sz="998" dirty="0">
+              <a:solidFill>
+                <a:schemeClr val="bg2">
+                  <a:lumMod val="50000"/>
+                </a:schemeClr>
+              </a:solidFill>
+            </a:endParaRPr>
+          </a:p>
+        </p:txBody>
+      </p:sp>
+      <p:sp>
+        <p:nvSpPr>
+          <p:cNvPr id="123" name="Elipse 122">
+            <a:extLst>
+              <a:ext uri="{FF2B5EF4-FFF2-40B4-BE49-F238E27FC236}">
+                <a16:creationId xmlns:a16="http://schemas.microsoft.com/office/drawing/2014/main" id="{5D2CC35D-97EE-C7D3-B5D4-4996928BB395}"/>
+              </a:ext>
+            </a:extLst>
+          </p:cNvPr>
+          <p:cNvSpPr/>
+          <p:nvPr/>
+        </p:nvSpPr>
+        <p:spPr>
+          <a:xfrm>
+            <a:off x="9201852" y="4329219"/>
+            <a:ext cx="260725" cy="258911"/>
+          </a:xfrm>
+          <a:prstGeom prst="ellipse">
+            <a:avLst/>
+          </a:prstGeom>
+          <a:solidFill>
+            <a:schemeClr val="accent2">
+              <a:lumMod val="40000"/>
+              <a:lumOff val="60000"/>
+            </a:schemeClr>
+          </a:solidFill>
+          <a:ln>
+            <a:solidFill>
+              <a:schemeClr val="accent2">
+                <a:lumMod val="75000"/>
+              </a:schemeClr>
+            </a:solidFill>
+          </a:ln>
+        </p:spPr>
+        <p:style>
+          <a:lnRef idx="2">
+            <a:schemeClr val="accent1">
+              <a:shade val="15000"/>
+            </a:schemeClr>
+          </a:lnRef>
+          <a:fillRef idx="1">
+            <a:schemeClr val="accent1"/>
+          </a:fillRef>
+          <a:effectRef idx="0">
+            <a:schemeClr val="accent1"/>
+          </a:effectRef>
+          <a:fontRef idx="minor">
+            <a:schemeClr val="lt1"/>
+          </a:fontRef>
+        </p:style>
+        <p:txBody>
+          <a:bodyPr rtlCol="0" anchor="ctr"/>
+          <a:lstStyle/>
+          <a:p>
+            <a:pPr algn="ctr"/>
+            <a:r>
+              <a:rPr lang="es-ES" sz="998" dirty="0">
+                <a:solidFill>
+                  <a:schemeClr val="bg2">
+                    <a:lumMod val="50000"/>
+                  </a:schemeClr>
+                </a:solidFill>
+              </a:rPr>
+              <a:t>5</a:t>
+            </a:r>
+            <a:endParaRPr lang="en-GB" sz="998" dirty="0">
+              <a:solidFill>
+                <a:schemeClr val="bg2">
+                  <a:lumMod val="50000"/>
+                </a:schemeClr>
+              </a:solidFill>
+            </a:endParaRPr>
+          </a:p>
+        </p:txBody>
+      </p:sp>
+      <p:sp>
+        <p:nvSpPr>
+          <p:cNvPr id="124" name="Elipse 123">
+            <a:extLst>
+              <a:ext uri="{FF2B5EF4-FFF2-40B4-BE49-F238E27FC236}">
+                <a16:creationId xmlns:a16="http://schemas.microsoft.com/office/drawing/2014/main" id="{257E9D1B-8E58-9EFC-5195-A08CF32C3C66}"/>
+              </a:ext>
+            </a:extLst>
+          </p:cNvPr>
+          <p:cNvSpPr/>
+          <p:nvPr/>
+        </p:nvSpPr>
+        <p:spPr>
+          <a:xfrm>
+            <a:off x="9555860" y="4333379"/>
+            <a:ext cx="260725" cy="258911"/>
+          </a:xfrm>
+          <a:prstGeom prst="ellipse">
+            <a:avLst/>
+          </a:prstGeom>
+          <a:solidFill>
+            <a:schemeClr val="accent2">
+              <a:lumMod val="40000"/>
+              <a:lumOff val="60000"/>
+            </a:schemeClr>
+          </a:solidFill>
+          <a:ln>
+            <a:solidFill>
+              <a:schemeClr val="accent2">
+                <a:lumMod val="75000"/>
+              </a:schemeClr>
+            </a:solidFill>
+          </a:ln>
+        </p:spPr>
+        <p:style>
+          <a:lnRef idx="2">
+            <a:schemeClr val="accent1">
+              <a:shade val="15000"/>
+            </a:schemeClr>
+          </a:lnRef>
+          <a:fillRef idx="1">
+            <a:schemeClr val="accent1"/>
+          </a:fillRef>
+          <a:effectRef idx="0">
+            <a:schemeClr val="accent1"/>
+          </a:effectRef>
+          <a:fontRef idx="minor">
+            <a:schemeClr val="lt1"/>
+          </a:fontRef>
+        </p:style>
+        <p:txBody>
+          <a:bodyPr rtlCol="0" anchor="ctr"/>
+          <a:lstStyle/>
+          <a:p>
+            <a:pPr algn="ctr"/>
+            <a:r>
+              <a:rPr lang="es-ES" sz="998" dirty="0">
+                <a:solidFill>
+                  <a:schemeClr val="bg2">
+                    <a:lumMod val="50000"/>
+                  </a:schemeClr>
+                </a:solidFill>
+              </a:rPr>
+              <a:t>8</a:t>
+            </a:r>
+            <a:endParaRPr lang="en-GB" sz="998" dirty="0">
+              <a:solidFill>
+                <a:schemeClr val="bg2">
+                  <a:lumMod val="50000"/>
+                </a:schemeClr>
+              </a:solidFill>
+            </a:endParaRPr>
+          </a:p>
+        </p:txBody>
+      </p:sp>
+      <p:sp>
+        <p:nvSpPr>
+          <p:cNvPr id="126" name="CuadroTexto 125">
+            <a:extLst>
+              <a:ext uri="{FF2B5EF4-FFF2-40B4-BE49-F238E27FC236}">
+                <a16:creationId xmlns:a16="http://schemas.microsoft.com/office/drawing/2014/main" id="{400CB39D-27EE-8F12-56B9-489920E23896}"/>
+              </a:ext>
+            </a:extLst>
+          </p:cNvPr>
+          <p:cNvSpPr txBox="1"/>
+          <p:nvPr/>
+        </p:nvSpPr>
+        <p:spPr>
+          <a:xfrm>
+            <a:off x="10173875" y="3135706"/>
+            <a:ext cx="715260" cy="315792"/>
+          </a:xfrm>
+          <a:prstGeom prst="rect">
+            <a:avLst/>
+          </a:prstGeom>
+          <a:noFill/>
+        </p:spPr>
+        <p:txBody>
+          <a:bodyPr wrap="none" rtlCol="0">
+            <a:spAutoFit/>
+          </a:bodyPr>
+          <a:lstStyle/>
+          <a:p>
+            <a:r>
+              <a:rPr lang="es-ES" sz="1452" dirty="0"/>
+              <a:t> </a:t>
+            </a:r>
+            <a:r>
+              <a:rPr lang="es-ES" sz="1452" b="1" dirty="0">
+                <a:latin typeface="Cambria Math" panose="02040503050406030204" pitchFamily="18" charset="0"/>
+                <a:ea typeface="Cambria Math" panose="02040503050406030204" pitchFamily="18" charset="0"/>
+              </a:rPr>
+              <a:t>X </a:t>
+            </a:r>
+            <a:r>
+              <a:rPr lang="es-ES" sz="1452" baseline="-25000" dirty="0">
+                <a:latin typeface="Cambria Math" panose="02040503050406030204" pitchFamily="18" charset="0"/>
+                <a:ea typeface="Cambria Math" panose="02040503050406030204" pitchFamily="18" charset="0"/>
+              </a:rPr>
+              <a:t>j</a:t>
+            </a:r>
+            <a:r>
+              <a:rPr lang="es-ES" sz="1452" dirty="0"/>
+              <a:t>  ≠ 0</a:t>
+            </a:r>
+            <a:endParaRPr lang="en-GB" sz="1452" dirty="0"/>
+          </a:p>
+        </p:txBody>
+      </p:sp>
+      <p:sp>
+        <p:nvSpPr>
+          <p:cNvPr id="127" name="Elipse 126">
+            <a:extLst>
+              <a:ext uri="{FF2B5EF4-FFF2-40B4-BE49-F238E27FC236}">
+                <a16:creationId xmlns:a16="http://schemas.microsoft.com/office/drawing/2014/main" id="{76BB50FC-CD3E-40BA-EF86-97E202C817F7}"/>
+              </a:ext>
+            </a:extLst>
+          </p:cNvPr>
+          <p:cNvSpPr/>
+          <p:nvPr/>
+        </p:nvSpPr>
+        <p:spPr>
+          <a:xfrm>
+            <a:off x="9151386" y="3525454"/>
+            <a:ext cx="361105" cy="340624"/>
+          </a:xfrm>
+          <a:prstGeom prst="ellipse">
+            <a:avLst/>
+          </a:prstGeom>
+          <a:solidFill>
+            <a:schemeClr val="accent5">
+              <a:lumMod val="20000"/>
+              <a:lumOff val="80000"/>
+            </a:schemeClr>
+          </a:solidFill>
+          <a:ln>
+            <a:solidFill>
+              <a:schemeClr val="accent5">
+                <a:lumMod val="60000"/>
+                <a:lumOff val="40000"/>
+              </a:schemeClr>
+            </a:solidFill>
+          </a:ln>
+        </p:spPr>
+        <p:style>
+          <a:lnRef idx="2">
+            <a:schemeClr val="accent1">
+              <a:shade val="15000"/>
+            </a:schemeClr>
+          </a:lnRef>
+          <a:fillRef idx="1">
+            <a:schemeClr val="accent1"/>
+          </a:fillRef>
+          <a:effectRef idx="0">
+            <a:schemeClr val="accent1"/>
+          </a:effectRef>
+          <a:fontRef idx="minor">
+            <a:schemeClr val="lt1"/>
+          </a:fontRef>
+        </p:style>
+        <p:txBody>
+          <a:bodyPr rtlCol="0" anchor="ctr"/>
+          <a:lstStyle/>
+          <a:p>
+            <a:pPr algn="ctr"/>
+            <a:r>
+              <a:rPr lang="es-ES" dirty="0">
+                <a:solidFill>
+                  <a:schemeClr val="tx1"/>
+                </a:solidFill>
+              </a:rPr>
+              <a:t>-</a:t>
+            </a:r>
+            <a:endParaRPr lang="en-GB" dirty="0">
+              <a:solidFill>
+                <a:schemeClr val="tx1"/>
+              </a:solidFill>
+            </a:endParaRPr>
+          </a:p>
+        </p:txBody>
+      </p:sp>
+      <p:sp>
+        <p:nvSpPr>
+          <p:cNvPr id="128" name="Elipse 127">
+            <a:extLst>
+              <a:ext uri="{FF2B5EF4-FFF2-40B4-BE49-F238E27FC236}">
+                <a16:creationId xmlns:a16="http://schemas.microsoft.com/office/drawing/2014/main" id="{01E9B84C-3EE6-5E9C-ACBB-60F1F2E587DA}"/>
+              </a:ext>
+            </a:extLst>
+          </p:cNvPr>
+          <p:cNvSpPr/>
+          <p:nvPr/>
+        </p:nvSpPr>
+        <p:spPr>
+          <a:xfrm>
+            <a:off x="10200982" y="3534096"/>
+            <a:ext cx="361105" cy="340624"/>
+          </a:xfrm>
+          <a:prstGeom prst="ellipse">
+            <a:avLst/>
+          </a:prstGeom>
+          <a:solidFill>
+            <a:schemeClr val="accent5">
+              <a:lumMod val="20000"/>
+              <a:lumOff val="80000"/>
+            </a:schemeClr>
+          </a:solidFill>
+          <a:ln>
+            <a:solidFill>
+              <a:schemeClr val="accent5">
+                <a:lumMod val="60000"/>
+                <a:lumOff val="40000"/>
+              </a:schemeClr>
+            </a:solidFill>
+          </a:ln>
+        </p:spPr>
+        <p:style>
+          <a:lnRef idx="2">
+            <a:schemeClr val="accent1">
+              <a:shade val="15000"/>
+            </a:schemeClr>
+          </a:lnRef>
+          <a:fillRef idx="1">
+            <a:schemeClr val="accent1"/>
+          </a:fillRef>
+          <a:effectRef idx="0">
+            <a:schemeClr val="accent1"/>
+          </a:effectRef>
+          <a:fontRef idx="minor">
+            <a:schemeClr val="lt1"/>
+          </a:fontRef>
+        </p:style>
+        <p:txBody>
+          <a:bodyPr rtlCol="0" anchor="ctr"/>
+          <a:lstStyle/>
+          <a:p>
+            <a:pPr algn="ctr"/>
+            <a:r>
+              <a:rPr lang="es-ES" dirty="0">
+                <a:solidFill>
+                  <a:schemeClr val="tx1"/>
+                </a:solidFill>
+              </a:rPr>
+              <a:t>+</a:t>
+            </a:r>
+            <a:endParaRPr lang="en-GB" dirty="0">
+              <a:solidFill>
+                <a:schemeClr val="tx1"/>
+              </a:solidFill>
+            </a:endParaRPr>
+          </a:p>
+        </p:txBody>
+      </p:sp>
+      <p:grpSp>
+        <p:nvGrpSpPr>
+          <p:cNvPr id="47" name="Grupo 46">
+            <a:extLst>
+              <a:ext uri="{FF2B5EF4-FFF2-40B4-BE49-F238E27FC236}">
+                <a16:creationId xmlns:a16="http://schemas.microsoft.com/office/drawing/2014/main" id="{7F70CAFB-BD7F-721E-A3DD-07A0EE7AA38A}"/>
+              </a:ext>
+            </a:extLst>
+          </p:cNvPr>
+          <p:cNvGrpSpPr/>
+          <p:nvPr/>
+        </p:nvGrpSpPr>
+        <p:grpSpPr>
+          <a:xfrm>
+            <a:off x="7243598" y="5096065"/>
+            <a:ext cx="1417802" cy="389948"/>
+            <a:chOff x="4756118" y="3361956"/>
+            <a:chExt cx="1495889" cy="378778"/>
+          </a:xfrm>
+        </p:grpSpPr>
+        <p:sp>
+          <p:nvSpPr>
+            <p:cNvPr id="27" name="Elipse 26">
+              <a:extLst>
+                <a:ext uri="{FF2B5EF4-FFF2-40B4-BE49-F238E27FC236}">
+                  <a16:creationId xmlns:a16="http://schemas.microsoft.com/office/drawing/2014/main" id="{ABAFBACE-0BA7-EEF2-992C-B7942CF10052}"/>
+                </a:ext>
+              </a:extLst>
+            </p:cNvPr>
+            <p:cNvSpPr/>
+            <p:nvPr/>
+          </p:nvSpPr>
+          <p:spPr>
+            <a:xfrm>
+              <a:off x="4756118" y="3361956"/>
+              <a:ext cx="398051" cy="375475"/>
+            </a:xfrm>
+            <a:prstGeom prst="ellipse">
+              <a:avLst/>
+            </a:prstGeom>
+            <a:solidFill>
+              <a:schemeClr val="accent4">
+                <a:lumMod val="20000"/>
+                <a:lumOff val="80000"/>
+              </a:schemeClr>
+            </a:solidFill>
+            <a:ln>
+              <a:solidFill>
+                <a:schemeClr val="accent4">
+                  <a:lumMod val="40000"/>
+                  <a:lumOff val="60000"/>
+                </a:schemeClr>
+              </a:solidFill>
+            </a:ln>
+          </p:spPr>
+          <p:style>
+            <a:lnRef idx="2">
+              <a:schemeClr val="accent1">
+                <a:shade val="15000"/>
+              </a:schemeClr>
+            </a:lnRef>
+            <a:fillRef idx="1">
+              <a:schemeClr val="accent1"/>
+            </a:fillRef>
+            <a:effectRef idx="0">
+              <a:schemeClr val="accent1"/>
+            </a:effectRef>
+            <a:fontRef idx="minor">
+              <a:schemeClr val="lt1"/>
+            </a:fontRef>
+          </p:style>
+          <p:txBody>
+            <a:bodyPr rtlCol="0" anchor="ctr"/>
+            <a:lstStyle/>
+            <a:p>
+              <a:pPr algn="ctr"/>
+              <a:r>
+                <a:rPr lang="es-ES" sz="998" dirty="0">
+                  <a:solidFill>
+                    <a:schemeClr val="tx1"/>
+                  </a:solidFill>
+                </a:rPr>
+                <a:t>f</a:t>
+              </a:r>
+              <a:r>
+                <a:rPr lang="es-ES" sz="998" baseline="-25000" dirty="0">
+                  <a:solidFill>
+                    <a:schemeClr val="tx1"/>
+                  </a:solidFill>
+                </a:rPr>
+                <a:t>2</a:t>
+              </a:r>
+              <a:endParaRPr lang="en-GB" sz="2177" dirty="0">
+                <a:solidFill>
+                  <a:schemeClr val="tx1"/>
+                </a:solidFill>
+              </a:endParaRPr>
+            </a:p>
+          </p:txBody>
+        </p:sp>
+        <p:sp>
+          <p:nvSpPr>
+            <p:cNvPr id="28" name="CuadroTexto 27">
+              <a:extLst>
+                <a:ext uri="{FF2B5EF4-FFF2-40B4-BE49-F238E27FC236}">
+                  <a16:creationId xmlns:a16="http://schemas.microsoft.com/office/drawing/2014/main" id="{F2C2B395-B54F-5ABD-0B27-4BE6CF123D1A}"/>
+                </a:ext>
+              </a:extLst>
+            </p:cNvPr>
+            <p:cNvSpPr txBox="1"/>
+            <p:nvPr/>
+          </p:nvSpPr>
+          <p:spPr>
+            <a:xfrm>
+              <a:off x="5143643" y="3361956"/>
+              <a:ext cx="1108364" cy="378778"/>
+            </a:xfrm>
+            <a:prstGeom prst="rect">
+              <a:avLst/>
+            </a:prstGeom>
+            <a:noFill/>
+          </p:spPr>
+          <p:txBody>
+            <a:bodyPr wrap="square" rtlCol="0">
+              <a:spAutoFit/>
+            </a:bodyPr>
+            <a:lstStyle/>
+            <a:p>
+              <a:r>
+                <a:rPr lang="es-ES" sz="1633" dirty="0"/>
+                <a:t>= </a:t>
+              </a:r>
+              <a:r>
+                <a:rPr lang="es-ES" sz="1633" b="1" dirty="0">
+                  <a:solidFill>
+                    <a:srgbClr val="00B0F0"/>
+                  </a:solidFill>
+                </a:rPr>
+                <a:t>1</a:t>
+              </a:r>
+              <a:endParaRPr lang="en-GB" sz="1633" b="1" dirty="0">
+                <a:solidFill>
+                  <a:srgbClr val="00B0F0"/>
+                </a:solidFill>
+              </a:endParaRPr>
+            </a:p>
+          </p:txBody>
+        </p:sp>
+      </p:grpSp>
+      <p:grpSp>
+        <p:nvGrpSpPr>
+          <p:cNvPr id="43" name="Grupo 42">
+            <a:extLst>
+              <a:ext uri="{FF2B5EF4-FFF2-40B4-BE49-F238E27FC236}">
+                <a16:creationId xmlns:a16="http://schemas.microsoft.com/office/drawing/2014/main" id="{AE3DB687-66F3-C845-137B-2F4CA0B057B2}"/>
+              </a:ext>
+            </a:extLst>
+          </p:cNvPr>
+          <p:cNvGrpSpPr/>
+          <p:nvPr/>
+        </p:nvGrpSpPr>
+        <p:grpSpPr>
+          <a:xfrm>
+            <a:off x="4968736" y="5091018"/>
+            <a:ext cx="1423597" cy="390761"/>
+            <a:chOff x="7037833" y="3355813"/>
+            <a:chExt cx="1506414" cy="384920"/>
+          </a:xfrm>
+        </p:grpSpPr>
+        <p:sp>
+          <p:nvSpPr>
+            <p:cNvPr id="31" name="Elipse 30">
+              <a:extLst>
+                <a:ext uri="{FF2B5EF4-FFF2-40B4-BE49-F238E27FC236}">
+                  <a16:creationId xmlns:a16="http://schemas.microsoft.com/office/drawing/2014/main" id="{E5DF29B2-523B-A4AC-9A27-9C0DD7105F7F}"/>
+                </a:ext>
+              </a:extLst>
+            </p:cNvPr>
+            <p:cNvSpPr/>
+            <p:nvPr/>
+          </p:nvSpPr>
+          <p:spPr>
+            <a:xfrm>
+              <a:off x="7037833" y="3355813"/>
+              <a:ext cx="398051" cy="375475"/>
+            </a:xfrm>
+            <a:prstGeom prst="ellipse">
+              <a:avLst/>
+            </a:prstGeom>
+            <a:solidFill>
+              <a:schemeClr val="tx2">
+                <a:lumMod val="25000"/>
+                <a:lumOff val="75000"/>
+              </a:schemeClr>
+            </a:solidFill>
+            <a:ln>
+              <a:solidFill>
+                <a:schemeClr val="tx2">
+                  <a:lumMod val="75000"/>
+                  <a:lumOff val="25000"/>
+                </a:schemeClr>
+              </a:solidFill>
+            </a:ln>
+          </p:spPr>
+          <p:style>
+            <a:lnRef idx="2">
+              <a:schemeClr val="accent1">
+                <a:shade val="15000"/>
+              </a:schemeClr>
+            </a:lnRef>
+            <a:fillRef idx="1">
+              <a:schemeClr val="accent1"/>
+            </a:fillRef>
+            <a:effectRef idx="0">
+              <a:schemeClr val="accent1"/>
+            </a:effectRef>
+            <a:fontRef idx="minor">
+              <a:schemeClr val="lt1"/>
+            </a:fontRef>
+          </p:style>
+          <p:txBody>
+            <a:bodyPr rtlCol="0" anchor="ctr"/>
+            <a:lstStyle/>
+            <a:p>
+              <a:pPr algn="ctr"/>
+              <a:r>
+                <a:rPr lang="es-ES" sz="953" dirty="0">
+                  <a:solidFill>
+                    <a:schemeClr val="tx1"/>
+                  </a:solidFill>
+                </a:rPr>
+                <a:t>f</a:t>
+              </a:r>
+              <a:r>
+                <a:rPr lang="es-ES" sz="953" baseline="-25000" dirty="0">
+                  <a:solidFill>
+                    <a:schemeClr val="tx1"/>
+                  </a:solidFill>
+                </a:rPr>
+                <a:t>1</a:t>
+              </a:r>
+            </a:p>
+          </p:txBody>
+        </p:sp>
+        <p:sp>
+          <p:nvSpPr>
+            <p:cNvPr id="36" name="CuadroTexto 35">
+              <a:extLst>
+                <a:ext uri="{FF2B5EF4-FFF2-40B4-BE49-F238E27FC236}">
+                  <a16:creationId xmlns:a16="http://schemas.microsoft.com/office/drawing/2014/main" id="{A0447269-C931-0644-8AF1-380F9A89233A}"/>
+                </a:ext>
+              </a:extLst>
+            </p:cNvPr>
+            <p:cNvSpPr txBox="1"/>
+            <p:nvPr/>
+          </p:nvSpPr>
+          <p:spPr>
+            <a:xfrm>
+              <a:off x="7435885" y="3361955"/>
+              <a:ext cx="1108362" cy="378778"/>
+            </a:xfrm>
+            <a:prstGeom prst="rect">
+              <a:avLst/>
+            </a:prstGeom>
+            <a:noFill/>
+          </p:spPr>
+          <p:txBody>
+            <a:bodyPr wrap="square" rtlCol="0">
+              <a:spAutoFit/>
+            </a:bodyPr>
+            <a:lstStyle/>
+            <a:p>
+              <a:r>
+                <a:rPr lang="es-ES" sz="1633" dirty="0"/>
+                <a:t>= </a:t>
+              </a:r>
+              <a:r>
+                <a:rPr lang="es-ES" sz="1633" b="1" dirty="0">
+                  <a:solidFill>
+                    <a:srgbClr val="002060"/>
+                  </a:solidFill>
+                </a:rPr>
+                <a:t>0</a:t>
+              </a:r>
+              <a:endParaRPr lang="en-GB" sz="1633" b="1" dirty="0">
+                <a:solidFill>
+                  <a:srgbClr val="002060"/>
+                </a:solidFill>
+              </a:endParaRPr>
+            </a:p>
+          </p:txBody>
+        </p:sp>
+      </p:grpSp>
+      <p:grpSp>
+        <p:nvGrpSpPr>
+          <p:cNvPr id="48" name="Grupo 47">
+            <a:extLst>
+              <a:ext uri="{FF2B5EF4-FFF2-40B4-BE49-F238E27FC236}">
+                <a16:creationId xmlns:a16="http://schemas.microsoft.com/office/drawing/2014/main" id="{75054C69-53D6-5FB7-A5F6-EBE263A509CA}"/>
+              </a:ext>
+            </a:extLst>
+          </p:cNvPr>
+          <p:cNvGrpSpPr/>
+          <p:nvPr/>
+        </p:nvGrpSpPr>
+        <p:grpSpPr>
+          <a:xfrm>
+            <a:off x="9532769" y="5089212"/>
+            <a:ext cx="1429893" cy="389981"/>
+            <a:chOff x="9949204" y="3355812"/>
+            <a:chExt cx="1506414" cy="378778"/>
+          </a:xfrm>
+        </p:grpSpPr>
+        <p:sp>
+          <p:nvSpPr>
+            <p:cNvPr id="34" name="Elipse 33">
+              <a:extLst>
+                <a:ext uri="{FF2B5EF4-FFF2-40B4-BE49-F238E27FC236}">
+                  <a16:creationId xmlns:a16="http://schemas.microsoft.com/office/drawing/2014/main" id="{4B9CEACB-E3C8-3C30-6F86-685AA4589B54}"/>
+                </a:ext>
+              </a:extLst>
+            </p:cNvPr>
+            <p:cNvSpPr/>
+            <p:nvPr/>
+          </p:nvSpPr>
+          <p:spPr>
+            <a:xfrm>
+              <a:off x="9949204" y="3355812"/>
+              <a:ext cx="398051" cy="375475"/>
+            </a:xfrm>
+            <a:prstGeom prst="ellipse">
+              <a:avLst/>
+            </a:prstGeom>
+            <a:solidFill>
+              <a:schemeClr val="accent5">
+                <a:lumMod val="20000"/>
+                <a:lumOff val="80000"/>
+              </a:schemeClr>
+            </a:solidFill>
+            <a:ln>
+              <a:solidFill>
+                <a:schemeClr val="accent5">
+                  <a:lumMod val="60000"/>
+                  <a:lumOff val="40000"/>
+                </a:schemeClr>
+              </a:solidFill>
+            </a:ln>
+          </p:spPr>
+          <p:style>
+            <a:lnRef idx="2">
+              <a:schemeClr val="accent1">
+                <a:shade val="15000"/>
+              </a:schemeClr>
+            </a:lnRef>
+            <a:fillRef idx="1">
+              <a:schemeClr val="accent1"/>
+            </a:fillRef>
+            <a:effectRef idx="0">
+              <a:schemeClr val="accent1"/>
+            </a:effectRef>
+            <a:fontRef idx="minor">
+              <a:schemeClr val="lt1"/>
+            </a:fontRef>
+          </p:style>
+          <p:txBody>
+            <a:bodyPr rtlCol="0" anchor="ctr"/>
+            <a:lstStyle/>
+            <a:p>
+              <a:pPr algn="ctr"/>
+              <a:r>
+                <a:rPr lang="es-ES" sz="998" dirty="0">
+                  <a:solidFill>
+                    <a:schemeClr val="tx1"/>
+                  </a:solidFill>
+                </a:rPr>
+                <a:t>f</a:t>
+              </a:r>
+              <a:r>
+                <a:rPr lang="es-ES" sz="998" baseline="-25000" dirty="0">
+                  <a:solidFill>
+                    <a:schemeClr val="tx1"/>
+                  </a:solidFill>
+                </a:rPr>
+                <a:t>3</a:t>
+              </a:r>
+              <a:endParaRPr lang="en-GB" sz="998" dirty="0">
+                <a:solidFill>
+                  <a:schemeClr val="tx1"/>
+                </a:solidFill>
+              </a:endParaRPr>
+            </a:p>
+          </p:txBody>
+        </p:sp>
+        <p:sp>
+          <p:nvSpPr>
+            <p:cNvPr id="38" name="CuadroTexto 37">
+              <a:extLst>
+                <a:ext uri="{FF2B5EF4-FFF2-40B4-BE49-F238E27FC236}">
+                  <a16:creationId xmlns:a16="http://schemas.microsoft.com/office/drawing/2014/main" id="{4131D7CD-C3F4-A422-0466-F8333EE69863}"/>
+                </a:ext>
+              </a:extLst>
+            </p:cNvPr>
+            <p:cNvSpPr txBox="1"/>
+            <p:nvPr/>
+          </p:nvSpPr>
+          <p:spPr>
+            <a:xfrm>
+              <a:off x="10347256" y="3355812"/>
+              <a:ext cx="1108362" cy="378778"/>
+            </a:xfrm>
+            <a:prstGeom prst="rect">
+              <a:avLst/>
+            </a:prstGeom>
+            <a:noFill/>
+          </p:spPr>
+          <p:txBody>
+            <a:bodyPr wrap="square" rtlCol="0">
+              <a:spAutoFit/>
+            </a:bodyPr>
+            <a:lstStyle/>
+            <a:p>
+              <a:r>
+                <a:rPr lang="es-ES" sz="1633" dirty="0"/>
+                <a:t>= </a:t>
+              </a:r>
+              <a:r>
+                <a:rPr lang="es-ES" sz="1633" b="1" dirty="0">
+                  <a:solidFill>
+                    <a:schemeClr val="accent5">
+                      <a:lumMod val="75000"/>
+                    </a:schemeClr>
+                  </a:solidFill>
+                </a:rPr>
+                <a:t>1</a:t>
+              </a:r>
+              <a:endParaRPr lang="en-GB" sz="1633" b="1" dirty="0">
+                <a:solidFill>
+                  <a:schemeClr val="accent5">
+                    <a:lumMod val="75000"/>
+                  </a:schemeClr>
+                </a:solidFill>
+              </a:endParaRPr>
+            </a:p>
+          </p:txBody>
+        </p:sp>
+      </p:grpSp>
+      <p:sp>
+        <p:nvSpPr>
+          <p:cNvPr id="58" name="Cerrar llave 57">
+            <a:extLst>
+              <a:ext uri="{FF2B5EF4-FFF2-40B4-BE49-F238E27FC236}">
+                <a16:creationId xmlns:a16="http://schemas.microsoft.com/office/drawing/2014/main" id="{787016C5-2B27-DC98-E1FB-A1014569D1B5}"/>
+              </a:ext>
+            </a:extLst>
+          </p:cNvPr>
+          <p:cNvSpPr/>
+          <p:nvPr/>
+        </p:nvSpPr>
+        <p:spPr>
+          <a:xfrm rot="5400000">
+            <a:off x="7641358" y="1913012"/>
+            <a:ext cx="272242" cy="7249457"/>
+          </a:xfrm>
+          <a:prstGeom prst="rightBrace">
+            <a:avLst/>
+          </a:prstGeom>
+        </p:spPr>
+        <p:style>
+          <a:lnRef idx="2">
+            <a:schemeClr val="dk1"/>
+          </a:lnRef>
+          <a:fillRef idx="0">
+            <a:schemeClr val="dk1"/>
+          </a:fillRef>
+          <a:effectRef idx="1">
+            <a:schemeClr val="dk1"/>
+          </a:effectRef>
+          <a:fontRef idx="minor">
+            <a:schemeClr val="tx1"/>
+          </a:fontRef>
+        </p:style>
+        <p:txBody>
+          <a:bodyPr rtlCol="0" anchor="ctr"/>
+          <a:lstStyle/>
+          <a:p>
+            <a:pPr algn="ctr"/>
+            <a:endParaRPr lang="en-GB" sz="1633"/>
+          </a:p>
+        </p:txBody>
+      </p:sp>
+      <p:sp>
+        <p:nvSpPr>
+          <p:cNvPr id="68" name="CuadroTexto 67">
+            <a:extLst>
+              <a:ext uri="{FF2B5EF4-FFF2-40B4-BE49-F238E27FC236}">
+                <a16:creationId xmlns:a16="http://schemas.microsoft.com/office/drawing/2014/main" id="{FD02F2F0-988E-21DE-AE74-946E6A06651B}"/>
+              </a:ext>
+            </a:extLst>
+          </p:cNvPr>
+          <p:cNvSpPr txBox="1"/>
+          <p:nvPr/>
+        </p:nvSpPr>
+        <p:spPr>
+          <a:xfrm>
+            <a:off x="10874395" y="3576555"/>
+            <a:ext cx="406549" cy="483209"/>
+          </a:xfrm>
+          <a:prstGeom prst="rect">
+            <a:avLst/>
+          </a:prstGeom>
+          <a:noFill/>
+        </p:spPr>
+        <p:txBody>
+          <a:bodyPr wrap="square" rtlCol="0">
+            <a:spAutoFit/>
+          </a:bodyPr>
+          <a:lstStyle/>
+          <a:p>
+            <a:r>
+              <a:rPr lang="es-ES" sz="2540" dirty="0"/>
+              <a:t>…</a:t>
+            </a:r>
+            <a:endParaRPr lang="en-GB" sz="2540" dirty="0"/>
+          </a:p>
+        </p:txBody>
+      </p:sp>
+      <p:grpSp>
+        <p:nvGrpSpPr>
+          <p:cNvPr id="29" name="Grupo 28">
+            <a:extLst>
+              <a:ext uri="{FF2B5EF4-FFF2-40B4-BE49-F238E27FC236}">
+                <a16:creationId xmlns:a16="http://schemas.microsoft.com/office/drawing/2014/main" id="{C9928C94-6755-2F29-39DA-DE721E2D82AD}"/>
+              </a:ext>
+            </a:extLst>
+          </p:cNvPr>
+          <p:cNvGrpSpPr/>
+          <p:nvPr/>
+        </p:nvGrpSpPr>
+        <p:grpSpPr>
+          <a:xfrm>
+            <a:off x="4620683" y="4914770"/>
+            <a:ext cx="6656931" cy="262582"/>
+            <a:chOff x="4142767" y="2836005"/>
+            <a:chExt cx="7338033" cy="289448"/>
+          </a:xfrm>
+        </p:grpSpPr>
+        <p:cxnSp>
+          <p:nvCxnSpPr>
+            <p:cNvPr id="50" name="Conector recto 49">
+              <a:extLst>
+                <a:ext uri="{FF2B5EF4-FFF2-40B4-BE49-F238E27FC236}">
+                  <a16:creationId xmlns:a16="http://schemas.microsoft.com/office/drawing/2014/main" id="{AD4F7318-6FE4-E43F-5268-161808901DCD}"/>
+                </a:ext>
+              </a:extLst>
+            </p:cNvPr>
+            <p:cNvCxnSpPr>
+              <a:cxnSpLocks/>
+            </p:cNvCxnSpPr>
+            <p:nvPr/>
+          </p:nvCxnSpPr>
+          <p:spPr>
+            <a:xfrm>
+              <a:off x="4142767" y="2840769"/>
+              <a:ext cx="5527706" cy="0"/>
+            </a:xfrm>
+            <a:prstGeom prst="line">
+              <a:avLst/>
+            </a:prstGeom>
+            <a:ln>
+              <a:solidFill>
+                <a:schemeClr val="tx1"/>
+              </a:solidFill>
+            </a:ln>
+          </p:spPr>
+          <p:style>
+            <a:lnRef idx="2">
+              <a:schemeClr val="accent1"/>
+            </a:lnRef>
+            <a:fillRef idx="0">
+              <a:schemeClr val="accent1"/>
+            </a:fillRef>
+            <a:effectRef idx="1">
+              <a:schemeClr val="accent1"/>
+            </a:effectRef>
+            <a:fontRef idx="minor">
+              <a:schemeClr val="tx1"/>
+            </a:fontRef>
+          </p:style>
+        </p:cxnSp>
+        <p:sp>
+          <p:nvSpPr>
+            <p:cNvPr id="51" name="Arco 50">
+              <a:extLst>
+                <a:ext uri="{FF2B5EF4-FFF2-40B4-BE49-F238E27FC236}">
+                  <a16:creationId xmlns:a16="http://schemas.microsoft.com/office/drawing/2014/main" id="{A11C712E-1CA2-D219-7848-38C58623D692}"/>
+                </a:ext>
+              </a:extLst>
+            </p:cNvPr>
+            <p:cNvSpPr/>
+            <p:nvPr/>
+          </p:nvSpPr>
+          <p:spPr>
+            <a:xfrm>
+              <a:off x="4513118" y="2836177"/>
+              <a:ext cx="212437" cy="277542"/>
+            </a:xfrm>
+            <a:prstGeom prst="arc">
+              <a:avLst>
+                <a:gd name="adj1" fmla="val 16200000"/>
+                <a:gd name="adj2" fmla="val 1114619"/>
+              </a:avLst>
+            </a:prstGeom>
+            <a:ln>
+              <a:solidFill>
+                <a:schemeClr val="tx1"/>
+              </a:solidFill>
+              <a:headEnd type="none"/>
+              <a:tailEnd type="triangle"/>
+            </a:ln>
+          </p:spPr>
+          <p:style>
+            <a:lnRef idx="2">
+              <a:schemeClr val="accent1"/>
+            </a:lnRef>
+            <a:fillRef idx="0">
+              <a:schemeClr val="accent1"/>
+            </a:fillRef>
+            <a:effectRef idx="1">
+              <a:schemeClr val="accent1"/>
+            </a:effectRef>
+            <a:fontRef idx="minor">
+              <a:schemeClr val="tx1"/>
+            </a:fontRef>
+          </p:style>
+          <p:txBody>
+            <a:bodyPr rtlCol="0" anchor="ctr"/>
+            <a:lstStyle/>
+            <a:p>
+              <a:pPr algn="ctr"/>
+              <a:endParaRPr lang="en-GB" sz="1633" dirty="0"/>
+            </a:p>
+          </p:txBody>
+        </p:sp>
+        <p:sp>
+          <p:nvSpPr>
+            <p:cNvPr id="54" name="Arco 53">
+              <a:extLst>
+                <a:ext uri="{FF2B5EF4-FFF2-40B4-BE49-F238E27FC236}">
+                  <a16:creationId xmlns:a16="http://schemas.microsoft.com/office/drawing/2014/main" id="{25F3596D-7DF8-A496-D1B2-1438FF28DBAC}"/>
+                </a:ext>
+              </a:extLst>
+            </p:cNvPr>
+            <p:cNvSpPr/>
+            <p:nvPr/>
+          </p:nvSpPr>
+          <p:spPr>
+            <a:xfrm>
+              <a:off x="7047065" y="2841560"/>
+              <a:ext cx="212437" cy="277542"/>
+            </a:xfrm>
+            <a:prstGeom prst="arc">
+              <a:avLst>
+                <a:gd name="adj1" fmla="val 16200000"/>
+                <a:gd name="adj2" fmla="val 1114619"/>
+              </a:avLst>
+            </a:prstGeom>
+            <a:ln>
+              <a:solidFill>
+                <a:schemeClr val="tx1"/>
+              </a:solidFill>
+              <a:headEnd type="none"/>
+              <a:tailEnd type="triangle"/>
+            </a:ln>
+          </p:spPr>
+          <p:style>
+            <a:lnRef idx="2">
+              <a:schemeClr val="accent1"/>
+            </a:lnRef>
+            <a:fillRef idx="0">
+              <a:schemeClr val="accent1"/>
+            </a:fillRef>
+            <a:effectRef idx="1">
+              <a:schemeClr val="accent1"/>
+            </a:effectRef>
+            <a:fontRef idx="minor">
+              <a:schemeClr val="tx1"/>
+            </a:fontRef>
+          </p:style>
+          <p:txBody>
+            <a:bodyPr rtlCol="0" anchor="ctr"/>
+            <a:lstStyle/>
+            <a:p>
+              <a:pPr algn="ctr"/>
+              <a:endParaRPr lang="en-GB" sz="1633"/>
+            </a:p>
+          </p:txBody>
+        </p:sp>
+        <p:sp>
+          <p:nvSpPr>
+            <p:cNvPr id="55" name="Arco 54">
+              <a:extLst>
+                <a:ext uri="{FF2B5EF4-FFF2-40B4-BE49-F238E27FC236}">
+                  <a16:creationId xmlns:a16="http://schemas.microsoft.com/office/drawing/2014/main" id="{5077DDA0-0096-3020-5ADA-403AFB494A17}"/>
+                </a:ext>
+              </a:extLst>
+            </p:cNvPr>
+            <p:cNvSpPr/>
+            <p:nvPr/>
+          </p:nvSpPr>
+          <p:spPr>
+            <a:xfrm>
+              <a:off x="9548163" y="2840767"/>
+              <a:ext cx="212437" cy="277542"/>
+            </a:xfrm>
+            <a:prstGeom prst="arc">
+              <a:avLst>
+                <a:gd name="adj1" fmla="val 16200000"/>
+                <a:gd name="adj2" fmla="val 1114619"/>
+              </a:avLst>
+            </a:prstGeom>
+            <a:ln>
+              <a:solidFill>
+                <a:schemeClr val="tx1"/>
+              </a:solidFill>
+              <a:headEnd type="none"/>
+              <a:tailEnd type="triangle"/>
+            </a:ln>
+          </p:spPr>
+          <p:style>
+            <a:lnRef idx="2">
+              <a:schemeClr val="accent1"/>
+            </a:lnRef>
+            <a:fillRef idx="0">
+              <a:schemeClr val="accent1"/>
+            </a:fillRef>
+            <a:effectRef idx="1">
+              <a:schemeClr val="accent1"/>
+            </a:effectRef>
+            <a:fontRef idx="minor">
+              <a:schemeClr val="tx1"/>
+            </a:fontRef>
+          </p:style>
+          <p:txBody>
+            <a:bodyPr rtlCol="0" anchor="ctr"/>
+            <a:lstStyle/>
+            <a:p>
+              <a:pPr algn="ctr"/>
+              <a:endParaRPr lang="en-GB" sz="1633"/>
+            </a:p>
+          </p:txBody>
+        </p:sp>
+        <p:cxnSp>
+          <p:nvCxnSpPr>
+            <p:cNvPr id="61" name="Conector recto 60">
+              <a:extLst>
+                <a:ext uri="{FF2B5EF4-FFF2-40B4-BE49-F238E27FC236}">
+                  <a16:creationId xmlns:a16="http://schemas.microsoft.com/office/drawing/2014/main" id="{FB47A690-58C8-FCD3-85DA-90FA72F11912}"/>
+                </a:ext>
+              </a:extLst>
+            </p:cNvPr>
+            <p:cNvCxnSpPr>
+              <a:cxnSpLocks/>
+            </p:cNvCxnSpPr>
+            <p:nvPr/>
+          </p:nvCxnSpPr>
+          <p:spPr>
+            <a:xfrm flipV="1">
+              <a:off x="9670473" y="2836005"/>
+              <a:ext cx="1810327" cy="7144"/>
+            </a:xfrm>
+            <a:prstGeom prst="line">
+              <a:avLst/>
+            </a:prstGeom>
+            <a:ln>
+              <a:solidFill>
+                <a:schemeClr val="tx1"/>
+              </a:solidFill>
+              <a:prstDash val="sysDot"/>
+            </a:ln>
+          </p:spPr>
+          <p:style>
+            <a:lnRef idx="2">
+              <a:schemeClr val="accent1"/>
+            </a:lnRef>
+            <a:fillRef idx="0">
+              <a:schemeClr val="accent1"/>
+            </a:fillRef>
+            <a:effectRef idx="1">
+              <a:schemeClr val="accent1"/>
+            </a:effectRef>
+            <a:fontRef idx="minor">
+              <a:schemeClr val="tx1"/>
+            </a:fontRef>
+          </p:style>
+        </p:cxnSp>
+        <p:sp>
+          <p:nvSpPr>
+            <p:cNvPr id="64" name="Arco 63">
+              <a:extLst>
+                <a:ext uri="{FF2B5EF4-FFF2-40B4-BE49-F238E27FC236}">
+                  <a16:creationId xmlns:a16="http://schemas.microsoft.com/office/drawing/2014/main" id="{0B6F5E44-B7BA-DCE7-8579-35B965F95D11}"/>
+                </a:ext>
+              </a:extLst>
+            </p:cNvPr>
+            <p:cNvSpPr/>
+            <p:nvPr/>
+          </p:nvSpPr>
+          <p:spPr>
+            <a:xfrm>
+              <a:off x="11182205" y="2847911"/>
+              <a:ext cx="212437" cy="277542"/>
+            </a:xfrm>
+            <a:prstGeom prst="arc">
+              <a:avLst>
+                <a:gd name="adj1" fmla="val 16200000"/>
+                <a:gd name="adj2" fmla="val 1114619"/>
+              </a:avLst>
+            </a:prstGeom>
+            <a:ln>
+              <a:solidFill>
+                <a:schemeClr val="tx1"/>
+              </a:solidFill>
+              <a:prstDash val="sysDot"/>
+              <a:headEnd type="none"/>
+              <a:tailEnd type="triangle"/>
+            </a:ln>
+          </p:spPr>
+          <p:style>
+            <a:lnRef idx="2">
+              <a:schemeClr val="accent1"/>
+            </a:lnRef>
+            <a:fillRef idx="0">
+              <a:schemeClr val="accent1"/>
+            </a:fillRef>
+            <a:effectRef idx="1">
+              <a:schemeClr val="accent1"/>
+            </a:effectRef>
+            <a:fontRef idx="minor">
+              <a:schemeClr val="tx1"/>
+            </a:fontRef>
+          </p:style>
+          <p:txBody>
+            <a:bodyPr rtlCol="0" anchor="ctr"/>
+            <a:lstStyle/>
+            <a:p>
+              <a:pPr algn="ctr"/>
+              <a:endParaRPr lang="en-GB" sz="1633"/>
+            </a:p>
+          </p:txBody>
+        </p:sp>
+        <p:sp>
+          <p:nvSpPr>
+            <p:cNvPr id="78" name="Arco 77">
+              <a:extLst>
+                <a:ext uri="{FF2B5EF4-FFF2-40B4-BE49-F238E27FC236}">
+                  <a16:creationId xmlns:a16="http://schemas.microsoft.com/office/drawing/2014/main" id="{92038B7A-E8B8-BAC5-888C-B41F7D7797BE}"/>
+                </a:ext>
+              </a:extLst>
+            </p:cNvPr>
+            <p:cNvSpPr/>
+            <p:nvPr/>
+          </p:nvSpPr>
+          <p:spPr>
+            <a:xfrm>
+              <a:off x="10948841" y="2847911"/>
+              <a:ext cx="212437" cy="277542"/>
+            </a:xfrm>
+            <a:prstGeom prst="arc">
+              <a:avLst>
+                <a:gd name="adj1" fmla="val 16200000"/>
+                <a:gd name="adj2" fmla="val 1114619"/>
+              </a:avLst>
+            </a:prstGeom>
+            <a:ln>
+              <a:solidFill>
+                <a:schemeClr val="tx1"/>
+              </a:solidFill>
+              <a:prstDash val="sysDot"/>
+              <a:headEnd type="none"/>
+              <a:tailEnd type="triangle"/>
+            </a:ln>
+          </p:spPr>
+          <p:style>
+            <a:lnRef idx="2">
+              <a:schemeClr val="accent1"/>
+            </a:lnRef>
+            <a:fillRef idx="0">
+              <a:schemeClr val="accent1"/>
+            </a:fillRef>
+            <a:effectRef idx="1">
+              <a:schemeClr val="accent1"/>
+            </a:effectRef>
+            <a:fontRef idx="minor">
+              <a:schemeClr val="tx1"/>
+            </a:fontRef>
+          </p:style>
+          <p:txBody>
+            <a:bodyPr rtlCol="0" anchor="ctr"/>
+            <a:lstStyle/>
+            <a:p>
+              <a:pPr algn="ctr"/>
+              <a:endParaRPr lang="en-GB" sz="1633"/>
+            </a:p>
+          </p:txBody>
+        </p:sp>
+      </p:grpSp>
+      <p:sp>
+        <p:nvSpPr>
+          <p:cNvPr id="30" name="CuadroTexto 29">
+            <a:extLst>
+              <a:ext uri="{FF2B5EF4-FFF2-40B4-BE49-F238E27FC236}">
+                <a16:creationId xmlns:a16="http://schemas.microsoft.com/office/drawing/2014/main" id="{6C692149-E840-B107-9C82-FE90E1955A6F}"/>
+              </a:ext>
+            </a:extLst>
+          </p:cNvPr>
+          <p:cNvSpPr txBox="1"/>
+          <p:nvPr/>
+        </p:nvSpPr>
+        <p:spPr>
+          <a:xfrm>
+            <a:off x="10864919" y="4934651"/>
+            <a:ext cx="537290" cy="483209"/>
+          </a:xfrm>
+          <a:prstGeom prst="rect">
+            <a:avLst/>
+          </a:prstGeom>
+          <a:noFill/>
+        </p:spPr>
+        <p:txBody>
+          <a:bodyPr wrap="square" rtlCol="0">
+            <a:spAutoFit/>
+          </a:bodyPr>
+          <a:lstStyle/>
+          <a:p>
+            <a:r>
+              <a:rPr lang="es-ES" sz="2540" dirty="0"/>
+              <a:t>…</a:t>
+            </a:r>
+            <a:endParaRPr lang="en-GB" sz="2540" dirty="0"/>
+          </a:p>
+        </p:txBody>
+      </p:sp>
+      <p:grpSp>
+        <p:nvGrpSpPr>
+          <p:cNvPr id="138" name="Grupo 137">
+            <a:extLst>
+              <a:ext uri="{FF2B5EF4-FFF2-40B4-BE49-F238E27FC236}">
+                <a16:creationId xmlns:a16="http://schemas.microsoft.com/office/drawing/2014/main" id="{7AA3DB1E-5BE9-337B-B5CE-66DA4EB4EDEB}"/>
+              </a:ext>
+            </a:extLst>
+          </p:cNvPr>
+          <p:cNvGrpSpPr/>
+          <p:nvPr/>
+        </p:nvGrpSpPr>
+        <p:grpSpPr>
+          <a:xfrm>
+            <a:off x="4152750" y="5724443"/>
+            <a:ext cx="7249459" cy="569002"/>
+            <a:chOff x="4379816" y="5587047"/>
+            <a:chExt cx="7563810" cy="627220"/>
+          </a:xfrm>
+        </p:grpSpPr>
+        <mc:AlternateContent xmlns:mc="http://schemas.openxmlformats.org/markup-compatibility/2006" xmlns:a14="http://schemas.microsoft.com/office/drawing/2010/main">
+          <mc:Choice Requires="a14">
+            <p:sp>
+              <p:nvSpPr>
+                <p:cNvPr id="59" name="CuadroTexto 58">
+                  <a:extLst>
+                    <a:ext uri="{FF2B5EF4-FFF2-40B4-BE49-F238E27FC236}">
+                      <a16:creationId xmlns:a16="http://schemas.microsoft.com/office/drawing/2014/main" id="{1CCADD88-50E8-46D4-755B-64D6FDC46519}"/>
+                    </a:ext>
+                  </a:extLst>
+                </p:cNvPr>
+                <p:cNvSpPr txBox="1"/>
+                <p:nvPr/>
+              </p:nvSpPr>
+              <p:spPr>
+                <a:xfrm>
+                  <a:off x="4379816" y="5587047"/>
+                  <a:ext cx="7563810" cy="627220"/>
+                </a:xfrm>
+                <a:prstGeom prst="rect">
+                  <a:avLst/>
+                </a:prstGeom>
+                <a:solidFill>
+                  <a:schemeClr val="bg2">
+                    <a:lumMod val="90000"/>
+                  </a:schemeClr>
+                </a:solidFill>
+                <a:ln>
+                  <a:solidFill>
+                    <a:schemeClr val="bg2">
+                      <a:lumMod val="50000"/>
+                    </a:schemeClr>
+                  </a:solidFill>
+                </a:ln>
+              </p:spPr>
+              <p:txBody>
+                <a:bodyPr wrap="square" rtlCol="0">
+                  <a:spAutoFit/>
+                </a:bodyPr>
+                <a:lstStyle/>
+                <a:p>
+                  <a:pPr/>
+                  <a14:m>
+                    <m:oMathPara xmlns:m="http://schemas.openxmlformats.org/officeDocument/2006/math">
+                      <m:oMathParaPr>
+                        <m:jc m:val="centerGroup"/>
+                      </m:oMathParaPr>
+                      <m:oMath xmlns:m="http://schemas.openxmlformats.org/officeDocument/2006/math">
+                        <m:f>
+                          <m:fPr>
+                            <m:ctrlPr>
+                              <a:rPr lang="en-GB" sz="1633" i="1" smtClean="0">
+                                <a:latin typeface="Cambria Math" panose="02040503050406030204" pitchFamily="18" charset="0"/>
+                              </a:rPr>
+                            </m:ctrlPr>
+                          </m:fPr>
+                          <m:num>
+                            <m:r>
+                              <a:rPr lang="es-ES" sz="1633" b="1" i="1">
+                                <a:solidFill>
+                                  <a:srgbClr val="00B0F0"/>
+                                </a:solidFill>
+                                <a:latin typeface="Cambria Math" panose="02040503050406030204" pitchFamily="18" charset="0"/>
+                              </a:rPr>
+                              <m:t>𝟏</m:t>
+                            </m:r>
+                            <m:r>
+                              <a:rPr lang="es-ES" sz="1633" i="1">
+                                <a:latin typeface="Cambria Math" panose="02040503050406030204" pitchFamily="18" charset="0"/>
+                              </a:rPr>
+                              <m:t>+</m:t>
+                            </m:r>
+                            <m:r>
+                              <a:rPr lang="es-ES" sz="1633" b="1" i="1">
+                                <a:solidFill>
+                                  <a:srgbClr val="002060"/>
+                                </a:solidFill>
+                                <a:latin typeface="Cambria Math" panose="02040503050406030204" pitchFamily="18" charset="0"/>
+                              </a:rPr>
+                              <m:t>𝟎</m:t>
+                            </m:r>
+                            <m:r>
+                              <a:rPr lang="es-ES" sz="1633" i="1">
+                                <a:latin typeface="Cambria Math" panose="02040503050406030204" pitchFamily="18" charset="0"/>
+                              </a:rPr>
+                              <m:t>+</m:t>
+                            </m:r>
+                            <m:r>
+                              <a:rPr lang="es-ES" sz="1633" b="1" i="1">
+                                <a:solidFill>
+                                  <a:schemeClr val="accent5">
+                                    <a:lumMod val="75000"/>
+                                  </a:schemeClr>
+                                </a:solidFill>
+                                <a:latin typeface="Cambria Math" panose="02040503050406030204" pitchFamily="18" charset="0"/>
+                              </a:rPr>
+                              <m:t>𝟏</m:t>
+                            </m:r>
+                            <m:r>
+                              <a:rPr lang="es-ES" sz="1633" i="1">
+                                <a:latin typeface="Cambria Math" panose="02040503050406030204" pitchFamily="18" charset="0"/>
+                              </a:rPr>
+                              <m:t> +</m:t>
+                            </m:r>
+                            <m:r>
+                              <a:rPr lang="es-ES" sz="1633" b="0" i="1" smtClean="0">
+                                <a:latin typeface="Cambria Math" panose="02040503050406030204" pitchFamily="18" charset="0"/>
+                              </a:rPr>
+                              <m:t>…</m:t>
+                            </m:r>
+                          </m:num>
+                          <m:den>
+                            <m:r>
+                              <a:rPr lang="es-ES" sz="1633" b="0" i="1" smtClean="0">
+                                <a:latin typeface="Cambria Math" panose="02040503050406030204" pitchFamily="18" charset="0"/>
+                              </a:rPr>
+                              <m:t>𝐾</m:t>
+                            </m:r>
+                          </m:den>
+                        </m:f>
+                        <m:r>
+                          <a:rPr lang="es-ES" sz="1633" i="1">
+                            <a:latin typeface="Cambria Math" panose="02040503050406030204" pitchFamily="18" charset="0"/>
+                          </a:rPr>
+                          <m:t>=0.66=</m:t>
+                        </m:r>
+                        <m:r>
+                          <a:rPr lang="es-ES" sz="1633" b="1" i="1">
+                            <a:latin typeface="Cambria Math" panose="02040503050406030204" pitchFamily="18" charset="0"/>
+                          </a:rPr>
+                          <m:t>𝑷</m:t>
+                        </m:r>
+                      </m:oMath>
+                    </m:oMathPara>
+                  </a14:m>
+                  <a:endParaRPr lang="en-GB" sz="1633" b="1" dirty="0"/>
+                </a:p>
+              </p:txBody>
+            </p:sp>
+          </mc:Choice>
+          <mc:Fallback xmlns="">
+            <p:sp>
+              <p:nvSpPr>
+                <p:cNvPr id="59" name="CuadroTexto 58">
+                  <a:extLst>
+                    <a:ext uri="{FF2B5EF4-FFF2-40B4-BE49-F238E27FC236}">
+                      <a16:creationId xmlns:a16="http://schemas.microsoft.com/office/drawing/2014/main" id="{1CCADD88-50E8-46D4-755B-64D6FDC46519}"/>
+                    </a:ext>
+                  </a:extLst>
+                </p:cNvPr>
+                <p:cNvSpPr txBox="1">
+                  <a:spLocks noRot="1" noChangeAspect="1" noMove="1" noResize="1" noEditPoints="1" noAdjustHandles="1" noChangeArrowheads="1" noChangeShapeType="1" noTextEdit="1"/>
+                </p:cNvSpPr>
+                <p:nvPr/>
+              </p:nvSpPr>
+              <p:spPr>
+                <a:xfrm>
+                  <a:off x="4379816" y="5587047"/>
+                  <a:ext cx="7563810" cy="627220"/>
+                </a:xfrm>
+                <a:prstGeom prst="rect">
+                  <a:avLst/>
+                </a:prstGeom>
+                <a:blipFill>
+                  <a:blip r:embed="rId2"/>
+                  <a:stretch>
+                    <a:fillRect/>
+                  </a:stretch>
+                </a:blipFill>
+                <a:ln>
+                  <a:solidFill>
+                    <a:schemeClr val="bg2">
+                      <a:lumMod val="50000"/>
+                    </a:schemeClr>
+                  </a:solidFill>
+                </a:ln>
+              </p:spPr>
+              <p:txBody>
+                <a:bodyPr/>
+                <a:lstStyle/>
+                <a:p>
+                  <a:r>
+                    <a:rPr lang="en-GB">
+                      <a:noFill/>
+                    </a:rPr>
+                    <a:t> </a:t>
+                  </a:r>
+                </a:p>
+              </p:txBody>
+            </p:sp>
+          </mc:Fallback>
+        </mc:AlternateContent>
+        <p:sp>
+          <p:nvSpPr>
+            <p:cNvPr id="129" name="CuadroTexto 128">
+              <a:extLst>
+                <a:ext uri="{FF2B5EF4-FFF2-40B4-BE49-F238E27FC236}">
+                  <a16:creationId xmlns:a16="http://schemas.microsoft.com/office/drawing/2014/main" id="{CA907E17-FC13-A5F3-A850-061F0B96D8A3}"/>
+                </a:ext>
+              </a:extLst>
+            </p:cNvPr>
+            <p:cNvSpPr txBox="1"/>
+            <p:nvPr/>
+          </p:nvSpPr>
+          <p:spPr>
+            <a:xfrm>
+              <a:off x="9661959" y="5745263"/>
+              <a:ext cx="2176774" cy="378778"/>
+            </a:xfrm>
+            <a:prstGeom prst="rect">
+              <a:avLst/>
+            </a:prstGeom>
+            <a:noFill/>
+          </p:spPr>
+          <p:txBody>
+            <a:bodyPr wrap="square" rtlCol="0">
+              <a:spAutoFit/>
+            </a:bodyPr>
+            <a:lstStyle/>
+            <a:p>
+              <a:r>
+                <a:rPr lang="es-ES" sz="1633" dirty="0"/>
+                <a:t>(</a:t>
+              </a:r>
+              <a:r>
+                <a:rPr lang="es-ES" sz="1633" dirty="0" err="1"/>
+                <a:t>Average</a:t>
+              </a:r>
+              <a:r>
+                <a:rPr lang="es-ES" sz="1633" dirty="0"/>
+                <a:t> </a:t>
+              </a:r>
+              <a:r>
+                <a:rPr lang="es-ES" sz="1633" dirty="0" err="1"/>
+                <a:t>probability</a:t>
+              </a:r>
+              <a:r>
+                <a:rPr lang="es-ES" sz="1633" dirty="0"/>
+                <a:t>)</a:t>
+              </a:r>
+              <a:endParaRPr lang="en-GB" sz="1633" dirty="0"/>
+            </a:p>
+          </p:txBody>
+        </p:sp>
+      </p:grpSp>
+      <p:sp>
+        <p:nvSpPr>
+          <p:cNvPr id="70" name="CuadroTexto 69">
+            <a:extLst>
+              <a:ext uri="{FF2B5EF4-FFF2-40B4-BE49-F238E27FC236}">
+                <a16:creationId xmlns:a16="http://schemas.microsoft.com/office/drawing/2014/main" id="{52BFF46D-040A-69DB-897B-8FA2B2A8151C}"/>
+              </a:ext>
+            </a:extLst>
+          </p:cNvPr>
+          <p:cNvSpPr txBox="1"/>
+          <p:nvPr/>
+        </p:nvSpPr>
+        <p:spPr>
+          <a:xfrm>
+            <a:off x="1096112" y="5122048"/>
+            <a:ext cx="1543497" cy="343620"/>
+          </a:xfrm>
+          <a:prstGeom prst="rect">
+            <a:avLst/>
+          </a:prstGeom>
+          <a:noFill/>
+        </p:spPr>
+        <p:txBody>
+          <a:bodyPr wrap="square" rtlCol="0">
+            <a:spAutoFit/>
+          </a:bodyPr>
+          <a:lstStyle/>
+          <a:p>
+            <a:r>
+              <a:rPr lang="es-ES" sz="1633" i="1" u="sng" dirty="0"/>
+              <a:t>3. </a:t>
+            </a:r>
+            <a:r>
+              <a:rPr lang="es-ES" sz="1633" i="1" u="sng" dirty="0" err="1"/>
+              <a:t>Aggregation</a:t>
+            </a:r>
+            <a:endParaRPr lang="en-GB" sz="1633" i="1" u="sng" dirty="0"/>
+          </a:p>
+        </p:txBody>
+      </p:sp>
+      <p:sp>
+        <p:nvSpPr>
+          <p:cNvPr id="87" name="CuadroTexto 86">
+            <a:extLst>
+              <a:ext uri="{FF2B5EF4-FFF2-40B4-BE49-F238E27FC236}">
+                <a16:creationId xmlns:a16="http://schemas.microsoft.com/office/drawing/2014/main" id="{D83ED376-904B-9C75-CEBC-B0FC6EDF8EAF}"/>
+              </a:ext>
+            </a:extLst>
+          </p:cNvPr>
+          <p:cNvSpPr txBox="1"/>
+          <p:nvPr/>
+        </p:nvSpPr>
+        <p:spPr>
+          <a:xfrm>
+            <a:off x="1096112" y="623783"/>
+            <a:ext cx="1738804" cy="343620"/>
+          </a:xfrm>
+          <a:prstGeom prst="rect">
+            <a:avLst/>
+          </a:prstGeom>
+          <a:noFill/>
+        </p:spPr>
+        <p:txBody>
+          <a:bodyPr wrap="square" rtlCol="0">
+            <a:spAutoFit/>
+          </a:bodyPr>
+          <a:lstStyle/>
+          <a:p>
+            <a:pPr algn="ctr"/>
+            <a:r>
+              <a:rPr lang="es-ES" sz="1633" i="1" u="sng" dirty="0"/>
+              <a:t>1. </a:t>
+            </a:r>
+            <a:r>
+              <a:rPr lang="es-ES" sz="1633" i="1" u="sng" dirty="0" err="1"/>
+              <a:t>Bootstrapping</a:t>
+            </a:r>
+            <a:endParaRPr lang="en-GB" sz="1633" i="1" u="sng" dirty="0"/>
+          </a:p>
+        </p:txBody>
+      </p:sp>
+      <p:cxnSp>
+        <p:nvCxnSpPr>
+          <p:cNvPr id="44" name="Conector recto 43">
+            <a:extLst>
+              <a:ext uri="{FF2B5EF4-FFF2-40B4-BE49-F238E27FC236}">
+                <a16:creationId xmlns:a16="http://schemas.microsoft.com/office/drawing/2014/main" id="{E8AAFCF7-0E74-CBD0-3781-61DA856B6FA7}"/>
+              </a:ext>
+            </a:extLst>
+          </p:cNvPr>
+          <p:cNvCxnSpPr>
+            <a:cxnSpLocks/>
+          </p:cNvCxnSpPr>
+          <p:nvPr/>
+        </p:nvCxnSpPr>
+        <p:spPr>
+          <a:xfrm flipH="1">
+            <a:off x="7076141" y="3055166"/>
+            <a:ext cx="401111" cy="476872"/>
+          </a:xfrm>
+          <a:prstGeom prst="line">
+            <a:avLst/>
+          </a:prstGeom>
+        </p:spPr>
+        <p:style>
+          <a:lnRef idx="2">
+            <a:schemeClr val="dk1"/>
+          </a:lnRef>
+          <a:fillRef idx="0">
+            <a:schemeClr val="dk1"/>
+          </a:fillRef>
+          <a:effectRef idx="1">
+            <a:schemeClr val="dk1"/>
+          </a:effectRef>
+          <a:fontRef idx="minor">
+            <a:schemeClr val="tx1"/>
+          </a:fontRef>
+        </p:style>
+      </p:cxnSp>
+      <p:cxnSp>
+        <p:nvCxnSpPr>
+          <p:cNvPr id="46" name="Conector recto 45">
+            <a:extLst>
+              <a:ext uri="{FF2B5EF4-FFF2-40B4-BE49-F238E27FC236}">
+                <a16:creationId xmlns:a16="http://schemas.microsoft.com/office/drawing/2014/main" id="{45BECD1B-27D7-C16E-9E2B-A3638A217264}"/>
+              </a:ext>
+            </a:extLst>
+          </p:cNvPr>
+          <p:cNvCxnSpPr>
+            <a:cxnSpLocks/>
+          </p:cNvCxnSpPr>
+          <p:nvPr/>
+        </p:nvCxnSpPr>
+        <p:spPr>
+          <a:xfrm>
+            <a:off x="7707490" y="3055166"/>
+            <a:ext cx="401111" cy="476872"/>
+          </a:xfrm>
+          <a:prstGeom prst="line">
+            <a:avLst/>
+          </a:prstGeom>
+        </p:spPr>
+        <p:style>
+          <a:lnRef idx="2">
+            <a:schemeClr val="dk1"/>
+          </a:lnRef>
+          <a:fillRef idx="0">
+            <a:schemeClr val="dk1"/>
+          </a:fillRef>
+          <a:effectRef idx="1">
+            <a:schemeClr val="dk1"/>
+          </a:effectRef>
+          <a:fontRef idx="minor">
+            <a:schemeClr val="tx1"/>
+          </a:fontRef>
+        </p:style>
+      </p:cxnSp>
+      <p:sp>
+        <p:nvSpPr>
+          <p:cNvPr id="42" name="Elipse 41">
+            <a:extLst>
+              <a:ext uri="{FF2B5EF4-FFF2-40B4-BE49-F238E27FC236}">
+                <a16:creationId xmlns:a16="http://schemas.microsoft.com/office/drawing/2014/main" id="{66B33945-E0E1-8375-D9D8-EDB05F9D2E35}"/>
+              </a:ext>
+            </a:extLst>
+          </p:cNvPr>
+          <p:cNvSpPr/>
+          <p:nvPr/>
+        </p:nvSpPr>
+        <p:spPr>
+          <a:xfrm>
+            <a:off x="7411819" y="2753283"/>
+            <a:ext cx="361105" cy="340624"/>
+          </a:xfrm>
+          <a:prstGeom prst="ellipse">
+            <a:avLst/>
+          </a:prstGeom>
+          <a:solidFill>
+            <a:schemeClr val="accent4">
+              <a:lumMod val="20000"/>
+              <a:lumOff val="80000"/>
+            </a:schemeClr>
+          </a:solidFill>
+          <a:ln>
+            <a:solidFill>
+              <a:schemeClr val="accent4">
+                <a:lumMod val="40000"/>
+                <a:lumOff val="60000"/>
+              </a:schemeClr>
+            </a:solidFill>
+          </a:ln>
+        </p:spPr>
+        <p:style>
+          <a:lnRef idx="2">
+            <a:schemeClr val="accent1">
+              <a:shade val="15000"/>
+            </a:schemeClr>
+          </a:lnRef>
+          <a:fillRef idx="1">
+            <a:schemeClr val="accent1"/>
+          </a:fillRef>
+          <a:effectRef idx="0">
+            <a:schemeClr val="accent1"/>
+          </a:effectRef>
+          <a:fontRef idx="minor">
+            <a:schemeClr val="lt1"/>
+          </a:fontRef>
+        </p:style>
+        <p:txBody>
+          <a:bodyPr rtlCol="0" anchor="ctr"/>
+          <a:lstStyle/>
+          <a:p>
+            <a:pPr algn="ctr"/>
+            <a:endParaRPr lang="en-GB" sz="2177" dirty="0">
+              <a:solidFill>
+                <a:schemeClr val="tx1"/>
+              </a:solidFill>
+            </a:endParaRPr>
+          </a:p>
+        </p:txBody>
+      </p:sp>
+      <p:cxnSp>
+        <p:nvCxnSpPr>
+          <p:cNvPr id="65" name="Conector recto 64">
+            <a:extLst>
+              <a:ext uri="{FF2B5EF4-FFF2-40B4-BE49-F238E27FC236}">
+                <a16:creationId xmlns:a16="http://schemas.microsoft.com/office/drawing/2014/main" id="{7D2FAA1A-22A5-F86E-A989-8C9AAAACBC9A}"/>
+              </a:ext>
+            </a:extLst>
+          </p:cNvPr>
+          <p:cNvCxnSpPr>
+            <a:cxnSpLocks/>
+          </p:cNvCxnSpPr>
+          <p:nvPr/>
+        </p:nvCxnSpPr>
+        <p:spPr>
+          <a:xfrm flipH="1">
+            <a:off x="7790601" y="3832760"/>
+            <a:ext cx="223830" cy="489628"/>
+          </a:xfrm>
+          <a:prstGeom prst="line">
+            <a:avLst/>
+          </a:prstGeom>
+        </p:spPr>
+        <p:style>
+          <a:lnRef idx="2">
+            <a:schemeClr val="dk1"/>
+          </a:lnRef>
+          <a:fillRef idx="0">
+            <a:schemeClr val="dk1"/>
+          </a:fillRef>
+          <a:effectRef idx="1">
+            <a:schemeClr val="dk1"/>
+          </a:effectRef>
+          <a:fontRef idx="minor">
+            <a:schemeClr val="tx1"/>
+          </a:fontRef>
+        </p:style>
+      </p:cxnSp>
+      <p:cxnSp>
+        <p:nvCxnSpPr>
+          <p:cNvPr id="67" name="Conector recto 66">
+            <a:extLst>
+              <a:ext uri="{FF2B5EF4-FFF2-40B4-BE49-F238E27FC236}">
+                <a16:creationId xmlns:a16="http://schemas.microsoft.com/office/drawing/2014/main" id="{1920D14F-ADD8-47A2-4EF9-BA2BE17E558E}"/>
+              </a:ext>
+            </a:extLst>
+          </p:cNvPr>
+          <p:cNvCxnSpPr>
+            <a:cxnSpLocks/>
+          </p:cNvCxnSpPr>
+          <p:nvPr/>
+        </p:nvCxnSpPr>
+        <p:spPr>
+          <a:xfrm>
+            <a:off x="8251850" y="3825943"/>
+            <a:ext cx="260725" cy="496445"/>
+          </a:xfrm>
+          <a:prstGeom prst="line">
+            <a:avLst/>
+          </a:prstGeom>
+        </p:spPr>
+        <p:style>
+          <a:lnRef idx="2">
+            <a:schemeClr val="dk1"/>
+          </a:lnRef>
+          <a:fillRef idx="0">
+            <a:schemeClr val="dk1"/>
+          </a:fillRef>
+          <a:effectRef idx="1">
+            <a:schemeClr val="dk1"/>
+          </a:effectRef>
+          <a:fontRef idx="minor">
+            <a:schemeClr val="tx1"/>
+          </a:fontRef>
+        </p:style>
+      </p:cxnSp>
+      <p:cxnSp>
+        <p:nvCxnSpPr>
+          <p:cNvPr id="69" name="Conector recto 68">
+            <a:extLst>
+              <a:ext uri="{FF2B5EF4-FFF2-40B4-BE49-F238E27FC236}">
+                <a16:creationId xmlns:a16="http://schemas.microsoft.com/office/drawing/2014/main" id="{26980B78-ADDF-C0DA-8E09-772086A03DDD}"/>
+              </a:ext>
+            </a:extLst>
+          </p:cNvPr>
+          <p:cNvCxnSpPr>
+            <a:cxnSpLocks/>
+          </p:cNvCxnSpPr>
+          <p:nvPr/>
+        </p:nvCxnSpPr>
+        <p:spPr>
+          <a:xfrm>
+            <a:off x="8146100" y="3853945"/>
+            <a:ext cx="0" cy="482053"/>
+          </a:xfrm>
+          <a:prstGeom prst="line">
+            <a:avLst/>
+          </a:prstGeom>
+        </p:spPr>
+        <p:style>
+          <a:lnRef idx="2">
+            <a:schemeClr val="dk1"/>
+          </a:lnRef>
+          <a:fillRef idx="0">
+            <a:schemeClr val="dk1"/>
+          </a:fillRef>
+          <a:effectRef idx="1">
+            <a:schemeClr val="dk1"/>
+          </a:effectRef>
+          <a:fontRef idx="minor">
+            <a:schemeClr val="tx1"/>
+          </a:fontRef>
+        </p:style>
+      </p:cxnSp>
+      <p:cxnSp>
+        <p:nvCxnSpPr>
+          <p:cNvPr id="74" name="Conector recto 73">
+            <a:extLst>
+              <a:ext uri="{FF2B5EF4-FFF2-40B4-BE49-F238E27FC236}">
+                <a16:creationId xmlns:a16="http://schemas.microsoft.com/office/drawing/2014/main" id="{31C5849B-7494-FC74-8622-CA79D4D39781}"/>
+              </a:ext>
+            </a:extLst>
+          </p:cNvPr>
+          <p:cNvCxnSpPr>
+            <a:cxnSpLocks/>
+            <a:endCxn id="84" idx="0"/>
+          </p:cNvCxnSpPr>
+          <p:nvPr/>
+        </p:nvCxnSpPr>
+        <p:spPr>
+          <a:xfrm flipH="1">
+            <a:off x="6716375" y="3824119"/>
+            <a:ext cx="248459" cy="503238"/>
+          </a:xfrm>
+          <a:prstGeom prst="line">
+            <a:avLst/>
+          </a:prstGeom>
+        </p:spPr>
+        <p:style>
+          <a:lnRef idx="2">
+            <a:schemeClr val="dk1"/>
+          </a:lnRef>
+          <a:fillRef idx="0">
+            <a:schemeClr val="dk1"/>
+          </a:fillRef>
+          <a:effectRef idx="1">
+            <a:schemeClr val="dk1"/>
+          </a:effectRef>
+          <a:fontRef idx="minor">
+            <a:schemeClr val="tx1"/>
+          </a:fontRef>
+        </p:style>
+      </p:cxnSp>
+      <p:cxnSp>
+        <p:nvCxnSpPr>
+          <p:cNvPr id="76" name="Conector recto 75">
+            <a:extLst>
+              <a:ext uri="{FF2B5EF4-FFF2-40B4-BE49-F238E27FC236}">
+                <a16:creationId xmlns:a16="http://schemas.microsoft.com/office/drawing/2014/main" id="{A2275E62-D909-B5A1-6BF6-213704119C7B}"/>
+              </a:ext>
+            </a:extLst>
+          </p:cNvPr>
+          <p:cNvCxnSpPr>
+            <a:cxnSpLocks/>
+            <a:endCxn id="86" idx="0"/>
+          </p:cNvCxnSpPr>
+          <p:nvPr/>
+        </p:nvCxnSpPr>
+        <p:spPr>
+          <a:xfrm>
+            <a:off x="7202253" y="3817302"/>
+            <a:ext cx="227897" cy="506548"/>
+          </a:xfrm>
+          <a:prstGeom prst="line">
+            <a:avLst/>
+          </a:prstGeom>
+        </p:spPr>
+        <p:style>
+          <a:lnRef idx="2">
+            <a:schemeClr val="dk1"/>
+          </a:lnRef>
+          <a:fillRef idx="0">
+            <a:schemeClr val="dk1"/>
+          </a:fillRef>
+          <a:effectRef idx="1">
+            <a:schemeClr val="dk1"/>
+          </a:effectRef>
+          <a:fontRef idx="minor">
+            <a:schemeClr val="tx1"/>
+          </a:fontRef>
+        </p:style>
+      </p:cxnSp>
+      <p:cxnSp>
+        <p:nvCxnSpPr>
+          <p:cNvPr id="77" name="Conector recto 76">
+            <a:extLst>
+              <a:ext uri="{FF2B5EF4-FFF2-40B4-BE49-F238E27FC236}">
+                <a16:creationId xmlns:a16="http://schemas.microsoft.com/office/drawing/2014/main" id="{4C64CA44-BC33-12A7-5B48-2C1E96235AC9}"/>
+              </a:ext>
+            </a:extLst>
+          </p:cNvPr>
+          <p:cNvCxnSpPr>
+            <a:cxnSpLocks/>
+          </p:cNvCxnSpPr>
+          <p:nvPr/>
+        </p:nvCxnSpPr>
+        <p:spPr>
+          <a:xfrm>
+            <a:off x="7074900" y="3845304"/>
+            <a:ext cx="0" cy="482053"/>
+          </a:xfrm>
+          <a:prstGeom prst="line">
+            <a:avLst/>
+          </a:prstGeom>
+        </p:spPr>
+        <p:style>
+          <a:lnRef idx="2">
+            <a:schemeClr val="dk1"/>
+          </a:lnRef>
+          <a:fillRef idx="0">
+            <a:schemeClr val="dk1"/>
+          </a:fillRef>
+          <a:effectRef idx="1">
+            <a:schemeClr val="dk1"/>
+          </a:effectRef>
+          <a:fontRef idx="minor">
+            <a:schemeClr val="tx1"/>
+          </a:fontRef>
+        </p:style>
+      </p:cxnSp>
+      <p:sp>
+        <p:nvSpPr>
+          <p:cNvPr id="81" name="Elipse 80">
+            <a:extLst>
+              <a:ext uri="{FF2B5EF4-FFF2-40B4-BE49-F238E27FC236}">
+                <a16:creationId xmlns:a16="http://schemas.microsoft.com/office/drawing/2014/main" id="{40B587E7-4CEE-E9BE-C49F-B6052D962236}"/>
+              </a:ext>
+            </a:extLst>
+          </p:cNvPr>
+          <p:cNvSpPr/>
+          <p:nvPr/>
+        </p:nvSpPr>
+        <p:spPr>
+          <a:xfrm>
+            <a:off x="8027472" y="4322389"/>
+            <a:ext cx="260725" cy="258911"/>
+          </a:xfrm>
+          <a:prstGeom prst="ellipse">
+            <a:avLst/>
+          </a:prstGeom>
+          <a:solidFill>
+            <a:schemeClr val="accent6">
+              <a:lumMod val="40000"/>
+              <a:lumOff val="60000"/>
+            </a:schemeClr>
+          </a:solidFill>
+          <a:ln>
+            <a:solidFill>
+              <a:schemeClr val="accent3">
+                <a:lumMod val="60000"/>
+                <a:lumOff val="40000"/>
+              </a:schemeClr>
+            </a:solidFill>
+          </a:ln>
+        </p:spPr>
+        <p:style>
+          <a:lnRef idx="2">
+            <a:schemeClr val="accent1">
+              <a:shade val="15000"/>
+            </a:schemeClr>
+          </a:lnRef>
+          <a:fillRef idx="1">
+            <a:schemeClr val="accent1"/>
+          </a:fillRef>
+          <a:effectRef idx="0">
+            <a:schemeClr val="accent1"/>
+          </a:effectRef>
+          <a:fontRef idx="minor">
+            <a:schemeClr val="lt1"/>
+          </a:fontRef>
+        </p:style>
+        <p:txBody>
+          <a:bodyPr rtlCol="0" anchor="ctr"/>
+          <a:lstStyle/>
+          <a:p>
+            <a:pPr algn="ctr"/>
+            <a:r>
+              <a:rPr lang="es-ES" sz="998" dirty="0">
+                <a:solidFill>
+                  <a:schemeClr val="bg2">
+                    <a:lumMod val="50000"/>
+                  </a:schemeClr>
+                </a:solidFill>
+              </a:rPr>
+              <a:t>4</a:t>
+            </a:r>
+            <a:endParaRPr lang="en-GB" sz="998" dirty="0">
+              <a:solidFill>
+                <a:schemeClr val="bg2">
+                  <a:lumMod val="50000"/>
+                </a:schemeClr>
+              </a:solidFill>
+            </a:endParaRPr>
+          </a:p>
+        </p:txBody>
+      </p:sp>
+      <p:sp>
+        <p:nvSpPr>
+          <p:cNvPr id="82" name="Elipse 81">
+            <a:extLst>
+              <a:ext uri="{FF2B5EF4-FFF2-40B4-BE49-F238E27FC236}">
+                <a16:creationId xmlns:a16="http://schemas.microsoft.com/office/drawing/2014/main" id="{E6E3D34D-0BC5-9755-4121-49F5656ADC46}"/>
+              </a:ext>
+            </a:extLst>
+          </p:cNvPr>
+          <p:cNvSpPr/>
+          <p:nvPr/>
+        </p:nvSpPr>
+        <p:spPr>
+          <a:xfrm>
+            <a:off x="7667706" y="4314559"/>
+            <a:ext cx="260725" cy="258911"/>
+          </a:xfrm>
+          <a:prstGeom prst="ellipse">
+            <a:avLst/>
+          </a:prstGeom>
+          <a:solidFill>
+            <a:schemeClr val="accent6">
+              <a:lumMod val="40000"/>
+              <a:lumOff val="60000"/>
+            </a:schemeClr>
+          </a:solidFill>
+          <a:ln>
+            <a:solidFill>
+              <a:schemeClr val="accent3">
+                <a:lumMod val="60000"/>
+                <a:lumOff val="40000"/>
+              </a:schemeClr>
+            </a:solidFill>
+          </a:ln>
+        </p:spPr>
+        <p:style>
+          <a:lnRef idx="2">
+            <a:schemeClr val="accent1">
+              <a:shade val="15000"/>
+            </a:schemeClr>
+          </a:lnRef>
+          <a:fillRef idx="1">
+            <a:schemeClr val="accent1"/>
+          </a:fillRef>
+          <a:effectRef idx="0">
+            <a:schemeClr val="accent1"/>
+          </a:effectRef>
+          <a:fontRef idx="minor">
+            <a:schemeClr val="lt1"/>
+          </a:fontRef>
+        </p:style>
+        <p:txBody>
+          <a:bodyPr rtlCol="0" anchor="ctr"/>
+          <a:lstStyle/>
+          <a:p>
+            <a:pPr algn="ctr"/>
+            <a:r>
+              <a:rPr lang="es-ES" sz="998" dirty="0">
+                <a:solidFill>
+                  <a:schemeClr val="bg2">
+                    <a:lumMod val="50000"/>
+                  </a:schemeClr>
+                </a:solidFill>
+              </a:rPr>
+              <a:t>2</a:t>
+            </a:r>
+            <a:endParaRPr lang="en-GB" sz="998" dirty="0">
+              <a:solidFill>
+                <a:schemeClr val="bg2">
+                  <a:lumMod val="50000"/>
+                </a:schemeClr>
+              </a:solidFill>
+            </a:endParaRPr>
+          </a:p>
+        </p:txBody>
+      </p:sp>
+      <p:sp>
+        <p:nvSpPr>
+          <p:cNvPr id="83" name="Elipse 82">
+            <a:extLst>
+              <a:ext uri="{FF2B5EF4-FFF2-40B4-BE49-F238E27FC236}">
+                <a16:creationId xmlns:a16="http://schemas.microsoft.com/office/drawing/2014/main" id="{6CE180E9-CF6C-7999-E4D1-09DC676FDD1E}"/>
+              </a:ext>
+            </a:extLst>
+          </p:cNvPr>
+          <p:cNvSpPr/>
+          <p:nvPr/>
+        </p:nvSpPr>
+        <p:spPr>
+          <a:xfrm>
+            <a:off x="8406826" y="4322389"/>
+            <a:ext cx="260725" cy="258911"/>
+          </a:xfrm>
+          <a:prstGeom prst="ellipse">
+            <a:avLst/>
+          </a:prstGeom>
+          <a:solidFill>
+            <a:schemeClr val="accent6">
+              <a:lumMod val="40000"/>
+              <a:lumOff val="60000"/>
+            </a:schemeClr>
+          </a:solidFill>
+          <a:ln>
+            <a:solidFill>
+              <a:schemeClr val="accent3">
+                <a:lumMod val="60000"/>
+                <a:lumOff val="40000"/>
+              </a:schemeClr>
+            </a:solidFill>
+          </a:ln>
+        </p:spPr>
+        <p:style>
+          <a:lnRef idx="2">
+            <a:schemeClr val="accent1">
+              <a:shade val="15000"/>
+            </a:schemeClr>
+          </a:lnRef>
+          <a:fillRef idx="1">
+            <a:schemeClr val="accent1"/>
+          </a:fillRef>
+          <a:effectRef idx="0">
+            <a:schemeClr val="accent1"/>
+          </a:effectRef>
+          <a:fontRef idx="minor">
+            <a:schemeClr val="lt1"/>
+          </a:fontRef>
+        </p:style>
+        <p:txBody>
+          <a:bodyPr rtlCol="0" anchor="ctr"/>
+          <a:lstStyle/>
+          <a:p>
+            <a:pPr algn="ctr"/>
+            <a:r>
+              <a:rPr lang="es-ES" sz="998" dirty="0">
+                <a:solidFill>
+                  <a:schemeClr val="bg2">
+                    <a:lumMod val="50000"/>
+                  </a:schemeClr>
+                </a:solidFill>
+              </a:rPr>
+              <a:t>7</a:t>
+            </a:r>
+            <a:endParaRPr lang="en-GB" sz="998" dirty="0">
+              <a:solidFill>
+                <a:schemeClr val="bg2">
+                  <a:lumMod val="50000"/>
+                </a:schemeClr>
+              </a:solidFill>
+            </a:endParaRPr>
+          </a:p>
+        </p:txBody>
+      </p:sp>
+      <p:sp>
+        <p:nvSpPr>
+          <p:cNvPr id="84" name="Elipse 83">
+            <a:extLst>
+              <a:ext uri="{FF2B5EF4-FFF2-40B4-BE49-F238E27FC236}">
+                <a16:creationId xmlns:a16="http://schemas.microsoft.com/office/drawing/2014/main" id="{4CC7D35B-C52D-98FD-C7BC-4A7AE4C8D89A}"/>
+              </a:ext>
+            </a:extLst>
+          </p:cNvPr>
+          <p:cNvSpPr/>
+          <p:nvPr/>
+        </p:nvSpPr>
+        <p:spPr>
+          <a:xfrm>
+            <a:off x="6586013" y="4327357"/>
+            <a:ext cx="260725" cy="258911"/>
+          </a:xfrm>
+          <a:prstGeom prst="ellipse">
+            <a:avLst/>
+          </a:prstGeom>
+          <a:solidFill>
+            <a:schemeClr val="accent2">
+              <a:lumMod val="40000"/>
+              <a:lumOff val="60000"/>
+            </a:schemeClr>
+          </a:solidFill>
+          <a:ln>
+            <a:solidFill>
+              <a:schemeClr val="accent2">
+                <a:lumMod val="75000"/>
+              </a:schemeClr>
+            </a:solidFill>
+          </a:ln>
+        </p:spPr>
+        <p:style>
+          <a:lnRef idx="2">
+            <a:schemeClr val="accent1">
+              <a:shade val="15000"/>
+            </a:schemeClr>
+          </a:lnRef>
+          <a:fillRef idx="1">
+            <a:schemeClr val="accent1"/>
+          </a:fillRef>
+          <a:effectRef idx="0">
+            <a:schemeClr val="accent1"/>
+          </a:effectRef>
+          <a:fontRef idx="minor">
+            <a:schemeClr val="lt1"/>
+          </a:fontRef>
+        </p:style>
+        <p:txBody>
+          <a:bodyPr rtlCol="0" anchor="ctr"/>
+          <a:lstStyle/>
+          <a:p>
+            <a:pPr algn="ctr"/>
+            <a:r>
+              <a:rPr lang="es-ES" sz="998" dirty="0">
+                <a:solidFill>
+                  <a:schemeClr val="bg2">
+                    <a:lumMod val="50000"/>
+                  </a:schemeClr>
+                </a:solidFill>
+              </a:rPr>
+              <a:t>1</a:t>
+            </a:r>
+            <a:endParaRPr lang="en-GB" sz="998" dirty="0">
+              <a:solidFill>
+                <a:schemeClr val="bg2">
+                  <a:lumMod val="50000"/>
+                </a:schemeClr>
+              </a:solidFill>
+            </a:endParaRPr>
+          </a:p>
+        </p:txBody>
+      </p:sp>
+      <p:sp>
+        <p:nvSpPr>
+          <p:cNvPr id="85" name="Elipse 84">
+            <a:extLst>
+              <a:ext uri="{FF2B5EF4-FFF2-40B4-BE49-F238E27FC236}">
+                <a16:creationId xmlns:a16="http://schemas.microsoft.com/office/drawing/2014/main" id="{48707AF9-A214-1D31-8A47-30A397AACBD8}"/>
+              </a:ext>
+            </a:extLst>
+          </p:cNvPr>
+          <p:cNvSpPr/>
+          <p:nvPr/>
+        </p:nvSpPr>
+        <p:spPr>
+          <a:xfrm>
+            <a:off x="6945779" y="4319690"/>
+            <a:ext cx="260725" cy="258911"/>
+          </a:xfrm>
+          <a:prstGeom prst="ellipse">
+            <a:avLst/>
+          </a:prstGeom>
+          <a:solidFill>
+            <a:schemeClr val="accent2">
+              <a:lumMod val="40000"/>
+              <a:lumOff val="60000"/>
+            </a:schemeClr>
+          </a:solidFill>
+          <a:ln>
+            <a:solidFill>
+              <a:schemeClr val="accent2">
+                <a:lumMod val="75000"/>
+              </a:schemeClr>
+            </a:solidFill>
+          </a:ln>
+        </p:spPr>
+        <p:style>
+          <a:lnRef idx="2">
+            <a:schemeClr val="accent1">
+              <a:shade val="15000"/>
+            </a:schemeClr>
+          </a:lnRef>
+          <a:fillRef idx="1">
+            <a:schemeClr val="accent1"/>
+          </a:fillRef>
+          <a:effectRef idx="0">
+            <a:schemeClr val="accent1"/>
+          </a:effectRef>
+          <a:fontRef idx="minor">
+            <a:schemeClr val="lt1"/>
+          </a:fontRef>
+        </p:style>
+        <p:txBody>
+          <a:bodyPr rtlCol="0" anchor="ctr"/>
+          <a:lstStyle/>
+          <a:p>
+            <a:pPr algn="ctr"/>
+            <a:r>
+              <a:rPr lang="es-ES" sz="998" dirty="0">
+                <a:solidFill>
+                  <a:schemeClr val="bg2">
+                    <a:lumMod val="50000"/>
+                  </a:schemeClr>
+                </a:solidFill>
+              </a:rPr>
+              <a:t>3</a:t>
+            </a:r>
+            <a:endParaRPr lang="en-GB" sz="998" dirty="0">
+              <a:solidFill>
+                <a:schemeClr val="bg2">
+                  <a:lumMod val="50000"/>
+                </a:schemeClr>
+              </a:solidFill>
+            </a:endParaRPr>
+          </a:p>
+        </p:txBody>
+      </p:sp>
+      <p:sp>
+        <p:nvSpPr>
+          <p:cNvPr id="86" name="Elipse 85">
+            <a:extLst>
+              <a:ext uri="{FF2B5EF4-FFF2-40B4-BE49-F238E27FC236}">
+                <a16:creationId xmlns:a16="http://schemas.microsoft.com/office/drawing/2014/main" id="{D0128BA6-B3FE-B2AA-9CC1-5A4B6E03FE32}"/>
+              </a:ext>
+            </a:extLst>
+          </p:cNvPr>
+          <p:cNvSpPr/>
+          <p:nvPr/>
+        </p:nvSpPr>
+        <p:spPr>
+          <a:xfrm>
+            <a:off x="7299787" y="4323849"/>
+            <a:ext cx="260725" cy="258911"/>
+          </a:xfrm>
+          <a:prstGeom prst="ellipse">
+            <a:avLst/>
+          </a:prstGeom>
+          <a:solidFill>
+            <a:schemeClr val="accent2">
+              <a:lumMod val="40000"/>
+              <a:lumOff val="60000"/>
+            </a:schemeClr>
+          </a:solidFill>
+          <a:ln>
+            <a:solidFill>
+              <a:schemeClr val="accent2">
+                <a:lumMod val="75000"/>
+              </a:schemeClr>
+            </a:solidFill>
+          </a:ln>
+        </p:spPr>
+        <p:style>
+          <a:lnRef idx="2">
+            <a:schemeClr val="accent1">
+              <a:shade val="15000"/>
+            </a:schemeClr>
+          </a:lnRef>
+          <a:fillRef idx="1">
+            <a:schemeClr val="accent1"/>
+          </a:fillRef>
+          <a:effectRef idx="0">
+            <a:schemeClr val="accent1"/>
+          </a:effectRef>
+          <a:fontRef idx="minor">
+            <a:schemeClr val="lt1"/>
+          </a:fontRef>
+        </p:style>
+        <p:txBody>
+          <a:bodyPr rtlCol="0" anchor="ctr"/>
+          <a:lstStyle/>
+          <a:p>
+            <a:pPr algn="ctr"/>
+            <a:r>
+              <a:rPr lang="es-ES" sz="998" dirty="0">
+                <a:solidFill>
+                  <a:schemeClr val="bg2">
+                    <a:lumMod val="50000"/>
+                  </a:schemeClr>
+                </a:solidFill>
+              </a:rPr>
+              <a:t>8</a:t>
+            </a:r>
+            <a:endParaRPr lang="en-GB" sz="998" dirty="0">
+              <a:solidFill>
+                <a:schemeClr val="bg2">
+                  <a:lumMod val="50000"/>
+                </a:schemeClr>
+              </a:solidFill>
+            </a:endParaRPr>
+          </a:p>
+        </p:txBody>
+      </p:sp>
+      <p:sp>
+        <p:nvSpPr>
+          <p:cNvPr id="89" name="CuadroTexto 88">
+            <a:extLst>
+              <a:ext uri="{FF2B5EF4-FFF2-40B4-BE49-F238E27FC236}">
+                <a16:creationId xmlns:a16="http://schemas.microsoft.com/office/drawing/2014/main" id="{3F5399D1-60FE-7655-5918-4CCF7A95CD72}"/>
+              </a:ext>
+            </a:extLst>
+          </p:cNvPr>
+          <p:cNvSpPr txBox="1"/>
+          <p:nvPr/>
+        </p:nvSpPr>
+        <p:spPr>
+          <a:xfrm>
+            <a:off x="6651055" y="3135706"/>
+            <a:ext cx="638316" cy="315792"/>
+          </a:xfrm>
+          <a:prstGeom prst="rect">
+            <a:avLst/>
+          </a:prstGeom>
+          <a:noFill/>
+        </p:spPr>
+        <p:txBody>
+          <a:bodyPr wrap="none" rtlCol="0">
+            <a:spAutoFit/>
+          </a:bodyPr>
+          <a:lstStyle/>
+          <a:p>
+            <a:r>
+              <a:rPr lang="es-ES" sz="1452" b="1" dirty="0">
+                <a:latin typeface="Cambria Math" panose="02040503050406030204" pitchFamily="18" charset="0"/>
+                <a:ea typeface="Cambria Math" panose="02040503050406030204" pitchFamily="18" charset="0"/>
+              </a:rPr>
+              <a:t>X </a:t>
+            </a:r>
+            <a:r>
+              <a:rPr lang="es-ES" sz="1452" baseline="-25000" dirty="0">
+                <a:latin typeface="Cambria Math" panose="02040503050406030204" pitchFamily="18" charset="0"/>
+                <a:ea typeface="Cambria Math" panose="02040503050406030204" pitchFamily="18" charset="0"/>
+              </a:rPr>
+              <a:t>j</a:t>
+            </a:r>
+            <a:r>
+              <a:rPr lang="es-ES" sz="1452" dirty="0"/>
+              <a:t> &gt; 0</a:t>
+            </a:r>
+            <a:endParaRPr lang="en-GB" sz="1452" dirty="0"/>
+          </a:p>
+        </p:txBody>
+      </p:sp>
+      <p:sp>
+        <p:nvSpPr>
+          <p:cNvPr id="90" name="CuadroTexto 89">
+            <a:extLst>
+              <a:ext uri="{FF2B5EF4-FFF2-40B4-BE49-F238E27FC236}">
+                <a16:creationId xmlns:a16="http://schemas.microsoft.com/office/drawing/2014/main" id="{30AA76ED-D02E-3435-4E6C-D639EF8A3402}"/>
+              </a:ext>
+            </a:extLst>
+          </p:cNvPr>
+          <p:cNvSpPr txBox="1"/>
+          <p:nvPr/>
+        </p:nvSpPr>
+        <p:spPr>
+          <a:xfrm>
+            <a:off x="7925470" y="3135706"/>
+            <a:ext cx="638316" cy="315792"/>
+          </a:xfrm>
+          <a:prstGeom prst="rect">
+            <a:avLst/>
+          </a:prstGeom>
+          <a:noFill/>
+        </p:spPr>
+        <p:txBody>
+          <a:bodyPr wrap="none" rtlCol="0">
+            <a:spAutoFit/>
+          </a:bodyPr>
+          <a:lstStyle/>
+          <a:p>
+            <a:r>
+              <a:rPr lang="es-ES" sz="1452" b="1" dirty="0">
+                <a:latin typeface="Cambria Math" panose="02040503050406030204" pitchFamily="18" charset="0"/>
+                <a:ea typeface="Cambria Math" panose="02040503050406030204" pitchFamily="18" charset="0"/>
+              </a:rPr>
+              <a:t>X </a:t>
+            </a:r>
+            <a:r>
+              <a:rPr lang="es-ES" sz="1452" baseline="-25000" dirty="0">
+                <a:latin typeface="Cambria Math" panose="02040503050406030204" pitchFamily="18" charset="0"/>
+                <a:ea typeface="Cambria Math" panose="02040503050406030204" pitchFamily="18" charset="0"/>
+              </a:rPr>
+              <a:t>j</a:t>
+            </a:r>
+            <a:r>
+              <a:rPr lang="es-ES" sz="1452" dirty="0"/>
+              <a:t> ≤ 0</a:t>
+            </a:r>
+            <a:endParaRPr lang="en-GB" sz="1452" dirty="0"/>
+          </a:p>
+        </p:txBody>
+      </p:sp>
+      <p:sp>
+        <p:nvSpPr>
+          <p:cNvPr id="75" name="Elipse 74">
+            <a:extLst>
+              <a:ext uri="{FF2B5EF4-FFF2-40B4-BE49-F238E27FC236}">
+                <a16:creationId xmlns:a16="http://schemas.microsoft.com/office/drawing/2014/main" id="{F82F9FEF-5D04-1544-AE3D-4F2D2275F22D}"/>
+              </a:ext>
+            </a:extLst>
+          </p:cNvPr>
+          <p:cNvSpPr/>
+          <p:nvPr/>
+        </p:nvSpPr>
+        <p:spPr>
+          <a:xfrm>
+            <a:off x="6895313" y="3515924"/>
+            <a:ext cx="361105" cy="340624"/>
+          </a:xfrm>
+          <a:prstGeom prst="ellipse">
+            <a:avLst/>
+          </a:prstGeom>
+          <a:solidFill>
+            <a:schemeClr val="accent4">
+              <a:lumMod val="20000"/>
+              <a:lumOff val="80000"/>
+            </a:schemeClr>
+          </a:solidFill>
+          <a:ln>
+            <a:solidFill>
+              <a:schemeClr val="accent4">
+                <a:lumMod val="40000"/>
+                <a:lumOff val="60000"/>
+              </a:schemeClr>
+            </a:solidFill>
+          </a:ln>
+        </p:spPr>
+        <p:style>
+          <a:lnRef idx="2">
+            <a:schemeClr val="accent1">
+              <a:shade val="15000"/>
+            </a:schemeClr>
+          </a:lnRef>
+          <a:fillRef idx="1">
+            <a:schemeClr val="accent1"/>
+          </a:fillRef>
+          <a:effectRef idx="0">
+            <a:schemeClr val="accent1"/>
+          </a:effectRef>
+          <a:fontRef idx="minor">
+            <a:schemeClr val="lt1"/>
+          </a:fontRef>
+        </p:style>
+        <p:txBody>
+          <a:bodyPr rtlCol="0" anchor="ctr"/>
+          <a:lstStyle/>
+          <a:p>
+            <a:pPr algn="ctr"/>
+            <a:r>
+              <a:rPr lang="es-ES" dirty="0">
+                <a:solidFill>
+                  <a:schemeClr val="tx1"/>
+                </a:solidFill>
+              </a:rPr>
+              <a:t>-</a:t>
+            </a:r>
+            <a:endParaRPr lang="en-GB" dirty="0">
+              <a:solidFill>
+                <a:schemeClr val="tx1"/>
+              </a:solidFill>
+            </a:endParaRPr>
+          </a:p>
+        </p:txBody>
+      </p:sp>
+      <p:sp>
+        <p:nvSpPr>
+          <p:cNvPr id="66" name="Elipse 65">
+            <a:extLst>
+              <a:ext uri="{FF2B5EF4-FFF2-40B4-BE49-F238E27FC236}">
+                <a16:creationId xmlns:a16="http://schemas.microsoft.com/office/drawing/2014/main" id="{5F25BBBA-2158-3EC8-9C0F-1B8405DFF844}"/>
+              </a:ext>
+            </a:extLst>
+          </p:cNvPr>
+          <p:cNvSpPr/>
+          <p:nvPr/>
+        </p:nvSpPr>
+        <p:spPr>
+          <a:xfrm>
+            <a:off x="7944909" y="3524566"/>
+            <a:ext cx="361105" cy="340624"/>
+          </a:xfrm>
+          <a:prstGeom prst="ellipse">
+            <a:avLst/>
+          </a:prstGeom>
+          <a:solidFill>
+            <a:schemeClr val="accent4">
+              <a:lumMod val="20000"/>
+              <a:lumOff val="80000"/>
+            </a:schemeClr>
+          </a:solidFill>
+          <a:ln>
+            <a:solidFill>
+              <a:schemeClr val="accent4">
+                <a:lumMod val="40000"/>
+                <a:lumOff val="60000"/>
+              </a:schemeClr>
+            </a:solidFill>
+          </a:ln>
+        </p:spPr>
+        <p:style>
+          <a:lnRef idx="2">
+            <a:schemeClr val="accent1">
+              <a:shade val="15000"/>
+            </a:schemeClr>
+          </a:lnRef>
+          <a:fillRef idx="1">
+            <a:schemeClr val="accent1"/>
+          </a:fillRef>
+          <a:effectRef idx="0">
+            <a:schemeClr val="accent1"/>
+          </a:effectRef>
+          <a:fontRef idx="minor">
+            <a:schemeClr val="lt1"/>
+          </a:fontRef>
+        </p:style>
+        <p:txBody>
+          <a:bodyPr rtlCol="0" anchor="ctr"/>
+          <a:lstStyle/>
+          <a:p>
+            <a:pPr algn="ctr"/>
+            <a:r>
+              <a:rPr lang="es-ES" dirty="0">
+                <a:solidFill>
+                  <a:schemeClr val="tx1"/>
+                </a:solidFill>
+              </a:rPr>
+              <a:t>+</a:t>
+            </a:r>
+            <a:endParaRPr lang="en-GB" dirty="0">
+              <a:solidFill>
+                <a:schemeClr val="tx1"/>
+              </a:solidFill>
+            </a:endParaRPr>
+          </a:p>
+        </p:txBody>
+      </p:sp>
+      <p:sp>
+        <p:nvSpPr>
+          <p:cNvPr id="130" name="CuadroTexto 129">
+            <a:extLst>
+              <a:ext uri="{FF2B5EF4-FFF2-40B4-BE49-F238E27FC236}">
+                <a16:creationId xmlns:a16="http://schemas.microsoft.com/office/drawing/2014/main" id="{0B3730F0-96A7-113A-7218-19CB7EAF9F71}"/>
+              </a:ext>
+            </a:extLst>
+          </p:cNvPr>
+          <p:cNvSpPr txBox="1"/>
+          <p:nvPr/>
+        </p:nvSpPr>
+        <p:spPr>
+          <a:xfrm>
+            <a:off x="6752045" y="2365084"/>
+            <a:ext cx="1633173" cy="343620"/>
+          </a:xfrm>
+          <a:prstGeom prst="rect">
+            <a:avLst/>
+          </a:prstGeom>
+          <a:solidFill>
+            <a:srgbClr val="CAEEFB"/>
+          </a:solidFill>
+        </p:spPr>
+        <p:txBody>
+          <a:bodyPr wrap="square" rtlCol="0">
+            <a:spAutoFit/>
+          </a:bodyPr>
+          <a:lstStyle/>
+          <a:p>
+            <a:pPr algn="ctr"/>
+            <a:r>
+              <a:rPr lang="es-ES" sz="1633" dirty="0" err="1"/>
+              <a:t>Decision</a:t>
+            </a:r>
+            <a:r>
+              <a:rPr lang="es-ES" sz="1633" dirty="0"/>
+              <a:t> </a:t>
+            </a:r>
+            <a:r>
+              <a:rPr lang="es-ES" sz="1633" dirty="0" err="1"/>
+              <a:t>tree</a:t>
+            </a:r>
+            <a:r>
+              <a:rPr lang="es-ES" sz="1633" dirty="0"/>
+              <a:t> 2</a:t>
+            </a:r>
+            <a:endParaRPr lang="en-GB" sz="1633" dirty="0"/>
+          </a:p>
+        </p:txBody>
+      </p:sp>
+      <p:sp>
+        <p:nvSpPr>
+          <p:cNvPr id="133" name="CuadroTexto 132">
+            <a:extLst>
+              <a:ext uri="{FF2B5EF4-FFF2-40B4-BE49-F238E27FC236}">
+                <a16:creationId xmlns:a16="http://schemas.microsoft.com/office/drawing/2014/main" id="{4CE766E4-DC31-EE0F-64EA-9BF41F2E2584}"/>
+              </a:ext>
+            </a:extLst>
+          </p:cNvPr>
+          <p:cNvSpPr txBox="1"/>
+          <p:nvPr/>
+        </p:nvSpPr>
+        <p:spPr>
+          <a:xfrm>
+            <a:off x="8900133" y="3135706"/>
+            <a:ext cx="638316" cy="315792"/>
+          </a:xfrm>
+          <a:prstGeom prst="rect">
+            <a:avLst/>
+          </a:prstGeom>
+          <a:noFill/>
+        </p:spPr>
+        <p:txBody>
+          <a:bodyPr wrap="none" rtlCol="0">
+            <a:spAutoFit/>
+          </a:bodyPr>
+          <a:lstStyle/>
+          <a:p>
+            <a:r>
+              <a:rPr lang="es-ES" sz="1452" b="1" dirty="0">
+                <a:latin typeface="Cambria Math" panose="02040503050406030204" pitchFamily="18" charset="0"/>
+                <a:ea typeface="Cambria Math" panose="02040503050406030204" pitchFamily="18" charset="0"/>
+              </a:rPr>
+              <a:t>X </a:t>
+            </a:r>
+            <a:r>
+              <a:rPr lang="es-ES" sz="1452" baseline="-25000" dirty="0">
+                <a:latin typeface="Cambria Math" panose="02040503050406030204" pitchFamily="18" charset="0"/>
+                <a:ea typeface="Cambria Math" panose="02040503050406030204" pitchFamily="18" charset="0"/>
+              </a:rPr>
+              <a:t>j</a:t>
+            </a:r>
+            <a:r>
+              <a:rPr lang="es-ES" sz="1452" dirty="0"/>
+              <a:t> = 0</a:t>
+            </a:r>
+            <a:endParaRPr lang="en-GB" sz="1452" dirty="0"/>
+          </a:p>
+        </p:txBody>
+      </p:sp>
+      <p:cxnSp>
+        <p:nvCxnSpPr>
+          <p:cNvPr id="91" name="Conector recto 90">
+            <a:extLst>
+              <a:ext uri="{FF2B5EF4-FFF2-40B4-BE49-F238E27FC236}">
+                <a16:creationId xmlns:a16="http://schemas.microsoft.com/office/drawing/2014/main" id="{CEFBA680-28EF-BAD6-F335-587555CD103A}"/>
+              </a:ext>
+            </a:extLst>
+          </p:cNvPr>
+          <p:cNvCxnSpPr>
+            <a:cxnSpLocks/>
+          </p:cNvCxnSpPr>
+          <p:nvPr/>
+        </p:nvCxnSpPr>
+        <p:spPr>
+          <a:xfrm flipH="1">
+            <a:off x="4779961" y="3055166"/>
+            <a:ext cx="401110" cy="476872"/>
+          </a:xfrm>
+          <a:prstGeom prst="line">
+            <a:avLst/>
+          </a:prstGeom>
+        </p:spPr>
+        <p:style>
+          <a:lnRef idx="2">
+            <a:schemeClr val="dk1"/>
+          </a:lnRef>
+          <a:fillRef idx="0">
+            <a:schemeClr val="dk1"/>
+          </a:fillRef>
+          <a:effectRef idx="1">
+            <a:schemeClr val="dk1"/>
+          </a:effectRef>
+          <a:fontRef idx="minor">
+            <a:schemeClr val="tx1"/>
+          </a:fontRef>
+        </p:style>
+      </p:cxnSp>
+      <p:cxnSp>
+        <p:nvCxnSpPr>
+          <p:cNvPr id="92" name="Conector recto 91">
+            <a:extLst>
+              <a:ext uri="{FF2B5EF4-FFF2-40B4-BE49-F238E27FC236}">
+                <a16:creationId xmlns:a16="http://schemas.microsoft.com/office/drawing/2014/main" id="{D3112C15-9279-A168-65E8-F2F0904E409F}"/>
+              </a:ext>
+            </a:extLst>
+          </p:cNvPr>
+          <p:cNvCxnSpPr>
+            <a:cxnSpLocks/>
+          </p:cNvCxnSpPr>
+          <p:nvPr/>
+        </p:nvCxnSpPr>
+        <p:spPr>
+          <a:xfrm>
+            <a:off x="5411310" y="3055166"/>
+            <a:ext cx="401110" cy="476872"/>
+          </a:xfrm>
+          <a:prstGeom prst="line">
+            <a:avLst/>
+          </a:prstGeom>
+        </p:spPr>
+        <p:style>
+          <a:lnRef idx="2">
+            <a:schemeClr val="dk1"/>
+          </a:lnRef>
+          <a:fillRef idx="0">
+            <a:schemeClr val="dk1"/>
+          </a:fillRef>
+          <a:effectRef idx="1">
+            <a:schemeClr val="dk1"/>
+          </a:effectRef>
+          <a:fontRef idx="minor">
+            <a:schemeClr val="tx1"/>
+          </a:fontRef>
+        </p:style>
+      </p:cxnSp>
+      <p:sp>
+        <p:nvSpPr>
+          <p:cNvPr id="93" name="Elipse 92">
+            <a:extLst>
+              <a:ext uri="{FF2B5EF4-FFF2-40B4-BE49-F238E27FC236}">
+                <a16:creationId xmlns:a16="http://schemas.microsoft.com/office/drawing/2014/main" id="{B4CA9C14-7623-8EB9-9352-62B89FC35AB8}"/>
+              </a:ext>
+            </a:extLst>
+          </p:cNvPr>
+          <p:cNvSpPr/>
+          <p:nvPr/>
+        </p:nvSpPr>
+        <p:spPr>
+          <a:xfrm>
+            <a:off x="5115639" y="2761514"/>
+            <a:ext cx="361105" cy="340624"/>
+          </a:xfrm>
+          <a:prstGeom prst="ellipse">
+            <a:avLst/>
+          </a:prstGeom>
+          <a:solidFill>
+            <a:schemeClr val="tx2">
+              <a:lumMod val="25000"/>
+              <a:lumOff val="75000"/>
+            </a:schemeClr>
+          </a:solidFill>
+          <a:ln>
+            <a:solidFill>
+              <a:schemeClr val="tx2">
+                <a:lumMod val="75000"/>
+                <a:lumOff val="25000"/>
+              </a:schemeClr>
+            </a:solidFill>
+          </a:ln>
+        </p:spPr>
+        <p:style>
+          <a:lnRef idx="2">
+            <a:schemeClr val="accent1">
+              <a:shade val="15000"/>
+            </a:schemeClr>
+          </a:lnRef>
+          <a:fillRef idx="1">
+            <a:schemeClr val="accent1"/>
+          </a:fillRef>
+          <a:effectRef idx="0">
+            <a:schemeClr val="accent1"/>
+          </a:effectRef>
+          <a:fontRef idx="minor">
+            <a:schemeClr val="lt1"/>
+          </a:fontRef>
+        </p:style>
+        <p:txBody>
+          <a:bodyPr rtlCol="0" anchor="ctr"/>
+          <a:lstStyle/>
+          <a:p>
+            <a:pPr algn="ctr"/>
+            <a:endParaRPr lang="es-ES" sz="953" baseline="-25000" dirty="0">
+              <a:solidFill>
+                <a:schemeClr val="tx1"/>
+              </a:solidFill>
+            </a:endParaRPr>
+          </a:p>
+        </p:txBody>
+      </p:sp>
+      <p:cxnSp>
+        <p:nvCxnSpPr>
+          <p:cNvPr id="94" name="Conector recto 93">
+            <a:extLst>
+              <a:ext uri="{FF2B5EF4-FFF2-40B4-BE49-F238E27FC236}">
+                <a16:creationId xmlns:a16="http://schemas.microsoft.com/office/drawing/2014/main" id="{667A3C41-D8D3-5586-B501-1E3F676019C3}"/>
+              </a:ext>
+            </a:extLst>
+          </p:cNvPr>
+          <p:cNvCxnSpPr>
+            <a:cxnSpLocks/>
+          </p:cNvCxnSpPr>
+          <p:nvPr/>
+        </p:nvCxnSpPr>
+        <p:spPr>
+          <a:xfrm flipH="1">
+            <a:off x="5494421" y="3840991"/>
+            <a:ext cx="223830" cy="489628"/>
+          </a:xfrm>
+          <a:prstGeom prst="line">
+            <a:avLst/>
+          </a:prstGeom>
+        </p:spPr>
+        <p:style>
+          <a:lnRef idx="2">
+            <a:schemeClr val="dk1"/>
+          </a:lnRef>
+          <a:fillRef idx="0">
+            <a:schemeClr val="dk1"/>
+          </a:fillRef>
+          <a:effectRef idx="1">
+            <a:schemeClr val="dk1"/>
+          </a:effectRef>
+          <a:fontRef idx="minor">
+            <a:schemeClr val="tx1"/>
+          </a:fontRef>
+        </p:style>
+      </p:cxnSp>
+      <p:cxnSp>
+        <p:nvCxnSpPr>
+          <p:cNvPr id="95" name="Conector recto 94">
+            <a:extLst>
+              <a:ext uri="{FF2B5EF4-FFF2-40B4-BE49-F238E27FC236}">
+                <a16:creationId xmlns:a16="http://schemas.microsoft.com/office/drawing/2014/main" id="{C6669EFA-368C-5A85-1D72-4E55133DF5F9}"/>
+              </a:ext>
+            </a:extLst>
+          </p:cNvPr>
+          <p:cNvCxnSpPr>
+            <a:cxnSpLocks/>
+          </p:cNvCxnSpPr>
+          <p:nvPr/>
+        </p:nvCxnSpPr>
+        <p:spPr>
+          <a:xfrm>
+            <a:off x="5955670" y="3834174"/>
+            <a:ext cx="260725" cy="496445"/>
+          </a:xfrm>
+          <a:prstGeom prst="line">
+            <a:avLst/>
+          </a:prstGeom>
+        </p:spPr>
+        <p:style>
+          <a:lnRef idx="2">
+            <a:schemeClr val="dk1"/>
+          </a:lnRef>
+          <a:fillRef idx="0">
+            <a:schemeClr val="dk1"/>
+          </a:fillRef>
+          <a:effectRef idx="1">
+            <a:schemeClr val="dk1"/>
+          </a:effectRef>
+          <a:fontRef idx="minor">
+            <a:schemeClr val="tx1"/>
+          </a:fontRef>
+        </p:style>
+      </p:cxnSp>
+      <p:cxnSp>
+        <p:nvCxnSpPr>
+          <p:cNvPr id="96" name="Conector recto 95">
+            <a:extLst>
+              <a:ext uri="{FF2B5EF4-FFF2-40B4-BE49-F238E27FC236}">
+                <a16:creationId xmlns:a16="http://schemas.microsoft.com/office/drawing/2014/main" id="{5A348DBA-CC2D-3D45-9DEA-956B251F9115}"/>
+              </a:ext>
+            </a:extLst>
+          </p:cNvPr>
+          <p:cNvCxnSpPr>
+            <a:cxnSpLocks/>
+          </p:cNvCxnSpPr>
+          <p:nvPr/>
+        </p:nvCxnSpPr>
+        <p:spPr>
+          <a:xfrm>
+            <a:off x="5849920" y="3862176"/>
+            <a:ext cx="0" cy="482053"/>
+          </a:xfrm>
+          <a:prstGeom prst="line">
+            <a:avLst/>
+          </a:prstGeom>
+        </p:spPr>
+        <p:style>
+          <a:lnRef idx="2">
+            <a:schemeClr val="dk1"/>
+          </a:lnRef>
+          <a:fillRef idx="0">
+            <a:schemeClr val="dk1"/>
+          </a:fillRef>
+          <a:effectRef idx="1">
+            <a:schemeClr val="dk1"/>
+          </a:effectRef>
+          <a:fontRef idx="minor">
+            <a:schemeClr val="tx1"/>
+          </a:fontRef>
+        </p:style>
+      </p:cxnSp>
+      <p:cxnSp>
+        <p:nvCxnSpPr>
+          <p:cNvPr id="97" name="Conector recto 96">
+            <a:extLst>
+              <a:ext uri="{FF2B5EF4-FFF2-40B4-BE49-F238E27FC236}">
+                <a16:creationId xmlns:a16="http://schemas.microsoft.com/office/drawing/2014/main" id="{6811F8CF-87EE-4B30-207B-32AE29F0466C}"/>
+              </a:ext>
+            </a:extLst>
+          </p:cNvPr>
+          <p:cNvCxnSpPr>
+            <a:cxnSpLocks/>
+            <a:endCxn id="103" idx="0"/>
+          </p:cNvCxnSpPr>
+          <p:nvPr/>
+        </p:nvCxnSpPr>
+        <p:spPr>
+          <a:xfrm flipH="1">
+            <a:off x="4420195" y="3832350"/>
+            <a:ext cx="248459" cy="503238"/>
+          </a:xfrm>
+          <a:prstGeom prst="line">
+            <a:avLst/>
+          </a:prstGeom>
+        </p:spPr>
+        <p:style>
+          <a:lnRef idx="2">
+            <a:schemeClr val="dk1"/>
+          </a:lnRef>
+          <a:fillRef idx="0">
+            <a:schemeClr val="dk1"/>
+          </a:fillRef>
+          <a:effectRef idx="1">
+            <a:schemeClr val="dk1"/>
+          </a:effectRef>
+          <a:fontRef idx="minor">
+            <a:schemeClr val="tx1"/>
+          </a:fontRef>
+        </p:style>
+      </p:cxnSp>
+      <p:cxnSp>
+        <p:nvCxnSpPr>
+          <p:cNvPr id="98" name="Conector recto 97">
+            <a:extLst>
+              <a:ext uri="{FF2B5EF4-FFF2-40B4-BE49-F238E27FC236}">
+                <a16:creationId xmlns:a16="http://schemas.microsoft.com/office/drawing/2014/main" id="{FA75AA32-9B1B-F548-433C-ADDD1D5D3E3F}"/>
+              </a:ext>
+            </a:extLst>
+          </p:cNvPr>
+          <p:cNvCxnSpPr>
+            <a:cxnSpLocks/>
+            <a:endCxn id="105" idx="0"/>
+          </p:cNvCxnSpPr>
+          <p:nvPr/>
+        </p:nvCxnSpPr>
+        <p:spPr>
+          <a:xfrm>
+            <a:off x="4906073" y="3825533"/>
+            <a:ext cx="227897" cy="506548"/>
+          </a:xfrm>
+          <a:prstGeom prst="line">
+            <a:avLst/>
+          </a:prstGeom>
+        </p:spPr>
+        <p:style>
+          <a:lnRef idx="2">
+            <a:schemeClr val="dk1"/>
+          </a:lnRef>
+          <a:fillRef idx="0">
+            <a:schemeClr val="dk1"/>
+          </a:fillRef>
+          <a:effectRef idx="1">
+            <a:schemeClr val="dk1"/>
+          </a:effectRef>
+          <a:fontRef idx="minor">
+            <a:schemeClr val="tx1"/>
+          </a:fontRef>
+        </p:style>
+      </p:cxnSp>
+      <p:cxnSp>
+        <p:nvCxnSpPr>
+          <p:cNvPr id="99" name="Conector recto 98">
+            <a:extLst>
+              <a:ext uri="{FF2B5EF4-FFF2-40B4-BE49-F238E27FC236}">
+                <a16:creationId xmlns:a16="http://schemas.microsoft.com/office/drawing/2014/main" id="{648F79A3-216C-908A-44B1-DA2A3B0AB39D}"/>
+              </a:ext>
+            </a:extLst>
+          </p:cNvPr>
+          <p:cNvCxnSpPr>
+            <a:cxnSpLocks/>
+          </p:cNvCxnSpPr>
+          <p:nvPr/>
+        </p:nvCxnSpPr>
+        <p:spPr>
+          <a:xfrm>
+            <a:off x="4778720" y="3853535"/>
+            <a:ext cx="0" cy="482053"/>
+          </a:xfrm>
+          <a:prstGeom prst="line">
+            <a:avLst/>
+          </a:prstGeom>
+        </p:spPr>
+        <p:style>
+          <a:lnRef idx="2">
+            <a:schemeClr val="dk1"/>
+          </a:lnRef>
+          <a:fillRef idx="0">
+            <a:schemeClr val="dk1"/>
+          </a:fillRef>
+          <a:effectRef idx="1">
+            <a:schemeClr val="dk1"/>
+          </a:effectRef>
+          <a:fontRef idx="minor">
+            <a:schemeClr val="tx1"/>
+          </a:fontRef>
+        </p:style>
+      </p:cxnSp>
+      <p:sp>
+        <p:nvSpPr>
+          <p:cNvPr id="100" name="Elipse 99">
+            <a:extLst>
+              <a:ext uri="{FF2B5EF4-FFF2-40B4-BE49-F238E27FC236}">
+                <a16:creationId xmlns:a16="http://schemas.microsoft.com/office/drawing/2014/main" id="{9F3254BC-AA2F-D869-AA2A-0AD33F9A98F3}"/>
+              </a:ext>
+            </a:extLst>
+          </p:cNvPr>
+          <p:cNvSpPr/>
+          <p:nvPr/>
+        </p:nvSpPr>
+        <p:spPr>
+          <a:xfrm>
+            <a:off x="5731292" y="4330620"/>
+            <a:ext cx="260725" cy="258911"/>
+          </a:xfrm>
+          <a:prstGeom prst="ellipse">
+            <a:avLst/>
+          </a:prstGeom>
+          <a:solidFill>
+            <a:schemeClr val="accent6">
+              <a:lumMod val="40000"/>
+              <a:lumOff val="60000"/>
+            </a:schemeClr>
+          </a:solidFill>
+          <a:ln>
+            <a:solidFill>
+              <a:schemeClr val="accent3">
+                <a:lumMod val="60000"/>
+                <a:lumOff val="40000"/>
+              </a:schemeClr>
+            </a:solidFill>
+          </a:ln>
+        </p:spPr>
+        <p:style>
+          <a:lnRef idx="2">
+            <a:schemeClr val="accent1">
+              <a:shade val="15000"/>
+            </a:schemeClr>
+          </a:lnRef>
+          <a:fillRef idx="1">
+            <a:schemeClr val="accent1"/>
+          </a:fillRef>
+          <a:effectRef idx="0">
+            <a:schemeClr val="accent1"/>
+          </a:effectRef>
+          <a:fontRef idx="minor">
+            <a:schemeClr val="lt1"/>
+          </a:fontRef>
+        </p:style>
+        <p:txBody>
+          <a:bodyPr rtlCol="0" anchor="ctr"/>
+          <a:lstStyle/>
+          <a:p>
+            <a:pPr algn="ctr"/>
+            <a:r>
+              <a:rPr lang="es-ES" sz="998" dirty="0">
+                <a:solidFill>
+                  <a:schemeClr val="bg2">
+                    <a:lumMod val="50000"/>
+                  </a:schemeClr>
+                </a:solidFill>
+              </a:rPr>
+              <a:t>6</a:t>
+            </a:r>
+            <a:endParaRPr lang="en-GB" sz="998" dirty="0">
+              <a:solidFill>
+                <a:schemeClr val="bg2">
+                  <a:lumMod val="50000"/>
+                </a:schemeClr>
+              </a:solidFill>
+            </a:endParaRPr>
+          </a:p>
+        </p:txBody>
+      </p:sp>
+      <p:sp>
+        <p:nvSpPr>
+          <p:cNvPr id="101" name="Elipse 100">
+            <a:extLst>
+              <a:ext uri="{FF2B5EF4-FFF2-40B4-BE49-F238E27FC236}">
+                <a16:creationId xmlns:a16="http://schemas.microsoft.com/office/drawing/2014/main" id="{EF5DECA9-7E00-C513-699E-5DD7C1152BC9}"/>
+              </a:ext>
+            </a:extLst>
+          </p:cNvPr>
+          <p:cNvSpPr/>
+          <p:nvPr/>
+        </p:nvSpPr>
+        <p:spPr>
+          <a:xfrm>
+            <a:off x="5371526" y="4322790"/>
+            <a:ext cx="260725" cy="258911"/>
+          </a:xfrm>
+          <a:prstGeom prst="ellipse">
+            <a:avLst/>
+          </a:prstGeom>
+          <a:solidFill>
+            <a:schemeClr val="accent6">
+              <a:lumMod val="40000"/>
+              <a:lumOff val="60000"/>
+            </a:schemeClr>
+          </a:solidFill>
+          <a:ln>
+            <a:solidFill>
+              <a:schemeClr val="accent3">
+                <a:lumMod val="60000"/>
+                <a:lumOff val="40000"/>
+              </a:schemeClr>
+            </a:solidFill>
+          </a:ln>
+        </p:spPr>
+        <p:style>
+          <a:lnRef idx="2">
+            <a:schemeClr val="accent1">
+              <a:shade val="15000"/>
+            </a:schemeClr>
+          </a:lnRef>
+          <a:fillRef idx="1">
+            <a:schemeClr val="accent1"/>
+          </a:fillRef>
+          <a:effectRef idx="0">
+            <a:schemeClr val="accent1"/>
+          </a:effectRef>
+          <a:fontRef idx="minor">
+            <a:schemeClr val="lt1"/>
+          </a:fontRef>
+        </p:style>
+        <p:txBody>
+          <a:bodyPr rtlCol="0" anchor="ctr"/>
+          <a:lstStyle/>
+          <a:p>
+            <a:pPr algn="ctr"/>
+            <a:r>
+              <a:rPr lang="es-ES" sz="998" dirty="0">
+                <a:solidFill>
+                  <a:schemeClr val="bg2">
+                    <a:lumMod val="50000"/>
+                  </a:schemeClr>
+                </a:solidFill>
+              </a:rPr>
+              <a:t>2</a:t>
+            </a:r>
+            <a:endParaRPr lang="en-GB" sz="998" dirty="0">
+              <a:solidFill>
+                <a:schemeClr val="bg2">
+                  <a:lumMod val="50000"/>
+                </a:schemeClr>
+              </a:solidFill>
+            </a:endParaRPr>
+          </a:p>
+        </p:txBody>
+      </p:sp>
+      <p:sp>
+        <p:nvSpPr>
+          <p:cNvPr id="102" name="Elipse 101">
+            <a:extLst>
+              <a:ext uri="{FF2B5EF4-FFF2-40B4-BE49-F238E27FC236}">
+                <a16:creationId xmlns:a16="http://schemas.microsoft.com/office/drawing/2014/main" id="{7C18FE40-430B-9D48-7809-75B9E1684DDE}"/>
+              </a:ext>
+            </a:extLst>
+          </p:cNvPr>
+          <p:cNvSpPr/>
+          <p:nvPr/>
+        </p:nvSpPr>
+        <p:spPr>
+          <a:xfrm>
+            <a:off x="6110646" y="4330620"/>
+            <a:ext cx="260725" cy="258911"/>
+          </a:xfrm>
+          <a:prstGeom prst="ellipse">
+            <a:avLst/>
+          </a:prstGeom>
+          <a:solidFill>
+            <a:schemeClr val="accent6">
+              <a:lumMod val="40000"/>
+              <a:lumOff val="60000"/>
+            </a:schemeClr>
+          </a:solidFill>
+          <a:ln>
+            <a:solidFill>
+              <a:schemeClr val="accent3">
+                <a:lumMod val="60000"/>
+                <a:lumOff val="40000"/>
+              </a:schemeClr>
+            </a:solidFill>
+          </a:ln>
+        </p:spPr>
+        <p:style>
+          <a:lnRef idx="2">
+            <a:schemeClr val="accent1">
+              <a:shade val="15000"/>
+            </a:schemeClr>
+          </a:lnRef>
+          <a:fillRef idx="1">
+            <a:schemeClr val="accent1"/>
+          </a:fillRef>
+          <a:effectRef idx="0">
+            <a:schemeClr val="accent1"/>
+          </a:effectRef>
+          <a:fontRef idx="minor">
+            <a:schemeClr val="lt1"/>
+          </a:fontRef>
+        </p:style>
+        <p:txBody>
+          <a:bodyPr rtlCol="0" anchor="ctr"/>
+          <a:lstStyle/>
+          <a:p>
+            <a:pPr algn="ctr"/>
+            <a:r>
+              <a:rPr lang="es-ES" sz="998" dirty="0">
+                <a:solidFill>
+                  <a:schemeClr val="bg2">
+                    <a:lumMod val="50000"/>
+                  </a:schemeClr>
+                </a:solidFill>
+              </a:rPr>
+              <a:t>7</a:t>
+            </a:r>
+            <a:endParaRPr lang="en-GB" sz="998" dirty="0">
+              <a:solidFill>
+                <a:schemeClr val="bg2">
+                  <a:lumMod val="50000"/>
+                </a:schemeClr>
+              </a:solidFill>
+            </a:endParaRPr>
+          </a:p>
+        </p:txBody>
+      </p:sp>
+      <p:sp>
+        <p:nvSpPr>
+          <p:cNvPr id="103" name="Elipse 102">
+            <a:extLst>
+              <a:ext uri="{FF2B5EF4-FFF2-40B4-BE49-F238E27FC236}">
+                <a16:creationId xmlns:a16="http://schemas.microsoft.com/office/drawing/2014/main" id="{0A1D2883-FBA9-430E-A667-F0009398B89A}"/>
+              </a:ext>
+            </a:extLst>
+          </p:cNvPr>
+          <p:cNvSpPr/>
+          <p:nvPr/>
+        </p:nvSpPr>
+        <p:spPr>
+          <a:xfrm>
+            <a:off x="4289833" y="4335588"/>
+            <a:ext cx="260725" cy="258911"/>
+          </a:xfrm>
+          <a:prstGeom prst="ellipse">
+            <a:avLst/>
+          </a:prstGeom>
+          <a:solidFill>
+            <a:schemeClr val="accent2">
+              <a:lumMod val="40000"/>
+              <a:lumOff val="60000"/>
+            </a:schemeClr>
+          </a:solidFill>
+          <a:ln>
+            <a:solidFill>
+              <a:schemeClr val="accent2">
+                <a:lumMod val="75000"/>
+              </a:schemeClr>
+            </a:solidFill>
+          </a:ln>
+        </p:spPr>
+        <p:style>
+          <a:lnRef idx="2">
+            <a:schemeClr val="accent1">
+              <a:shade val="15000"/>
+            </a:schemeClr>
+          </a:lnRef>
+          <a:fillRef idx="1">
+            <a:schemeClr val="accent1"/>
+          </a:fillRef>
+          <a:effectRef idx="0">
+            <a:schemeClr val="accent1"/>
+          </a:effectRef>
+          <a:fontRef idx="minor">
+            <a:schemeClr val="lt1"/>
+          </a:fontRef>
+        </p:style>
+        <p:txBody>
+          <a:bodyPr rtlCol="0" anchor="ctr"/>
+          <a:lstStyle/>
+          <a:p>
+            <a:pPr algn="ctr"/>
+            <a:r>
+              <a:rPr lang="es-ES" sz="998" dirty="0">
+                <a:solidFill>
+                  <a:schemeClr val="bg2">
+                    <a:lumMod val="50000"/>
+                  </a:schemeClr>
+                </a:solidFill>
+              </a:rPr>
+              <a:t>1</a:t>
+            </a:r>
+          </a:p>
+        </p:txBody>
+      </p:sp>
+      <p:sp>
+        <p:nvSpPr>
+          <p:cNvPr id="104" name="Elipse 103">
+            <a:extLst>
+              <a:ext uri="{FF2B5EF4-FFF2-40B4-BE49-F238E27FC236}">
+                <a16:creationId xmlns:a16="http://schemas.microsoft.com/office/drawing/2014/main" id="{9E10CDDD-0EFF-834B-A433-7C832A1295EB}"/>
+              </a:ext>
+            </a:extLst>
+          </p:cNvPr>
+          <p:cNvSpPr/>
+          <p:nvPr/>
+        </p:nvSpPr>
+        <p:spPr>
+          <a:xfrm>
+            <a:off x="4649599" y="4327921"/>
+            <a:ext cx="260725" cy="258911"/>
+          </a:xfrm>
+          <a:prstGeom prst="ellipse">
+            <a:avLst/>
+          </a:prstGeom>
+          <a:solidFill>
+            <a:schemeClr val="accent2">
+              <a:lumMod val="40000"/>
+              <a:lumOff val="60000"/>
+            </a:schemeClr>
+          </a:solidFill>
+          <a:ln>
+            <a:solidFill>
+              <a:schemeClr val="accent2">
+                <a:lumMod val="75000"/>
+              </a:schemeClr>
+            </a:solidFill>
+          </a:ln>
+        </p:spPr>
+        <p:style>
+          <a:lnRef idx="2">
+            <a:schemeClr val="accent1">
+              <a:shade val="15000"/>
+            </a:schemeClr>
+          </a:lnRef>
+          <a:fillRef idx="1">
+            <a:schemeClr val="accent1"/>
+          </a:fillRef>
+          <a:effectRef idx="0">
+            <a:schemeClr val="accent1"/>
+          </a:effectRef>
+          <a:fontRef idx="minor">
+            <a:schemeClr val="lt1"/>
+          </a:fontRef>
+        </p:style>
+        <p:txBody>
+          <a:bodyPr rtlCol="0" anchor="ctr"/>
+          <a:lstStyle/>
+          <a:p>
+            <a:pPr algn="ctr"/>
+            <a:r>
+              <a:rPr lang="es-ES" sz="998" dirty="0">
+                <a:solidFill>
+                  <a:schemeClr val="bg2">
+                    <a:lumMod val="50000"/>
+                  </a:schemeClr>
+                </a:solidFill>
+              </a:rPr>
+              <a:t>3</a:t>
+            </a:r>
+            <a:endParaRPr lang="en-GB" sz="998" dirty="0">
+              <a:solidFill>
+                <a:schemeClr val="bg2">
+                  <a:lumMod val="50000"/>
+                </a:schemeClr>
+              </a:solidFill>
+            </a:endParaRPr>
+          </a:p>
+        </p:txBody>
+      </p:sp>
+      <p:sp>
+        <p:nvSpPr>
+          <p:cNvPr id="105" name="Elipse 104">
+            <a:extLst>
+              <a:ext uri="{FF2B5EF4-FFF2-40B4-BE49-F238E27FC236}">
+                <a16:creationId xmlns:a16="http://schemas.microsoft.com/office/drawing/2014/main" id="{3634630C-C274-9227-E622-BDB13EB7185F}"/>
+              </a:ext>
+            </a:extLst>
+          </p:cNvPr>
+          <p:cNvSpPr/>
+          <p:nvPr/>
+        </p:nvSpPr>
+        <p:spPr>
+          <a:xfrm>
+            <a:off x="5003608" y="4332080"/>
+            <a:ext cx="260725" cy="258911"/>
+          </a:xfrm>
+          <a:prstGeom prst="ellipse">
+            <a:avLst/>
+          </a:prstGeom>
+          <a:solidFill>
+            <a:schemeClr val="accent2">
+              <a:lumMod val="40000"/>
+              <a:lumOff val="60000"/>
+            </a:schemeClr>
+          </a:solidFill>
+          <a:ln>
+            <a:solidFill>
+              <a:schemeClr val="accent2">
+                <a:lumMod val="75000"/>
+              </a:schemeClr>
+            </a:solidFill>
+          </a:ln>
+        </p:spPr>
+        <p:style>
+          <a:lnRef idx="2">
+            <a:schemeClr val="accent1">
+              <a:shade val="15000"/>
+            </a:schemeClr>
+          </a:lnRef>
+          <a:fillRef idx="1">
+            <a:schemeClr val="accent1"/>
+          </a:fillRef>
+          <a:effectRef idx="0">
+            <a:schemeClr val="accent1"/>
+          </a:effectRef>
+          <a:fontRef idx="minor">
+            <a:schemeClr val="lt1"/>
+          </a:fontRef>
+        </p:style>
+        <p:txBody>
+          <a:bodyPr rtlCol="0" anchor="ctr"/>
+          <a:lstStyle/>
+          <a:p>
+            <a:pPr algn="ctr"/>
+            <a:r>
+              <a:rPr lang="es-ES" sz="998" dirty="0">
+                <a:solidFill>
+                  <a:schemeClr val="bg2">
+                    <a:lumMod val="50000"/>
+                  </a:schemeClr>
+                </a:solidFill>
+              </a:rPr>
+              <a:t>5</a:t>
+            </a:r>
+            <a:endParaRPr lang="en-GB" sz="998" dirty="0">
+              <a:solidFill>
+                <a:schemeClr val="bg2">
+                  <a:lumMod val="50000"/>
+                </a:schemeClr>
+              </a:solidFill>
+            </a:endParaRPr>
+          </a:p>
+        </p:txBody>
+      </p:sp>
+      <p:sp>
+        <p:nvSpPr>
+          <p:cNvPr id="108" name="Elipse 107">
+            <a:extLst>
+              <a:ext uri="{FF2B5EF4-FFF2-40B4-BE49-F238E27FC236}">
+                <a16:creationId xmlns:a16="http://schemas.microsoft.com/office/drawing/2014/main" id="{F1194625-D33D-33CD-F899-851A824884BD}"/>
+              </a:ext>
+            </a:extLst>
+          </p:cNvPr>
+          <p:cNvSpPr/>
+          <p:nvPr/>
+        </p:nvSpPr>
+        <p:spPr>
+          <a:xfrm>
+            <a:off x="4599133" y="3524155"/>
+            <a:ext cx="361105" cy="340624"/>
+          </a:xfrm>
+          <a:prstGeom prst="ellipse">
+            <a:avLst/>
+          </a:prstGeom>
+          <a:solidFill>
+            <a:schemeClr val="tx2">
+              <a:lumMod val="25000"/>
+              <a:lumOff val="75000"/>
+            </a:schemeClr>
+          </a:solidFill>
+          <a:ln>
+            <a:solidFill>
+              <a:schemeClr val="tx2">
+                <a:lumMod val="75000"/>
+                <a:lumOff val="25000"/>
+              </a:schemeClr>
+            </a:solidFill>
+          </a:ln>
+        </p:spPr>
+        <p:style>
+          <a:lnRef idx="2">
+            <a:schemeClr val="accent1">
+              <a:shade val="15000"/>
+            </a:schemeClr>
+          </a:lnRef>
+          <a:fillRef idx="1">
+            <a:schemeClr val="accent1"/>
+          </a:fillRef>
+          <a:effectRef idx="0">
+            <a:schemeClr val="accent1"/>
+          </a:effectRef>
+          <a:fontRef idx="minor">
+            <a:schemeClr val="lt1"/>
+          </a:fontRef>
+        </p:style>
+        <p:txBody>
+          <a:bodyPr rtlCol="0" anchor="ctr"/>
+          <a:lstStyle/>
+          <a:p>
+            <a:pPr algn="ctr"/>
+            <a:r>
+              <a:rPr lang="es-ES" dirty="0">
+                <a:solidFill>
+                  <a:schemeClr val="tx1"/>
+                </a:solidFill>
+              </a:rPr>
+              <a:t>-</a:t>
+            </a:r>
+            <a:endParaRPr lang="en-GB" dirty="0">
+              <a:solidFill>
+                <a:schemeClr val="tx1"/>
+              </a:solidFill>
+            </a:endParaRPr>
+          </a:p>
+        </p:txBody>
+      </p:sp>
+      <p:sp>
+        <p:nvSpPr>
+          <p:cNvPr id="109" name="Elipse 108">
+            <a:extLst>
+              <a:ext uri="{FF2B5EF4-FFF2-40B4-BE49-F238E27FC236}">
+                <a16:creationId xmlns:a16="http://schemas.microsoft.com/office/drawing/2014/main" id="{036C4861-F8E4-D519-8471-8B53143DD82E}"/>
+              </a:ext>
+            </a:extLst>
+          </p:cNvPr>
+          <p:cNvSpPr/>
+          <p:nvPr/>
+        </p:nvSpPr>
+        <p:spPr>
+          <a:xfrm>
+            <a:off x="5648729" y="3532797"/>
+            <a:ext cx="361105" cy="340624"/>
+          </a:xfrm>
+          <a:prstGeom prst="ellipse">
+            <a:avLst/>
+          </a:prstGeom>
+          <a:solidFill>
+            <a:schemeClr val="tx2">
+              <a:lumMod val="25000"/>
+              <a:lumOff val="75000"/>
+            </a:schemeClr>
+          </a:solidFill>
+          <a:ln>
+            <a:solidFill>
+              <a:schemeClr val="tx2">
+                <a:lumMod val="75000"/>
+                <a:lumOff val="25000"/>
+              </a:schemeClr>
+            </a:solidFill>
+          </a:ln>
+        </p:spPr>
+        <p:style>
+          <a:lnRef idx="2">
+            <a:schemeClr val="accent1">
+              <a:shade val="15000"/>
+            </a:schemeClr>
+          </a:lnRef>
+          <a:fillRef idx="1">
+            <a:schemeClr val="accent1"/>
+          </a:fillRef>
+          <a:effectRef idx="0">
+            <a:schemeClr val="accent1"/>
+          </a:effectRef>
+          <a:fontRef idx="minor">
+            <a:schemeClr val="lt1"/>
+          </a:fontRef>
+        </p:style>
+        <p:txBody>
+          <a:bodyPr rtlCol="0" anchor="ctr"/>
+          <a:lstStyle/>
+          <a:p>
+            <a:pPr algn="ctr"/>
+            <a:r>
+              <a:rPr lang="es-ES" dirty="0">
+                <a:solidFill>
+                  <a:schemeClr val="tx1"/>
+                </a:solidFill>
+              </a:rPr>
+              <a:t>+</a:t>
+            </a:r>
+            <a:endParaRPr lang="en-GB" dirty="0">
+              <a:solidFill>
+                <a:schemeClr val="tx1"/>
+              </a:solidFill>
+            </a:endParaRPr>
+          </a:p>
+        </p:txBody>
+      </p:sp>
+      <p:sp>
+        <p:nvSpPr>
+          <p:cNvPr id="131" name="CuadroTexto 130">
+            <a:extLst>
+              <a:ext uri="{FF2B5EF4-FFF2-40B4-BE49-F238E27FC236}">
+                <a16:creationId xmlns:a16="http://schemas.microsoft.com/office/drawing/2014/main" id="{BC95FEC9-F2F3-11F4-FFA1-A0CACCC21AF4}"/>
+              </a:ext>
+            </a:extLst>
+          </p:cNvPr>
+          <p:cNvSpPr txBox="1"/>
+          <p:nvPr/>
+        </p:nvSpPr>
+        <p:spPr>
+          <a:xfrm>
+            <a:off x="4162911" y="3135706"/>
+            <a:ext cx="790601" cy="315792"/>
+          </a:xfrm>
+          <a:prstGeom prst="rect">
+            <a:avLst/>
+          </a:prstGeom>
+          <a:noFill/>
+        </p:spPr>
+        <p:txBody>
+          <a:bodyPr wrap="none" rtlCol="0">
+            <a:spAutoFit/>
+          </a:bodyPr>
+          <a:lstStyle/>
+          <a:p>
+            <a:r>
+              <a:rPr lang="es-ES" sz="1452" b="1" dirty="0">
+                <a:latin typeface="Cambria Math" panose="02040503050406030204" pitchFamily="18" charset="0"/>
+                <a:ea typeface="Cambria Math" panose="02040503050406030204" pitchFamily="18" charset="0"/>
+              </a:rPr>
+              <a:t>X </a:t>
+            </a:r>
+            <a:r>
+              <a:rPr lang="es-ES" sz="1452" baseline="-25000" dirty="0">
+                <a:latin typeface="Cambria Math" panose="02040503050406030204" pitchFamily="18" charset="0"/>
+                <a:ea typeface="Cambria Math" panose="02040503050406030204" pitchFamily="18" charset="0"/>
+              </a:rPr>
+              <a:t>j</a:t>
+            </a:r>
+            <a:r>
+              <a:rPr lang="es-ES" sz="1452" dirty="0"/>
+              <a:t> ≥ 0.2</a:t>
+            </a:r>
+            <a:endParaRPr lang="en-GB" sz="1452" dirty="0"/>
+          </a:p>
+        </p:txBody>
+      </p:sp>
+      <p:sp>
+        <p:nvSpPr>
+          <p:cNvPr id="132" name="CuadroTexto 131">
+            <a:extLst>
+              <a:ext uri="{FF2B5EF4-FFF2-40B4-BE49-F238E27FC236}">
+                <a16:creationId xmlns:a16="http://schemas.microsoft.com/office/drawing/2014/main" id="{85213AC5-2D7D-E4EA-ED78-4DD3F6CA77A2}"/>
+              </a:ext>
+            </a:extLst>
+          </p:cNvPr>
+          <p:cNvSpPr txBox="1"/>
+          <p:nvPr/>
+        </p:nvSpPr>
+        <p:spPr>
+          <a:xfrm>
+            <a:off x="5635339" y="3135706"/>
+            <a:ext cx="790601" cy="315792"/>
+          </a:xfrm>
+          <a:prstGeom prst="rect">
+            <a:avLst/>
+          </a:prstGeom>
+          <a:noFill/>
+        </p:spPr>
+        <p:txBody>
+          <a:bodyPr wrap="none" rtlCol="0">
+            <a:spAutoFit/>
+          </a:bodyPr>
+          <a:lstStyle/>
+          <a:p>
+            <a:r>
+              <a:rPr lang="es-ES" sz="1452" b="1" dirty="0">
+                <a:latin typeface="Cambria Math" panose="02040503050406030204" pitchFamily="18" charset="0"/>
+                <a:ea typeface="Cambria Math" panose="02040503050406030204" pitchFamily="18" charset="0"/>
+              </a:rPr>
+              <a:t>X </a:t>
+            </a:r>
+            <a:r>
+              <a:rPr lang="es-ES" sz="1452" baseline="-25000" dirty="0">
+                <a:latin typeface="Cambria Math" panose="02040503050406030204" pitchFamily="18" charset="0"/>
+                <a:ea typeface="Cambria Math" panose="02040503050406030204" pitchFamily="18" charset="0"/>
+              </a:rPr>
+              <a:t>j</a:t>
+            </a:r>
+            <a:r>
+              <a:rPr lang="es-ES" sz="1452" dirty="0"/>
+              <a:t> &lt; 0.2</a:t>
+            </a:r>
+            <a:endParaRPr lang="en-GB" sz="1452" dirty="0"/>
+          </a:p>
+        </p:txBody>
+      </p:sp>
+      <p:sp>
+        <p:nvSpPr>
+          <p:cNvPr id="134" name="CuadroTexto 133">
+            <a:extLst>
+              <a:ext uri="{FF2B5EF4-FFF2-40B4-BE49-F238E27FC236}">
+                <a16:creationId xmlns:a16="http://schemas.microsoft.com/office/drawing/2014/main" id="{975D61DE-AEF4-6190-C03B-6F681ACF6307}"/>
+              </a:ext>
+            </a:extLst>
+          </p:cNvPr>
+          <p:cNvSpPr txBox="1"/>
+          <p:nvPr/>
+        </p:nvSpPr>
+        <p:spPr>
+          <a:xfrm>
+            <a:off x="4480599" y="2370247"/>
+            <a:ext cx="1633172" cy="343620"/>
+          </a:xfrm>
+          <a:prstGeom prst="rect">
+            <a:avLst/>
+          </a:prstGeom>
+          <a:solidFill>
+            <a:srgbClr val="A6CAEC"/>
+          </a:solidFill>
+        </p:spPr>
+        <p:txBody>
+          <a:bodyPr wrap="square" rtlCol="0">
+            <a:spAutoFit/>
+          </a:bodyPr>
+          <a:lstStyle/>
+          <a:p>
+            <a:pPr algn="ctr"/>
+            <a:r>
+              <a:rPr lang="es-ES" sz="1633" dirty="0" err="1"/>
+              <a:t>Decision</a:t>
+            </a:r>
+            <a:r>
+              <a:rPr lang="es-ES" sz="1633" dirty="0"/>
+              <a:t> </a:t>
+            </a:r>
+            <a:r>
+              <a:rPr lang="es-ES" sz="1633" dirty="0" err="1"/>
+              <a:t>tree</a:t>
+            </a:r>
+            <a:r>
+              <a:rPr lang="es-ES" sz="1633" dirty="0"/>
+              <a:t> 1</a:t>
+            </a:r>
+            <a:endParaRPr lang="en-GB" sz="1633" dirty="0"/>
+          </a:p>
+        </p:txBody>
+      </p:sp>
+      <p:sp>
+        <p:nvSpPr>
+          <p:cNvPr id="135" name="CuadroTexto 134">
+            <a:extLst>
+              <a:ext uri="{FF2B5EF4-FFF2-40B4-BE49-F238E27FC236}">
+                <a16:creationId xmlns:a16="http://schemas.microsoft.com/office/drawing/2014/main" id="{AB7690DD-1CBB-A725-21C4-058A8CA87532}"/>
+              </a:ext>
+            </a:extLst>
+          </p:cNvPr>
+          <p:cNvSpPr txBox="1"/>
+          <p:nvPr/>
+        </p:nvSpPr>
+        <p:spPr>
+          <a:xfrm>
+            <a:off x="8968210" y="2370247"/>
+            <a:ext cx="1633172" cy="343620"/>
+          </a:xfrm>
+          <a:prstGeom prst="rect">
+            <a:avLst/>
+          </a:prstGeom>
+          <a:solidFill>
+            <a:schemeClr val="accent5">
+              <a:lumMod val="20000"/>
+              <a:lumOff val="80000"/>
+            </a:schemeClr>
+          </a:solidFill>
+        </p:spPr>
+        <p:txBody>
+          <a:bodyPr wrap="square" rtlCol="0">
+            <a:spAutoFit/>
+          </a:bodyPr>
+          <a:lstStyle/>
+          <a:p>
+            <a:pPr algn="ctr"/>
+            <a:r>
+              <a:rPr lang="es-ES" sz="1633" dirty="0" err="1"/>
+              <a:t>Decision</a:t>
+            </a:r>
+            <a:r>
+              <a:rPr lang="es-ES" sz="1633" dirty="0"/>
+              <a:t> </a:t>
+            </a:r>
+            <a:r>
+              <a:rPr lang="es-ES" sz="1633" dirty="0" err="1"/>
+              <a:t>tree</a:t>
+            </a:r>
+            <a:r>
+              <a:rPr lang="es-ES" sz="1633" dirty="0"/>
+              <a:t> 3</a:t>
+            </a:r>
+            <a:endParaRPr lang="en-GB" sz="1633" dirty="0"/>
+          </a:p>
+        </p:txBody>
+      </p:sp>
+      <p:sp>
+        <p:nvSpPr>
+          <p:cNvPr id="137" name="CuadroTexto 136">
+            <a:extLst>
+              <a:ext uri="{FF2B5EF4-FFF2-40B4-BE49-F238E27FC236}">
+                <a16:creationId xmlns:a16="http://schemas.microsoft.com/office/drawing/2014/main" id="{37C5914B-673D-C4CF-6384-B7747481AB98}"/>
+              </a:ext>
+            </a:extLst>
+          </p:cNvPr>
+          <p:cNvSpPr txBox="1"/>
+          <p:nvPr/>
+        </p:nvSpPr>
+        <p:spPr>
+          <a:xfrm>
+            <a:off x="10735684" y="3541877"/>
+            <a:ext cx="765231" cy="307777"/>
+          </a:xfrm>
+          <a:prstGeom prst="rect">
+            <a:avLst/>
+          </a:prstGeom>
+          <a:noFill/>
+        </p:spPr>
+        <p:txBody>
+          <a:bodyPr wrap="square">
+            <a:spAutoFit/>
+          </a:bodyPr>
+          <a:lstStyle/>
+          <a:p>
+            <a:r>
+              <a:rPr lang="es-ES" sz="1400" dirty="0">
+                <a:latin typeface="Cambria Math" panose="02040503050406030204" pitchFamily="18" charset="0"/>
+                <a:ea typeface="Cambria Math" panose="02040503050406030204" pitchFamily="18" charset="0"/>
+              </a:rPr>
+              <a:t>K</a:t>
+            </a:r>
+            <a:r>
+              <a:rPr lang="es-ES" sz="1400" dirty="0"/>
+              <a:t> </a:t>
+            </a:r>
+            <a:r>
+              <a:rPr lang="es-ES" sz="1400" dirty="0" err="1"/>
+              <a:t>trees</a:t>
+            </a:r>
+            <a:endParaRPr lang="en-GB" sz="1400" dirty="0"/>
+          </a:p>
+        </p:txBody>
+      </p:sp>
+      <p:graphicFrame>
+        <p:nvGraphicFramePr>
+          <p:cNvPr id="3" name="Tabla 2">
+            <a:extLst>
+              <a:ext uri="{FF2B5EF4-FFF2-40B4-BE49-F238E27FC236}">
+                <a16:creationId xmlns:a16="http://schemas.microsoft.com/office/drawing/2014/main" id="{E1EB9F41-69E8-873E-6C60-7C8BE3913217}"/>
+              </a:ext>
+            </a:extLst>
+          </p:cNvPr>
+          <p:cNvGraphicFramePr>
+            <a:graphicFrameLocks noGrp="1"/>
+          </p:cNvGraphicFramePr>
+          <p:nvPr>
+            <p:extLst>
+              <p:ext uri="{D42A27DB-BD31-4B8C-83A1-F6EECF244321}">
+                <p14:modId xmlns:p14="http://schemas.microsoft.com/office/powerpoint/2010/main" val="1059837476"/>
+              </p:ext>
+            </p:extLst>
+          </p:nvPr>
+        </p:nvGraphicFramePr>
+        <p:xfrm>
+          <a:off x="4008357" y="27938"/>
+          <a:ext cx="7393854" cy="1926345"/>
+        </p:xfrm>
+        <a:graphic>
+          <a:graphicData uri="http://schemas.openxmlformats.org/drawingml/2006/table">
+            <a:tbl>
+              <a:tblPr firstRow="1" bandRow="1">
+                <a:tableStyleId>{5202B0CA-FC54-4496-8BCA-5EF66A818D29}</a:tableStyleId>
+              </a:tblPr>
+              <a:tblGrid>
+                <a:gridCol w="1232309">
+                  <a:extLst>
+                    <a:ext uri="{9D8B030D-6E8A-4147-A177-3AD203B41FA5}">
+                      <a16:colId xmlns:a16="http://schemas.microsoft.com/office/drawing/2014/main" val="291692086"/>
+                    </a:ext>
+                  </a:extLst>
+                </a:gridCol>
+                <a:gridCol w="1232309">
+                  <a:extLst>
+                    <a:ext uri="{9D8B030D-6E8A-4147-A177-3AD203B41FA5}">
+                      <a16:colId xmlns:a16="http://schemas.microsoft.com/office/drawing/2014/main" val="107300031"/>
+                    </a:ext>
+                  </a:extLst>
+                </a:gridCol>
+                <a:gridCol w="1232309">
+                  <a:extLst>
+                    <a:ext uri="{9D8B030D-6E8A-4147-A177-3AD203B41FA5}">
+                      <a16:colId xmlns:a16="http://schemas.microsoft.com/office/drawing/2014/main" val="3902680072"/>
+                    </a:ext>
+                  </a:extLst>
+                </a:gridCol>
+                <a:gridCol w="1232309">
+                  <a:extLst>
+                    <a:ext uri="{9D8B030D-6E8A-4147-A177-3AD203B41FA5}">
+                      <a16:colId xmlns:a16="http://schemas.microsoft.com/office/drawing/2014/main" val="1537104247"/>
+                    </a:ext>
+                  </a:extLst>
+                </a:gridCol>
+                <a:gridCol w="1232309">
+                  <a:extLst>
+                    <a:ext uri="{9D8B030D-6E8A-4147-A177-3AD203B41FA5}">
+                      <a16:colId xmlns:a16="http://schemas.microsoft.com/office/drawing/2014/main" val="3274801056"/>
+                    </a:ext>
+                  </a:extLst>
+                </a:gridCol>
+                <a:gridCol w="1232309">
+                  <a:extLst>
+                    <a:ext uri="{9D8B030D-6E8A-4147-A177-3AD203B41FA5}">
+                      <a16:colId xmlns:a16="http://schemas.microsoft.com/office/drawing/2014/main" val="640631469"/>
+                    </a:ext>
+                  </a:extLst>
+                </a:gridCol>
+              </a:tblGrid>
+              <a:tr h="580669">
+                <a:tc>
+                  <a:txBody>
+                    <a:bodyPr/>
+                    <a:lstStyle/>
+                    <a:p>
+                      <a:pPr algn="ctr"/>
+                      <a:endParaRPr lang="en-GB" sz="1600" dirty="0"/>
+                    </a:p>
+                  </a:txBody>
+                  <a:tcPr marL="82953" marR="82953" marT="41476" marB="41476">
+                    <a:lnL w="12700" cap="flat" cmpd="sng" algn="ctr">
+                      <a:solidFill>
+                        <a:schemeClr val="tx1"/>
+                      </a:solidFill>
+                      <a:prstDash val="solid"/>
+                      <a:round/>
+                      <a:headEnd type="none" w="med" len="med"/>
+                      <a:tailEnd type="none" w="med" len="med"/>
+                    </a:lnL>
+                    <a:lnT w="12700" cap="flat" cmpd="sng" algn="ctr">
+                      <a:solidFill>
+                        <a:schemeClr val="tx1"/>
+                      </a:solidFill>
+                      <a:prstDash val="solid"/>
+                      <a:round/>
+                      <a:headEnd type="none" w="med" len="med"/>
+                      <a:tailEnd type="none" w="med" len="med"/>
+                    </a:lnT>
+                    <a:lnB w="12700" cap="flat" cmpd="sng" algn="ctr">
+                      <a:solidFill>
+                        <a:schemeClr val="accent2">
+                          <a:lumMod val="75000"/>
+                        </a:schemeClr>
+                      </a:solidFill>
+                      <a:prstDash val="solid"/>
+                      <a:round/>
+                      <a:headEnd type="none" w="med" len="med"/>
+                      <a:tailEnd type="none" w="med" len="med"/>
+                    </a:lnB>
+                    <a:lnTlToBr w="12700" cap="flat" cmpd="sng" algn="ctr">
+                      <a:solidFill>
+                        <a:schemeClr val="bg1"/>
+                      </a:solidFill>
+                      <a:prstDash val="solid"/>
+                      <a:round/>
+                      <a:headEnd type="none" w="med" len="med"/>
+                      <a:tailEnd type="none" w="med" len="med"/>
+                    </a:lnTlToBr>
+                  </a:tcPr>
+                </a:tc>
+                <a:tc>
+                  <a:txBody>
+                    <a:bodyPr/>
+                    <a:lstStyle/>
+                    <a:p>
+                      <a:pPr algn="ctr"/>
+                      <a:r>
+                        <a:rPr lang="es-ES" sz="1600" dirty="0">
+                          <a:latin typeface="Cambria Math" panose="02040503050406030204" pitchFamily="18" charset="0"/>
+                          <a:ea typeface="Cambria Math" panose="02040503050406030204" pitchFamily="18" charset="0"/>
+                        </a:rPr>
+                        <a:t>X </a:t>
+                      </a:r>
+                      <a:r>
+                        <a:rPr lang="es-ES" sz="1600" i="1" baseline="-25000" dirty="0">
+                          <a:latin typeface="Cambria Math" panose="02040503050406030204" pitchFamily="18" charset="0"/>
+                          <a:ea typeface="Cambria Math" panose="02040503050406030204" pitchFamily="18" charset="0"/>
+                        </a:rPr>
+                        <a:t>j </a:t>
+                      </a:r>
+                      <a:r>
+                        <a:rPr lang="es-ES" sz="1600" baseline="-25000" dirty="0">
+                          <a:latin typeface="Cambria Math" panose="02040503050406030204" pitchFamily="18" charset="0"/>
+                          <a:ea typeface="Cambria Math" panose="02040503050406030204" pitchFamily="18" charset="0"/>
+                        </a:rPr>
+                        <a:t>= 1</a:t>
+                      </a:r>
+                      <a:endParaRPr lang="en-GB" sz="1600" dirty="0">
+                        <a:latin typeface="Cambria Math" panose="02040503050406030204" pitchFamily="18" charset="0"/>
+                        <a:ea typeface="Cambria Math" panose="02040503050406030204" pitchFamily="18" charset="0"/>
+                      </a:endParaRPr>
+                    </a:p>
+                  </a:txBody>
+                  <a:tcPr marL="82953" marR="82953" marT="41476" marB="41476">
+                    <a:lnT w="12700" cap="flat" cmpd="sng" algn="ctr">
+                      <a:solidFill>
+                        <a:schemeClr val="tx1"/>
+                      </a:solidFill>
+                      <a:prstDash val="solid"/>
+                      <a:round/>
+                      <a:headEnd type="none" w="med" len="med"/>
+                      <a:tailEnd type="none" w="med" len="med"/>
+                    </a:lnT>
+                    <a:lnB w="28575" cap="flat" cmpd="sng" algn="ctr">
+                      <a:solidFill>
+                        <a:srgbClr val="215F9A"/>
+                      </a:solidFill>
+                      <a:prstDash val="solid"/>
+                      <a:round/>
+                      <a:headEnd type="none" w="med" len="med"/>
+                      <a:tailEnd type="none" w="med" len="med"/>
+                    </a:lnB>
+                  </a:tcPr>
+                </a:tc>
+                <a:tc>
+                  <a:txBody>
+                    <a:bodyPr/>
+                    <a:lstStyle/>
+                    <a:p>
+                      <a:pPr marL="0" marR="0" lvl="0" indent="0" algn="ctr" defTabSz="914400" rtl="0" eaLnBrk="1" fontAlgn="auto" latinLnBrk="0" hangingPunct="1">
+                        <a:lnSpc>
+                          <a:spcPct val="100000"/>
+                        </a:lnSpc>
+                        <a:spcBef>
+                          <a:spcPts val="0"/>
+                        </a:spcBef>
+                        <a:spcAft>
+                          <a:spcPts val="0"/>
+                        </a:spcAft>
+                        <a:buClrTx/>
+                        <a:buSzTx/>
+                        <a:buFontTx/>
+                        <a:buNone/>
+                        <a:tabLst/>
+                        <a:defRPr/>
+                      </a:pPr>
+                      <a:r>
+                        <a:rPr lang="es-ES" sz="1600" dirty="0">
+                          <a:latin typeface="Cambria Math" panose="02040503050406030204" pitchFamily="18" charset="0"/>
+                          <a:ea typeface="Cambria Math" panose="02040503050406030204" pitchFamily="18" charset="0"/>
+                        </a:rPr>
+                        <a:t>X </a:t>
+                      </a:r>
+                      <a:r>
+                        <a:rPr lang="es-ES" sz="1600" i="1" baseline="-25000" dirty="0">
+                          <a:latin typeface="Cambria Math" panose="02040503050406030204" pitchFamily="18" charset="0"/>
+                          <a:ea typeface="Cambria Math" panose="02040503050406030204" pitchFamily="18" charset="0"/>
+                        </a:rPr>
+                        <a:t>j</a:t>
+                      </a:r>
+                      <a:r>
+                        <a:rPr lang="es-ES" sz="1600" i="0" baseline="-25000" dirty="0">
+                          <a:latin typeface="Cambria Math" panose="02040503050406030204" pitchFamily="18" charset="0"/>
+                          <a:ea typeface="Cambria Math" panose="02040503050406030204" pitchFamily="18" charset="0"/>
+                        </a:rPr>
+                        <a:t> </a:t>
+                      </a:r>
+                      <a:r>
+                        <a:rPr lang="es-ES" sz="1600" baseline="-25000" dirty="0">
+                          <a:latin typeface="Cambria Math" panose="02040503050406030204" pitchFamily="18" charset="0"/>
+                          <a:ea typeface="Cambria Math" panose="02040503050406030204" pitchFamily="18" charset="0"/>
+                        </a:rPr>
+                        <a:t>= 2</a:t>
+                      </a:r>
+                      <a:endParaRPr lang="en-GB" sz="1600" dirty="0">
+                        <a:latin typeface="Cambria Math" panose="02040503050406030204" pitchFamily="18" charset="0"/>
+                        <a:ea typeface="Cambria Math" panose="02040503050406030204" pitchFamily="18" charset="0"/>
+                      </a:endParaRPr>
+                    </a:p>
+                  </a:txBody>
+                  <a:tcPr marL="82953" marR="82953" marT="41476" marB="41476">
+                    <a:lnT w="12700" cap="flat" cmpd="sng" algn="ctr">
+                      <a:solidFill>
+                        <a:schemeClr val="tx1"/>
+                      </a:solidFill>
+                      <a:prstDash val="solid"/>
+                      <a:round/>
+                      <a:headEnd type="none" w="med" len="med"/>
+                      <a:tailEnd type="none" w="med" len="med"/>
+                    </a:lnT>
+                    <a:lnB w="28575" cap="flat" cmpd="sng" algn="ctr">
+                      <a:solidFill>
+                        <a:srgbClr val="215F9A"/>
+                      </a:solidFill>
+                      <a:prstDash val="sysDot"/>
+                      <a:round/>
+                      <a:headEnd type="none" w="med" len="med"/>
+                      <a:tailEnd type="none" w="med" len="med"/>
+                    </a:lnB>
+                  </a:tcPr>
+                </a:tc>
+                <a:tc>
+                  <a:txBody>
+                    <a:bodyPr/>
+                    <a:lstStyle/>
+                    <a:p>
+                      <a:pPr marL="0" marR="0" lvl="0" indent="0" algn="ctr" defTabSz="914400" rtl="0" eaLnBrk="1" fontAlgn="auto" latinLnBrk="0" hangingPunct="1">
+                        <a:lnSpc>
+                          <a:spcPct val="100000"/>
+                        </a:lnSpc>
+                        <a:spcBef>
+                          <a:spcPts val="0"/>
+                        </a:spcBef>
+                        <a:spcAft>
+                          <a:spcPts val="0"/>
+                        </a:spcAft>
+                        <a:buClrTx/>
+                        <a:buSzTx/>
+                        <a:buFontTx/>
+                        <a:buNone/>
+                        <a:tabLst/>
+                        <a:defRPr/>
+                      </a:pPr>
+                      <a:r>
+                        <a:rPr lang="es-ES" sz="1600" dirty="0">
+                          <a:latin typeface="Cambria Math" panose="02040503050406030204" pitchFamily="18" charset="0"/>
+                          <a:ea typeface="Cambria Math" panose="02040503050406030204" pitchFamily="18" charset="0"/>
+                        </a:rPr>
+                        <a:t>X </a:t>
+                      </a:r>
+                      <a:r>
+                        <a:rPr lang="es-ES" sz="1600" i="1" baseline="-25000" dirty="0">
+                          <a:latin typeface="Cambria Math" panose="02040503050406030204" pitchFamily="18" charset="0"/>
+                          <a:ea typeface="Cambria Math" panose="02040503050406030204" pitchFamily="18" charset="0"/>
+                        </a:rPr>
+                        <a:t>j </a:t>
+                      </a:r>
+                      <a:r>
+                        <a:rPr lang="es-ES" sz="1600" baseline="-25000" dirty="0">
+                          <a:latin typeface="Cambria Math" panose="02040503050406030204" pitchFamily="18" charset="0"/>
+                          <a:ea typeface="Cambria Math" panose="02040503050406030204" pitchFamily="18" charset="0"/>
+                        </a:rPr>
+                        <a:t>= 3</a:t>
+                      </a:r>
+                      <a:endParaRPr lang="en-GB" sz="1600" dirty="0">
+                        <a:latin typeface="Cambria Math" panose="02040503050406030204" pitchFamily="18" charset="0"/>
+                        <a:ea typeface="Cambria Math" panose="02040503050406030204" pitchFamily="18" charset="0"/>
+                      </a:endParaRPr>
+                    </a:p>
+                  </a:txBody>
+                  <a:tcPr marL="82953" marR="82953" marT="41476" marB="41476">
+                    <a:lnT w="12700" cap="flat" cmpd="sng" algn="ctr">
+                      <a:solidFill>
+                        <a:schemeClr val="tx1"/>
+                      </a:solidFill>
+                      <a:prstDash val="solid"/>
+                      <a:round/>
+                      <a:headEnd type="none" w="med" len="med"/>
+                      <a:tailEnd type="none" w="med" len="med"/>
+                    </a:lnT>
+                    <a:lnB w="28575" cap="flat" cmpd="sng" algn="ctr">
+                      <a:solidFill>
+                        <a:schemeClr val="accent4">
+                          <a:lumMod val="60000"/>
+                          <a:lumOff val="40000"/>
+                        </a:schemeClr>
+                      </a:solidFill>
+                      <a:prstDash val="solid"/>
+                      <a:round/>
+                      <a:headEnd type="none" w="med" len="med"/>
+                      <a:tailEnd type="none" w="med" len="med"/>
+                    </a:lnB>
+                  </a:tcPr>
+                </a:tc>
+                <a:tc>
+                  <a:txBody>
+                    <a:bodyPr/>
+                    <a:lstStyle/>
+                    <a:p>
+                      <a:pPr marL="0" marR="0" lvl="0" indent="0" algn="ctr" defTabSz="914400" rtl="0" eaLnBrk="1" fontAlgn="auto" latinLnBrk="0" hangingPunct="1">
+                        <a:lnSpc>
+                          <a:spcPct val="100000"/>
+                        </a:lnSpc>
+                        <a:spcBef>
+                          <a:spcPts val="0"/>
+                        </a:spcBef>
+                        <a:spcAft>
+                          <a:spcPts val="0"/>
+                        </a:spcAft>
+                        <a:buClrTx/>
+                        <a:buSzTx/>
+                        <a:buFontTx/>
+                        <a:buNone/>
+                        <a:tabLst/>
+                        <a:defRPr/>
+                      </a:pPr>
+                      <a:r>
+                        <a:rPr lang="es-ES" sz="1600" dirty="0">
+                          <a:latin typeface="Cambria Math" panose="02040503050406030204" pitchFamily="18" charset="0"/>
+                          <a:ea typeface="Cambria Math" panose="02040503050406030204" pitchFamily="18" charset="0"/>
+                        </a:rPr>
+                        <a:t>X </a:t>
+                      </a:r>
+                      <a:r>
+                        <a:rPr lang="es-ES" sz="1600" i="1" baseline="-25000" dirty="0">
+                          <a:latin typeface="Cambria Math" panose="02040503050406030204" pitchFamily="18" charset="0"/>
+                          <a:ea typeface="Cambria Math" panose="02040503050406030204" pitchFamily="18" charset="0"/>
+                        </a:rPr>
+                        <a:t>j</a:t>
+                      </a:r>
+                      <a:r>
+                        <a:rPr lang="es-ES" sz="1600" baseline="-25000" dirty="0">
+                          <a:latin typeface="Cambria Math" panose="02040503050406030204" pitchFamily="18" charset="0"/>
+                          <a:ea typeface="Cambria Math" panose="02040503050406030204" pitchFamily="18" charset="0"/>
+                        </a:rPr>
+                        <a:t> = 4</a:t>
+                      </a:r>
+                      <a:endParaRPr lang="en-GB" sz="1600" dirty="0">
+                        <a:latin typeface="Cambria Math" panose="02040503050406030204" pitchFamily="18" charset="0"/>
+                        <a:ea typeface="Cambria Math" panose="02040503050406030204" pitchFamily="18" charset="0"/>
+                      </a:endParaRPr>
+                    </a:p>
+                  </a:txBody>
+                  <a:tcPr marL="82953" marR="82953" marT="41476" marB="41476">
+                    <a:lnT w="12700" cap="flat" cmpd="sng" algn="ctr">
+                      <a:solidFill>
+                        <a:schemeClr val="tx1"/>
+                      </a:solidFill>
+                      <a:prstDash val="solid"/>
+                      <a:round/>
+                      <a:headEnd type="none" w="med" len="med"/>
+                      <a:tailEnd type="none" w="med" len="med"/>
+                    </a:lnT>
+                    <a:lnB w="12700" cap="flat" cmpd="sng" algn="ctr">
+                      <a:noFill/>
+                      <a:prstDash val="solid"/>
+                      <a:round/>
+                      <a:headEnd type="none" w="med" len="med"/>
+                      <a:tailEnd type="none" w="med" len="med"/>
+                    </a:lnB>
+                  </a:tcPr>
+                </a:tc>
+                <a:tc>
+                  <a:txBody>
+                    <a:bodyPr/>
+                    <a:lstStyle/>
+                    <a:p>
+                      <a:pPr marL="0" marR="0" lvl="0" indent="0" algn="ctr" defTabSz="914400" rtl="0" eaLnBrk="1" fontAlgn="auto" latinLnBrk="0" hangingPunct="1">
+                        <a:lnSpc>
+                          <a:spcPct val="100000"/>
+                        </a:lnSpc>
+                        <a:spcBef>
+                          <a:spcPts val="0"/>
+                        </a:spcBef>
+                        <a:spcAft>
+                          <a:spcPts val="0"/>
+                        </a:spcAft>
+                        <a:buClrTx/>
+                        <a:buSzTx/>
+                        <a:buFontTx/>
+                        <a:buNone/>
+                        <a:tabLst/>
+                        <a:defRPr/>
+                      </a:pPr>
+                      <a:r>
+                        <a:rPr lang="es-ES" sz="1600" dirty="0">
+                          <a:latin typeface="Cambria Math" panose="02040503050406030204" pitchFamily="18" charset="0"/>
+                          <a:ea typeface="Cambria Math" panose="02040503050406030204" pitchFamily="18" charset="0"/>
+                        </a:rPr>
+                        <a:t>X </a:t>
+                      </a:r>
+                      <a:r>
+                        <a:rPr lang="es-ES" sz="1600" i="1" baseline="-25000" dirty="0">
+                          <a:latin typeface="Cambria Math" panose="02040503050406030204" pitchFamily="18" charset="0"/>
+                          <a:ea typeface="Cambria Math" panose="02040503050406030204" pitchFamily="18" charset="0"/>
+                        </a:rPr>
+                        <a:t>j </a:t>
+                      </a:r>
+                      <a:r>
+                        <a:rPr lang="es-ES" sz="1600" i="0" baseline="-25000" dirty="0">
+                          <a:latin typeface="Cambria Math" panose="02040503050406030204" pitchFamily="18" charset="0"/>
+                          <a:ea typeface="Cambria Math" panose="02040503050406030204" pitchFamily="18" charset="0"/>
+                        </a:rPr>
+                        <a:t>= </a:t>
+                      </a:r>
+                      <a:r>
+                        <a:rPr lang="es-ES" sz="1600" i="1" baseline="-25000" dirty="0">
+                          <a:latin typeface="Cambria Math" panose="02040503050406030204" pitchFamily="18" charset="0"/>
+                          <a:ea typeface="Cambria Math" panose="02040503050406030204" pitchFamily="18" charset="0"/>
+                        </a:rPr>
+                        <a:t>p</a:t>
+                      </a:r>
+                      <a:endParaRPr lang="en-GB" sz="1600" i="1" dirty="0">
+                        <a:latin typeface="Cambria Math" panose="02040503050406030204" pitchFamily="18" charset="0"/>
+                        <a:ea typeface="Cambria Math" panose="02040503050406030204" pitchFamily="18" charset="0"/>
+                      </a:endParaRPr>
+                    </a:p>
+                  </a:txBody>
+                  <a:tcPr marL="82953" marR="82953" marT="41476" marB="41476">
+                    <a:lnT w="12700" cap="flat" cmpd="sng" algn="ctr">
+                      <a:solidFill>
+                        <a:schemeClr val="tx1"/>
+                      </a:solidFill>
+                      <a:prstDash val="solid"/>
+                      <a:round/>
+                      <a:headEnd type="none" w="med" len="med"/>
+                      <a:tailEnd type="none" w="med" len="med"/>
+                    </a:lnT>
+                  </a:tcPr>
+                </a:tc>
+                <a:extLst>
+                  <a:ext uri="{0D108BD9-81ED-4DB2-BD59-A6C34878D82A}">
+                    <a16:rowId xmlns:a16="http://schemas.microsoft.com/office/drawing/2014/main" val="2970882795"/>
+                  </a:ext>
+                </a:extLst>
+              </a:tr>
+              <a:tr h="336419">
+                <a:tc>
+                  <a:txBody>
+                    <a:bodyPr/>
+                    <a:lstStyle/>
+                    <a:p>
+                      <a:pPr marL="0" marR="0" lvl="0" indent="0" algn="l" defTabSz="914400" rtl="0" eaLnBrk="1" fontAlgn="auto" latinLnBrk="0" hangingPunct="1">
+                        <a:lnSpc>
+                          <a:spcPct val="100000"/>
+                        </a:lnSpc>
+                        <a:spcBef>
+                          <a:spcPts val="0"/>
+                        </a:spcBef>
+                        <a:spcAft>
+                          <a:spcPts val="0"/>
+                        </a:spcAft>
+                        <a:buClrTx/>
+                        <a:buSzTx/>
+                        <a:buFontTx/>
+                        <a:buNone/>
+                        <a:tabLst/>
+                        <a:defRPr/>
+                      </a:pPr>
+                      <a:r>
+                        <a:rPr lang="es-ES" sz="1600" dirty="0">
+                          <a:latin typeface="Cambria Math" panose="02040503050406030204" pitchFamily="18" charset="0"/>
+                          <a:ea typeface="Cambria Math" panose="02040503050406030204" pitchFamily="18" charset="0"/>
+                        </a:rPr>
+                        <a:t>X</a:t>
+                      </a:r>
+                      <a:r>
+                        <a:rPr lang="es-ES" sz="1600" i="1" baseline="-25000" dirty="0">
+                          <a:latin typeface="Cambria Math" panose="02040503050406030204" pitchFamily="18" charset="0"/>
+                          <a:ea typeface="Cambria Math" panose="02040503050406030204" pitchFamily="18" charset="0"/>
+                        </a:rPr>
+                        <a:t>i</a:t>
+                      </a:r>
+                      <a:r>
+                        <a:rPr lang="es-ES" sz="1600" baseline="-25000" dirty="0">
+                          <a:latin typeface="Cambria Math" panose="02040503050406030204" pitchFamily="18" charset="0"/>
+                          <a:ea typeface="Cambria Math" panose="02040503050406030204" pitchFamily="18" charset="0"/>
+                        </a:rPr>
+                        <a:t> =1</a:t>
+                      </a:r>
+                      <a:endParaRPr lang="en-GB" sz="1600" dirty="0">
+                        <a:latin typeface="Cambria Math" panose="02040503050406030204" pitchFamily="18" charset="0"/>
+                        <a:ea typeface="Cambria Math" panose="02040503050406030204" pitchFamily="18" charset="0"/>
+                      </a:endParaRPr>
+                    </a:p>
+                  </a:txBody>
+                  <a:tcPr marL="82953" marR="82953" marT="41476" marB="41476">
+                    <a:lnL w="12700" cap="flat" cmpd="sng" algn="ctr">
+                      <a:solidFill>
+                        <a:schemeClr val="accent2">
+                          <a:lumMod val="75000"/>
+                        </a:schemeClr>
+                      </a:solidFill>
+                      <a:prstDash val="solid"/>
+                      <a:round/>
+                      <a:headEnd type="none" w="med" len="med"/>
+                      <a:tailEnd type="none" w="med" len="med"/>
+                    </a:lnL>
+                    <a:lnR w="28575" cap="flat" cmpd="sng" algn="ctr">
+                      <a:solidFill>
+                        <a:srgbClr val="215F9A"/>
+                      </a:solidFill>
+                      <a:prstDash val="solid"/>
+                      <a:round/>
+                      <a:headEnd type="none" w="med" len="med"/>
+                      <a:tailEnd type="none" w="med" len="med"/>
+                    </a:lnR>
+                    <a:lnT w="12700" cap="flat" cmpd="sng" algn="ctr">
+                      <a:solidFill>
+                        <a:schemeClr val="accent2">
+                          <a:lumMod val="75000"/>
+                        </a:schemeClr>
+                      </a:solidFill>
+                      <a:prstDash val="solid"/>
+                      <a:round/>
+                      <a:headEnd type="none" w="med" len="med"/>
+                      <a:tailEnd type="none" w="med" len="med"/>
+                    </a:lnT>
+                    <a:lnB w="12700" cap="flat" cmpd="sng" algn="ctr">
+                      <a:solidFill>
+                        <a:schemeClr val="accent2">
+                          <a:lumMod val="75000"/>
+                        </a:schemeClr>
+                      </a:solidFill>
+                      <a:prstDash val="solid"/>
+                      <a:round/>
+                      <a:headEnd type="none" w="med" len="med"/>
+                      <a:tailEnd type="none" w="med" len="med"/>
+                    </a:lnB>
+                    <a:solidFill>
+                      <a:srgbClr val="F6C6AD"/>
+                    </a:solidFill>
+                  </a:tcPr>
+                </a:tc>
+                <a:tc>
+                  <a:txBody>
+                    <a:bodyPr/>
+                    <a:lstStyle/>
+                    <a:p>
+                      <a:pPr algn="ctr"/>
+                      <a:r>
+                        <a:rPr lang="es-ES" sz="1600" dirty="0"/>
+                        <a:t>1.23</a:t>
+                      </a:r>
+                      <a:endParaRPr lang="en-GB" sz="1600" dirty="0"/>
+                    </a:p>
+                  </a:txBody>
+                  <a:tcPr marL="82953" marR="82953" marT="41476" marB="41476">
+                    <a:lnL w="28575" cap="flat" cmpd="sng" algn="ctr">
+                      <a:solidFill>
+                        <a:srgbClr val="215F9A"/>
+                      </a:solidFill>
+                      <a:prstDash val="solid"/>
+                      <a:round/>
+                      <a:headEnd type="none" w="med" len="med"/>
+                      <a:tailEnd type="none" w="med" len="med"/>
+                    </a:lnL>
+                    <a:lnR w="28575" cap="flat" cmpd="sng" algn="ctr">
+                      <a:solidFill>
+                        <a:schemeClr val="accent4">
+                          <a:lumMod val="60000"/>
+                          <a:lumOff val="40000"/>
+                        </a:schemeClr>
+                      </a:solidFill>
+                      <a:prstDash val="sysDot"/>
+                      <a:round/>
+                      <a:headEnd type="none" w="med" len="med"/>
+                      <a:tailEnd type="none" w="med" len="med"/>
+                    </a:lnR>
+                    <a:lnT w="28575" cap="flat" cmpd="sng" algn="ctr">
+                      <a:solidFill>
+                        <a:srgbClr val="215F9A"/>
+                      </a:solidFill>
+                      <a:prstDash val="solid"/>
+                      <a:round/>
+                      <a:headEnd type="none" w="med" len="med"/>
+                      <a:tailEnd type="none" w="med" len="med"/>
+                    </a:lnT>
+                    <a:lnB w="28575" cap="flat" cmpd="sng" algn="ctr">
+                      <a:noFill/>
+                      <a:prstDash val="solid"/>
+                      <a:round/>
+                      <a:headEnd type="none" w="med" len="med"/>
+                      <a:tailEnd type="none" w="med" len="med"/>
+                    </a:lnB>
+                    <a:lnTlToBr w="12700" cmpd="sng">
+                      <a:noFill/>
+                      <a:prstDash val="solid"/>
+                    </a:lnTlToBr>
+                    <a:lnBlToTr w="12700" cmpd="sng">
+                      <a:noFill/>
+                      <a:prstDash val="solid"/>
+                    </a:lnBlToTr>
+                    <a:solidFill>
+                      <a:srgbClr val="A6CAEC"/>
+                    </a:solidFill>
+                  </a:tcPr>
+                </a:tc>
+                <a:tc>
+                  <a:txBody>
+                    <a:bodyPr/>
+                    <a:lstStyle/>
+                    <a:p>
+                      <a:pPr algn="ctr"/>
+                      <a:r>
+                        <a:rPr lang="es-ES" sz="1600" dirty="0"/>
+                        <a:t>0.77</a:t>
+                      </a:r>
+                      <a:endParaRPr lang="en-GB" sz="1600" dirty="0"/>
+                    </a:p>
+                  </a:txBody>
+                  <a:tcPr marL="82953" marR="82953" marT="41476" marB="41476">
+                    <a:lnL w="28575" cap="flat" cmpd="sng" algn="ctr">
+                      <a:solidFill>
+                        <a:schemeClr val="accent4">
+                          <a:lumMod val="60000"/>
+                          <a:lumOff val="40000"/>
+                        </a:schemeClr>
+                      </a:solidFill>
+                      <a:prstDash val="sysDot"/>
+                      <a:round/>
+                      <a:headEnd type="none" w="med" len="med"/>
+                      <a:tailEnd type="none" w="med" len="med"/>
+                    </a:lnL>
+                    <a:lnR w="28575" cap="flat" cmpd="sng" algn="ctr">
+                      <a:solidFill>
+                        <a:srgbClr val="215F9A"/>
+                      </a:solidFill>
+                      <a:prstDash val="sysDot"/>
+                      <a:round/>
+                      <a:headEnd type="none" w="med" len="med"/>
+                      <a:tailEnd type="none" w="med" len="med"/>
+                    </a:lnR>
+                    <a:lnT w="28575" cap="flat" cmpd="sng" algn="ctr">
+                      <a:solidFill>
+                        <a:srgbClr val="215F9A"/>
+                      </a:solidFill>
+                      <a:prstDash val="sysDot"/>
+                      <a:round/>
+                      <a:headEnd type="none" w="med" len="med"/>
+                      <a:tailEnd type="none" w="med" len="med"/>
+                    </a:lnT>
+                    <a:lnB w="28575" cap="flat" cmpd="sng" algn="ctr">
+                      <a:noFill/>
+                      <a:prstDash val="sysDot"/>
+                      <a:round/>
+                      <a:headEnd type="none" w="med" len="med"/>
+                      <a:tailEnd type="none" w="med" len="med"/>
+                    </a:lnB>
+                    <a:lnTlToBr w="12700" cmpd="sng">
+                      <a:noFill/>
+                      <a:prstDash val="solid"/>
+                    </a:lnTlToBr>
+                    <a:lnBlToTr w="12700" cmpd="sng">
+                      <a:noFill/>
+                      <a:prstDash val="solid"/>
+                    </a:lnBlToTr>
+                    <a:pattFill prst="wdUpDiag">
+                      <a:fgClr>
+                        <a:srgbClr val="CAEEFB"/>
+                      </a:fgClr>
+                      <a:bgClr>
+                        <a:srgbClr val="A6CAEC"/>
+                      </a:bgClr>
+                    </a:pattFill>
+                  </a:tcPr>
+                </a:tc>
+                <a:tc>
+                  <a:txBody>
+                    <a:bodyPr/>
+                    <a:lstStyle/>
+                    <a:p>
+                      <a:pPr algn="ctr"/>
+                      <a:r>
+                        <a:rPr lang="es-ES" sz="1600" dirty="0"/>
+                        <a:t>0.88</a:t>
+                      </a:r>
+                      <a:endParaRPr lang="en-GB" sz="1600" dirty="0"/>
+                    </a:p>
+                  </a:txBody>
+                  <a:tcPr marL="82953" marR="82953" marT="41476" marB="41476">
+                    <a:lnL w="28575" cap="flat" cmpd="sng" algn="ctr">
+                      <a:solidFill>
+                        <a:srgbClr val="215F9A"/>
+                      </a:solidFill>
+                      <a:prstDash val="sysDot"/>
+                      <a:round/>
+                      <a:headEnd type="none" w="med" len="med"/>
+                      <a:tailEnd type="none" w="med" len="med"/>
+                    </a:lnL>
+                    <a:lnR w="28575" cap="flat" cmpd="sng" algn="ctr">
+                      <a:solidFill>
+                        <a:schemeClr val="accent4">
+                          <a:lumMod val="60000"/>
+                          <a:lumOff val="40000"/>
+                        </a:schemeClr>
+                      </a:solidFill>
+                      <a:prstDash val="solid"/>
+                      <a:round/>
+                      <a:headEnd type="none" w="med" len="med"/>
+                      <a:tailEnd type="none" w="med" len="med"/>
+                    </a:lnR>
+                    <a:lnT w="28575" cap="flat" cmpd="sng" algn="ctr">
+                      <a:solidFill>
+                        <a:schemeClr val="accent4">
+                          <a:lumMod val="60000"/>
+                          <a:lumOff val="40000"/>
+                        </a:schemeClr>
+                      </a:solidFill>
+                      <a:prstDash val="solid"/>
+                      <a:round/>
+                      <a:headEnd type="none" w="med" len="med"/>
+                      <a:tailEnd type="none" w="med" len="med"/>
+                    </a:lnT>
+                    <a:lnB w="28575" cap="flat" cmpd="sng" algn="ctr">
+                      <a:solidFill>
+                        <a:schemeClr val="accent5">
+                          <a:lumMod val="60000"/>
+                          <a:lumOff val="40000"/>
+                        </a:schemeClr>
+                      </a:solidFill>
+                      <a:prstDash val="sysDot"/>
+                      <a:round/>
+                      <a:headEnd type="none" w="med" len="med"/>
+                      <a:tailEnd type="none" w="med" len="med"/>
+                    </a:lnB>
+                    <a:lnTlToBr w="12700" cmpd="sng">
+                      <a:noFill/>
+                      <a:prstDash val="solid"/>
+                    </a:lnTlToBr>
+                    <a:lnBlToTr w="12700" cmpd="sng">
+                      <a:noFill/>
+                      <a:prstDash val="solid"/>
+                    </a:lnBlToTr>
+                    <a:solidFill>
+                      <a:srgbClr val="CAEEFB"/>
+                    </a:solidFill>
+                  </a:tcPr>
+                </a:tc>
+                <a:tc>
+                  <a:txBody>
+                    <a:bodyPr/>
+                    <a:lstStyle/>
+                    <a:p>
+                      <a:pPr algn="ctr"/>
+                      <a:r>
+                        <a:rPr lang="es-ES" sz="1600" dirty="0"/>
+                        <a:t>0</a:t>
+                      </a:r>
+                      <a:endParaRPr lang="en-GB" sz="1600" dirty="0"/>
+                    </a:p>
+                  </a:txBody>
+                  <a:tcPr marL="82953" marR="82953" marT="41476" marB="41476">
+                    <a:lnL w="28575" cap="flat" cmpd="sng" algn="ctr">
+                      <a:solidFill>
+                        <a:schemeClr val="accent4">
+                          <a:lumMod val="60000"/>
+                          <a:lumOff val="40000"/>
+                        </a:schemeClr>
+                      </a:solidFill>
+                      <a:prstDash val="solid"/>
+                      <a:round/>
+                      <a:headEnd type="none" w="med" len="med"/>
+                      <a:tailEnd type="none" w="med" len="med"/>
+                    </a:lnL>
+                    <a:lnR w="12700" cap="flat" cmpd="sng" algn="ctr">
+                      <a:noFill/>
+                      <a:prstDash val="solid"/>
+                      <a:round/>
+                      <a:headEnd type="none" w="med" len="med"/>
+                      <a:tailEnd type="none" w="med" len="med"/>
+                    </a:lnR>
+                    <a:lnT w="12700" cap="flat" cmpd="sng" algn="ctr">
+                      <a:noFill/>
+                      <a:prstDash val="solid"/>
+                      <a:round/>
+                      <a:headEnd type="none" w="med" len="med"/>
+                      <a:tailEnd type="none" w="med" len="med"/>
+                    </a:lnT>
+                    <a:lnB w="28575" cap="flat" cmpd="sng" algn="ctr">
+                      <a:solidFill>
+                        <a:schemeClr val="accent5">
+                          <a:lumMod val="60000"/>
+                          <a:lumOff val="40000"/>
+                        </a:schemeClr>
+                      </a:solidFill>
+                      <a:prstDash val="solid"/>
+                      <a:round/>
+                      <a:headEnd type="none" w="med" len="med"/>
+                      <a:tailEnd type="none" w="med" len="med"/>
+                    </a:lnB>
+                    <a:lnTlToBr w="12700" cmpd="sng">
+                      <a:noFill/>
+                      <a:prstDash val="solid"/>
+                    </a:lnTlToBr>
+                    <a:lnBlToTr w="12700" cmpd="sng">
+                      <a:noFill/>
+                      <a:prstDash val="solid"/>
+                    </a:lnBlToTr>
+                    <a:solidFill>
+                      <a:srgbClr val="CBCBCB"/>
+                    </a:solidFill>
+                  </a:tcPr>
+                </a:tc>
+                <a:tc>
+                  <a:txBody>
+                    <a:bodyPr/>
+                    <a:lstStyle/>
+                    <a:p>
+                      <a:pPr algn="ctr"/>
+                      <a:r>
+                        <a:rPr lang="es-ES" sz="1600" dirty="0"/>
+                        <a:t>…</a:t>
+                      </a:r>
+                    </a:p>
+                  </a:txBody>
+                  <a:tcPr marL="82953" marR="82953" marT="41476" marB="41476">
+                    <a:lnL w="12700" cap="flat" cmpd="sng" algn="ctr">
+                      <a:noFill/>
+                      <a:prstDash val="solid"/>
+                      <a:round/>
+                      <a:headEnd type="none" w="med" len="med"/>
+                      <a:tailEnd type="none" w="med" len="med"/>
+                    </a:lnL>
+                  </a:tcPr>
+                </a:tc>
+                <a:extLst>
+                  <a:ext uri="{0D108BD9-81ED-4DB2-BD59-A6C34878D82A}">
+                    <a16:rowId xmlns:a16="http://schemas.microsoft.com/office/drawing/2014/main" val="597313570"/>
+                  </a:ext>
+                </a:extLst>
+              </a:tr>
+              <a:tr h="336419">
+                <a:tc>
+                  <a:txBody>
+                    <a:bodyPr/>
+                    <a:lstStyle/>
+                    <a:p>
+                      <a:pPr marL="0" marR="0" lvl="0" indent="0" algn="l" defTabSz="914400" rtl="0" eaLnBrk="1" fontAlgn="auto" latinLnBrk="0" hangingPunct="1">
+                        <a:lnSpc>
+                          <a:spcPct val="100000"/>
+                        </a:lnSpc>
+                        <a:spcBef>
+                          <a:spcPts val="0"/>
+                        </a:spcBef>
+                        <a:spcAft>
+                          <a:spcPts val="0"/>
+                        </a:spcAft>
+                        <a:buClrTx/>
+                        <a:buSzTx/>
+                        <a:buFontTx/>
+                        <a:buNone/>
+                        <a:tabLst/>
+                        <a:defRPr/>
+                      </a:pPr>
+                      <a:r>
+                        <a:rPr lang="es-ES" sz="1600" dirty="0">
+                          <a:latin typeface="Cambria Math" panose="02040503050406030204" pitchFamily="18" charset="0"/>
+                          <a:ea typeface="Cambria Math" panose="02040503050406030204" pitchFamily="18" charset="0"/>
+                        </a:rPr>
+                        <a:t>X</a:t>
+                      </a:r>
+                      <a:r>
+                        <a:rPr lang="es-ES" sz="1600" i="1" baseline="-25000" dirty="0">
+                          <a:latin typeface="Cambria Math" panose="02040503050406030204" pitchFamily="18" charset="0"/>
+                          <a:ea typeface="Cambria Math" panose="02040503050406030204" pitchFamily="18" charset="0"/>
+                        </a:rPr>
+                        <a:t>i</a:t>
+                      </a:r>
+                      <a:r>
+                        <a:rPr lang="es-ES" sz="1600" baseline="-25000" dirty="0">
+                          <a:latin typeface="Cambria Math" panose="02040503050406030204" pitchFamily="18" charset="0"/>
+                          <a:ea typeface="Cambria Math" panose="02040503050406030204" pitchFamily="18" charset="0"/>
+                        </a:rPr>
+                        <a:t> =2</a:t>
+                      </a:r>
+                      <a:endParaRPr lang="en-GB" sz="1600" dirty="0">
+                        <a:latin typeface="Cambria Math" panose="02040503050406030204" pitchFamily="18" charset="0"/>
+                        <a:ea typeface="Cambria Math" panose="02040503050406030204" pitchFamily="18" charset="0"/>
+                      </a:endParaRPr>
+                    </a:p>
+                  </a:txBody>
+                  <a:tcPr marL="82953" marR="82953" marT="41476" marB="41476">
+                    <a:lnL w="12700" cap="flat" cmpd="sng" algn="ctr">
+                      <a:solidFill>
+                        <a:schemeClr val="accent6"/>
+                      </a:solidFill>
+                      <a:prstDash val="solid"/>
+                      <a:round/>
+                      <a:headEnd type="none" w="med" len="med"/>
+                      <a:tailEnd type="none" w="med" len="med"/>
+                    </a:lnL>
+                    <a:lnR w="28575" cap="flat" cmpd="sng" algn="ctr">
+                      <a:solidFill>
+                        <a:srgbClr val="215F9A"/>
+                      </a:solidFill>
+                      <a:prstDash val="solid"/>
+                      <a:round/>
+                      <a:headEnd type="none" w="med" len="med"/>
+                      <a:tailEnd type="none" w="med" len="med"/>
+                    </a:lnR>
+                    <a:lnT w="12700" cap="flat" cmpd="sng" algn="ctr">
+                      <a:solidFill>
+                        <a:schemeClr val="accent2">
+                          <a:lumMod val="75000"/>
+                        </a:schemeClr>
+                      </a:solidFill>
+                      <a:prstDash val="solid"/>
+                      <a:round/>
+                      <a:headEnd type="none" w="med" len="med"/>
+                      <a:tailEnd type="none" w="med" len="med"/>
+                    </a:lnT>
+                    <a:lnB w="12700" cap="flat" cmpd="sng" algn="ctr">
+                      <a:solidFill>
+                        <a:schemeClr val="accent6"/>
+                      </a:solidFill>
+                      <a:prstDash val="solid"/>
+                      <a:round/>
+                      <a:headEnd type="none" w="med" len="med"/>
+                      <a:tailEnd type="none" w="med" len="med"/>
+                    </a:lnB>
+                    <a:solidFill>
+                      <a:srgbClr val="B4E5A2"/>
+                    </a:solidFill>
+                  </a:tcPr>
+                </a:tc>
+                <a:tc>
+                  <a:txBody>
+                    <a:bodyPr/>
+                    <a:lstStyle/>
+                    <a:p>
+                      <a:pPr algn="ctr"/>
+                      <a:r>
+                        <a:rPr lang="es-ES" sz="1600" dirty="0"/>
+                        <a:t>0.12</a:t>
+                      </a:r>
+                      <a:endParaRPr lang="en-GB" sz="1600" dirty="0"/>
+                    </a:p>
+                  </a:txBody>
+                  <a:tcPr marL="82953" marR="82953" marT="41476" marB="41476">
+                    <a:lnL w="28575" cap="flat" cmpd="sng" algn="ctr">
+                      <a:solidFill>
+                        <a:srgbClr val="215F9A"/>
+                      </a:solidFill>
+                      <a:prstDash val="solid"/>
+                      <a:round/>
+                      <a:headEnd type="none" w="med" len="med"/>
+                      <a:tailEnd type="none" w="med" len="med"/>
+                    </a:lnL>
+                    <a:lnR w="28575" cap="flat" cmpd="sng" algn="ctr">
+                      <a:solidFill>
+                        <a:schemeClr val="accent4">
+                          <a:lumMod val="60000"/>
+                          <a:lumOff val="40000"/>
+                        </a:schemeClr>
+                      </a:solidFill>
+                      <a:prstDash val="sysDot"/>
+                      <a:round/>
+                      <a:headEnd type="none" w="med" len="med"/>
+                      <a:tailEnd type="none" w="med" len="med"/>
+                    </a:lnR>
+                    <a:lnT w="28575" cap="flat" cmpd="sng" algn="ctr">
+                      <a:noFill/>
+                      <a:prstDash val="solid"/>
+                      <a:round/>
+                      <a:headEnd type="none" w="med" len="med"/>
+                      <a:tailEnd type="none" w="med" len="med"/>
+                    </a:lnT>
+                    <a:lnB w="12700" cap="flat" cmpd="sng" algn="ctr">
+                      <a:noFill/>
+                      <a:prstDash val="solid"/>
+                      <a:round/>
+                      <a:headEnd type="none" w="med" len="med"/>
+                      <a:tailEnd type="none" w="med" len="med"/>
+                    </a:lnB>
+                    <a:lnTlToBr w="12700" cmpd="sng">
+                      <a:noFill/>
+                      <a:prstDash val="solid"/>
+                    </a:lnTlToBr>
+                    <a:lnBlToTr w="12700" cmpd="sng">
+                      <a:noFill/>
+                      <a:prstDash val="solid"/>
+                    </a:lnBlToTr>
+                    <a:solidFill>
+                      <a:srgbClr val="A6CAEC"/>
+                    </a:solidFill>
+                  </a:tcPr>
+                </a:tc>
+                <a:tc>
+                  <a:txBody>
+                    <a:bodyPr/>
+                    <a:lstStyle/>
+                    <a:p>
+                      <a:pPr algn="ctr"/>
+                      <a:r>
+                        <a:rPr lang="es-ES" sz="1600" dirty="0"/>
+                        <a:t>-0.52</a:t>
+                      </a:r>
+                      <a:endParaRPr lang="en-GB" sz="1600" dirty="0"/>
+                    </a:p>
+                  </a:txBody>
+                  <a:tcPr marL="82953" marR="82953" marT="41476" marB="41476">
+                    <a:lnL w="28575" cap="flat" cmpd="sng" algn="ctr">
+                      <a:solidFill>
+                        <a:schemeClr val="accent4">
+                          <a:lumMod val="60000"/>
+                          <a:lumOff val="40000"/>
+                        </a:schemeClr>
+                      </a:solidFill>
+                      <a:prstDash val="sysDot"/>
+                      <a:round/>
+                      <a:headEnd type="none" w="med" len="med"/>
+                      <a:tailEnd type="none" w="med" len="med"/>
+                    </a:lnL>
+                    <a:lnR w="28575" cap="flat" cmpd="sng" algn="ctr">
+                      <a:solidFill>
+                        <a:srgbClr val="215F9A"/>
+                      </a:solidFill>
+                      <a:prstDash val="sysDot"/>
+                      <a:round/>
+                      <a:headEnd type="none" w="med" len="med"/>
+                      <a:tailEnd type="none" w="med" len="med"/>
+                    </a:lnR>
+                    <a:lnT w="28575" cap="flat" cmpd="sng" algn="ctr">
+                      <a:noFill/>
+                      <a:prstDash val="sysDot"/>
+                      <a:round/>
+                      <a:headEnd type="none" w="med" len="med"/>
+                      <a:tailEnd type="none" w="med" len="med"/>
+                    </a:lnT>
+                    <a:lnB w="28575" cap="flat" cmpd="sng" algn="ctr">
+                      <a:noFill/>
+                      <a:prstDash val="sysDot"/>
+                      <a:round/>
+                      <a:headEnd type="none" w="med" len="med"/>
+                      <a:tailEnd type="none" w="med" len="med"/>
+                    </a:lnB>
+                    <a:lnTlToBr w="12700" cmpd="sng">
+                      <a:noFill/>
+                      <a:prstDash val="solid"/>
+                    </a:lnTlToBr>
+                    <a:lnBlToTr w="12700" cmpd="sng">
+                      <a:noFill/>
+                      <a:prstDash val="solid"/>
+                    </a:lnBlToTr>
+                    <a:pattFill prst="wdUpDiag">
+                      <a:fgClr>
+                        <a:srgbClr val="CAEEFB"/>
+                      </a:fgClr>
+                      <a:bgClr>
+                        <a:srgbClr val="A6CAEC"/>
+                      </a:bgClr>
+                    </a:pattFill>
+                  </a:tcPr>
+                </a:tc>
+                <a:tc>
+                  <a:txBody>
+                    <a:bodyPr/>
+                    <a:lstStyle/>
+                    <a:p>
+                      <a:pPr algn="ctr"/>
+                      <a:r>
+                        <a:rPr lang="es-ES" sz="1600" dirty="0"/>
+                        <a:t>1.00</a:t>
+                      </a:r>
+                      <a:endParaRPr lang="en-GB" sz="1600" dirty="0"/>
+                    </a:p>
+                  </a:txBody>
+                  <a:tcPr marL="82953" marR="82953" marT="41476" marB="41476">
+                    <a:lnL w="28575" cap="flat" cmpd="sng" algn="ctr">
+                      <a:solidFill>
+                        <a:srgbClr val="215F9A"/>
+                      </a:solidFill>
+                      <a:prstDash val="sysDot"/>
+                      <a:round/>
+                      <a:headEnd type="none" w="med" len="med"/>
+                      <a:tailEnd type="none" w="med" len="med"/>
+                    </a:lnL>
+                    <a:lnR w="28575" cap="flat" cmpd="sng" algn="ctr">
+                      <a:solidFill>
+                        <a:schemeClr val="accent4">
+                          <a:lumMod val="60000"/>
+                          <a:lumOff val="40000"/>
+                        </a:schemeClr>
+                      </a:solidFill>
+                      <a:prstDash val="sysDot"/>
+                      <a:round/>
+                      <a:headEnd type="none" w="med" len="med"/>
+                      <a:tailEnd type="none" w="med" len="med"/>
+                    </a:lnR>
+                    <a:lnT w="28575" cap="flat" cmpd="sng" algn="ctr">
+                      <a:solidFill>
+                        <a:schemeClr val="accent5">
+                          <a:lumMod val="60000"/>
+                          <a:lumOff val="40000"/>
+                        </a:schemeClr>
+                      </a:solidFill>
+                      <a:prstDash val="sysDot"/>
+                      <a:round/>
+                      <a:headEnd type="none" w="med" len="med"/>
+                      <a:tailEnd type="none" w="med" len="med"/>
+                    </a:lnT>
+                    <a:lnB w="28575" cap="flat" cmpd="sng" algn="ctr">
+                      <a:noFill/>
+                      <a:prstDash val="solid"/>
+                      <a:round/>
+                      <a:headEnd type="none" w="med" len="med"/>
+                      <a:tailEnd type="none" w="med" len="med"/>
+                    </a:lnB>
+                    <a:lnTlToBr w="12700" cmpd="sng">
+                      <a:noFill/>
+                      <a:prstDash val="solid"/>
+                    </a:lnTlToBr>
+                    <a:lnBlToTr w="12700" cmpd="sng">
+                      <a:noFill/>
+                      <a:prstDash val="solid"/>
+                    </a:lnBlToTr>
+                    <a:pattFill prst="wdUpDiag">
+                      <a:fgClr>
+                        <a:srgbClr val="CAEEFB"/>
+                      </a:fgClr>
+                      <a:bgClr>
+                        <a:schemeClr val="accent5">
+                          <a:lumMod val="20000"/>
+                          <a:lumOff val="80000"/>
+                        </a:schemeClr>
+                      </a:bgClr>
+                    </a:pattFill>
+                  </a:tcPr>
+                </a:tc>
+                <a:tc>
+                  <a:txBody>
+                    <a:bodyPr/>
+                    <a:lstStyle/>
+                    <a:p>
+                      <a:pPr algn="ctr"/>
+                      <a:r>
+                        <a:rPr lang="es-ES" sz="1600" dirty="0"/>
+                        <a:t>1</a:t>
+                      </a:r>
+                      <a:endParaRPr lang="en-GB" sz="1600" dirty="0"/>
+                    </a:p>
+                  </a:txBody>
+                  <a:tcPr marL="82953" marR="82953" marT="41476" marB="41476">
+                    <a:lnL w="28575" cap="flat" cmpd="sng" algn="ctr">
+                      <a:solidFill>
+                        <a:schemeClr val="accent4">
+                          <a:lumMod val="60000"/>
+                          <a:lumOff val="40000"/>
+                        </a:schemeClr>
+                      </a:solidFill>
+                      <a:prstDash val="sysDot"/>
+                      <a:round/>
+                      <a:headEnd type="none" w="med" len="med"/>
+                      <a:tailEnd type="none" w="med" len="med"/>
+                    </a:lnL>
+                    <a:lnR w="28575" cap="flat" cmpd="sng" algn="ctr">
+                      <a:solidFill>
+                        <a:schemeClr val="accent5">
+                          <a:lumMod val="60000"/>
+                          <a:lumOff val="40000"/>
+                        </a:schemeClr>
+                      </a:solidFill>
+                      <a:prstDash val="solid"/>
+                      <a:round/>
+                      <a:headEnd type="none" w="med" len="med"/>
+                      <a:tailEnd type="none" w="med" len="med"/>
+                    </a:lnR>
+                    <a:lnT w="28575" cap="flat" cmpd="sng" algn="ctr">
+                      <a:solidFill>
+                        <a:schemeClr val="accent5">
+                          <a:lumMod val="60000"/>
+                          <a:lumOff val="40000"/>
+                        </a:schemeClr>
+                      </a:solidFill>
+                      <a:prstDash val="solid"/>
+                      <a:round/>
+                      <a:headEnd type="none" w="med" len="med"/>
+                      <a:tailEnd type="none" w="med" len="med"/>
+                    </a:lnT>
+                    <a:lnB w="28575" cap="flat" cmpd="sng" algn="ctr">
+                      <a:noFill/>
+                      <a:prstDash val="solid"/>
+                      <a:round/>
+                      <a:headEnd type="none" w="med" len="med"/>
+                      <a:tailEnd type="none" w="med" len="med"/>
+                    </a:lnB>
+                    <a:lnTlToBr w="12700" cmpd="sng">
+                      <a:noFill/>
+                      <a:prstDash val="solid"/>
+                    </a:lnTlToBr>
+                    <a:lnBlToTr w="12700" cmpd="sng">
+                      <a:noFill/>
+                      <a:prstDash val="solid"/>
+                    </a:lnBlToTr>
+                    <a:solidFill>
+                      <a:schemeClr val="accent5">
+                        <a:lumMod val="20000"/>
+                        <a:lumOff val="80000"/>
+                      </a:schemeClr>
+                    </a:solidFill>
+                  </a:tcPr>
+                </a:tc>
+                <a:tc>
+                  <a:txBody>
+                    <a:bodyPr/>
+                    <a:lstStyle/>
+                    <a:p>
+                      <a:pPr algn="ctr"/>
+                      <a:r>
+                        <a:rPr lang="es-ES" sz="1600" dirty="0"/>
+                        <a:t>…</a:t>
+                      </a:r>
+                      <a:endParaRPr lang="en-GB" sz="1600" dirty="0"/>
+                    </a:p>
+                  </a:txBody>
+                  <a:tcPr marL="82953" marR="82953" marT="41476" marB="41476">
+                    <a:lnL w="28575" cap="flat" cmpd="sng" algn="ctr">
+                      <a:solidFill>
+                        <a:schemeClr val="accent5">
+                          <a:lumMod val="60000"/>
+                          <a:lumOff val="40000"/>
+                        </a:schemeClr>
+                      </a:solidFill>
+                      <a:prstDash val="solid"/>
+                      <a:round/>
+                      <a:headEnd type="none" w="med" len="med"/>
+                      <a:tailEnd type="none" w="med" len="med"/>
+                    </a:lnL>
+                  </a:tcPr>
+                </a:tc>
+                <a:extLst>
+                  <a:ext uri="{0D108BD9-81ED-4DB2-BD59-A6C34878D82A}">
+                    <a16:rowId xmlns:a16="http://schemas.microsoft.com/office/drawing/2014/main" val="2270800572"/>
+                  </a:ext>
+                </a:extLst>
+              </a:tr>
+              <a:tr h="336419">
+                <a:tc>
+                  <a:txBody>
+                    <a:bodyPr/>
+                    <a:lstStyle/>
+                    <a:p>
+                      <a:pPr marL="0" marR="0" lvl="0" indent="0" algn="l" defTabSz="914400" rtl="0" eaLnBrk="1" fontAlgn="auto" latinLnBrk="0" hangingPunct="1">
+                        <a:lnSpc>
+                          <a:spcPct val="100000"/>
+                        </a:lnSpc>
+                        <a:spcBef>
+                          <a:spcPts val="0"/>
+                        </a:spcBef>
+                        <a:spcAft>
+                          <a:spcPts val="0"/>
+                        </a:spcAft>
+                        <a:buClrTx/>
+                        <a:buSzTx/>
+                        <a:buFontTx/>
+                        <a:buNone/>
+                        <a:tabLst/>
+                        <a:defRPr/>
+                      </a:pPr>
+                      <a:r>
+                        <a:rPr lang="es-ES" sz="1600" dirty="0">
+                          <a:latin typeface="Cambria Math" panose="02040503050406030204" pitchFamily="18" charset="0"/>
+                          <a:ea typeface="Cambria Math" panose="02040503050406030204" pitchFamily="18" charset="0"/>
+                        </a:rPr>
+                        <a:t>X</a:t>
+                      </a:r>
+                      <a:r>
+                        <a:rPr lang="es-ES" sz="1600" i="1" baseline="-25000" dirty="0">
+                          <a:latin typeface="Cambria Math" panose="02040503050406030204" pitchFamily="18" charset="0"/>
+                          <a:ea typeface="Cambria Math" panose="02040503050406030204" pitchFamily="18" charset="0"/>
+                        </a:rPr>
+                        <a:t>i</a:t>
+                      </a:r>
+                      <a:r>
+                        <a:rPr lang="es-ES" sz="1600" baseline="-25000" dirty="0">
+                          <a:latin typeface="Cambria Math" panose="02040503050406030204" pitchFamily="18" charset="0"/>
+                          <a:ea typeface="Cambria Math" panose="02040503050406030204" pitchFamily="18" charset="0"/>
+                        </a:rPr>
+                        <a:t> =3</a:t>
+                      </a:r>
+                      <a:endParaRPr lang="en-GB" sz="1600" dirty="0">
+                        <a:latin typeface="Cambria Math" panose="02040503050406030204" pitchFamily="18" charset="0"/>
+                        <a:ea typeface="Cambria Math" panose="02040503050406030204" pitchFamily="18" charset="0"/>
+                      </a:endParaRPr>
+                    </a:p>
+                  </a:txBody>
+                  <a:tcPr marL="82953" marR="82953" marT="41476" marB="41476">
+                    <a:lnL w="12700" cap="flat" cmpd="sng" algn="ctr">
+                      <a:solidFill>
+                        <a:schemeClr val="accent2">
+                          <a:lumMod val="75000"/>
+                        </a:schemeClr>
+                      </a:solidFill>
+                      <a:prstDash val="solid"/>
+                      <a:round/>
+                      <a:headEnd type="none" w="med" len="med"/>
+                      <a:tailEnd type="none" w="med" len="med"/>
+                    </a:lnL>
+                    <a:lnR w="28575" cap="flat" cmpd="sng" algn="ctr">
+                      <a:solidFill>
+                        <a:srgbClr val="215F9A"/>
+                      </a:solidFill>
+                      <a:prstDash val="solid"/>
+                      <a:round/>
+                      <a:headEnd type="none" w="med" len="med"/>
+                      <a:tailEnd type="none" w="med" len="med"/>
+                    </a:lnR>
+                    <a:lnT w="12700" cap="flat" cmpd="sng" algn="ctr">
+                      <a:solidFill>
+                        <a:schemeClr val="accent6"/>
+                      </a:solidFill>
+                      <a:prstDash val="solid"/>
+                      <a:round/>
+                      <a:headEnd type="none" w="med" len="med"/>
+                      <a:tailEnd type="none" w="med" len="med"/>
+                    </a:lnT>
+                    <a:lnB w="12700" cap="flat" cmpd="sng" algn="ctr">
+                      <a:solidFill>
+                        <a:schemeClr val="accent2">
+                          <a:lumMod val="75000"/>
+                        </a:schemeClr>
+                      </a:solidFill>
+                      <a:prstDash val="solid"/>
+                      <a:round/>
+                      <a:headEnd type="none" w="med" len="med"/>
+                      <a:tailEnd type="none" w="med" len="med"/>
+                    </a:lnB>
+                    <a:solidFill>
+                      <a:srgbClr val="F6C6AD"/>
+                    </a:solidFill>
+                  </a:tcPr>
+                </a:tc>
+                <a:tc>
+                  <a:txBody>
+                    <a:bodyPr/>
+                    <a:lstStyle/>
+                    <a:p>
+                      <a:pPr algn="ctr"/>
+                      <a:r>
+                        <a:rPr lang="es-ES" sz="1600" dirty="0"/>
+                        <a:t>0.31</a:t>
+                      </a:r>
+                      <a:endParaRPr lang="en-GB" sz="1600" dirty="0"/>
+                    </a:p>
+                  </a:txBody>
+                  <a:tcPr marL="82953" marR="82953" marT="41476" marB="41476">
+                    <a:lnL w="28575" cap="flat" cmpd="sng" algn="ctr">
+                      <a:solidFill>
+                        <a:srgbClr val="215F9A"/>
+                      </a:solidFill>
+                      <a:prstDash val="solid"/>
+                      <a:round/>
+                      <a:headEnd type="none" w="med" len="med"/>
+                      <a:tailEnd type="none" w="med" len="med"/>
+                    </a:lnL>
+                    <a:lnR w="28575" cap="flat" cmpd="sng" algn="ctr">
+                      <a:solidFill>
+                        <a:schemeClr val="accent4">
+                          <a:lumMod val="60000"/>
+                          <a:lumOff val="40000"/>
+                        </a:schemeClr>
+                      </a:solidFill>
+                      <a:prstDash val="sysDot"/>
+                      <a:round/>
+                      <a:headEnd type="none" w="med" len="med"/>
+                      <a:tailEnd type="none" w="med" len="med"/>
+                    </a:lnR>
+                    <a:lnT w="12700" cap="flat" cmpd="sng" algn="ctr">
+                      <a:noFill/>
+                      <a:prstDash val="solid"/>
+                      <a:round/>
+                      <a:headEnd type="none" w="med" len="med"/>
+                      <a:tailEnd type="none" w="med" len="med"/>
+                    </a:lnT>
+                    <a:lnB w="28575" cap="flat" cmpd="sng" algn="ctr">
+                      <a:solidFill>
+                        <a:srgbClr val="215F9A"/>
+                      </a:solidFill>
+                      <a:prstDash val="solid"/>
+                      <a:round/>
+                      <a:headEnd type="none" w="med" len="med"/>
+                      <a:tailEnd type="none" w="med" len="med"/>
+                    </a:lnB>
+                    <a:lnTlToBr w="12700" cmpd="sng">
+                      <a:noFill/>
+                      <a:prstDash val="solid"/>
+                    </a:lnTlToBr>
+                    <a:lnBlToTr w="12700" cmpd="sng">
+                      <a:noFill/>
+                      <a:prstDash val="solid"/>
+                    </a:lnBlToTr>
+                    <a:solidFill>
+                      <a:srgbClr val="A6CAEC"/>
+                    </a:solidFill>
+                  </a:tcPr>
+                </a:tc>
+                <a:tc>
+                  <a:txBody>
+                    <a:bodyPr/>
+                    <a:lstStyle/>
+                    <a:p>
+                      <a:pPr algn="ctr"/>
+                      <a:r>
+                        <a:rPr lang="es-ES" sz="1600" dirty="0"/>
+                        <a:t>1.11</a:t>
+                      </a:r>
+                      <a:endParaRPr lang="en-GB" sz="1600" dirty="0"/>
+                    </a:p>
+                  </a:txBody>
+                  <a:tcPr marL="82953" marR="82953" marT="41476" marB="41476">
+                    <a:lnL w="28575" cap="flat" cmpd="sng" algn="ctr">
+                      <a:solidFill>
+                        <a:schemeClr val="accent4">
+                          <a:lumMod val="60000"/>
+                          <a:lumOff val="40000"/>
+                        </a:schemeClr>
+                      </a:solidFill>
+                      <a:prstDash val="sysDot"/>
+                      <a:round/>
+                      <a:headEnd type="none" w="med" len="med"/>
+                      <a:tailEnd type="none" w="med" len="med"/>
+                    </a:lnL>
+                    <a:lnR w="28575" cap="flat" cmpd="sng" algn="ctr">
+                      <a:solidFill>
+                        <a:srgbClr val="215F9A"/>
+                      </a:solidFill>
+                      <a:prstDash val="sysDot"/>
+                      <a:round/>
+                      <a:headEnd type="none" w="med" len="med"/>
+                      <a:tailEnd type="none" w="med" len="med"/>
+                    </a:lnR>
+                    <a:lnT w="28575" cap="flat" cmpd="sng" algn="ctr">
+                      <a:noFill/>
+                      <a:prstDash val="sysDot"/>
+                      <a:round/>
+                      <a:headEnd type="none" w="med" len="med"/>
+                      <a:tailEnd type="none" w="med" len="med"/>
+                    </a:lnT>
+                    <a:lnB w="28575" cap="flat" cmpd="sng" algn="ctr">
+                      <a:solidFill>
+                        <a:srgbClr val="215F9A"/>
+                      </a:solidFill>
+                      <a:prstDash val="sysDot"/>
+                      <a:round/>
+                      <a:headEnd type="none" w="med" len="med"/>
+                      <a:tailEnd type="none" w="med" len="med"/>
+                    </a:lnB>
+                    <a:lnTlToBr w="12700" cmpd="sng">
+                      <a:noFill/>
+                      <a:prstDash val="solid"/>
+                    </a:lnTlToBr>
+                    <a:lnBlToTr w="12700" cmpd="sng">
+                      <a:noFill/>
+                      <a:prstDash val="solid"/>
+                    </a:lnBlToTr>
+                    <a:pattFill prst="wdUpDiag">
+                      <a:fgClr>
+                        <a:srgbClr val="CAEEFB"/>
+                      </a:fgClr>
+                      <a:bgClr>
+                        <a:srgbClr val="A6CAEC"/>
+                      </a:bgClr>
+                    </a:pattFill>
+                  </a:tcPr>
+                </a:tc>
+                <a:tc>
+                  <a:txBody>
+                    <a:bodyPr/>
+                    <a:lstStyle/>
+                    <a:p>
+                      <a:pPr algn="ctr"/>
+                      <a:r>
+                        <a:rPr lang="es-ES" sz="1600" dirty="0"/>
+                        <a:t>0.59</a:t>
+                      </a:r>
+                      <a:endParaRPr lang="en-GB" sz="1600" dirty="0"/>
+                    </a:p>
+                  </a:txBody>
+                  <a:tcPr marL="82953" marR="82953" marT="41476" marB="41476">
+                    <a:lnL w="28575" cap="flat" cmpd="sng" algn="ctr">
+                      <a:solidFill>
+                        <a:srgbClr val="215F9A"/>
+                      </a:solidFill>
+                      <a:prstDash val="sysDot"/>
+                      <a:round/>
+                      <a:headEnd type="none" w="med" len="med"/>
+                      <a:tailEnd type="none" w="med" len="med"/>
+                    </a:lnL>
+                    <a:lnR w="28575" cap="flat" cmpd="sng" algn="ctr">
+                      <a:solidFill>
+                        <a:schemeClr val="accent4">
+                          <a:lumMod val="60000"/>
+                          <a:lumOff val="40000"/>
+                        </a:schemeClr>
+                      </a:solidFill>
+                      <a:prstDash val="sysDot"/>
+                      <a:round/>
+                      <a:headEnd type="none" w="med" len="med"/>
+                      <a:tailEnd type="none" w="med" len="med"/>
+                    </a:lnR>
+                    <a:lnT w="28575" cap="flat" cmpd="sng" algn="ctr">
+                      <a:noFill/>
+                      <a:prstDash val="solid"/>
+                      <a:round/>
+                      <a:headEnd type="none" w="med" len="med"/>
+                      <a:tailEnd type="none" w="med" len="med"/>
+                    </a:lnT>
+                    <a:lnB w="28575" cap="flat" cmpd="sng" algn="ctr">
+                      <a:solidFill>
+                        <a:schemeClr val="accent4">
+                          <a:lumMod val="60000"/>
+                          <a:lumOff val="40000"/>
+                        </a:schemeClr>
+                      </a:solidFill>
+                      <a:prstDash val="sysDot"/>
+                      <a:round/>
+                      <a:headEnd type="none" w="med" len="med"/>
+                      <a:tailEnd type="none" w="med" len="med"/>
+                    </a:lnB>
+                    <a:lnTlToBr w="12700" cmpd="sng">
+                      <a:noFill/>
+                      <a:prstDash val="solid"/>
+                    </a:lnTlToBr>
+                    <a:lnBlToTr w="12700" cmpd="sng">
+                      <a:noFill/>
+                      <a:prstDash val="solid"/>
+                    </a:lnBlToTr>
+                    <a:pattFill prst="wdUpDiag">
+                      <a:fgClr>
+                        <a:srgbClr val="CAEEFB"/>
+                      </a:fgClr>
+                      <a:bgClr>
+                        <a:schemeClr val="accent5">
+                          <a:lumMod val="20000"/>
+                          <a:lumOff val="80000"/>
+                        </a:schemeClr>
+                      </a:bgClr>
+                    </a:pattFill>
+                  </a:tcPr>
+                </a:tc>
+                <a:tc>
+                  <a:txBody>
+                    <a:bodyPr/>
+                    <a:lstStyle/>
+                    <a:p>
+                      <a:pPr algn="ctr"/>
+                      <a:r>
+                        <a:rPr lang="es-ES" sz="1600" dirty="0"/>
+                        <a:t>0</a:t>
+                      </a:r>
+                      <a:endParaRPr lang="en-GB" sz="1600" dirty="0"/>
+                    </a:p>
+                  </a:txBody>
+                  <a:tcPr marL="82953" marR="82953" marT="41476" marB="41476">
+                    <a:lnL w="28575" cap="flat" cmpd="sng" algn="ctr">
+                      <a:solidFill>
+                        <a:schemeClr val="accent4">
+                          <a:lumMod val="60000"/>
+                          <a:lumOff val="40000"/>
+                        </a:schemeClr>
+                      </a:solidFill>
+                      <a:prstDash val="sysDot"/>
+                      <a:round/>
+                      <a:headEnd type="none" w="med" len="med"/>
+                      <a:tailEnd type="none" w="med" len="med"/>
+                    </a:lnL>
+                    <a:lnR w="28575" cap="flat" cmpd="sng" algn="ctr">
+                      <a:solidFill>
+                        <a:schemeClr val="accent5">
+                          <a:lumMod val="60000"/>
+                          <a:lumOff val="40000"/>
+                        </a:schemeClr>
+                      </a:solidFill>
+                      <a:prstDash val="solid"/>
+                      <a:round/>
+                      <a:headEnd type="none" w="med" len="med"/>
+                      <a:tailEnd type="none" w="med" len="med"/>
+                    </a:lnR>
+                    <a:lnT w="28575" cap="flat" cmpd="sng" algn="ctr">
+                      <a:noFill/>
+                      <a:prstDash val="solid"/>
+                      <a:round/>
+                      <a:headEnd type="none" w="med" len="med"/>
+                      <a:tailEnd type="none" w="med" len="med"/>
+                    </a:lnT>
+                    <a:lnB w="28575" cap="flat" cmpd="sng" algn="ctr">
+                      <a:solidFill>
+                        <a:schemeClr val="accent5">
+                          <a:lumMod val="60000"/>
+                          <a:lumOff val="40000"/>
+                        </a:schemeClr>
+                      </a:solidFill>
+                      <a:prstDash val="solid"/>
+                      <a:round/>
+                      <a:headEnd type="none" w="med" len="med"/>
+                      <a:tailEnd type="none" w="med" len="med"/>
+                    </a:lnB>
+                    <a:lnTlToBr w="12700" cmpd="sng">
+                      <a:noFill/>
+                      <a:prstDash val="solid"/>
+                    </a:lnTlToBr>
+                    <a:lnBlToTr w="12700" cmpd="sng">
+                      <a:noFill/>
+                      <a:prstDash val="solid"/>
+                    </a:lnBlToTr>
+                    <a:solidFill>
+                      <a:schemeClr val="accent5">
+                        <a:lumMod val="20000"/>
+                        <a:lumOff val="80000"/>
+                      </a:schemeClr>
+                    </a:solidFill>
+                  </a:tcPr>
+                </a:tc>
+                <a:tc>
+                  <a:txBody>
+                    <a:bodyPr/>
+                    <a:lstStyle/>
+                    <a:p>
+                      <a:pPr algn="ctr"/>
+                      <a:r>
+                        <a:rPr lang="es-ES" sz="1600" dirty="0"/>
+                        <a:t>…</a:t>
+                      </a:r>
+                      <a:endParaRPr lang="en-GB" sz="1600" dirty="0"/>
+                    </a:p>
+                  </a:txBody>
+                  <a:tcPr marL="82953" marR="82953" marT="41476" marB="41476">
+                    <a:lnL w="28575" cap="flat" cmpd="sng" algn="ctr">
+                      <a:solidFill>
+                        <a:schemeClr val="accent5">
+                          <a:lumMod val="60000"/>
+                          <a:lumOff val="40000"/>
+                        </a:schemeClr>
+                      </a:solidFill>
+                      <a:prstDash val="solid"/>
+                      <a:round/>
+                      <a:headEnd type="none" w="med" len="med"/>
+                      <a:tailEnd type="none" w="med" len="med"/>
+                    </a:lnL>
+                  </a:tcPr>
+                </a:tc>
+                <a:extLst>
+                  <a:ext uri="{0D108BD9-81ED-4DB2-BD59-A6C34878D82A}">
+                    <a16:rowId xmlns:a16="http://schemas.microsoft.com/office/drawing/2014/main" val="2622875697"/>
+                  </a:ext>
+                </a:extLst>
+              </a:tr>
+              <a:tr h="336419">
+                <a:tc>
+                  <a:txBody>
+                    <a:bodyPr/>
+                    <a:lstStyle/>
+                    <a:p>
+                      <a:pPr marL="0" marR="0" lvl="0" indent="0" algn="l" defTabSz="914400" rtl="0" eaLnBrk="1" fontAlgn="auto" latinLnBrk="0" hangingPunct="1">
+                        <a:lnSpc>
+                          <a:spcPct val="100000"/>
+                        </a:lnSpc>
+                        <a:spcBef>
+                          <a:spcPts val="0"/>
+                        </a:spcBef>
+                        <a:spcAft>
+                          <a:spcPts val="0"/>
+                        </a:spcAft>
+                        <a:buClrTx/>
+                        <a:buSzTx/>
+                        <a:buFontTx/>
+                        <a:buNone/>
+                        <a:tabLst/>
+                        <a:defRPr/>
+                      </a:pPr>
+                      <a:r>
+                        <a:rPr lang="es-ES" sz="1600" dirty="0">
+                          <a:latin typeface="Cambria Math" panose="02040503050406030204" pitchFamily="18" charset="0"/>
+                          <a:ea typeface="Cambria Math" panose="02040503050406030204" pitchFamily="18" charset="0"/>
+                        </a:rPr>
+                        <a:t>X</a:t>
+                      </a:r>
+                      <a:r>
+                        <a:rPr lang="es-ES" sz="1600" i="1" baseline="-25000" dirty="0">
+                          <a:latin typeface="Cambria Math" panose="02040503050406030204" pitchFamily="18" charset="0"/>
+                          <a:ea typeface="Cambria Math" panose="02040503050406030204" pitchFamily="18" charset="0"/>
+                        </a:rPr>
+                        <a:t>i = n</a:t>
+                      </a:r>
+                      <a:endParaRPr lang="en-GB" sz="1600" i="1" dirty="0">
+                        <a:latin typeface="Cambria Math" panose="02040503050406030204" pitchFamily="18" charset="0"/>
+                        <a:ea typeface="Cambria Math" panose="02040503050406030204" pitchFamily="18" charset="0"/>
+                      </a:endParaRPr>
+                    </a:p>
+                  </a:txBody>
+                  <a:tcPr marL="82953" marR="82953" marT="41476" marB="41476">
+                    <a:lnL w="12700" cap="flat" cmpd="sng" algn="ctr">
+                      <a:solidFill>
+                        <a:srgbClr val="E7E7E7"/>
+                      </a:solidFill>
+                      <a:prstDash val="solid"/>
+                      <a:round/>
+                      <a:headEnd type="none" w="med" len="med"/>
+                      <a:tailEnd type="none" w="med" len="med"/>
+                    </a:lnL>
+                    <a:lnR>
+                      <a:noFill/>
+                    </a:lnR>
+                    <a:lnT w="12700" cap="flat" cmpd="sng" algn="ctr">
+                      <a:solidFill>
+                        <a:schemeClr val="accent2">
+                          <a:lumMod val="75000"/>
+                        </a:schemeClr>
+                      </a:solidFill>
+                      <a:prstDash val="solid"/>
+                      <a:round/>
+                      <a:headEnd type="none" w="med" len="med"/>
+                      <a:tailEnd type="none" w="med" len="med"/>
+                    </a:lnT>
+                    <a:lnB w="12700" cap="flat" cmpd="sng" algn="ctr">
+                      <a:noFill/>
+                      <a:prstDash val="solid"/>
+                      <a:round/>
+                      <a:headEnd type="none" w="med" len="med"/>
+                      <a:tailEnd type="none" w="med" len="med"/>
+                    </a:lnB>
+                    <a:lnTlToBr w="12700" cmpd="sng">
+                      <a:noFill/>
+                      <a:prstDash val="solid"/>
+                    </a:lnTlToBr>
+                    <a:lnBlToTr w="12700" cmpd="sng">
+                      <a:noFill/>
+                      <a:prstDash val="solid"/>
+                    </a:lnBlToTr>
+                    <a:solidFill>
+                      <a:srgbClr val="E7E7E7"/>
+                    </a:solidFill>
+                  </a:tcPr>
+                </a:tc>
+                <a:tc>
+                  <a:txBody>
+                    <a:bodyPr/>
+                    <a:lstStyle/>
+                    <a:p>
+                      <a:pPr marL="0" marR="0" lvl="0" indent="0" algn="ctr" defTabSz="914400" rtl="0" eaLnBrk="1" fontAlgn="auto" latinLnBrk="0" hangingPunct="1">
+                        <a:lnSpc>
+                          <a:spcPct val="100000"/>
+                        </a:lnSpc>
+                        <a:spcBef>
+                          <a:spcPts val="0"/>
+                        </a:spcBef>
+                        <a:spcAft>
+                          <a:spcPts val="0"/>
+                        </a:spcAft>
+                        <a:buClrTx/>
+                        <a:buSzTx/>
+                        <a:buFontTx/>
+                        <a:buNone/>
+                        <a:tabLst/>
+                        <a:defRPr/>
+                      </a:pPr>
+                      <a:r>
+                        <a:rPr lang="es-ES" sz="1600" kern="1200" dirty="0">
+                          <a:solidFill>
+                            <a:schemeClr val="dk1"/>
+                          </a:solidFill>
+                          <a:latin typeface="+mn-lt"/>
+                          <a:ea typeface="+mn-ea"/>
+                          <a:cs typeface="+mn-cs"/>
+                        </a:rPr>
+                        <a:t>…</a:t>
+                      </a:r>
+                      <a:endParaRPr lang="en-GB" sz="1600" kern="1200" dirty="0">
+                        <a:solidFill>
+                          <a:schemeClr val="dk1"/>
+                        </a:solidFill>
+                        <a:latin typeface="+mn-lt"/>
+                        <a:ea typeface="+mn-ea"/>
+                        <a:cs typeface="+mn-cs"/>
+                      </a:endParaRPr>
+                    </a:p>
+                  </a:txBody>
+                  <a:tcPr marL="82953" marR="82953" marT="41476" marB="41476">
+                    <a:lnL w="12700" cap="flat" cmpd="sng" algn="ctr">
+                      <a:noFill/>
+                      <a:prstDash val="solid"/>
+                      <a:round/>
+                      <a:headEnd type="none" w="med" len="med"/>
+                      <a:tailEnd type="none" w="med" len="med"/>
+                    </a:lnL>
+                    <a:lnR>
+                      <a:noFill/>
+                    </a:lnR>
+                    <a:lnT w="28575" cap="flat" cmpd="sng" algn="ctr">
+                      <a:solidFill>
+                        <a:srgbClr val="215F9A"/>
+                      </a:solidFill>
+                      <a:prstDash val="solid"/>
+                      <a:round/>
+                      <a:headEnd type="none" w="med" len="med"/>
+                      <a:tailEnd type="none" w="med" len="med"/>
+                    </a:lnT>
+                    <a:lnB w="12700" cap="flat" cmpd="sng" algn="ctr">
+                      <a:noFill/>
+                      <a:prstDash val="solid"/>
+                      <a:round/>
+                      <a:headEnd type="none" w="med" len="med"/>
+                      <a:tailEnd type="none" w="med" len="med"/>
+                    </a:lnB>
+                    <a:lnTlToBr w="12700" cmpd="sng">
+                      <a:noFill/>
+                      <a:prstDash val="solid"/>
+                    </a:lnTlToBr>
+                    <a:lnBlToTr w="12700" cmpd="sng">
+                      <a:noFill/>
+                      <a:prstDash val="solid"/>
+                    </a:lnBlToTr>
+                    <a:solidFill>
+                      <a:srgbClr val="E7E7E7"/>
+                    </a:solidFill>
+                  </a:tcPr>
+                </a:tc>
+                <a:tc>
+                  <a:txBody>
+                    <a:bodyPr/>
+                    <a:lstStyle/>
+                    <a:p>
+                      <a:pPr algn="ctr"/>
+                      <a:r>
+                        <a:rPr lang="es-ES" sz="1600" dirty="0"/>
+                        <a:t>…</a:t>
+                      </a:r>
+                      <a:endParaRPr lang="en-GB" sz="1600" dirty="0"/>
+                    </a:p>
+                  </a:txBody>
+                  <a:tcPr marL="82953" marR="82953" marT="41476" marB="41476">
+                    <a:lnL>
+                      <a:noFill/>
+                    </a:lnL>
+                    <a:lnT w="28575" cap="flat" cmpd="sng" algn="ctr">
+                      <a:solidFill>
+                        <a:srgbClr val="215F9A"/>
+                      </a:solidFill>
+                      <a:prstDash val="sysDot"/>
+                      <a:round/>
+                      <a:headEnd type="none" w="med" len="med"/>
+                      <a:tailEnd type="none" w="med" len="med"/>
+                    </a:lnT>
+                  </a:tcPr>
+                </a:tc>
+                <a:tc>
+                  <a:txBody>
+                    <a:bodyPr/>
+                    <a:lstStyle/>
+                    <a:p>
+                      <a:pPr algn="ctr"/>
+                      <a:r>
+                        <a:rPr lang="es-ES" sz="1600" dirty="0"/>
+                        <a:t>...</a:t>
+                      </a:r>
+                      <a:endParaRPr lang="en-GB" sz="1600" dirty="0"/>
+                    </a:p>
+                  </a:txBody>
+                  <a:tcPr marL="82953" marR="82953" marT="41476" marB="41476">
+                    <a:lnT w="28575" cap="flat" cmpd="sng" algn="ctr">
+                      <a:solidFill>
+                        <a:schemeClr val="accent4">
+                          <a:lumMod val="60000"/>
+                          <a:lumOff val="40000"/>
+                        </a:schemeClr>
+                      </a:solidFill>
+                      <a:prstDash val="sysDot"/>
+                      <a:round/>
+                      <a:headEnd type="none" w="med" len="med"/>
+                      <a:tailEnd type="none" w="med" len="med"/>
+                    </a:lnT>
+                  </a:tcPr>
+                </a:tc>
+                <a:tc>
+                  <a:txBody>
+                    <a:bodyPr/>
+                    <a:lstStyle/>
+                    <a:p>
+                      <a:pPr algn="ctr"/>
+                      <a:r>
+                        <a:rPr lang="es-ES" sz="1600" dirty="0"/>
+                        <a:t>…</a:t>
+                      </a:r>
+                      <a:endParaRPr lang="en-GB" sz="1600" dirty="0"/>
+                    </a:p>
+                  </a:txBody>
+                  <a:tcPr marL="82953" marR="82953" marT="41476" marB="41476">
+                    <a:lnT w="28575" cap="flat" cmpd="sng" algn="ctr">
+                      <a:solidFill>
+                        <a:schemeClr val="accent5">
+                          <a:lumMod val="60000"/>
+                          <a:lumOff val="40000"/>
+                        </a:schemeClr>
+                      </a:solidFill>
+                      <a:prstDash val="solid"/>
+                      <a:round/>
+                      <a:headEnd type="none" w="med" len="med"/>
+                      <a:tailEnd type="none" w="med" len="med"/>
+                    </a:lnT>
+                  </a:tcPr>
+                </a:tc>
+                <a:tc>
+                  <a:txBody>
+                    <a:bodyPr/>
+                    <a:lstStyle/>
+                    <a:p>
+                      <a:pPr algn="ctr"/>
+                      <a:r>
+                        <a:rPr lang="es-ES" sz="1600" b="1" dirty="0"/>
+                        <a:t>…</a:t>
+                      </a:r>
+                      <a:endParaRPr lang="en-GB" sz="1600" b="1" dirty="0"/>
+                    </a:p>
+                  </a:txBody>
+                  <a:tcPr marL="82953" marR="82953" marT="41476" marB="41476"/>
+                </a:tc>
+                <a:extLst>
+                  <a:ext uri="{0D108BD9-81ED-4DB2-BD59-A6C34878D82A}">
+                    <a16:rowId xmlns:a16="http://schemas.microsoft.com/office/drawing/2014/main" val="3961091715"/>
+                  </a:ext>
+                </a:extLst>
+              </a:tr>
+            </a:tbl>
+          </a:graphicData>
+        </a:graphic>
+      </p:graphicFrame>
+      <p:grpSp>
+        <p:nvGrpSpPr>
+          <p:cNvPr id="145" name="Grupo 144">
+            <a:extLst>
+              <a:ext uri="{FF2B5EF4-FFF2-40B4-BE49-F238E27FC236}">
+                <a16:creationId xmlns:a16="http://schemas.microsoft.com/office/drawing/2014/main" id="{1A7EBB2D-D02F-C553-2948-CFCD730177CB}"/>
+              </a:ext>
+            </a:extLst>
+          </p:cNvPr>
+          <p:cNvGrpSpPr/>
+          <p:nvPr/>
+        </p:nvGrpSpPr>
+        <p:grpSpPr>
+          <a:xfrm>
+            <a:off x="3964594" y="40031"/>
+            <a:ext cx="1319635" cy="500594"/>
+            <a:chOff x="3749309" y="327234"/>
+            <a:chExt cx="1454653" cy="551813"/>
+          </a:xfrm>
+        </p:grpSpPr>
+        <p:sp>
+          <p:nvSpPr>
+            <p:cNvPr id="71" name="CuadroTexto 70">
+              <a:extLst>
+                <a:ext uri="{FF2B5EF4-FFF2-40B4-BE49-F238E27FC236}">
+                  <a16:creationId xmlns:a16="http://schemas.microsoft.com/office/drawing/2014/main" id="{86895316-A4B3-1068-F23C-8BC42287582A}"/>
+                </a:ext>
+              </a:extLst>
+            </p:cNvPr>
+            <p:cNvSpPr txBox="1"/>
+            <p:nvPr/>
+          </p:nvSpPr>
+          <p:spPr>
+            <a:xfrm>
+              <a:off x="3749309" y="592508"/>
+              <a:ext cx="935103" cy="286539"/>
+            </a:xfrm>
+            <a:prstGeom prst="rect">
+              <a:avLst/>
+            </a:prstGeom>
+            <a:noFill/>
+          </p:spPr>
+          <p:txBody>
+            <a:bodyPr wrap="none" rtlCol="0">
+              <a:spAutoFit/>
+            </a:bodyPr>
+            <a:lstStyle/>
+            <a:p>
+              <a:r>
+                <a:rPr lang="es-ES" sz="1089" b="1" dirty="0" err="1">
+                  <a:solidFill>
+                    <a:schemeClr val="bg1"/>
+                  </a:solidFill>
+                </a:rPr>
+                <a:t>Molecules</a:t>
+              </a:r>
+              <a:endParaRPr lang="en-GB" sz="1089" b="1" dirty="0">
+                <a:solidFill>
+                  <a:schemeClr val="bg1"/>
+                </a:solidFill>
+              </a:endParaRPr>
+            </a:p>
+          </p:txBody>
+        </p:sp>
+        <p:sp>
+          <p:nvSpPr>
+            <p:cNvPr id="136" name="CuadroTexto 135">
+              <a:extLst>
+                <a:ext uri="{FF2B5EF4-FFF2-40B4-BE49-F238E27FC236}">
+                  <a16:creationId xmlns:a16="http://schemas.microsoft.com/office/drawing/2014/main" id="{2B7693C4-39C1-14F9-27CB-137CF7A38BD6}"/>
+                </a:ext>
+              </a:extLst>
+            </p:cNvPr>
+            <p:cNvSpPr txBox="1"/>
+            <p:nvPr/>
+          </p:nvSpPr>
+          <p:spPr>
+            <a:xfrm>
+              <a:off x="4381947" y="327234"/>
+              <a:ext cx="822015" cy="286539"/>
+            </a:xfrm>
+            <a:prstGeom prst="rect">
+              <a:avLst/>
+            </a:prstGeom>
+            <a:noFill/>
+          </p:spPr>
+          <p:txBody>
+            <a:bodyPr wrap="none" rtlCol="0">
+              <a:spAutoFit/>
+            </a:bodyPr>
+            <a:lstStyle/>
+            <a:p>
+              <a:r>
+                <a:rPr lang="es-ES" sz="1089" b="1" dirty="0" err="1">
+                  <a:solidFill>
+                    <a:schemeClr val="bg1"/>
+                  </a:solidFill>
+                </a:rPr>
+                <a:t>Features</a:t>
+              </a:r>
+              <a:endParaRPr lang="en-GB" sz="1089" b="1" dirty="0">
+                <a:solidFill>
+                  <a:schemeClr val="bg1"/>
+                </a:solidFill>
+              </a:endParaRPr>
+            </a:p>
+          </p:txBody>
+        </p:sp>
+      </p:grpSp>
+      <p:grpSp>
+        <p:nvGrpSpPr>
+          <p:cNvPr id="142" name="Grupo 141">
+            <a:extLst>
+              <a:ext uri="{FF2B5EF4-FFF2-40B4-BE49-F238E27FC236}">
+                <a16:creationId xmlns:a16="http://schemas.microsoft.com/office/drawing/2014/main" id="{47728959-55F9-3DDB-9079-45C47F8645E6}"/>
+              </a:ext>
+            </a:extLst>
+          </p:cNvPr>
+          <p:cNvGrpSpPr/>
+          <p:nvPr/>
+        </p:nvGrpSpPr>
+        <p:grpSpPr>
+          <a:xfrm>
+            <a:off x="4104852" y="4740464"/>
+            <a:ext cx="475005" cy="375434"/>
+            <a:chOff x="8327714" y="4483934"/>
+            <a:chExt cx="523605" cy="413846"/>
+          </a:xfrm>
+        </p:grpSpPr>
+        <p:sp>
+          <p:nvSpPr>
+            <p:cNvPr id="143" name="Elipse 142">
+              <a:extLst>
+                <a:ext uri="{FF2B5EF4-FFF2-40B4-BE49-F238E27FC236}">
+                  <a16:creationId xmlns:a16="http://schemas.microsoft.com/office/drawing/2014/main" id="{62784079-6B89-09EE-8B97-8B9FB95DC275}"/>
+                </a:ext>
+              </a:extLst>
+            </p:cNvPr>
+            <p:cNvSpPr/>
+            <p:nvPr/>
+          </p:nvSpPr>
+          <p:spPr>
+            <a:xfrm>
+              <a:off x="8364469" y="4483934"/>
+              <a:ext cx="423932" cy="413846"/>
+            </a:xfrm>
+            <a:prstGeom prst="ellipse">
+              <a:avLst/>
+            </a:prstGeom>
+            <a:solidFill>
+              <a:srgbClr val="FFC000"/>
+            </a:solidFill>
+            <a:ln>
+              <a:solidFill>
+                <a:schemeClr val="accent2">
+                  <a:lumMod val="50000"/>
+                </a:schemeClr>
+              </a:solidFill>
+            </a:ln>
+          </p:spPr>
+          <p:style>
+            <a:lnRef idx="2">
+              <a:schemeClr val="accent1">
+                <a:shade val="15000"/>
+              </a:schemeClr>
+            </a:lnRef>
+            <a:fillRef idx="1">
+              <a:schemeClr val="accent1"/>
+            </a:fillRef>
+            <a:effectRef idx="0">
+              <a:schemeClr val="accent1"/>
+            </a:effectRef>
+            <a:fontRef idx="minor">
+              <a:schemeClr val="lt1"/>
+            </a:fontRef>
+          </p:style>
+          <p:txBody>
+            <a:bodyPr rtlCol="0" anchor="ctr"/>
+            <a:lstStyle/>
+            <a:p>
+              <a:pPr algn="ctr"/>
+              <a:endParaRPr lang="en-GB" sz="726" dirty="0">
+                <a:solidFill>
+                  <a:schemeClr val="tx1"/>
+                </a:solidFill>
+              </a:endParaRPr>
+            </a:p>
+          </p:txBody>
+        </p:sp>
+        <p:sp>
+          <p:nvSpPr>
+            <p:cNvPr id="144" name="CuadroTexto 143">
+              <a:extLst>
+                <a:ext uri="{FF2B5EF4-FFF2-40B4-BE49-F238E27FC236}">
+                  <a16:creationId xmlns:a16="http://schemas.microsoft.com/office/drawing/2014/main" id="{C071F7BB-D7AA-C61C-5DDF-C48C06328E81}"/>
+                </a:ext>
+              </a:extLst>
+            </p:cNvPr>
+            <p:cNvSpPr txBox="1"/>
+            <p:nvPr/>
+          </p:nvSpPr>
+          <p:spPr>
+            <a:xfrm>
+              <a:off x="8327714" y="4514414"/>
+              <a:ext cx="523605" cy="317214"/>
+            </a:xfrm>
+            <a:prstGeom prst="rect">
+              <a:avLst/>
+            </a:prstGeom>
+            <a:noFill/>
+          </p:spPr>
+          <p:txBody>
+            <a:bodyPr wrap="square" rtlCol="0">
+              <a:spAutoFit/>
+            </a:bodyPr>
+            <a:lstStyle/>
+            <a:p>
+              <a:r>
+                <a:rPr lang="es-ES" sz="1270" b="1" dirty="0" err="1">
+                  <a:latin typeface="Cambria Math" panose="02040503050406030204" pitchFamily="18" charset="0"/>
+                  <a:ea typeface="Cambria Math" panose="02040503050406030204" pitchFamily="18" charset="0"/>
+                </a:rPr>
+                <a:t>X</a:t>
+              </a:r>
+              <a:r>
+                <a:rPr lang="es-ES" sz="1270" baseline="-25000" dirty="0" err="1">
+                  <a:latin typeface="Cambria Math" panose="02040503050406030204" pitchFamily="18" charset="0"/>
+                  <a:ea typeface="Cambria Math" panose="02040503050406030204" pitchFamily="18" charset="0"/>
+                </a:rPr>
+                <a:t>new</a:t>
+              </a:r>
+              <a:endParaRPr lang="en-GB" sz="1270" baseline="-25000" dirty="0">
+                <a:latin typeface="Cambria Math" panose="02040503050406030204" pitchFamily="18" charset="0"/>
+                <a:ea typeface="Cambria Math" panose="02040503050406030204" pitchFamily="18" charset="0"/>
+              </a:endParaRPr>
+            </a:p>
+          </p:txBody>
+        </p:sp>
+      </p:grpSp>
+      <p:grpSp>
+        <p:nvGrpSpPr>
+          <p:cNvPr id="4" name="Group 3">
+            <a:extLst>
+              <a:ext uri="{FF2B5EF4-FFF2-40B4-BE49-F238E27FC236}">
+                <a16:creationId xmlns:a16="http://schemas.microsoft.com/office/drawing/2014/main" id="{F92A9B17-6DEA-E390-2BE9-6A44C1AEA01F}"/>
+              </a:ext>
+            </a:extLst>
+          </p:cNvPr>
+          <p:cNvGrpSpPr/>
+          <p:nvPr/>
+        </p:nvGrpSpPr>
+        <p:grpSpPr>
+          <a:xfrm>
+            <a:off x="4184565" y="6282196"/>
+            <a:ext cx="7176718" cy="464237"/>
+            <a:chOff x="4276276" y="6249764"/>
+            <a:chExt cx="7176718" cy="464237"/>
+          </a:xfrm>
+        </p:grpSpPr>
+        <p:sp>
+          <p:nvSpPr>
+            <p:cNvPr id="60" name="CuadroTexto 59">
+              <a:extLst>
+                <a:ext uri="{FF2B5EF4-FFF2-40B4-BE49-F238E27FC236}">
+                  <a16:creationId xmlns:a16="http://schemas.microsoft.com/office/drawing/2014/main" id="{F787DB3B-2BDB-2CA7-0527-B550B89DDE78}"/>
+                </a:ext>
+              </a:extLst>
+            </p:cNvPr>
+            <p:cNvSpPr txBox="1"/>
+            <p:nvPr/>
+          </p:nvSpPr>
+          <p:spPr>
+            <a:xfrm>
+              <a:off x="4276276" y="6249764"/>
+              <a:ext cx="7176718" cy="430759"/>
+            </a:xfrm>
+            <a:prstGeom prst="rect">
+              <a:avLst/>
+            </a:prstGeom>
+            <a:noFill/>
+          </p:spPr>
+          <p:txBody>
+            <a:bodyPr wrap="square" rtlCol="0">
+              <a:spAutoFit/>
+            </a:bodyPr>
+            <a:lstStyle/>
+            <a:p>
+              <a:pPr>
+                <a:lnSpc>
+                  <a:spcPct val="150000"/>
+                </a:lnSpc>
+              </a:pPr>
+              <a:r>
+                <a:rPr lang="es-ES" sz="1633" dirty="0"/>
+                <a:t>If </a:t>
+              </a:r>
+              <a:r>
+                <a:rPr lang="es-ES" sz="1633" dirty="0" err="1"/>
+                <a:t>aggregated</a:t>
+              </a:r>
+              <a:r>
+                <a:rPr lang="es-ES" sz="1633" dirty="0"/>
+                <a:t> </a:t>
+              </a:r>
+              <a:r>
+                <a:rPr lang="es-ES" sz="1633" b="1" dirty="0">
+                  <a:latin typeface="Cambria Math" panose="02040503050406030204" pitchFamily="18" charset="0"/>
+                  <a:ea typeface="Cambria Math" panose="02040503050406030204" pitchFamily="18" charset="0"/>
+                </a:rPr>
+                <a:t>P</a:t>
+              </a:r>
+              <a:r>
+                <a:rPr lang="es-ES" sz="1633" dirty="0"/>
+                <a:t> &gt; </a:t>
+              </a:r>
+              <a:r>
+                <a:rPr lang="es-ES" sz="1633" dirty="0" err="1"/>
+                <a:t>threshold</a:t>
+              </a:r>
+              <a:r>
+                <a:rPr lang="es-ES" sz="1633" dirty="0"/>
+                <a:t>* </a:t>
+              </a:r>
+              <a:r>
+                <a:rPr lang="es-ES" sz="1633" dirty="0" err="1"/>
+                <a:t>then</a:t>
+              </a:r>
+              <a:r>
+                <a:rPr lang="es-ES" sz="1633" dirty="0"/>
+                <a:t>            </a:t>
+              </a:r>
+              <a:r>
+                <a:rPr lang="es-ES" sz="1633" dirty="0" err="1"/>
+                <a:t>is</a:t>
+              </a:r>
+              <a:r>
+                <a:rPr lang="es-ES" sz="1633" dirty="0"/>
+                <a:t> </a:t>
+              </a:r>
+              <a:r>
+                <a:rPr lang="es-ES" sz="1633" dirty="0" err="1"/>
+                <a:t>predicted</a:t>
+              </a:r>
+              <a:r>
+                <a:rPr lang="es-ES" sz="1633" dirty="0"/>
+                <a:t> </a:t>
+              </a:r>
+              <a:r>
+                <a:rPr lang="es-ES" sz="1633" dirty="0" err="1"/>
+                <a:t>to</a:t>
+              </a:r>
+              <a:r>
+                <a:rPr lang="es-ES" sz="1633" dirty="0"/>
+                <a:t> be </a:t>
+              </a:r>
+              <a:r>
+                <a:rPr lang="es-ES" sz="1633" dirty="0" err="1"/>
+                <a:t>metabolized</a:t>
+              </a:r>
+              <a:r>
+                <a:rPr lang="es-ES" sz="1633" dirty="0"/>
+                <a:t> </a:t>
+              </a:r>
+              <a:r>
+                <a:rPr lang="es-ES" sz="1633" dirty="0" err="1"/>
+                <a:t>by</a:t>
+              </a:r>
+              <a:r>
+                <a:rPr lang="es-ES" sz="1633" dirty="0"/>
+                <a:t> CYP</a:t>
+              </a:r>
+              <a:r>
+                <a:rPr lang="es-ES" sz="1633" baseline="-25000" dirty="0"/>
+                <a:t>XYZ</a:t>
+              </a:r>
+              <a:endParaRPr lang="en-GB" sz="1633" baseline="-25000" dirty="0"/>
+            </a:p>
+          </p:txBody>
+        </p:sp>
+        <p:grpSp>
+          <p:nvGrpSpPr>
+            <p:cNvPr id="146" name="Grupo 145">
+              <a:extLst>
+                <a:ext uri="{FF2B5EF4-FFF2-40B4-BE49-F238E27FC236}">
+                  <a16:creationId xmlns:a16="http://schemas.microsoft.com/office/drawing/2014/main" id="{FEA710FB-8983-221B-EDFF-379BBEA50CAE}"/>
+                </a:ext>
+              </a:extLst>
+            </p:cNvPr>
+            <p:cNvGrpSpPr/>
+            <p:nvPr/>
+          </p:nvGrpSpPr>
+          <p:grpSpPr>
+            <a:xfrm>
+              <a:off x="7293863" y="6338567"/>
+              <a:ext cx="475005" cy="375434"/>
+              <a:chOff x="8327714" y="4483934"/>
+              <a:chExt cx="523605" cy="413846"/>
+            </a:xfrm>
+          </p:grpSpPr>
+          <p:sp>
+            <p:nvSpPr>
+              <p:cNvPr id="147" name="Elipse 146">
+                <a:extLst>
+                  <a:ext uri="{FF2B5EF4-FFF2-40B4-BE49-F238E27FC236}">
+                    <a16:creationId xmlns:a16="http://schemas.microsoft.com/office/drawing/2014/main" id="{4D55DC89-0320-0079-1A7C-8FA0B4C09D41}"/>
+                  </a:ext>
+                </a:extLst>
+              </p:cNvPr>
+              <p:cNvSpPr/>
+              <p:nvPr/>
+            </p:nvSpPr>
+            <p:spPr>
+              <a:xfrm>
+                <a:off x="8364469" y="4483934"/>
+                <a:ext cx="423932" cy="413846"/>
+              </a:xfrm>
+              <a:prstGeom prst="ellipse">
+                <a:avLst/>
+              </a:prstGeom>
+              <a:solidFill>
+                <a:srgbClr val="FFC000"/>
+              </a:solidFill>
+              <a:ln>
+                <a:solidFill>
+                  <a:schemeClr val="accent2">
+                    <a:lumMod val="50000"/>
+                  </a:schemeClr>
+                </a:solidFill>
+              </a:ln>
+            </p:spPr>
+            <p:style>
+              <a:lnRef idx="2">
+                <a:schemeClr val="accent1">
+                  <a:shade val="15000"/>
+                </a:schemeClr>
+              </a:lnRef>
+              <a:fillRef idx="1">
+                <a:schemeClr val="accent1"/>
+              </a:fillRef>
+              <a:effectRef idx="0">
+                <a:schemeClr val="accent1"/>
+              </a:effectRef>
+              <a:fontRef idx="minor">
+                <a:schemeClr val="lt1"/>
+              </a:fontRef>
+            </p:style>
+            <p:txBody>
+              <a:bodyPr rtlCol="0" anchor="ctr"/>
+              <a:lstStyle/>
+              <a:p>
+                <a:pPr algn="ctr"/>
+                <a:endParaRPr lang="en-GB" sz="726" dirty="0">
+                  <a:solidFill>
+                    <a:schemeClr val="tx1"/>
+                  </a:solidFill>
+                </a:endParaRPr>
+              </a:p>
+            </p:txBody>
+          </p:sp>
+          <p:sp>
+            <p:nvSpPr>
+              <p:cNvPr id="148" name="CuadroTexto 147">
+                <a:extLst>
+                  <a:ext uri="{FF2B5EF4-FFF2-40B4-BE49-F238E27FC236}">
+                    <a16:creationId xmlns:a16="http://schemas.microsoft.com/office/drawing/2014/main" id="{BC2C57CC-7BD3-65A8-DA7A-5743F4E4E688}"/>
+                  </a:ext>
+                </a:extLst>
+              </p:cNvPr>
+              <p:cNvSpPr txBox="1"/>
+              <p:nvPr/>
+            </p:nvSpPr>
+            <p:spPr>
+              <a:xfrm>
+                <a:off x="8327714" y="4514414"/>
+                <a:ext cx="523605" cy="317214"/>
+              </a:xfrm>
+              <a:prstGeom prst="rect">
+                <a:avLst/>
+              </a:prstGeom>
+              <a:noFill/>
+            </p:spPr>
+            <p:txBody>
+              <a:bodyPr wrap="square" rtlCol="0">
+                <a:spAutoFit/>
+              </a:bodyPr>
+              <a:lstStyle/>
+              <a:p>
+                <a:r>
+                  <a:rPr lang="es-ES" sz="1270" b="1" dirty="0" err="1">
+                    <a:latin typeface="Cambria Math" panose="02040503050406030204" pitchFamily="18" charset="0"/>
+                    <a:ea typeface="Cambria Math" panose="02040503050406030204" pitchFamily="18" charset="0"/>
+                  </a:rPr>
+                  <a:t>X</a:t>
+                </a:r>
+                <a:r>
+                  <a:rPr lang="es-ES" sz="1270" baseline="-25000" dirty="0" err="1">
+                    <a:latin typeface="Cambria Math" panose="02040503050406030204" pitchFamily="18" charset="0"/>
+                    <a:ea typeface="Cambria Math" panose="02040503050406030204" pitchFamily="18" charset="0"/>
+                  </a:rPr>
+                  <a:t>new</a:t>
+                </a:r>
+                <a:endParaRPr lang="en-GB" sz="1270" baseline="-25000" dirty="0">
+                  <a:latin typeface="Cambria Math" panose="02040503050406030204" pitchFamily="18" charset="0"/>
+                  <a:ea typeface="Cambria Math" panose="02040503050406030204" pitchFamily="18" charset="0"/>
+                </a:endParaRPr>
+              </a:p>
+            </p:txBody>
+          </p:sp>
+        </p:grpSp>
+      </p:grpSp>
+      <p:sp>
+        <p:nvSpPr>
+          <p:cNvPr id="21" name="CuadroTexto 20">
+            <a:extLst>
+              <a:ext uri="{FF2B5EF4-FFF2-40B4-BE49-F238E27FC236}">
+                <a16:creationId xmlns:a16="http://schemas.microsoft.com/office/drawing/2014/main" id="{A1421F32-ABB0-604D-EF36-CE15D9DFC8AA}"/>
+              </a:ext>
+            </a:extLst>
+          </p:cNvPr>
+          <p:cNvSpPr txBox="1"/>
+          <p:nvPr/>
+        </p:nvSpPr>
+        <p:spPr>
+          <a:xfrm>
+            <a:off x="1096112" y="2604593"/>
+            <a:ext cx="2801493" cy="343620"/>
+          </a:xfrm>
+          <a:prstGeom prst="rect">
+            <a:avLst/>
+          </a:prstGeom>
+          <a:noFill/>
+          <a:ln>
+            <a:solidFill>
+              <a:schemeClr val="bg1"/>
+            </a:solidFill>
+          </a:ln>
+        </p:spPr>
+        <p:txBody>
+          <a:bodyPr wrap="square" rtlCol="0">
+            <a:spAutoFit/>
+          </a:bodyPr>
+          <a:lstStyle/>
+          <a:p>
+            <a:r>
+              <a:rPr lang="es-ES" sz="1633" i="1" u="sng" dirty="0"/>
+              <a:t>2. </a:t>
+            </a:r>
+            <a:r>
+              <a:rPr lang="es-ES" sz="1633" i="1" u="sng" dirty="0" err="1"/>
+              <a:t>Multiple</a:t>
+            </a:r>
+            <a:r>
+              <a:rPr lang="es-ES" sz="1633" i="1" u="sng" dirty="0"/>
+              <a:t> </a:t>
+            </a:r>
+            <a:r>
+              <a:rPr lang="es-ES" sz="1633" i="1" u="sng" dirty="0" err="1"/>
+              <a:t>tree</a:t>
+            </a:r>
+            <a:r>
+              <a:rPr lang="es-ES" sz="1633" i="1" u="sng" dirty="0"/>
+              <a:t> </a:t>
+            </a:r>
+            <a:r>
+              <a:rPr lang="es-ES" sz="1633" i="1" u="sng" dirty="0" err="1"/>
+              <a:t>construction</a:t>
+            </a:r>
+            <a:endParaRPr lang="en-GB" sz="1633" i="1" u="sng" dirty="0"/>
+          </a:p>
+        </p:txBody>
+      </p:sp>
+      <p:cxnSp>
+        <p:nvCxnSpPr>
+          <p:cNvPr id="5" name="Conector recto 21">
+            <a:extLst>
+              <a:ext uri="{FF2B5EF4-FFF2-40B4-BE49-F238E27FC236}">
+                <a16:creationId xmlns:a16="http://schemas.microsoft.com/office/drawing/2014/main" id="{48B76290-2B4F-3601-8C48-D61D766B8CD3}"/>
+              </a:ext>
+            </a:extLst>
+          </p:cNvPr>
+          <p:cNvCxnSpPr>
+            <a:cxnSpLocks/>
+          </p:cNvCxnSpPr>
+          <p:nvPr/>
+        </p:nvCxnSpPr>
+        <p:spPr>
+          <a:xfrm>
+            <a:off x="-53171" y="2094868"/>
+            <a:ext cx="12192000" cy="0"/>
+          </a:xfrm>
+          <a:prstGeom prst="line">
+            <a:avLst/>
+          </a:prstGeom>
+          <a:ln w="38100"/>
+        </p:spPr>
+        <p:style>
+          <a:lnRef idx="2">
+            <a:schemeClr val="dk1"/>
+          </a:lnRef>
+          <a:fillRef idx="0">
+            <a:schemeClr val="dk1"/>
+          </a:fillRef>
+          <a:effectRef idx="1">
+            <a:schemeClr val="dk1"/>
+          </a:effectRef>
+          <a:fontRef idx="minor">
+            <a:schemeClr val="tx1"/>
+          </a:fontRef>
+        </p:style>
+      </p:cxnSp>
+      <p:cxnSp>
+        <p:nvCxnSpPr>
+          <p:cNvPr id="6" name="Conector recto 21">
+            <a:extLst>
+              <a:ext uri="{FF2B5EF4-FFF2-40B4-BE49-F238E27FC236}">
+                <a16:creationId xmlns:a16="http://schemas.microsoft.com/office/drawing/2014/main" id="{FA4C0D99-2CA2-5392-930C-89FA32503DAA}"/>
+              </a:ext>
+            </a:extLst>
+          </p:cNvPr>
+          <p:cNvCxnSpPr>
+            <a:cxnSpLocks/>
+          </p:cNvCxnSpPr>
+          <p:nvPr/>
+        </p:nvCxnSpPr>
+        <p:spPr>
+          <a:xfrm>
+            <a:off x="-18289" y="4656070"/>
+            <a:ext cx="12192000" cy="0"/>
+          </a:xfrm>
+          <a:prstGeom prst="line">
+            <a:avLst/>
+          </a:prstGeom>
+          <a:ln w="38100"/>
+        </p:spPr>
+        <p:style>
+          <a:lnRef idx="2">
+            <a:schemeClr val="dk1"/>
+          </a:lnRef>
+          <a:fillRef idx="0">
+            <a:schemeClr val="dk1"/>
+          </a:fillRef>
+          <a:effectRef idx="1">
+            <a:schemeClr val="dk1"/>
+          </a:effectRef>
+          <a:fontRef idx="minor">
+            <a:schemeClr val="tx1"/>
+          </a:fontRef>
+        </p:style>
+      </p:cxnSp>
+      <p:sp>
+        <p:nvSpPr>
+          <p:cNvPr id="8" name="Text Box 1">
+            <a:extLst>
+              <a:ext uri="{FF2B5EF4-FFF2-40B4-BE49-F238E27FC236}">
+                <a16:creationId xmlns:a16="http://schemas.microsoft.com/office/drawing/2014/main" id="{736A741D-AA40-0B27-E915-FD042868CBDA}"/>
+              </a:ext>
+            </a:extLst>
+          </p:cNvPr>
+          <p:cNvSpPr txBox="1"/>
+          <p:nvPr/>
+        </p:nvSpPr>
+        <p:spPr>
+          <a:xfrm>
+            <a:off x="466002" y="-10186"/>
+            <a:ext cx="630110" cy="461179"/>
+          </a:xfrm>
+          <a:prstGeom prst="rect">
+            <a:avLst/>
+          </a:prstGeom>
+          <a:noFill/>
+          <a:ln>
+            <a:noFill/>
+          </a:ln>
+        </p:spPr>
+        <p:txBody>
+          <a:bodyPr rot="0" spcFirstLastPara="0" vert="horz" wrap="none" lIns="91440" tIns="45720" rIns="91440" bIns="45720" numCol="1" spcCol="0" rtlCol="0" fromWordArt="0" anchor="t" anchorCtr="0" forceAA="0" compatLnSpc="1">
+            <a:prstTxWarp prst="textNoShape">
+              <a:avLst/>
+            </a:prstTxWarp>
+            <a:noAutofit/>
+          </a:bodyPr>
+          <a:lstStyle/>
+          <a:p>
+            <a:pPr algn="ctr">
+              <a:lnSpc>
+                <a:spcPct val="107000"/>
+              </a:lnSpc>
+              <a:spcAft>
+                <a:spcPts val="800"/>
+              </a:spcAft>
+              <a:buNone/>
+            </a:pPr>
+            <a:r>
+              <a:rPr lang="es-ES" sz="2000" b="1" dirty="0">
+                <a:ln>
+                  <a:noFill/>
+                </a:ln>
+                <a:solidFill>
+                  <a:srgbClr val="000000"/>
+                </a:solidFill>
+                <a:effectLst>
+                  <a:outerShdw blurRad="38100" dist="19050" dir="2700000" algn="tl">
+                    <a:schemeClr val="dk1">
+                      <a:alpha val="40000"/>
+                    </a:schemeClr>
+                  </a:outerShdw>
+                </a:effectLst>
+                <a:latin typeface="Calibri" panose="020F0502020204030204" pitchFamily="34" charset="0"/>
+                <a:ea typeface="Times New Roman" panose="02020603050405020304" pitchFamily="18" charset="0"/>
+                <a:cs typeface="Times New Roman" panose="02020603050405020304" pitchFamily="18" charset="0"/>
+              </a:rPr>
+              <a:t>A</a:t>
+            </a:r>
+            <a:endParaRPr lang="en-GB" sz="1100" b="1" dirty="0">
+              <a:effectLst/>
+              <a:latin typeface="Calibri" panose="020F0502020204030204" pitchFamily="34" charset="0"/>
+              <a:ea typeface="Times New Roman" panose="02020603050405020304" pitchFamily="18" charset="0"/>
+              <a:cs typeface="Times New Roman" panose="02020603050405020304" pitchFamily="18" charset="0"/>
+            </a:endParaRPr>
+          </a:p>
+        </p:txBody>
+      </p:sp>
+      <p:sp>
+        <p:nvSpPr>
+          <p:cNvPr id="10" name="Text Box 1">
+            <a:extLst>
+              <a:ext uri="{FF2B5EF4-FFF2-40B4-BE49-F238E27FC236}">
+                <a16:creationId xmlns:a16="http://schemas.microsoft.com/office/drawing/2014/main" id="{80E35638-3CFF-482B-90A7-211E9AA221A3}"/>
+              </a:ext>
+            </a:extLst>
+          </p:cNvPr>
+          <p:cNvSpPr txBox="1"/>
+          <p:nvPr/>
+        </p:nvSpPr>
+        <p:spPr>
+          <a:xfrm>
+            <a:off x="466002" y="2114524"/>
+            <a:ext cx="630110" cy="461179"/>
+          </a:xfrm>
+          <a:prstGeom prst="rect">
+            <a:avLst/>
+          </a:prstGeom>
+          <a:noFill/>
+          <a:ln>
+            <a:noFill/>
+          </a:ln>
+        </p:spPr>
+        <p:txBody>
+          <a:bodyPr rot="0" spcFirstLastPara="0" vert="horz" wrap="none" lIns="91440" tIns="45720" rIns="91440" bIns="45720" numCol="1" spcCol="0" rtlCol="0" fromWordArt="0" anchor="t" anchorCtr="0" forceAA="0" compatLnSpc="1">
+            <a:prstTxWarp prst="textNoShape">
+              <a:avLst/>
+            </a:prstTxWarp>
+            <a:noAutofit/>
+          </a:bodyPr>
+          <a:lstStyle/>
+          <a:p>
+            <a:pPr algn="ctr">
+              <a:lnSpc>
+                <a:spcPct val="107000"/>
+              </a:lnSpc>
+              <a:spcAft>
+                <a:spcPts val="800"/>
+              </a:spcAft>
+              <a:buNone/>
+            </a:pPr>
+            <a:r>
+              <a:rPr lang="es-ES" sz="2000" b="1" dirty="0">
+                <a:solidFill>
+                  <a:srgbClr val="000000"/>
+                </a:solidFill>
+                <a:effectLst>
+                  <a:outerShdw blurRad="38100" dist="19050" dir="2700000" algn="tl">
+                    <a:schemeClr val="dk1">
+                      <a:alpha val="40000"/>
+                    </a:schemeClr>
+                  </a:outerShdw>
+                </a:effectLst>
+                <a:latin typeface="Calibri" panose="020F0502020204030204" pitchFamily="34" charset="0"/>
+                <a:ea typeface="Times New Roman" panose="02020603050405020304" pitchFamily="18" charset="0"/>
+                <a:cs typeface="Times New Roman" panose="02020603050405020304" pitchFamily="18" charset="0"/>
+              </a:rPr>
+              <a:t>B</a:t>
+            </a:r>
+            <a:endParaRPr lang="en-GB" sz="1100" b="1" dirty="0">
+              <a:effectLst/>
+              <a:latin typeface="Calibri" panose="020F0502020204030204" pitchFamily="34" charset="0"/>
+              <a:ea typeface="Times New Roman" panose="02020603050405020304" pitchFamily="18" charset="0"/>
+              <a:cs typeface="Times New Roman" panose="02020603050405020304" pitchFamily="18" charset="0"/>
+            </a:endParaRPr>
+          </a:p>
+        </p:txBody>
+      </p:sp>
+      <p:sp>
+        <p:nvSpPr>
+          <p:cNvPr id="17" name="Text Box 1">
+            <a:extLst>
+              <a:ext uri="{FF2B5EF4-FFF2-40B4-BE49-F238E27FC236}">
+                <a16:creationId xmlns:a16="http://schemas.microsoft.com/office/drawing/2014/main" id="{DAEC87D6-D836-E3D2-154D-90445F0D4273}"/>
+              </a:ext>
+            </a:extLst>
+          </p:cNvPr>
+          <p:cNvSpPr txBox="1"/>
+          <p:nvPr/>
+        </p:nvSpPr>
+        <p:spPr>
+          <a:xfrm>
+            <a:off x="466002" y="4683597"/>
+            <a:ext cx="630110" cy="461179"/>
+          </a:xfrm>
+          <a:prstGeom prst="rect">
+            <a:avLst/>
+          </a:prstGeom>
+          <a:noFill/>
+          <a:ln>
+            <a:noFill/>
+          </a:ln>
+        </p:spPr>
+        <p:txBody>
+          <a:bodyPr rot="0" spcFirstLastPara="0" vert="horz" wrap="none" lIns="91440" tIns="45720" rIns="91440" bIns="45720" numCol="1" spcCol="0" rtlCol="0" fromWordArt="0" anchor="t" anchorCtr="0" forceAA="0" compatLnSpc="1">
+            <a:prstTxWarp prst="textNoShape">
+              <a:avLst/>
+            </a:prstTxWarp>
+            <a:noAutofit/>
+          </a:bodyPr>
+          <a:lstStyle/>
+          <a:p>
+            <a:pPr algn="ctr">
+              <a:lnSpc>
+                <a:spcPct val="107000"/>
+              </a:lnSpc>
+              <a:spcAft>
+                <a:spcPts val="800"/>
+              </a:spcAft>
+              <a:buNone/>
+            </a:pPr>
+            <a:r>
+              <a:rPr lang="es-ES" sz="2000" b="1" dirty="0">
+                <a:ln>
+                  <a:noFill/>
+                </a:ln>
+                <a:solidFill>
+                  <a:srgbClr val="000000"/>
+                </a:solidFill>
+                <a:effectLst>
+                  <a:outerShdw blurRad="38100" dist="19050" dir="2700000" algn="tl">
+                    <a:schemeClr val="dk1">
+                      <a:alpha val="40000"/>
+                    </a:schemeClr>
+                  </a:outerShdw>
+                </a:effectLst>
+                <a:latin typeface="Calibri" panose="020F0502020204030204" pitchFamily="34" charset="0"/>
+                <a:ea typeface="Times New Roman" panose="02020603050405020304" pitchFamily="18" charset="0"/>
+                <a:cs typeface="Times New Roman" panose="02020603050405020304" pitchFamily="18" charset="0"/>
+              </a:rPr>
+              <a:t>C</a:t>
+            </a:r>
+            <a:endParaRPr lang="en-GB" sz="1100" b="1" dirty="0">
+              <a:effectLst/>
+              <a:latin typeface="Calibri" panose="020F0502020204030204" pitchFamily="34" charset="0"/>
+              <a:ea typeface="Times New Roman" panose="02020603050405020304" pitchFamily="18" charset="0"/>
+              <a:cs typeface="Times New Roman" panose="02020603050405020304" pitchFamily="18" charset="0"/>
+            </a:endParaRPr>
+          </a:p>
+        </p:txBody>
+      </p:sp>
+      <p:sp>
+        <p:nvSpPr>
+          <p:cNvPr id="9" name="CuadroTexto 22">
+            <a:extLst>
+              <a:ext uri="{FF2B5EF4-FFF2-40B4-BE49-F238E27FC236}">
+                <a16:creationId xmlns:a16="http://schemas.microsoft.com/office/drawing/2014/main" id="{7E068C76-67E1-E7A3-42C2-141709A09779}"/>
+              </a:ext>
+            </a:extLst>
+          </p:cNvPr>
+          <p:cNvSpPr txBox="1"/>
+          <p:nvPr/>
+        </p:nvSpPr>
+        <p:spPr>
+          <a:xfrm>
+            <a:off x="1096112" y="2221837"/>
+            <a:ext cx="2801493" cy="315792"/>
+          </a:xfrm>
+          <a:prstGeom prst="rect">
+            <a:avLst/>
+          </a:prstGeom>
+          <a:noFill/>
+          <a:ln>
+            <a:solidFill>
+              <a:schemeClr val="tx1"/>
+            </a:solidFill>
+          </a:ln>
+        </p:spPr>
+        <p:txBody>
+          <a:bodyPr wrap="square" rtlCol="0">
+            <a:spAutoFit/>
+          </a:bodyPr>
+          <a:lstStyle/>
+          <a:p>
+            <a:pPr algn="ctr"/>
+            <a:r>
+              <a:rPr lang="es-ES" sz="1452" b="1" dirty="0">
+                <a:latin typeface="Cambria Math" panose="02040503050406030204" pitchFamily="18" charset="0"/>
+                <a:ea typeface="Cambria Math" panose="02040503050406030204" pitchFamily="18" charset="0"/>
+              </a:rPr>
+              <a:t>K </a:t>
+            </a:r>
+            <a:r>
+              <a:rPr lang="es-ES" sz="1452" b="1" dirty="0" err="1"/>
+              <a:t>trees</a:t>
+            </a:r>
+            <a:r>
+              <a:rPr lang="es-ES" sz="1452" b="1" dirty="0"/>
+              <a:t> </a:t>
+            </a:r>
+            <a:r>
+              <a:rPr lang="es-ES" sz="1452" b="1" dirty="0" err="1"/>
+              <a:t>grown</a:t>
+            </a:r>
+            <a:r>
+              <a:rPr lang="es-ES" sz="1452" b="1" dirty="0"/>
+              <a:t> in </a:t>
+            </a:r>
+            <a:r>
+              <a:rPr lang="es-ES" sz="1452" b="1" dirty="0" err="1"/>
+              <a:t>parallel</a:t>
+            </a:r>
+            <a:endParaRPr lang="es-ES" sz="1452" dirty="0"/>
+          </a:p>
+        </p:txBody>
+      </p:sp>
+      <p:sp>
+        <p:nvSpPr>
+          <p:cNvPr id="19" name="TextBox 18">
+            <a:extLst>
+              <a:ext uri="{FF2B5EF4-FFF2-40B4-BE49-F238E27FC236}">
+                <a16:creationId xmlns:a16="http://schemas.microsoft.com/office/drawing/2014/main" id="{D8AB7580-3333-43BA-4A98-7414363CA680}"/>
+              </a:ext>
+            </a:extLst>
+          </p:cNvPr>
+          <p:cNvSpPr txBox="1"/>
+          <p:nvPr/>
+        </p:nvSpPr>
+        <p:spPr>
+          <a:xfrm>
+            <a:off x="1096113" y="2952456"/>
+            <a:ext cx="2807088" cy="1200329"/>
+          </a:xfrm>
+          <a:prstGeom prst="rect">
+            <a:avLst/>
+          </a:prstGeom>
+          <a:noFill/>
+          <a:ln w="28575">
+            <a:solidFill>
+              <a:schemeClr val="bg1"/>
+            </a:solidFill>
+          </a:ln>
+        </p:spPr>
+        <p:txBody>
+          <a:bodyPr wrap="square" rtlCol="0">
+            <a:spAutoFit/>
+          </a:bodyPr>
+          <a:lstStyle>
+            <a:defPPr>
+              <a:defRPr lang="en-US"/>
+            </a:defPPr>
+            <a:lvl1pPr algn="just"/>
+          </a:lstStyle>
+          <a:p>
+            <a:r>
+              <a:rPr lang="en-GB" dirty="0"/>
+              <a:t>Each tree uses a different bootstrapped sample to partition molecules via decision nodes.</a:t>
+            </a:r>
+          </a:p>
+        </p:txBody>
+      </p:sp>
+      <p:sp>
+        <p:nvSpPr>
+          <p:cNvPr id="22" name="TextBox 21">
+            <a:extLst>
+              <a:ext uri="{FF2B5EF4-FFF2-40B4-BE49-F238E27FC236}">
+                <a16:creationId xmlns:a16="http://schemas.microsoft.com/office/drawing/2014/main" id="{B6C94112-3E59-0F25-5715-FC36170594DC}"/>
+              </a:ext>
+            </a:extLst>
+          </p:cNvPr>
+          <p:cNvSpPr txBox="1"/>
+          <p:nvPr/>
+        </p:nvSpPr>
+        <p:spPr>
+          <a:xfrm>
+            <a:off x="1096112" y="967403"/>
+            <a:ext cx="2801493" cy="923330"/>
+          </a:xfrm>
+          <a:prstGeom prst="rect">
+            <a:avLst/>
+          </a:prstGeom>
+          <a:noFill/>
+          <a:ln w="28575">
+            <a:solidFill>
+              <a:schemeClr val="bg1"/>
+            </a:solidFill>
+          </a:ln>
+        </p:spPr>
+        <p:txBody>
+          <a:bodyPr wrap="square" rtlCol="0">
+            <a:spAutoFit/>
+          </a:bodyPr>
+          <a:lstStyle/>
+          <a:p>
+            <a:pPr algn="just"/>
+            <a:r>
+              <a:rPr lang="es-ES" dirty="0"/>
+              <a:t>Random </a:t>
+            </a:r>
+            <a:r>
+              <a:rPr lang="es-ES" dirty="0" err="1"/>
+              <a:t>molecule</a:t>
+            </a:r>
+            <a:r>
+              <a:rPr lang="es-ES" dirty="0"/>
+              <a:t> and </a:t>
+            </a:r>
+            <a:r>
+              <a:rPr lang="es-ES" dirty="0" err="1"/>
+              <a:t>feature</a:t>
+            </a:r>
+            <a:r>
+              <a:rPr lang="es-ES" dirty="0"/>
+              <a:t> </a:t>
+            </a:r>
+            <a:r>
+              <a:rPr lang="es-ES" dirty="0" err="1"/>
+              <a:t>selection</a:t>
+            </a:r>
+            <a:r>
+              <a:rPr lang="es-ES" dirty="0"/>
+              <a:t> </a:t>
+            </a:r>
+            <a:r>
+              <a:rPr lang="es-ES" dirty="0" err="1"/>
+              <a:t>for</a:t>
+            </a:r>
+            <a:r>
+              <a:rPr lang="es-ES" dirty="0"/>
+              <a:t> </a:t>
+            </a:r>
+            <a:r>
+              <a:rPr lang="es-ES" dirty="0" err="1"/>
+              <a:t>tree</a:t>
+            </a:r>
+            <a:r>
+              <a:rPr lang="es-ES" dirty="0"/>
+              <a:t> </a:t>
+            </a:r>
+            <a:r>
+              <a:rPr lang="es-ES" dirty="0" err="1"/>
+              <a:t>construction</a:t>
+            </a:r>
+            <a:r>
+              <a:rPr lang="es-ES" dirty="0"/>
+              <a:t>.</a:t>
+            </a:r>
+            <a:endParaRPr lang="en-GB" dirty="0"/>
+          </a:p>
+        </p:txBody>
+      </p:sp>
+      <p:sp>
+        <p:nvSpPr>
+          <p:cNvPr id="35" name="CuadroTexto 22">
+            <a:extLst>
+              <a:ext uri="{FF2B5EF4-FFF2-40B4-BE49-F238E27FC236}">
+                <a16:creationId xmlns:a16="http://schemas.microsoft.com/office/drawing/2014/main" id="{E778A3F6-3AAF-D085-3CE9-1A7F3C14B1B8}"/>
+              </a:ext>
+            </a:extLst>
+          </p:cNvPr>
+          <p:cNvSpPr txBox="1"/>
+          <p:nvPr/>
+        </p:nvSpPr>
+        <p:spPr>
+          <a:xfrm>
+            <a:off x="1096113" y="4756289"/>
+            <a:ext cx="2801492" cy="315792"/>
+          </a:xfrm>
+          <a:prstGeom prst="rect">
+            <a:avLst/>
+          </a:prstGeom>
+          <a:noFill/>
+          <a:ln>
+            <a:solidFill>
+              <a:schemeClr val="tx1"/>
+            </a:solidFill>
+          </a:ln>
+        </p:spPr>
+        <p:txBody>
+          <a:bodyPr wrap="square" rtlCol="0">
+            <a:spAutoFit/>
+          </a:bodyPr>
+          <a:lstStyle/>
+          <a:p>
+            <a:pPr algn="ctr"/>
+            <a:r>
+              <a:rPr lang="es-ES" sz="1452" b="1" dirty="0" err="1">
+                <a:latin typeface="Cambria Math" panose="02040503050406030204" pitchFamily="18" charset="0"/>
+                <a:ea typeface="Cambria Math" panose="02040503050406030204" pitchFamily="18" charset="0"/>
+              </a:rPr>
+              <a:t>X</a:t>
+            </a:r>
+            <a:r>
+              <a:rPr lang="es-ES" sz="1452" b="1" baseline="-25000" dirty="0" err="1">
+                <a:latin typeface="Aptos" panose="020B0004020202020204" pitchFamily="34" charset="0"/>
+                <a:ea typeface="Cambria Math" panose="02040503050406030204" pitchFamily="18" charset="0"/>
+              </a:rPr>
+              <a:t>new</a:t>
+            </a:r>
+            <a:r>
+              <a:rPr lang="es-ES" sz="1452" b="1" dirty="0">
+                <a:latin typeface="Aptos" panose="020B0004020202020204" pitchFamily="34" charset="0"/>
+                <a:ea typeface="Cambria Math" panose="02040503050406030204" pitchFamily="18" charset="0"/>
+              </a:rPr>
+              <a:t> </a:t>
+            </a:r>
+            <a:r>
+              <a:rPr lang="es-ES" sz="1452" b="1" dirty="0" err="1">
+                <a:latin typeface="Aptos" panose="020B0004020202020204" pitchFamily="34" charset="0"/>
+                <a:ea typeface="Cambria Math" panose="02040503050406030204" pitchFamily="18" charset="0"/>
+              </a:rPr>
+              <a:t>predicted</a:t>
+            </a:r>
+            <a:r>
+              <a:rPr lang="es-ES" sz="1452" b="1" dirty="0">
+                <a:latin typeface="Aptos" panose="020B0004020202020204" pitchFamily="34" charset="0"/>
+                <a:ea typeface="Cambria Math" panose="02040503050406030204" pitchFamily="18" charset="0"/>
+              </a:rPr>
+              <a:t> </a:t>
+            </a:r>
+            <a:r>
+              <a:rPr lang="es-ES" sz="1452" b="1" dirty="0" err="1">
+                <a:latin typeface="Aptos" panose="020B0004020202020204" pitchFamily="34" charset="0"/>
+                <a:ea typeface="Cambria Math" panose="02040503050406030204" pitchFamily="18" charset="0"/>
+              </a:rPr>
+              <a:t>independently</a:t>
+            </a:r>
+            <a:endParaRPr lang="es-ES" sz="1452" dirty="0"/>
+          </a:p>
+        </p:txBody>
+      </p:sp>
+      <mc:AlternateContent xmlns:mc="http://schemas.openxmlformats.org/markup-compatibility/2006" xmlns:a14="http://schemas.microsoft.com/office/drawing/2010/main">
+        <mc:Choice Requires="a14">
+          <p:sp>
+            <p:nvSpPr>
+              <p:cNvPr id="41" name="TextBox 40">
+                <a:extLst>
+                  <a:ext uri="{FF2B5EF4-FFF2-40B4-BE49-F238E27FC236}">
+                    <a16:creationId xmlns:a16="http://schemas.microsoft.com/office/drawing/2014/main" id="{903F635C-559C-3D55-E045-B0749BDF9CA9}"/>
+                  </a:ext>
+                </a:extLst>
+              </p:cNvPr>
+              <p:cNvSpPr txBox="1"/>
+              <p:nvPr/>
+            </p:nvSpPr>
+            <p:spPr>
+              <a:xfrm>
+                <a:off x="1096112" y="5462487"/>
+                <a:ext cx="2801493" cy="1200329"/>
+              </a:xfrm>
+              <a:prstGeom prst="rect">
+                <a:avLst/>
+              </a:prstGeom>
+              <a:noFill/>
+              <a:ln w="28575">
+                <a:solidFill>
+                  <a:schemeClr val="bg1"/>
+                </a:solidFill>
+              </a:ln>
+            </p:spPr>
+            <p:txBody>
+              <a:bodyPr wrap="square" rtlCol="0">
+                <a:spAutoFit/>
+              </a:bodyPr>
+              <a:lstStyle>
+                <a:defPPr>
+                  <a:defRPr lang="en-US"/>
+                </a:defPPr>
+                <a:lvl1pPr algn="just"/>
+              </a:lstStyle>
+              <a:p>
+                <a:r>
+                  <a:rPr lang="en-GB" dirty="0"/>
+                  <a:t>An unseen molecule is passed through all trees, and their predictions are averaged to obtain </a:t>
+                </a:r>
+                <a14:m>
+                  <m:oMath xmlns:m="http://schemas.openxmlformats.org/officeDocument/2006/math">
+                    <m:r>
+                      <a:rPr lang="es-ES" b="1" i="1">
+                        <a:latin typeface="Cambria Math" panose="02040503050406030204" pitchFamily="18" charset="0"/>
+                      </a:rPr>
+                      <m:t>𝑷</m:t>
+                    </m:r>
+                  </m:oMath>
+                </a14:m>
+                <a:r>
+                  <a:rPr lang="en-GB" dirty="0"/>
+                  <a:t>.</a:t>
+                </a:r>
+              </a:p>
+            </p:txBody>
+          </p:sp>
+        </mc:Choice>
+        <mc:Fallback xmlns="">
+          <p:sp>
+            <p:nvSpPr>
+              <p:cNvPr id="41" name="TextBox 40">
+                <a:extLst>
+                  <a:ext uri="{FF2B5EF4-FFF2-40B4-BE49-F238E27FC236}">
+                    <a16:creationId xmlns:a16="http://schemas.microsoft.com/office/drawing/2014/main" id="{903F635C-559C-3D55-E045-B0749BDF9CA9}"/>
+                  </a:ext>
+                </a:extLst>
+              </p:cNvPr>
+              <p:cNvSpPr txBox="1">
+                <a:spLocks noRot="1" noChangeAspect="1" noMove="1" noResize="1" noEditPoints="1" noAdjustHandles="1" noChangeArrowheads="1" noChangeShapeType="1" noTextEdit="1"/>
+              </p:cNvSpPr>
+              <p:nvPr/>
+            </p:nvSpPr>
+            <p:spPr>
+              <a:xfrm>
+                <a:off x="1096112" y="5462487"/>
+                <a:ext cx="2801493" cy="1200329"/>
+              </a:xfrm>
+              <a:prstGeom prst="rect">
+                <a:avLst/>
+              </a:prstGeom>
+              <a:blipFill>
+                <a:blip r:embed="rId3"/>
+                <a:stretch>
+                  <a:fillRect l="-1509" t="-990" r="-1078" b="-5941"/>
+                </a:stretch>
+              </a:blipFill>
+              <a:ln w="28575">
+                <a:solidFill>
+                  <a:schemeClr val="bg1"/>
+                </a:solidFill>
+              </a:ln>
+            </p:spPr>
+            <p:txBody>
+              <a:bodyPr/>
+              <a:lstStyle/>
+              <a:p>
+                <a:r>
+                  <a:rPr lang="en-GB">
+                    <a:noFill/>
+                  </a:rPr>
+                  <a:t> </a:t>
+                </a:r>
+              </a:p>
+            </p:txBody>
+          </p:sp>
+        </mc:Fallback>
+      </mc:AlternateContent>
+      <p:sp>
+        <p:nvSpPr>
+          <p:cNvPr id="45" name="Oval 44">
+            <a:extLst>
+              <a:ext uri="{FF2B5EF4-FFF2-40B4-BE49-F238E27FC236}">
+                <a16:creationId xmlns:a16="http://schemas.microsoft.com/office/drawing/2014/main" id="{D33E3285-E08E-57C5-C1D0-A83EA6423B64}"/>
+              </a:ext>
+            </a:extLst>
+          </p:cNvPr>
+          <p:cNvSpPr/>
+          <p:nvPr/>
+        </p:nvSpPr>
+        <p:spPr>
+          <a:xfrm>
+            <a:off x="4782240" y="723105"/>
+            <a:ext cx="133350" cy="120646"/>
+          </a:xfrm>
+          <a:prstGeom prst="ellipse">
+            <a:avLst/>
+          </a:prstGeom>
+          <a:solidFill>
+            <a:srgbClr val="CAEEFB"/>
+          </a:solidFill>
+          <a:ln>
+            <a:solidFill>
+              <a:schemeClr val="accent4">
+                <a:lumMod val="60000"/>
+                <a:lumOff val="40000"/>
+              </a:schemeClr>
+            </a:solidFill>
+          </a:ln>
+        </p:spPr>
+        <p:style>
+          <a:lnRef idx="2">
+            <a:schemeClr val="accent1">
+              <a:shade val="15000"/>
+            </a:schemeClr>
+          </a:lnRef>
+          <a:fillRef idx="1">
+            <a:schemeClr val="accent1"/>
+          </a:fillRef>
+          <a:effectRef idx="0">
+            <a:schemeClr val="accent1"/>
+          </a:effectRef>
+          <a:fontRef idx="minor">
+            <a:schemeClr val="lt1"/>
+          </a:fontRef>
+        </p:style>
+        <p:txBody>
+          <a:bodyPr rtlCol="0" anchor="ctr"/>
+          <a:lstStyle/>
+          <a:p>
+            <a:pPr algn="ctr"/>
+            <a:endParaRPr lang="en-GB"/>
+          </a:p>
+        </p:txBody>
+      </p:sp>
+      <p:sp>
+        <p:nvSpPr>
+          <p:cNvPr id="52" name="Oval 51">
+            <a:extLst>
+              <a:ext uri="{FF2B5EF4-FFF2-40B4-BE49-F238E27FC236}">
+                <a16:creationId xmlns:a16="http://schemas.microsoft.com/office/drawing/2014/main" id="{E59653B4-CB43-7735-FAB0-189C3308E481}"/>
+              </a:ext>
+            </a:extLst>
+          </p:cNvPr>
+          <p:cNvSpPr/>
+          <p:nvPr/>
+        </p:nvSpPr>
+        <p:spPr>
+          <a:xfrm>
+            <a:off x="4772723" y="1059971"/>
+            <a:ext cx="133350" cy="120646"/>
+          </a:xfrm>
+          <a:prstGeom prst="ellipse">
+            <a:avLst/>
+          </a:prstGeom>
+          <a:solidFill>
+            <a:srgbClr val="CAEEFB"/>
+          </a:solidFill>
+          <a:ln>
+            <a:solidFill>
+              <a:schemeClr val="accent4">
+                <a:lumMod val="60000"/>
+                <a:lumOff val="40000"/>
+              </a:schemeClr>
+            </a:solidFill>
+          </a:ln>
+        </p:spPr>
+        <p:style>
+          <a:lnRef idx="2">
+            <a:schemeClr val="accent1">
+              <a:shade val="15000"/>
+            </a:schemeClr>
+          </a:lnRef>
+          <a:fillRef idx="1">
+            <a:schemeClr val="accent1"/>
+          </a:fillRef>
+          <a:effectRef idx="0">
+            <a:schemeClr val="accent1"/>
+          </a:effectRef>
+          <a:fontRef idx="minor">
+            <a:schemeClr val="lt1"/>
+          </a:fontRef>
+        </p:style>
+        <p:txBody>
+          <a:bodyPr rtlCol="0" anchor="ctr"/>
+          <a:lstStyle/>
+          <a:p>
+            <a:pPr algn="ctr"/>
+            <a:endParaRPr lang="en-GB"/>
+          </a:p>
+        </p:txBody>
+      </p:sp>
+      <p:sp>
+        <p:nvSpPr>
+          <p:cNvPr id="56" name="Oval 55">
+            <a:extLst>
+              <a:ext uri="{FF2B5EF4-FFF2-40B4-BE49-F238E27FC236}">
+                <a16:creationId xmlns:a16="http://schemas.microsoft.com/office/drawing/2014/main" id="{96C64ED1-2B2A-A574-7B88-629DDA484788}"/>
+              </a:ext>
+            </a:extLst>
+          </p:cNvPr>
+          <p:cNvSpPr/>
+          <p:nvPr/>
+        </p:nvSpPr>
+        <p:spPr>
+          <a:xfrm>
+            <a:off x="4778720" y="1391592"/>
+            <a:ext cx="133350" cy="120646"/>
+          </a:xfrm>
+          <a:prstGeom prst="ellipse">
+            <a:avLst/>
+          </a:prstGeom>
+          <a:solidFill>
+            <a:srgbClr val="CAEEFB"/>
+          </a:solidFill>
+          <a:ln>
+            <a:solidFill>
+              <a:schemeClr val="accent4">
+                <a:lumMod val="60000"/>
+                <a:lumOff val="40000"/>
+              </a:schemeClr>
+            </a:solidFill>
+          </a:ln>
+        </p:spPr>
+        <p:style>
+          <a:lnRef idx="2">
+            <a:schemeClr val="accent1">
+              <a:shade val="15000"/>
+            </a:schemeClr>
+          </a:lnRef>
+          <a:fillRef idx="1">
+            <a:schemeClr val="accent1"/>
+          </a:fillRef>
+          <a:effectRef idx="0">
+            <a:schemeClr val="accent1"/>
+          </a:effectRef>
+          <a:fontRef idx="minor">
+            <a:schemeClr val="lt1"/>
+          </a:fontRef>
+        </p:style>
+        <p:txBody>
+          <a:bodyPr rtlCol="0" anchor="ctr"/>
+          <a:lstStyle/>
+          <a:p>
+            <a:pPr algn="ctr"/>
+            <a:endParaRPr lang="en-GB"/>
+          </a:p>
+        </p:txBody>
+      </p:sp>
+      <p:sp>
+        <p:nvSpPr>
+          <p:cNvPr id="62" name="Oval 61">
+            <a:extLst>
+              <a:ext uri="{FF2B5EF4-FFF2-40B4-BE49-F238E27FC236}">
+                <a16:creationId xmlns:a16="http://schemas.microsoft.com/office/drawing/2014/main" id="{6C5AA6C0-A92B-15E3-D2B5-A246388FF681}"/>
+              </a:ext>
+            </a:extLst>
+          </p:cNvPr>
+          <p:cNvSpPr/>
+          <p:nvPr/>
+        </p:nvSpPr>
+        <p:spPr>
+          <a:xfrm>
+            <a:off x="4582924" y="723105"/>
+            <a:ext cx="133350" cy="120646"/>
+          </a:xfrm>
+          <a:prstGeom prst="ellipse">
+            <a:avLst/>
+          </a:prstGeom>
+          <a:solidFill>
+            <a:srgbClr val="A6CAEC"/>
+          </a:solidFill>
+          <a:ln>
+            <a:solidFill>
+              <a:srgbClr val="215F9A"/>
+            </a:solidFill>
+          </a:ln>
+        </p:spPr>
+        <p:style>
+          <a:lnRef idx="2">
+            <a:schemeClr val="accent1">
+              <a:shade val="15000"/>
+            </a:schemeClr>
+          </a:lnRef>
+          <a:fillRef idx="1">
+            <a:schemeClr val="accent1"/>
+          </a:fillRef>
+          <a:effectRef idx="0">
+            <a:schemeClr val="accent1"/>
+          </a:effectRef>
+          <a:fontRef idx="minor">
+            <a:schemeClr val="lt1"/>
+          </a:fontRef>
+        </p:style>
+        <p:txBody>
+          <a:bodyPr rtlCol="0" anchor="ctr"/>
+          <a:lstStyle/>
+          <a:p>
+            <a:pPr algn="ctr"/>
+            <a:endParaRPr lang="en-GB"/>
+          </a:p>
+        </p:txBody>
+      </p:sp>
+      <p:sp>
+        <p:nvSpPr>
+          <p:cNvPr id="72" name="Oval 71">
+            <a:extLst>
+              <a:ext uri="{FF2B5EF4-FFF2-40B4-BE49-F238E27FC236}">
+                <a16:creationId xmlns:a16="http://schemas.microsoft.com/office/drawing/2014/main" id="{54573C4D-113D-34A5-862C-F195DA3080F6}"/>
+              </a:ext>
+            </a:extLst>
+          </p:cNvPr>
+          <p:cNvSpPr/>
+          <p:nvPr/>
+        </p:nvSpPr>
+        <p:spPr>
+          <a:xfrm>
+            <a:off x="4582924" y="1059971"/>
+            <a:ext cx="133350" cy="120646"/>
+          </a:xfrm>
+          <a:prstGeom prst="ellipse">
+            <a:avLst/>
+          </a:prstGeom>
+          <a:solidFill>
+            <a:srgbClr val="A6CAEC"/>
+          </a:solidFill>
+          <a:ln>
+            <a:solidFill>
+              <a:srgbClr val="215F9A"/>
+            </a:solidFill>
+          </a:ln>
+        </p:spPr>
+        <p:style>
+          <a:lnRef idx="2">
+            <a:schemeClr val="accent1">
+              <a:shade val="15000"/>
+            </a:schemeClr>
+          </a:lnRef>
+          <a:fillRef idx="1">
+            <a:schemeClr val="accent1"/>
+          </a:fillRef>
+          <a:effectRef idx="0">
+            <a:schemeClr val="accent1"/>
+          </a:effectRef>
+          <a:fontRef idx="minor">
+            <a:schemeClr val="lt1"/>
+          </a:fontRef>
+        </p:style>
+        <p:txBody>
+          <a:bodyPr rtlCol="0" anchor="ctr"/>
+          <a:lstStyle/>
+          <a:p>
+            <a:pPr algn="ctr"/>
+            <a:endParaRPr lang="en-GB"/>
+          </a:p>
+        </p:txBody>
+      </p:sp>
+      <p:sp>
+        <p:nvSpPr>
+          <p:cNvPr id="80" name="Oval 79">
+            <a:extLst>
+              <a:ext uri="{FF2B5EF4-FFF2-40B4-BE49-F238E27FC236}">
+                <a16:creationId xmlns:a16="http://schemas.microsoft.com/office/drawing/2014/main" id="{0BFEED48-54A7-9586-1F4B-F91EEAAF7C14}"/>
+              </a:ext>
+            </a:extLst>
+          </p:cNvPr>
+          <p:cNvSpPr/>
+          <p:nvPr/>
+        </p:nvSpPr>
+        <p:spPr>
+          <a:xfrm>
+            <a:off x="4582924" y="1391592"/>
+            <a:ext cx="133350" cy="120646"/>
+          </a:xfrm>
+          <a:prstGeom prst="ellipse">
+            <a:avLst/>
+          </a:prstGeom>
+          <a:solidFill>
+            <a:srgbClr val="A6CAEC"/>
+          </a:solidFill>
+          <a:ln>
+            <a:solidFill>
+              <a:srgbClr val="215F9A"/>
+            </a:solidFill>
+          </a:ln>
+        </p:spPr>
+        <p:style>
+          <a:lnRef idx="2">
+            <a:schemeClr val="accent1">
+              <a:shade val="15000"/>
+            </a:schemeClr>
+          </a:lnRef>
+          <a:fillRef idx="1">
+            <a:schemeClr val="accent1"/>
+          </a:fillRef>
+          <a:effectRef idx="0">
+            <a:schemeClr val="accent1"/>
+          </a:effectRef>
+          <a:fontRef idx="minor">
+            <a:schemeClr val="lt1"/>
+          </a:fontRef>
+        </p:style>
+        <p:txBody>
+          <a:bodyPr rtlCol="0" anchor="ctr"/>
+          <a:lstStyle/>
+          <a:p>
+            <a:pPr algn="ctr"/>
+            <a:endParaRPr lang="en-GB"/>
+          </a:p>
+        </p:txBody>
+      </p:sp>
+      <p:sp>
+        <p:nvSpPr>
+          <p:cNvPr id="106" name="Oval 105">
+            <a:extLst>
+              <a:ext uri="{FF2B5EF4-FFF2-40B4-BE49-F238E27FC236}">
+                <a16:creationId xmlns:a16="http://schemas.microsoft.com/office/drawing/2014/main" id="{6809388A-24FE-9FDA-9999-9DDE8E8850FE}"/>
+              </a:ext>
+            </a:extLst>
+          </p:cNvPr>
+          <p:cNvSpPr/>
+          <p:nvPr/>
+        </p:nvSpPr>
+        <p:spPr>
+          <a:xfrm>
+            <a:off x="4953346" y="1059971"/>
+            <a:ext cx="133350" cy="120646"/>
+          </a:xfrm>
+          <a:prstGeom prst="ellipse">
+            <a:avLst/>
+          </a:prstGeom>
+          <a:solidFill>
+            <a:schemeClr val="accent5">
+              <a:lumMod val="20000"/>
+              <a:lumOff val="80000"/>
+            </a:schemeClr>
+          </a:solidFill>
+          <a:ln>
+            <a:solidFill>
+              <a:schemeClr val="accent5">
+                <a:lumMod val="60000"/>
+                <a:lumOff val="40000"/>
+              </a:schemeClr>
+            </a:solidFill>
+          </a:ln>
+        </p:spPr>
+        <p:style>
+          <a:lnRef idx="2">
+            <a:schemeClr val="accent1">
+              <a:shade val="15000"/>
+            </a:schemeClr>
+          </a:lnRef>
+          <a:fillRef idx="1">
+            <a:schemeClr val="accent1"/>
+          </a:fillRef>
+          <a:effectRef idx="0">
+            <a:schemeClr val="accent1"/>
+          </a:effectRef>
+          <a:fontRef idx="minor">
+            <a:schemeClr val="lt1"/>
+          </a:fontRef>
+        </p:style>
+        <p:txBody>
+          <a:bodyPr rtlCol="0" anchor="ctr"/>
+          <a:lstStyle/>
+          <a:p>
+            <a:pPr algn="ctr"/>
+            <a:endParaRPr lang="en-GB"/>
+          </a:p>
+        </p:txBody>
+      </p:sp>
+      <p:sp>
+        <p:nvSpPr>
+          <p:cNvPr id="125" name="Oval 124">
+            <a:extLst>
+              <a:ext uri="{FF2B5EF4-FFF2-40B4-BE49-F238E27FC236}">
+                <a16:creationId xmlns:a16="http://schemas.microsoft.com/office/drawing/2014/main" id="{70A6BB55-C77D-090F-8973-5BAB4EA7D311}"/>
+              </a:ext>
+            </a:extLst>
+          </p:cNvPr>
+          <p:cNvSpPr/>
+          <p:nvPr/>
+        </p:nvSpPr>
+        <p:spPr>
+          <a:xfrm>
+            <a:off x="4960238" y="1391592"/>
+            <a:ext cx="133350" cy="120646"/>
+          </a:xfrm>
+          <a:prstGeom prst="ellipse">
+            <a:avLst/>
+          </a:prstGeom>
+          <a:solidFill>
+            <a:schemeClr val="accent5">
+              <a:lumMod val="20000"/>
+              <a:lumOff val="80000"/>
+            </a:schemeClr>
+          </a:solidFill>
+          <a:ln>
+            <a:solidFill>
+              <a:schemeClr val="accent5">
+                <a:lumMod val="60000"/>
+                <a:lumOff val="40000"/>
+              </a:schemeClr>
+            </a:solidFill>
+          </a:ln>
+        </p:spPr>
+        <p:style>
+          <a:lnRef idx="2">
+            <a:schemeClr val="accent1">
+              <a:shade val="15000"/>
+            </a:schemeClr>
+          </a:lnRef>
+          <a:fillRef idx="1">
+            <a:schemeClr val="accent1"/>
+          </a:fillRef>
+          <a:effectRef idx="0">
+            <a:schemeClr val="accent1"/>
+          </a:effectRef>
+          <a:fontRef idx="minor">
+            <a:schemeClr val="lt1"/>
+          </a:fontRef>
+        </p:style>
+        <p:txBody>
+          <a:bodyPr rtlCol="0" anchor="ctr"/>
+          <a:lstStyle/>
+          <a:p>
+            <a:pPr algn="ctr"/>
+            <a:endParaRPr lang="en-GB"/>
+          </a:p>
+        </p:txBody>
+      </p:sp>
+      <p:sp>
+        <p:nvSpPr>
+          <p:cNvPr id="161" name="Oval 160">
+            <a:extLst>
+              <a:ext uri="{FF2B5EF4-FFF2-40B4-BE49-F238E27FC236}">
+                <a16:creationId xmlns:a16="http://schemas.microsoft.com/office/drawing/2014/main" id="{DD7696F0-2CBF-5536-6794-01CB8A688E1C}"/>
+              </a:ext>
+            </a:extLst>
+          </p:cNvPr>
+          <p:cNvSpPr/>
+          <p:nvPr/>
+        </p:nvSpPr>
+        <p:spPr>
+          <a:xfrm>
+            <a:off x="5603694" y="390670"/>
+            <a:ext cx="133350" cy="120646"/>
+          </a:xfrm>
+          <a:prstGeom prst="ellipse">
+            <a:avLst/>
+          </a:prstGeom>
+          <a:solidFill>
+            <a:srgbClr val="A6CAEC"/>
+          </a:solidFill>
+          <a:ln>
+            <a:solidFill>
+              <a:srgbClr val="215F9A"/>
+            </a:solidFill>
+          </a:ln>
+        </p:spPr>
+        <p:style>
+          <a:lnRef idx="2">
+            <a:schemeClr val="accent1">
+              <a:shade val="15000"/>
+            </a:schemeClr>
+          </a:lnRef>
+          <a:fillRef idx="1">
+            <a:schemeClr val="accent1"/>
+          </a:fillRef>
+          <a:effectRef idx="0">
+            <a:schemeClr val="accent1"/>
+          </a:effectRef>
+          <a:fontRef idx="minor">
+            <a:schemeClr val="lt1"/>
+          </a:fontRef>
+        </p:style>
+        <p:txBody>
+          <a:bodyPr rtlCol="0" anchor="ctr"/>
+          <a:lstStyle/>
+          <a:p>
+            <a:pPr algn="ctr"/>
+            <a:endParaRPr lang="en-GB"/>
+          </a:p>
+        </p:txBody>
+      </p:sp>
+      <p:sp>
+        <p:nvSpPr>
+          <p:cNvPr id="165" name="Oval 164">
+            <a:extLst>
+              <a:ext uri="{FF2B5EF4-FFF2-40B4-BE49-F238E27FC236}">
+                <a16:creationId xmlns:a16="http://schemas.microsoft.com/office/drawing/2014/main" id="{ABE98E14-D89A-E8FB-F54F-D5346C8105C7}"/>
+              </a:ext>
+            </a:extLst>
+          </p:cNvPr>
+          <p:cNvSpPr/>
+          <p:nvPr/>
+        </p:nvSpPr>
+        <p:spPr>
+          <a:xfrm>
+            <a:off x="7037494" y="390670"/>
+            <a:ext cx="133350" cy="120646"/>
+          </a:xfrm>
+          <a:prstGeom prst="ellipse">
+            <a:avLst/>
+          </a:prstGeom>
+          <a:solidFill>
+            <a:srgbClr val="CAEEFB"/>
+          </a:solidFill>
+          <a:ln>
+            <a:solidFill>
+              <a:schemeClr val="accent4">
+                <a:lumMod val="60000"/>
+                <a:lumOff val="40000"/>
+              </a:schemeClr>
+            </a:solidFill>
+          </a:ln>
+        </p:spPr>
+        <p:style>
+          <a:lnRef idx="2">
+            <a:schemeClr val="accent1">
+              <a:shade val="15000"/>
+            </a:schemeClr>
+          </a:lnRef>
+          <a:fillRef idx="1">
+            <a:schemeClr val="accent1"/>
+          </a:fillRef>
+          <a:effectRef idx="0">
+            <a:schemeClr val="accent1"/>
+          </a:effectRef>
+          <a:fontRef idx="minor">
+            <a:schemeClr val="lt1"/>
+          </a:fontRef>
+        </p:style>
+        <p:txBody>
+          <a:bodyPr rtlCol="0" anchor="ctr"/>
+          <a:lstStyle/>
+          <a:p>
+            <a:pPr algn="ctr"/>
+            <a:endParaRPr lang="en-GB"/>
+          </a:p>
+        </p:txBody>
+      </p:sp>
+      <p:sp>
+        <p:nvSpPr>
+          <p:cNvPr id="167" name="Oval 166">
+            <a:extLst>
+              <a:ext uri="{FF2B5EF4-FFF2-40B4-BE49-F238E27FC236}">
+                <a16:creationId xmlns:a16="http://schemas.microsoft.com/office/drawing/2014/main" id="{DED86733-6EC3-1D99-C668-05DA3E3E9AEF}"/>
+              </a:ext>
+            </a:extLst>
+          </p:cNvPr>
+          <p:cNvSpPr/>
+          <p:nvPr/>
+        </p:nvSpPr>
+        <p:spPr>
+          <a:xfrm>
+            <a:off x="6847695" y="390670"/>
+            <a:ext cx="133350" cy="120646"/>
+          </a:xfrm>
+          <a:prstGeom prst="ellipse">
+            <a:avLst/>
+          </a:prstGeom>
+          <a:solidFill>
+            <a:srgbClr val="A6CAEC"/>
+          </a:solidFill>
+          <a:ln>
+            <a:solidFill>
+              <a:srgbClr val="215F9A"/>
+            </a:solidFill>
+          </a:ln>
+        </p:spPr>
+        <p:style>
+          <a:lnRef idx="2">
+            <a:schemeClr val="accent1">
+              <a:shade val="15000"/>
+            </a:schemeClr>
+          </a:lnRef>
+          <a:fillRef idx="1">
+            <a:schemeClr val="accent1"/>
+          </a:fillRef>
+          <a:effectRef idx="0">
+            <a:schemeClr val="accent1"/>
+          </a:effectRef>
+          <a:fontRef idx="minor">
+            <a:schemeClr val="lt1"/>
+          </a:fontRef>
+        </p:style>
+        <p:txBody>
+          <a:bodyPr rtlCol="0" anchor="ctr"/>
+          <a:lstStyle/>
+          <a:p>
+            <a:pPr algn="ctr"/>
+            <a:endParaRPr lang="en-GB"/>
+          </a:p>
+        </p:txBody>
+      </p:sp>
+      <p:sp>
+        <p:nvSpPr>
+          <p:cNvPr id="171" name="Oval 170">
+            <a:extLst>
+              <a:ext uri="{FF2B5EF4-FFF2-40B4-BE49-F238E27FC236}">
+                <a16:creationId xmlns:a16="http://schemas.microsoft.com/office/drawing/2014/main" id="{A8430D2F-2DE6-0D13-01EE-3865FCD9AD1A}"/>
+              </a:ext>
+            </a:extLst>
+          </p:cNvPr>
+          <p:cNvSpPr/>
+          <p:nvPr/>
+        </p:nvSpPr>
+        <p:spPr>
+          <a:xfrm>
+            <a:off x="8265815" y="390670"/>
+            <a:ext cx="133350" cy="120646"/>
+          </a:xfrm>
+          <a:prstGeom prst="ellipse">
+            <a:avLst/>
+          </a:prstGeom>
+          <a:solidFill>
+            <a:srgbClr val="CAEEFB"/>
+          </a:solidFill>
+          <a:ln>
+            <a:solidFill>
+              <a:schemeClr val="accent4">
+                <a:lumMod val="60000"/>
+                <a:lumOff val="40000"/>
+              </a:schemeClr>
+            </a:solidFill>
+          </a:ln>
+        </p:spPr>
+        <p:style>
+          <a:lnRef idx="2">
+            <a:schemeClr val="accent1">
+              <a:shade val="15000"/>
+            </a:schemeClr>
+          </a:lnRef>
+          <a:fillRef idx="1">
+            <a:schemeClr val="accent1"/>
+          </a:fillRef>
+          <a:effectRef idx="0">
+            <a:schemeClr val="accent1"/>
+          </a:effectRef>
+          <a:fontRef idx="minor">
+            <a:schemeClr val="lt1"/>
+          </a:fontRef>
+        </p:style>
+        <p:txBody>
+          <a:bodyPr rtlCol="0" anchor="ctr"/>
+          <a:lstStyle/>
+          <a:p>
+            <a:pPr algn="ctr"/>
+            <a:endParaRPr lang="en-GB"/>
+          </a:p>
+        </p:txBody>
+      </p:sp>
+      <p:sp>
+        <p:nvSpPr>
+          <p:cNvPr id="175" name="Oval 174">
+            <a:extLst>
+              <a:ext uri="{FF2B5EF4-FFF2-40B4-BE49-F238E27FC236}">
+                <a16:creationId xmlns:a16="http://schemas.microsoft.com/office/drawing/2014/main" id="{642BA148-9738-257F-5BB9-D5E4B061DEE0}"/>
+              </a:ext>
+            </a:extLst>
+          </p:cNvPr>
+          <p:cNvSpPr/>
+          <p:nvPr/>
+        </p:nvSpPr>
+        <p:spPr>
+          <a:xfrm>
+            <a:off x="8446438" y="390670"/>
+            <a:ext cx="133350" cy="120646"/>
+          </a:xfrm>
+          <a:prstGeom prst="ellipse">
+            <a:avLst/>
+          </a:prstGeom>
+          <a:solidFill>
+            <a:schemeClr val="accent5">
+              <a:lumMod val="20000"/>
+              <a:lumOff val="80000"/>
+            </a:schemeClr>
+          </a:solidFill>
+          <a:ln>
+            <a:solidFill>
+              <a:schemeClr val="accent5">
+                <a:lumMod val="60000"/>
+                <a:lumOff val="40000"/>
+              </a:schemeClr>
+            </a:solidFill>
+          </a:ln>
+        </p:spPr>
+        <p:style>
+          <a:lnRef idx="2">
+            <a:schemeClr val="accent1">
+              <a:shade val="15000"/>
+            </a:schemeClr>
+          </a:lnRef>
+          <a:fillRef idx="1">
+            <a:schemeClr val="accent1"/>
+          </a:fillRef>
+          <a:effectRef idx="0">
+            <a:schemeClr val="accent1"/>
+          </a:effectRef>
+          <a:fontRef idx="minor">
+            <a:schemeClr val="lt1"/>
+          </a:fontRef>
+        </p:style>
+        <p:txBody>
+          <a:bodyPr rtlCol="0" anchor="ctr"/>
+          <a:lstStyle/>
+          <a:p>
+            <a:pPr algn="ctr"/>
+            <a:endParaRPr lang="en-GB"/>
+          </a:p>
+        </p:txBody>
+      </p:sp>
+      <p:sp>
+        <p:nvSpPr>
+          <p:cNvPr id="181" name="Oval 180">
+            <a:extLst>
+              <a:ext uri="{FF2B5EF4-FFF2-40B4-BE49-F238E27FC236}">
+                <a16:creationId xmlns:a16="http://schemas.microsoft.com/office/drawing/2014/main" id="{CC841A46-7856-5AED-5E82-CB7191F65106}"/>
+              </a:ext>
+            </a:extLst>
+          </p:cNvPr>
+          <p:cNvSpPr/>
+          <p:nvPr/>
+        </p:nvSpPr>
+        <p:spPr>
+          <a:xfrm>
+            <a:off x="9686222" y="390670"/>
+            <a:ext cx="133350" cy="120646"/>
+          </a:xfrm>
+          <a:prstGeom prst="ellipse">
+            <a:avLst/>
+          </a:prstGeom>
+          <a:solidFill>
+            <a:schemeClr val="accent5">
+              <a:lumMod val="20000"/>
+              <a:lumOff val="80000"/>
+            </a:schemeClr>
+          </a:solidFill>
+          <a:ln>
+            <a:solidFill>
+              <a:schemeClr val="accent5">
+                <a:lumMod val="60000"/>
+                <a:lumOff val="40000"/>
+              </a:schemeClr>
+            </a:solidFill>
+          </a:ln>
+        </p:spPr>
+        <p:style>
+          <a:lnRef idx="2">
+            <a:schemeClr val="accent1">
+              <a:shade val="15000"/>
+            </a:schemeClr>
+          </a:lnRef>
+          <a:fillRef idx="1">
+            <a:schemeClr val="accent1"/>
+          </a:fillRef>
+          <a:effectRef idx="0">
+            <a:schemeClr val="accent1"/>
+          </a:effectRef>
+          <a:fontRef idx="minor">
+            <a:schemeClr val="lt1"/>
+          </a:fontRef>
+        </p:style>
+        <p:txBody>
+          <a:bodyPr rtlCol="0" anchor="ctr"/>
+          <a:lstStyle/>
+          <a:p>
+            <a:pPr algn="ctr"/>
+            <a:endParaRPr lang="en-GB"/>
+          </a:p>
+        </p:txBody>
+      </p:sp>
+    </p:spTree>
+    <p:extLst>
+      <p:ext uri="{BB962C8B-B14F-4D97-AF65-F5344CB8AC3E}">
+        <p14:creationId xmlns:p14="http://schemas.microsoft.com/office/powerpoint/2010/main" val="4011949799"/>
+      </p:ext>
+    </p:extLst>
+  </p:cSld>
+  <p:clrMapOvr>
+    <a:masterClrMapping/>
+  </p:clrMapOvr>
+</p:sld>
+</file>
+
 <file path=ppt/theme/theme1.xml><?xml version="1.0" encoding="utf-8"?>
 <a:theme xmlns:a="http://schemas.openxmlformats.org/drawingml/2006/main" name="Office Theme">
   <a:themeElements>
